--- a/ECU 고장 진단 시스템.pptx
+++ b/ECU 고장 진단 시스템.pptx
@@ -8,6 +8,8 @@
     <p:sldId id="256" r:id="rId2"/>
     <p:sldId id="257" r:id="rId3"/>
     <p:sldId id="258" r:id="rId4"/>
+    <p:sldId id="261" r:id="rId5"/>
+    <p:sldId id="259" r:id="rId6"/>
   </p:sldIdLst>
   <p:sldSz cx="12192000" cy="6858000"/>
   <p:notesSz cx="6858000" cy="9144000"/>
@@ -3482,9 +3484,16 @@
             <p:ph idx="1"/>
           </p:nvPr>
         </p:nvSpPr>
-        <p:spPr/>
-        <p:txBody>
-          <a:bodyPr/>
+        <p:spPr>
+          <a:xfrm>
+            <a:off x="838200" y="1494503"/>
+            <a:ext cx="10515600" cy="4682460"/>
+          </a:xfrm>
+        </p:spPr>
+        <p:txBody>
+          <a:bodyPr>
+            <a:normAutofit fontScale="92500" lnSpcReduction="10000"/>
+          </a:bodyPr>
           <a:lstStyle/>
           <a:p>
             <a:r>
@@ -3510,6 +3519,9 @@
             <a:endParaRPr lang="en-US" altLang="ko-KR" dirty="0"/>
           </a:p>
           <a:p>
+            <a:endParaRPr lang="en-US" altLang="ko-KR" dirty="0"/>
+          </a:p>
+          <a:p>
             <a:r>
               <a:rPr lang="ko-KR" altLang="en-US" dirty="0"/>
               <a:t>요구사항 </a:t>
@@ -3664,6 +3676,10 @@
               <a:rPr lang="en-US" altLang="ko-KR" dirty="0"/>
               <a:t>clear</a:t>
             </a:r>
+          </a:p>
+          <a:p>
+            <a:pPr lvl="1"/>
+            <a:endParaRPr lang="en-US" altLang="ko-KR" dirty="0"/>
           </a:p>
           <a:p>
             <a:r>
@@ -5219,6 +5235,2427 @@
     <p:extLst>
       <p:ext uri="{BB962C8B-B14F-4D97-AF65-F5344CB8AC3E}">
         <p14:creationId xmlns:p14="http://schemas.microsoft.com/office/powerpoint/2010/main" val="2064950699"/>
+      </p:ext>
+    </p:extLst>
+  </p:cSld>
+  <p:clrMapOvr>
+    <a:masterClrMapping/>
+  </p:clrMapOvr>
+</p:sld>
+</file>
+
+<file path=ppt/slides/slide4.xml><?xml version="1.0" encoding="utf-8"?>
+<p:sld xmlns:a="http://schemas.openxmlformats.org/drawingml/2006/main" xmlns:r="http://schemas.openxmlformats.org/officeDocument/2006/relationships" xmlns:p="http://schemas.openxmlformats.org/presentationml/2006/main">
+  <p:cSld>
+    <p:spTree>
+      <p:nvGrpSpPr>
+        <p:cNvPr id="1" name="">
+          <a:extLst>
+            <a:ext uri="{FF2B5EF4-FFF2-40B4-BE49-F238E27FC236}">
+              <a16:creationId xmlns:a16="http://schemas.microsoft.com/office/drawing/2014/main" id="{D8B1EBC2-1B5B-5599-6E22-978F0E1FD67C}"/>
+            </a:ext>
+          </a:extLst>
+        </p:cNvPr>
+        <p:cNvGrpSpPr/>
+        <p:nvPr/>
+      </p:nvGrpSpPr>
+      <p:grpSpPr>
+        <a:xfrm>
+          <a:off x="0" y="0"/>
+          <a:ext cx="0" cy="0"/>
+          <a:chOff x="0" y="0"/>
+          <a:chExt cx="0" cy="0"/>
+        </a:xfrm>
+      </p:grpSpPr>
+      <p:sp>
+        <p:nvSpPr>
+          <p:cNvPr id="2" name="제목 1">
+            <a:extLst>
+              <a:ext uri="{FF2B5EF4-FFF2-40B4-BE49-F238E27FC236}">
+                <a16:creationId xmlns:a16="http://schemas.microsoft.com/office/drawing/2014/main" id="{B7B3243A-5991-76D4-1A79-B82969009A59}"/>
+              </a:ext>
+            </a:extLst>
+          </p:cNvPr>
+          <p:cNvSpPr>
+            <a:spLocks noGrp="1"/>
+          </p:cNvSpPr>
+          <p:nvPr>
+            <p:ph type="title"/>
+          </p:nvPr>
+        </p:nvSpPr>
+        <p:spPr>
+          <a:xfrm>
+            <a:off x="838200" y="18255"/>
+            <a:ext cx="10515600" cy="1325563"/>
+          </a:xfrm>
+        </p:spPr>
+        <p:txBody>
+          <a:bodyPr/>
+          <a:lstStyle/>
+          <a:p>
+            <a:r>
+              <a:rPr lang="en-US" altLang="ko-KR" dirty="0"/>
+              <a:t>IC </a:t>
+            </a:r>
+            <a:r>
+              <a:rPr lang="ko-KR" altLang="en-US" dirty="0"/>
+              <a:t>분석 </a:t>
+            </a:r>
+            <a:r>
+              <a:rPr lang="en-US" altLang="ko-KR" dirty="0"/>
+              <a:t>(PMIC</a:t>
+            </a:r>
+            <a:r>
+              <a:rPr lang="ko-KR" altLang="en-US" dirty="0"/>
+              <a:t> </a:t>
+            </a:r>
+            <a:r>
+              <a:rPr lang="en-US" altLang="ko-KR" dirty="0"/>
+              <a:t>:</a:t>
+            </a:r>
+            <a:r>
+              <a:rPr lang="ko-KR" altLang="en-US" dirty="0"/>
+              <a:t> </a:t>
+            </a:r>
+            <a:r>
+              <a:rPr lang="en-US" altLang="ko-KR" dirty="0"/>
+              <a:t>MP5475)</a:t>
+            </a:r>
+            <a:endParaRPr lang="ko-KR" altLang="en-US" dirty="0"/>
+          </a:p>
+        </p:txBody>
+      </p:sp>
+      <p:graphicFrame>
+        <p:nvGraphicFramePr>
+          <p:cNvPr id="11" name="표 10">
+            <a:extLst>
+              <a:ext uri="{FF2B5EF4-FFF2-40B4-BE49-F238E27FC236}">
+                <a16:creationId xmlns:a16="http://schemas.microsoft.com/office/drawing/2014/main" id="{1986E299-924E-786E-13F1-E3CE1B68A8EE}"/>
+              </a:ext>
+            </a:extLst>
+          </p:cNvPr>
+          <p:cNvGraphicFramePr>
+            <a:graphicFrameLocks noGrp="1"/>
+          </p:cNvGraphicFramePr>
+          <p:nvPr>
+            <p:extLst>
+              <p:ext uri="{D42A27DB-BD31-4B8C-83A1-F6EECF244321}">
+                <p14:modId xmlns:p14="http://schemas.microsoft.com/office/powerpoint/2010/main" val="826716249"/>
+              </p:ext>
+            </p:extLst>
+          </p:nvPr>
+        </p:nvGraphicFramePr>
+        <p:xfrm>
+          <a:off x="985684" y="1501134"/>
+          <a:ext cx="5243873" cy="2865120"/>
+        </p:xfrm>
+        <a:graphic>
+          <a:graphicData uri="http://schemas.openxmlformats.org/drawingml/2006/table">
+            <a:tbl>
+              <a:tblPr firstRow="1" bandRow="1">
+                <a:tableStyleId>{5C22544A-7EE6-4342-B048-85BDC9FD1C3A}</a:tableStyleId>
+              </a:tblPr>
+              <a:tblGrid>
+                <a:gridCol w="2041487">
+                  <a:extLst>
+                    <a:ext uri="{9D8B030D-6E8A-4147-A177-3AD203B41FA5}">
+                      <a16:colId xmlns:a16="http://schemas.microsoft.com/office/drawing/2014/main" val="1317882026"/>
+                    </a:ext>
+                  </a:extLst>
+                </a:gridCol>
+                <a:gridCol w="3202386">
+                  <a:extLst>
+                    <a:ext uri="{9D8B030D-6E8A-4147-A177-3AD203B41FA5}">
+                      <a16:colId xmlns:a16="http://schemas.microsoft.com/office/drawing/2014/main" val="1801095769"/>
+                    </a:ext>
+                  </a:extLst>
+                </a:gridCol>
+              </a:tblGrid>
+              <a:tr h="370840">
+                <a:tc>
+                  <a:txBody>
+                    <a:bodyPr/>
+                    <a:lstStyle/>
+                    <a:p>
+                      <a:pPr latinLnBrk="1"/>
+                      <a:r>
+                        <a:rPr lang="ko-KR" altLang="en-US" dirty="0"/>
+                        <a:t>주요 항목</a:t>
+                      </a:r>
+                    </a:p>
+                  </a:txBody>
+                  <a:tcPr/>
+                </a:tc>
+                <a:tc>
+                  <a:txBody>
+                    <a:bodyPr/>
+                    <a:lstStyle/>
+                    <a:p>
+                      <a:pPr latinLnBrk="1"/>
+                      <a:r>
+                        <a:rPr lang="ko-KR" altLang="en-US" dirty="0"/>
+                        <a:t>사양</a:t>
+                      </a:r>
+                    </a:p>
+                  </a:txBody>
+                  <a:tcPr/>
+                </a:tc>
+                <a:extLst>
+                  <a:ext uri="{0D108BD9-81ED-4DB2-BD59-A6C34878D82A}">
+                    <a16:rowId xmlns:a16="http://schemas.microsoft.com/office/drawing/2014/main" val="1446087308"/>
+                  </a:ext>
+                </a:extLst>
+              </a:tr>
+              <a:tr h="370840">
+                <a:tc>
+                  <a:txBody>
+                    <a:bodyPr/>
+                    <a:lstStyle/>
+                    <a:p>
+                      <a:pPr latinLnBrk="1"/>
+                      <a:r>
+                        <a:rPr lang="ko-KR" altLang="en-US" dirty="0"/>
+                        <a:t>입력 전압</a:t>
+                      </a:r>
+                    </a:p>
+                  </a:txBody>
+                  <a:tcPr/>
+                </a:tc>
+                <a:tc>
+                  <a:txBody>
+                    <a:bodyPr/>
+                    <a:lstStyle/>
+                    <a:p>
+                      <a:pPr latinLnBrk="1"/>
+                      <a:r>
+                        <a:rPr lang="en-US" altLang="ko-KR" dirty="0"/>
+                        <a:t>3 ~ 16V</a:t>
+                      </a:r>
+                      <a:endParaRPr lang="ko-KR" altLang="en-US" dirty="0"/>
+                    </a:p>
+                  </a:txBody>
+                  <a:tcPr/>
+                </a:tc>
+                <a:extLst>
+                  <a:ext uri="{0D108BD9-81ED-4DB2-BD59-A6C34878D82A}">
+                    <a16:rowId xmlns:a16="http://schemas.microsoft.com/office/drawing/2014/main" val="2878854580"/>
+                  </a:ext>
+                </a:extLst>
+              </a:tr>
+              <a:tr h="370840">
+                <a:tc>
+                  <a:txBody>
+                    <a:bodyPr/>
+                    <a:lstStyle/>
+                    <a:p>
+                      <a:pPr latinLnBrk="1"/>
+                      <a:r>
+                        <a:rPr lang="ko-KR" altLang="ko-KR" dirty="0"/>
+                        <a:t>출력 채널</a:t>
+                      </a:r>
+                      <a:endParaRPr lang="ko-KR" altLang="en-US" dirty="0"/>
+                    </a:p>
+                  </a:txBody>
+                  <a:tcPr/>
+                </a:tc>
+                <a:tc>
+                  <a:txBody>
+                    <a:bodyPr/>
+                    <a:lstStyle/>
+                    <a:p>
+                      <a:pPr latinLnBrk="1"/>
+                      <a:r>
+                        <a:rPr lang="ko-KR" altLang="ko-KR" dirty="0" err="1"/>
+                        <a:t>Buck</a:t>
+                      </a:r>
+                      <a:r>
+                        <a:rPr lang="ko-KR" altLang="ko-KR" dirty="0"/>
+                        <a:t> </a:t>
+                      </a:r>
+                      <a:r>
+                        <a:rPr lang="ko-KR" altLang="ko-KR" dirty="0" err="1"/>
+                        <a:t>Converter</a:t>
+                      </a:r>
+                      <a:r>
+                        <a:rPr lang="ko-KR" altLang="ko-KR" dirty="0"/>
+                        <a:t> 4채널</a:t>
+                      </a:r>
+                      <a:endParaRPr lang="ko-KR" altLang="en-US" dirty="0"/>
+                    </a:p>
+                  </a:txBody>
+                  <a:tcPr/>
+                </a:tc>
+                <a:extLst>
+                  <a:ext uri="{0D108BD9-81ED-4DB2-BD59-A6C34878D82A}">
+                    <a16:rowId xmlns:a16="http://schemas.microsoft.com/office/drawing/2014/main" val="3423155806"/>
+                  </a:ext>
+                </a:extLst>
+              </a:tr>
+              <a:tr h="370840">
+                <a:tc>
+                  <a:txBody>
+                    <a:bodyPr/>
+                    <a:lstStyle/>
+                    <a:p>
+                      <a:pPr latinLnBrk="1"/>
+                      <a:r>
+                        <a:rPr lang="ko-KR" altLang="ko-KR" dirty="0"/>
+                        <a:t>채널별 출력 전류</a:t>
+                      </a:r>
+                      <a:endParaRPr lang="ko-KR" altLang="en-US" dirty="0"/>
+                    </a:p>
+                  </a:txBody>
+                  <a:tcPr/>
+                </a:tc>
+                <a:tc>
+                  <a:txBody>
+                    <a:bodyPr/>
+                    <a:lstStyle/>
+                    <a:p>
+                      <a:pPr latinLnBrk="1"/>
+                      <a:r>
+                        <a:rPr lang="ko-KR" altLang="ko-KR" dirty="0"/>
+                        <a:t>최대 6A</a:t>
+                      </a:r>
+                      <a:endParaRPr lang="ko-KR" altLang="en-US" dirty="0"/>
+                    </a:p>
+                  </a:txBody>
+                  <a:tcPr/>
+                </a:tc>
+                <a:extLst>
+                  <a:ext uri="{0D108BD9-81ED-4DB2-BD59-A6C34878D82A}">
+                    <a16:rowId xmlns:a16="http://schemas.microsoft.com/office/drawing/2014/main" val="1633234599"/>
+                  </a:ext>
+                </a:extLst>
+              </a:tr>
+              <a:tr h="370840">
+                <a:tc>
+                  <a:txBody>
+                    <a:bodyPr/>
+                    <a:lstStyle/>
+                    <a:p>
+                      <a:pPr latinLnBrk="1"/>
+                      <a:r>
+                        <a:rPr lang="ko-KR" altLang="ko-KR" dirty="0"/>
+                        <a:t>제어 인터페이스</a:t>
+                      </a:r>
+                      <a:endParaRPr lang="ko-KR" altLang="en-US" dirty="0"/>
+                    </a:p>
+                  </a:txBody>
+                  <a:tcPr/>
+                </a:tc>
+                <a:tc>
+                  <a:txBody>
+                    <a:bodyPr/>
+                    <a:lstStyle/>
+                    <a:p>
+                      <a:pPr latinLnBrk="1"/>
+                      <a:r>
+                        <a:rPr lang="ko-KR" altLang="ko-KR" dirty="0"/>
+                        <a:t>I2C</a:t>
+                      </a:r>
+                      <a:endParaRPr lang="ko-KR" altLang="en-US" dirty="0"/>
+                    </a:p>
+                  </a:txBody>
+                  <a:tcPr/>
+                </a:tc>
+                <a:extLst>
+                  <a:ext uri="{0D108BD9-81ED-4DB2-BD59-A6C34878D82A}">
+                    <a16:rowId xmlns:a16="http://schemas.microsoft.com/office/drawing/2014/main" val="1188293425"/>
+                  </a:ext>
+                </a:extLst>
+              </a:tr>
+              <a:tr h="370840">
+                <a:tc>
+                  <a:txBody>
+                    <a:bodyPr/>
+                    <a:lstStyle/>
+                    <a:p>
+                      <a:pPr latinLnBrk="1"/>
+                      <a:r>
+                        <a:rPr lang="ko-KR" altLang="ko-KR" dirty="0"/>
+                        <a:t>내부 VREF</a:t>
+                      </a:r>
+                      <a:endParaRPr lang="ko-KR" altLang="en-US" dirty="0"/>
+                    </a:p>
+                  </a:txBody>
+                  <a:tcPr/>
+                </a:tc>
+                <a:tc>
+                  <a:txBody>
+                    <a:bodyPr/>
+                    <a:lstStyle/>
+                    <a:p>
+                      <a:pPr latinLnBrk="1"/>
+                      <a:r>
+                        <a:rPr lang="ko-KR" altLang="ko-KR" dirty="0"/>
+                        <a:t>0.3~2.048V, 2mV 단위</a:t>
+                      </a:r>
+                      <a:endParaRPr lang="ko-KR" altLang="en-US" dirty="0"/>
+                    </a:p>
+                  </a:txBody>
+                  <a:tcPr/>
+                </a:tc>
+                <a:extLst>
+                  <a:ext uri="{0D108BD9-81ED-4DB2-BD59-A6C34878D82A}">
+                    <a16:rowId xmlns:a16="http://schemas.microsoft.com/office/drawing/2014/main" val="763771115"/>
+                  </a:ext>
+                </a:extLst>
+              </a:tr>
+              <a:tr h="370840">
+                <a:tc>
+                  <a:txBody>
+                    <a:bodyPr/>
+                    <a:lstStyle/>
+                    <a:p>
+                      <a:pPr latinLnBrk="1"/>
+                      <a:r>
+                        <a:rPr lang="ko-KR" altLang="ko-KR" dirty="0"/>
+                        <a:t>보호 기능</a:t>
+                      </a:r>
+                      <a:endParaRPr lang="ko-KR" altLang="en-US" dirty="0"/>
+                    </a:p>
+                  </a:txBody>
+                  <a:tcPr/>
+                </a:tc>
+                <a:tc>
+                  <a:txBody>
+                    <a:bodyPr/>
+                    <a:lstStyle/>
+                    <a:p>
+                      <a:pPr latinLnBrk="1"/>
+                      <a:r>
+                        <a:rPr lang="ko-KR" altLang="ko-KR" dirty="0"/>
+                        <a:t>UVP, OVP, OCP,</a:t>
+                      </a:r>
+                      <a:r>
+                        <a:rPr lang="en-US" altLang="ko-KR" dirty="0"/>
+                        <a:t> UVLO,</a:t>
+                      </a:r>
+                    </a:p>
+                    <a:p>
+                      <a:pPr latinLnBrk="1"/>
+                      <a:r>
+                        <a:rPr lang="ko-KR" altLang="ko-KR" dirty="0" err="1"/>
+                        <a:t>Thermal</a:t>
+                      </a:r>
+                      <a:r>
+                        <a:rPr lang="ko-KR" altLang="ko-KR" dirty="0"/>
+                        <a:t> </a:t>
+                      </a:r>
+                      <a:r>
+                        <a:rPr lang="ko-KR" altLang="ko-KR" dirty="0" err="1"/>
+                        <a:t>Shutdown</a:t>
+                      </a:r>
+                      <a:endParaRPr lang="ko-KR" altLang="en-US" dirty="0"/>
+                    </a:p>
+                  </a:txBody>
+                  <a:tcPr/>
+                </a:tc>
+                <a:extLst>
+                  <a:ext uri="{0D108BD9-81ED-4DB2-BD59-A6C34878D82A}">
+                    <a16:rowId xmlns:a16="http://schemas.microsoft.com/office/drawing/2014/main" val="603084113"/>
+                  </a:ext>
+                </a:extLst>
+              </a:tr>
+            </a:tbl>
+          </a:graphicData>
+        </a:graphic>
+      </p:graphicFrame>
+      <p:graphicFrame>
+        <p:nvGraphicFramePr>
+          <p:cNvPr id="13" name="표 12">
+            <a:extLst>
+              <a:ext uri="{FF2B5EF4-FFF2-40B4-BE49-F238E27FC236}">
+                <a16:creationId xmlns:a16="http://schemas.microsoft.com/office/drawing/2014/main" id="{D91A0FA2-BB27-3E4D-044F-88E3B472118C}"/>
+              </a:ext>
+            </a:extLst>
+          </p:cNvPr>
+          <p:cNvGraphicFramePr>
+            <a:graphicFrameLocks noGrp="1"/>
+          </p:cNvGraphicFramePr>
+          <p:nvPr>
+            <p:extLst>
+              <p:ext uri="{D42A27DB-BD31-4B8C-83A1-F6EECF244321}">
+                <p14:modId xmlns:p14="http://schemas.microsoft.com/office/powerpoint/2010/main" val="463870054"/>
+              </p:ext>
+            </p:extLst>
+          </p:nvPr>
+        </p:nvGraphicFramePr>
+        <p:xfrm>
+          <a:off x="985684" y="4678383"/>
+          <a:ext cx="7971504" cy="1854200"/>
+        </p:xfrm>
+        <a:graphic>
+          <a:graphicData uri="http://schemas.openxmlformats.org/drawingml/2006/table">
+            <a:tbl>
+              <a:tblPr firstRow="1" bandRow="1">
+                <a:tableStyleId>{5C22544A-7EE6-4342-B048-85BDC9FD1C3A}</a:tableStyleId>
+              </a:tblPr>
+              <a:tblGrid>
+                <a:gridCol w="2058866">
+                  <a:extLst>
+                    <a:ext uri="{9D8B030D-6E8A-4147-A177-3AD203B41FA5}">
+                      <a16:colId xmlns:a16="http://schemas.microsoft.com/office/drawing/2014/main" val="1317882026"/>
+                    </a:ext>
+                  </a:extLst>
+                </a:gridCol>
+                <a:gridCol w="3102448">
+                  <a:extLst>
+                    <a:ext uri="{9D8B030D-6E8A-4147-A177-3AD203B41FA5}">
+                      <a16:colId xmlns:a16="http://schemas.microsoft.com/office/drawing/2014/main" val="1801095769"/>
+                    </a:ext>
+                  </a:extLst>
+                </a:gridCol>
+                <a:gridCol w="2810190">
+                  <a:extLst>
+                    <a:ext uri="{9D8B030D-6E8A-4147-A177-3AD203B41FA5}">
+                      <a16:colId xmlns:a16="http://schemas.microsoft.com/office/drawing/2014/main" val="671593876"/>
+                    </a:ext>
+                  </a:extLst>
+                </a:gridCol>
+              </a:tblGrid>
+              <a:tr h="370840">
+                <a:tc>
+                  <a:txBody>
+                    <a:bodyPr/>
+                    <a:lstStyle/>
+                    <a:p>
+                      <a:pPr latinLnBrk="1"/>
+                      <a:r>
+                        <a:rPr lang="ko-KR" altLang="en-US" dirty="0"/>
+                        <a:t>주요 항목</a:t>
+                      </a:r>
+                    </a:p>
+                  </a:txBody>
+                  <a:tcPr/>
+                </a:tc>
+                <a:tc>
+                  <a:txBody>
+                    <a:bodyPr/>
+                    <a:lstStyle/>
+                    <a:p>
+                      <a:pPr latinLnBrk="1"/>
+                      <a:r>
+                        <a:rPr lang="ko-KR" altLang="en-US" dirty="0"/>
+                        <a:t>사양</a:t>
+                      </a:r>
+                    </a:p>
+                  </a:txBody>
+                  <a:tcPr/>
+                </a:tc>
+                <a:tc>
+                  <a:txBody>
+                    <a:bodyPr/>
+                    <a:lstStyle/>
+                    <a:p>
+                      <a:pPr latinLnBrk="1"/>
+                      <a:r>
+                        <a:rPr lang="ko-KR" altLang="en-US" dirty="0"/>
+                        <a:t>활용</a:t>
+                      </a:r>
+                    </a:p>
+                  </a:txBody>
+                  <a:tcPr/>
+                </a:tc>
+                <a:extLst>
+                  <a:ext uri="{0D108BD9-81ED-4DB2-BD59-A6C34878D82A}">
+                    <a16:rowId xmlns:a16="http://schemas.microsoft.com/office/drawing/2014/main" val="1446087308"/>
+                  </a:ext>
+                </a:extLst>
+              </a:tr>
+              <a:tr h="370840">
+                <a:tc>
+                  <a:txBody>
+                    <a:bodyPr/>
+                    <a:lstStyle/>
+                    <a:p>
+                      <a:pPr latinLnBrk="1"/>
+                      <a:r>
+                        <a:rPr lang="ko-KR" altLang="ko-KR" dirty="0"/>
+                        <a:t>0x07</a:t>
+                      </a:r>
+                      <a:endParaRPr lang="ko-KR" altLang="en-US" dirty="0"/>
+                    </a:p>
+                  </a:txBody>
+                  <a:tcPr/>
+                </a:tc>
+                <a:tc>
+                  <a:txBody>
+                    <a:bodyPr/>
+                    <a:lstStyle/>
+                    <a:p>
+                      <a:pPr latinLnBrk="1"/>
+                      <a:r>
+                        <a:rPr lang="ko-KR" altLang="ko-KR" dirty="0" err="1"/>
+                        <a:t>Buck</a:t>
+                      </a:r>
+                      <a:r>
+                        <a:rPr lang="ko-KR" altLang="ko-KR" dirty="0"/>
+                        <a:t> UV/OV 상태</a:t>
+                      </a:r>
+                      <a:endParaRPr lang="ko-KR" altLang="en-US" dirty="0"/>
+                    </a:p>
+                  </a:txBody>
+                  <a:tcPr/>
+                </a:tc>
+                <a:tc>
+                  <a:txBody>
+                    <a:bodyPr/>
+                    <a:lstStyle/>
+                    <a:p>
+                      <a:pPr latinLnBrk="1"/>
+                      <a:r>
+                        <a:rPr lang="ko-KR" altLang="ko-KR" dirty="0" err="1"/>
+                        <a:t>저전압</a:t>
+                      </a:r>
+                      <a:r>
+                        <a:rPr lang="ko-KR" altLang="ko-KR" dirty="0"/>
+                        <a:t> </a:t>
+                      </a:r>
+                      <a:r>
+                        <a:rPr lang="en-US" altLang="ko-KR" dirty="0"/>
+                        <a:t>,</a:t>
+                      </a:r>
+                      <a:r>
+                        <a:rPr lang="ko-KR" altLang="ko-KR" dirty="0"/>
+                        <a:t>과전압 감지</a:t>
+                      </a:r>
+                      <a:endParaRPr lang="ko-KR" altLang="en-US" dirty="0"/>
+                    </a:p>
+                  </a:txBody>
+                  <a:tcPr/>
+                </a:tc>
+                <a:extLst>
+                  <a:ext uri="{0D108BD9-81ED-4DB2-BD59-A6C34878D82A}">
+                    <a16:rowId xmlns:a16="http://schemas.microsoft.com/office/drawing/2014/main" val="2878854580"/>
+                  </a:ext>
+                </a:extLst>
+              </a:tr>
+              <a:tr h="370840">
+                <a:tc>
+                  <a:txBody>
+                    <a:bodyPr/>
+                    <a:lstStyle/>
+                    <a:p>
+                      <a:pPr latinLnBrk="1"/>
+                      <a:r>
+                        <a:rPr lang="ko-KR" altLang="ko-KR" dirty="0"/>
+                        <a:t>0x08</a:t>
+                      </a:r>
+                      <a:endParaRPr lang="ko-KR" altLang="en-US" dirty="0"/>
+                    </a:p>
+                  </a:txBody>
+                  <a:tcPr/>
+                </a:tc>
+                <a:tc>
+                  <a:txBody>
+                    <a:bodyPr/>
+                    <a:lstStyle/>
+                    <a:p>
+                      <a:pPr latinLnBrk="1"/>
+                      <a:r>
+                        <a:rPr lang="ko-KR" altLang="ko-KR" dirty="0" err="1"/>
+                        <a:t>Buck</a:t>
+                      </a:r>
+                      <a:r>
+                        <a:rPr lang="ko-KR" altLang="ko-KR" dirty="0"/>
+                        <a:t> OC/OC </a:t>
+                      </a:r>
+                      <a:r>
+                        <a:rPr lang="ko-KR" altLang="ko-KR" dirty="0" err="1"/>
+                        <a:t>Warning</a:t>
+                      </a:r>
+                      <a:r>
+                        <a:rPr lang="ko-KR" altLang="ko-KR" dirty="0"/>
+                        <a:t> 상태</a:t>
+                      </a:r>
+                      <a:endParaRPr lang="ko-KR" altLang="en-US" dirty="0"/>
+                    </a:p>
+                  </a:txBody>
+                  <a:tcPr/>
+                </a:tc>
+                <a:tc>
+                  <a:txBody>
+                    <a:bodyPr/>
+                    <a:lstStyle/>
+                    <a:p>
+                      <a:pPr latinLnBrk="1"/>
+                      <a:r>
+                        <a:rPr lang="ko-KR" altLang="ko-KR" dirty="0"/>
+                        <a:t>과전류 및 경고 확인</a:t>
+                      </a:r>
+                      <a:endParaRPr lang="ko-KR" altLang="en-US" dirty="0"/>
+                    </a:p>
+                  </a:txBody>
+                  <a:tcPr/>
+                </a:tc>
+                <a:extLst>
+                  <a:ext uri="{0D108BD9-81ED-4DB2-BD59-A6C34878D82A}">
+                    <a16:rowId xmlns:a16="http://schemas.microsoft.com/office/drawing/2014/main" val="3423155806"/>
+                  </a:ext>
+                </a:extLst>
+              </a:tr>
+              <a:tr h="370840">
+                <a:tc>
+                  <a:txBody>
+                    <a:bodyPr/>
+                    <a:lstStyle/>
+                    <a:p>
+                      <a:pPr latinLnBrk="1"/>
+                      <a:r>
+                        <a:rPr lang="ko-KR" altLang="ko-KR" dirty="0"/>
+                        <a:t>0x13</a:t>
+                      </a:r>
+                      <a:endParaRPr lang="ko-KR" altLang="en-US" dirty="0"/>
+                    </a:p>
+                  </a:txBody>
+                  <a:tcPr/>
+                </a:tc>
+                <a:tc>
+                  <a:txBody>
+                    <a:bodyPr/>
+                    <a:lstStyle/>
+                    <a:p>
+                      <a:pPr latinLnBrk="1"/>
+                      <a:r>
+                        <a:rPr lang="ko-KR" altLang="ko-KR" dirty="0"/>
+                        <a:t>VREF </a:t>
+                      </a:r>
+                      <a:r>
+                        <a:rPr lang="ko-KR" altLang="ko-KR" dirty="0" err="1"/>
+                        <a:t>A</a:t>
+                      </a:r>
+                      <a:r>
+                        <a:rPr lang="ko-KR" altLang="ko-KR" dirty="0"/>
+                        <a:t> HIGH</a:t>
+                      </a:r>
+                      <a:endParaRPr lang="ko-KR" altLang="en-US" dirty="0"/>
+                    </a:p>
+                  </a:txBody>
+                  <a:tcPr/>
+                </a:tc>
+                <a:tc>
+                  <a:txBody>
+                    <a:bodyPr/>
+                    <a:lstStyle/>
+                    <a:p>
+                      <a:pPr latinLnBrk="1"/>
+                      <a:r>
+                        <a:rPr lang="ko-KR" altLang="ko-KR" dirty="0"/>
+                        <a:t>기준 전압 상위 비트 설정</a:t>
+                      </a:r>
+                      <a:endParaRPr lang="ko-KR" altLang="en-US" dirty="0"/>
+                    </a:p>
+                  </a:txBody>
+                  <a:tcPr/>
+                </a:tc>
+                <a:extLst>
+                  <a:ext uri="{0D108BD9-81ED-4DB2-BD59-A6C34878D82A}">
+                    <a16:rowId xmlns:a16="http://schemas.microsoft.com/office/drawing/2014/main" val="1633234599"/>
+                  </a:ext>
+                </a:extLst>
+              </a:tr>
+              <a:tr h="370840">
+                <a:tc>
+                  <a:txBody>
+                    <a:bodyPr/>
+                    <a:lstStyle/>
+                    <a:p>
+                      <a:pPr latinLnBrk="1"/>
+                      <a:r>
+                        <a:rPr lang="ko-KR" altLang="ko-KR" dirty="0"/>
+                        <a:t>0x14</a:t>
+                      </a:r>
+                      <a:endParaRPr lang="ko-KR" altLang="en-US" dirty="0"/>
+                    </a:p>
+                  </a:txBody>
+                  <a:tcPr/>
+                </a:tc>
+                <a:tc>
+                  <a:txBody>
+                    <a:bodyPr/>
+                    <a:lstStyle/>
+                    <a:p>
+                      <a:pPr latinLnBrk="1"/>
+                      <a:r>
+                        <a:rPr lang="ko-KR" altLang="ko-KR" dirty="0"/>
+                        <a:t>VREF </a:t>
+                      </a:r>
+                      <a:r>
+                        <a:rPr lang="ko-KR" altLang="ko-KR" dirty="0" err="1"/>
+                        <a:t>A</a:t>
+                      </a:r>
+                      <a:r>
+                        <a:rPr lang="ko-KR" altLang="ko-KR" dirty="0"/>
+                        <a:t> LOW</a:t>
+                      </a:r>
+                      <a:endParaRPr lang="ko-KR" altLang="en-US" dirty="0"/>
+                    </a:p>
+                  </a:txBody>
+                  <a:tcPr/>
+                </a:tc>
+                <a:tc>
+                  <a:txBody>
+                    <a:bodyPr/>
+                    <a:lstStyle/>
+                    <a:p>
+                      <a:pPr latinLnBrk="1"/>
+                      <a:r>
+                        <a:rPr lang="ko-KR" altLang="ko-KR" dirty="0"/>
+                        <a:t>기준 전압 하위 비트 설정</a:t>
+                      </a:r>
+                      <a:endParaRPr lang="ko-KR" altLang="en-US" dirty="0"/>
+                    </a:p>
+                  </a:txBody>
+                  <a:tcPr/>
+                </a:tc>
+                <a:extLst>
+                  <a:ext uri="{0D108BD9-81ED-4DB2-BD59-A6C34878D82A}">
+                    <a16:rowId xmlns:a16="http://schemas.microsoft.com/office/drawing/2014/main" val="1188293425"/>
+                  </a:ext>
+                </a:extLst>
+              </a:tr>
+            </a:tbl>
+          </a:graphicData>
+        </a:graphic>
+      </p:graphicFrame>
+    </p:spTree>
+    <p:extLst>
+      <p:ext uri="{BB962C8B-B14F-4D97-AF65-F5344CB8AC3E}">
+        <p14:creationId xmlns:p14="http://schemas.microsoft.com/office/powerpoint/2010/main" val="1126638210"/>
+      </p:ext>
+    </p:extLst>
+  </p:cSld>
+  <p:clrMapOvr>
+    <a:masterClrMapping/>
+  </p:clrMapOvr>
+</p:sld>
+</file>
+
+<file path=ppt/slides/slide5.xml><?xml version="1.0" encoding="utf-8"?>
+<p:sld xmlns:a="http://schemas.openxmlformats.org/drawingml/2006/main" xmlns:r="http://schemas.openxmlformats.org/officeDocument/2006/relationships" xmlns:p="http://schemas.openxmlformats.org/presentationml/2006/main">
+  <p:cSld>
+    <p:spTree>
+      <p:nvGrpSpPr>
+        <p:cNvPr id="1" name=""/>
+        <p:cNvGrpSpPr/>
+        <p:nvPr/>
+      </p:nvGrpSpPr>
+      <p:grpSpPr>
+        <a:xfrm>
+          <a:off x="0" y="0"/>
+          <a:ext cx="0" cy="0"/>
+          <a:chOff x="0" y="0"/>
+          <a:chExt cx="0" cy="0"/>
+        </a:xfrm>
+      </p:grpSpPr>
+      <p:sp>
+        <p:nvSpPr>
+          <p:cNvPr id="2" name="제목 1">
+            <a:extLst>
+              <a:ext uri="{FF2B5EF4-FFF2-40B4-BE49-F238E27FC236}">
+                <a16:creationId xmlns:a16="http://schemas.microsoft.com/office/drawing/2014/main" id="{CCF29319-983C-63D7-FBC5-33A4E2189F2C}"/>
+              </a:ext>
+            </a:extLst>
+          </p:cNvPr>
+          <p:cNvSpPr>
+            <a:spLocks noGrp="1"/>
+          </p:cNvSpPr>
+          <p:nvPr>
+            <p:ph type="title"/>
+          </p:nvPr>
+        </p:nvSpPr>
+        <p:spPr>
+          <a:xfrm>
+            <a:off x="838200" y="18255"/>
+            <a:ext cx="10515600" cy="1325563"/>
+          </a:xfrm>
+        </p:spPr>
+        <p:txBody>
+          <a:bodyPr/>
+          <a:lstStyle/>
+          <a:p>
+            <a:r>
+              <a:rPr lang="en-US" altLang="ko-KR" dirty="0"/>
+              <a:t>RTOS </a:t>
+            </a:r>
+            <a:r>
+              <a:rPr lang="ko-KR" altLang="en-US" dirty="0"/>
+              <a:t>기반 시스템 설계</a:t>
+            </a:r>
+          </a:p>
+        </p:txBody>
+      </p:sp>
+      <p:sp>
+        <p:nvSpPr>
+          <p:cNvPr id="4" name="직사각형 3">
+            <a:extLst>
+              <a:ext uri="{FF2B5EF4-FFF2-40B4-BE49-F238E27FC236}">
+                <a16:creationId xmlns:a16="http://schemas.microsoft.com/office/drawing/2014/main" id="{91FF48B4-D263-4CB4-DB4E-8661DEF6EACE}"/>
+              </a:ext>
+            </a:extLst>
+          </p:cNvPr>
+          <p:cNvSpPr/>
+          <p:nvPr/>
+        </p:nvSpPr>
+        <p:spPr>
+          <a:xfrm>
+            <a:off x="1445342" y="2458065"/>
+            <a:ext cx="3814916" cy="4001728"/>
+          </a:xfrm>
+          <a:prstGeom prst="rect">
+            <a:avLst/>
+          </a:prstGeom>
+          <a:noFill/>
+        </p:spPr>
+        <p:style>
+          <a:lnRef idx="2">
+            <a:schemeClr val="accent1">
+              <a:shade val="15000"/>
+            </a:schemeClr>
+          </a:lnRef>
+          <a:fillRef idx="1">
+            <a:schemeClr val="accent1"/>
+          </a:fillRef>
+          <a:effectRef idx="0">
+            <a:schemeClr val="accent1"/>
+          </a:effectRef>
+          <a:fontRef idx="minor">
+            <a:schemeClr val="lt1"/>
+          </a:fontRef>
+        </p:style>
+        <p:txBody>
+          <a:bodyPr rtlCol="0" anchor="ctr"/>
+          <a:lstStyle/>
+          <a:p>
+            <a:pPr algn="ctr"/>
+            <a:endParaRPr lang="ko-KR" altLang="en-US"/>
+          </a:p>
+        </p:txBody>
+      </p:sp>
+      <p:sp>
+        <p:nvSpPr>
+          <p:cNvPr id="6" name="직사각형 5">
+            <a:extLst>
+              <a:ext uri="{FF2B5EF4-FFF2-40B4-BE49-F238E27FC236}">
+                <a16:creationId xmlns:a16="http://schemas.microsoft.com/office/drawing/2014/main" id="{DC265D45-F9B0-E307-29B2-A1F9609320A9}"/>
+              </a:ext>
+            </a:extLst>
+          </p:cNvPr>
+          <p:cNvSpPr/>
+          <p:nvPr/>
+        </p:nvSpPr>
+        <p:spPr>
+          <a:xfrm>
+            <a:off x="6543368" y="2440662"/>
+            <a:ext cx="3814916" cy="4019132"/>
+          </a:xfrm>
+          <a:prstGeom prst="rect">
+            <a:avLst/>
+          </a:prstGeom>
+          <a:noFill/>
+        </p:spPr>
+        <p:style>
+          <a:lnRef idx="2">
+            <a:schemeClr val="accent1">
+              <a:shade val="15000"/>
+            </a:schemeClr>
+          </a:lnRef>
+          <a:fillRef idx="1">
+            <a:schemeClr val="accent1"/>
+          </a:fillRef>
+          <a:effectRef idx="0">
+            <a:schemeClr val="accent1"/>
+          </a:effectRef>
+          <a:fontRef idx="minor">
+            <a:schemeClr val="lt1"/>
+          </a:fontRef>
+        </p:style>
+        <p:txBody>
+          <a:bodyPr rtlCol="0" anchor="ctr"/>
+          <a:lstStyle/>
+          <a:p>
+            <a:pPr algn="ctr"/>
+            <a:endParaRPr lang="ko-KR" altLang="en-US"/>
+          </a:p>
+        </p:txBody>
+      </p:sp>
+      <p:sp>
+        <p:nvSpPr>
+          <p:cNvPr id="7" name="TextBox 6">
+            <a:extLst>
+              <a:ext uri="{FF2B5EF4-FFF2-40B4-BE49-F238E27FC236}">
+                <a16:creationId xmlns:a16="http://schemas.microsoft.com/office/drawing/2014/main" id="{F31BF079-C236-D175-79A8-103DCD32498E}"/>
+              </a:ext>
+            </a:extLst>
+          </p:cNvPr>
+          <p:cNvSpPr txBox="1"/>
+          <p:nvPr/>
+        </p:nvSpPr>
+        <p:spPr>
+          <a:xfrm>
+            <a:off x="2787933" y="2071330"/>
+            <a:ext cx="1129733" cy="369332"/>
+          </a:xfrm>
+          <a:prstGeom prst="rect">
+            <a:avLst/>
+          </a:prstGeom>
+          <a:noFill/>
+        </p:spPr>
+        <p:txBody>
+          <a:bodyPr wrap="none" rtlCol="0">
+            <a:spAutoFit/>
+          </a:bodyPr>
+          <a:lstStyle/>
+          <a:p>
+            <a:r>
+              <a:rPr lang="en-US" altLang="ko-KR" dirty="0"/>
+              <a:t>1ms Task</a:t>
+            </a:r>
+            <a:endParaRPr lang="ko-KR" altLang="en-US" dirty="0"/>
+          </a:p>
+        </p:txBody>
+      </p:sp>
+      <p:sp>
+        <p:nvSpPr>
+          <p:cNvPr id="9" name="TextBox 8">
+            <a:extLst>
+              <a:ext uri="{FF2B5EF4-FFF2-40B4-BE49-F238E27FC236}">
+                <a16:creationId xmlns:a16="http://schemas.microsoft.com/office/drawing/2014/main" id="{156306CA-EF0B-D6F5-7074-8664F3C2F784}"/>
+              </a:ext>
+            </a:extLst>
+          </p:cNvPr>
+          <p:cNvSpPr txBox="1"/>
+          <p:nvPr/>
+        </p:nvSpPr>
+        <p:spPr>
+          <a:xfrm>
+            <a:off x="7974449" y="2071330"/>
+            <a:ext cx="1129733" cy="369332"/>
+          </a:xfrm>
+          <a:prstGeom prst="rect">
+            <a:avLst/>
+          </a:prstGeom>
+          <a:noFill/>
+        </p:spPr>
+        <p:txBody>
+          <a:bodyPr wrap="none" rtlCol="0">
+            <a:spAutoFit/>
+          </a:bodyPr>
+          <a:lstStyle/>
+          <a:p>
+            <a:r>
+              <a:rPr lang="en-US" altLang="ko-KR" dirty="0"/>
+              <a:t>5ms Task</a:t>
+            </a:r>
+            <a:endParaRPr lang="ko-KR" altLang="en-US" dirty="0"/>
+          </a:p>
+        </p:txBody>
+      </p:sp>
+      <p:pic>
+        <p:nvPicPr>
+          <p:cNvPr id="11" name="그래픽 10" descr="키 윤곽선">
+            <a:extLst>
+              <a:ext uri="{FF2B5EF4-FFF2-40B4-BE49-F238E27FC236}">
+                <a16:creationId xmlns:a16="http://schemas.microsoft.com/office/drawing/2014/main" id="{CD2AD3E9-5C61-FD82-52AD-24E15D8E46CB}"/>
+              </a:ext>
+            </a:extLst>
+          </p:cNvPr>
+          <p:cNvPicPr>
+            <a:picLocks noChangeAspect="1"/>
+          </p:cNvPicPr>
+          <p:nvPr/>
+        </p:nvPicPr>
+        <p:blipFill>
+          <a:blip>
+            <a:extLst>
+              <a:ext uri="{96DAC541-7B7A-43D3-8B79-37D633B846F1}">
+                <asvg:svgBlip xmlns:asvg="http://schemas.microsoft.com/office/drawing/2016/SVG/main" r:embed="rId2"/>
+              </a:ext>
+            </a:extLst>
+          </a:blip>
+          <a:stretch>
+            <a:fillRect/>
+          </a:stretch>
+        </p:blipFill>
+        <p:spPr>
+          <a:xfrm>
+            <a:off x="5124377" y="1212418"/>
+            <a:ext cx="1442847" cy="1096844"/>
+          </a:xfrm>
+          <a:prstGeom prst="rect">
+            <a:avLst/>
+          </a:prstGeom>
+        </p:spPr>
+      </p:pic>
+      <p:sp>
+        <p:nvSpPr>
+          <p:cNvPr id="13" name="TextBox 12">
+            <a:extLst>
+              <a:ext uri="{FF2B5EF4-FFF2-40B4-BE49-F238E27FC236}">
+                <a16:creationId xmlns:a16="http://schemas.microsoft.com/office/drawing/2014/main" id="{D9C44A05-8D4E-CDBD-5107-2D94CC86342C}"/>
+              </a:ext>
+            </a:extLst>
+          </p:cNvPr>
+          <p:cNvSpPr txBox="1"/>
+          <p:nvPr/>
+        </p:nvSpPr>
+        <p:spPr>
+          <a:xfrm>
+            <a:off x="5407220" y="1167854"/>
+            <a:ext cx="830356" cy="369332"/>
+          </a:xfrm>
+          <a:prstGeom prst="rect">
+            <a:avLst/>
+          </a:prstGeom>
+          <a:noFill/>
+        </p:spPr>
+        <p:txBody>
+          <a:bodyPr wrap="none" rtlCol="0">
+            <a:spAutoFit/>
+          </a:bodyPr>
+          <a:lstStyle/>
+          <a:p>
+            <a:r>
+              <a:rPr lang="en-US" altLang="ko-KR" dirty="0"/>
+              <a:t>mutex</a:t>
+            </a:r>
+            <a:endParaRPr lang="ko-KR" altLang="en-US" dirty="0"/>
+          </a:p>
+        </p:txBody>
+      </p:sp>
+      <p:sp>
+        <p:nvSpPr>
+          <p:cNvPr id="16" name="화살표: 오른쪽 15">
+            <a:extLst>
+              <a:ext uri="{FF2B5EF4-FFF2-40B4-BE49-F238E27FC236}">
+                <a16:creationId xmlns:a16="http://schemas.microsoft.com/office/drawing/2014/main" id="{7F2B2C9D-605E-7415-E620-D705549FC793}"/>
+              </a:ext>
+            </a:extLst>
+          </p:cNvPr>
+          <p:cNvSpPr/>
+          <p:nvPr/>
+        </p:nvSpPr>
+        <p:spPr>
+          <a:xfrm rot="8897107">
+            <a:off x="4167892" y="2205719"/>
+            <a:ext cx="1096362" cy="296214"/>
+          </a:xfrm>
+          <a:prstGeom prst="rightArrow">
+            <a:avLst/>
+          </a:prstGeom>
+          <a:noFill/>
+        </p:spPr>
+        <p:style>
+          <a:lnRef idx="2">
+            <a:schemeClr val="accent1">
+              <a:shade val="15000"/>
+            </a:schemeClr>
+          </a:lnRef>
+          <a:fillRef idx="1">
+            <a:schemeClr val="accent1"/>
+          </a:fillRef>
+          <a:effectRef idx="0">
+            <a:schemeClr val="accent1"/>
+          </a:effectRef>
+          <a:fontRef idx="minor">
+            <a:schemeClr val="lt1"/>
+          </a:fontRef>
+        </p:style>
+        <p:txBody>
+          <a:bodyPr rtlCol="0" anchor="ctr"/>
+          <a:lstStyle/>
+          <a:p>
+            <a:pPr algn="ctr"/>
+            <a:endParaRPr lang="ko-KR" altLang="en-US"/>
+          </a:p>
+        </p:txBody>
+      </p:sp>
+      <p:sp>
+        <p:nvSpPr>
+          <p:cNvPr id="21" name="사각형: 둥근 모서리 20">
+            <a:extLst>
+              <a:ext uri="{FF2B5EF4-FFF2-40B4-BE49-F238E27FC236}">
+                <a16:creationId xmlns:a16="http://schemas.microsoft.com/office/drawing/2014/main" id="{694675F8-E533-9A09-DE51-C3553880E74D}"/>
+              </a:ext>
+            </a:extLst>
+          </p:cNvPr>
+          <p:cNvSpPr/>
+          <p:nvPr/>
+        </p:nvSpPr>
+        <p:spPr>
+          <a:xfrm>
+            <a:off x="2470598" y="2693071"/>
+            <a:ext cx="1764401" cy="557981"/>
+          </a:xfrm>
+          <a:prstGeom prst="roundRect">
+            <a:avLst/>
+          </a:prstGeom>
+          <a:noFill/>
+        </p:spPr>
+        <p:style>
+          <a:lnRef idx="2">
+            <a:schemeClr val="accent1">
+              <a:shade val="15000"/>
+            </a:schemeClr>
+          </a:lnRef>
+          <a:fillRef idx="1">
+            <a:schemeClr val="accent1"/>
+          </a:fillRef>
+          <a:effectRef idx="0">
+            <a:schemeClr val="accent1"/>
+          </a:effectRef>
+          <a:fontRef idx="minor">
+            <a:schemeClr val="lt1"/>
+          </a:fontRef>
+        </p:style>
+        <p:txBody>
+          <a:bodyPr rtlCol="0" anchor="ctr"/>
+          <a:lstStyle/>
+          <a:p>
+            <a:pPr algn="ctr"/>
+            <a:endParaRPr lang="ko-KR" altLang="en-US"/>
+          </a:p>
+        </p:txBody>
+      </p:sp>
+      <p:sp>
+        <p:nvSpPr>
+          <p:cNvPr id="25" name="TextBox 24">
+            <a:extLst>
+              <a:ext uri="{FF2B5EF4-FFF2-40B4-BE49-F238E27FC236}">
+                <a16:creationId xmlns:a16="http://schemas.microsoft.com/office/drawing/2014/main" id="{9E09595B-1445-4F77-75BD-DCC3233D1086}"/>
+              </a:ext>
+            </a:extLst>
+          </p:cNvPr>
+          <p:cNvSpPr txBox="1"/>
+          <p:nvPr/>
+        </p:nvSpPr>
+        <p:spPr>
+          <a:xfrm>
+            <a:off x="2665911" y="2787395"/>
+            <a:ext cx="1373774" cy="369332"/>
+          </a:xfrm>
+          <a:prstGeom prst="rect">
+            <a:avLst/>
+          </a:prstGeom>
+          <a:noFill/>
+        </p:spPr>
+        <p:txBody>
+          <a:bodyPr wrap="none" rtlCol="0">
+            <a:spAutoFit/>
+          </a:bodyPr>
+          <a:lstStyle/>
+          <a:p>
+            <a:r>
+              <a:rPr lang="en-US" altLang="ko-KR" dirty="0"/>
+              <a:t>mutex</a:t>
+            </a:r>
+            <a:r>
+              <a:rPr lang="ko-KR" altLang="en-US" dirty="0"/>
+              <a:t> 획득</a:t>
+            </a:r>
+          </a:p>
+        </p:txBody>
+      </p:sp>
+      <p:sp>
+        <p:nvSpPr>
+          <p:cNvPr id="27" name="사각형: 둥근 모서리 26">
+            <a:extLst>
+              <a:ext uri="{FF2B5EF4-FFF2-40B4-BE49-F238E27FC236}">
+                <a16:creationId xmlns:a16="http://schemas.microsoft.com/office/drawing/2014/main" id="{EA507486-804D-8D32-3898-501B8DA8E764}"/>
+              </a:ext>
+            </a:extLst>
+          </p:cNvPr>
+          <p:cNvSpPr/>
+          <p:nvPr/>
+        </p:nvSpPr>
+        <p:spPr>
+          <a:xfrm>
+            <a:off x="7568625" y="2654424"/>
+            <a:ext cx="1764401" cy="557981"/>
+          </a:xfrm>
+          <a:prstGeom prst="roundRect">
+            <a:avLst/>
+          </a:prstGeom>
+          <a:noFill/>
+        </p:spPr>
+        <p:style>
+          <a:lnRef idx="2">
+            <a:schemeClr val="accent1">
+              <a:shade val="15000"/>
+            </a:schemeClr>
+          </a:lnRef>
+          <a:fillRef idx="1">
+            <a:schemeClr val="accent1"/>
+          </a:fillRef>
+          <a:effectRef idx="0">
+            <a:schemeClr val="accent1"/>
+          </a:effectRef>
+          <a:fontRef idx="minor">
+            <a:schemeClr val="lt1"/>
+          </a:fontRef>
+        </p:style>
+        <p:txBody>
+          <a:bodyPr rtlCol="0" anchor="ctr"/>
+          <a:lstStyle/>
+          <a:p>
+            <a:pPr algn="ctr"/>
+            <a:endParaRPr lang="ko-KR" altLang="en-US"/>
+          </a:p>
+        </p:txBody>
+      </p:sp>
+      <p:sp>
+        <p:nvSpPr>
+          <p:cNvPr id="29" name="TextBox 28">
+            <a:extLst>
+              <a:ext uri="{FF2B5EF4-FFF2-40B4-BE49-F238E27FC236}">
+                <a16:creationId xmlns:a16="http://schemas.microsoft.com/office/drawing/2014/main" id="{1BEA8982-7997-5410-260A-7312300AED9C}"/>
+              </a:ext>
+            </a:extLst>
+          </p:cNvPr>
+          <p:cNvSpPr txBox="1"/>
+          <p:nvPr/>
+        </p:nvSpPr>
+        <p:spPr>
+          <a:xfrm>
+            <a:off x="7768229" y="2748749"/>
+            <a:ext cx="1373774" cy="369332"/>
+          </a:xfrm>
+          <a:prstGeom prst="rect">
+            <a:avLst/>
+          </a:prstGeom>
+          <a:noFill/>
+        </p:spPr>
+        <p:txBody>
+          <a:bodyPr wrap="none" rtlCol="0">
+            <a:spAutoFit/>
+          </a:bodyPr>
+          <a:lstStyle/>
+          <a:p>
+            <a:r>
+              <a:rPr lang="en-US" altLang="ko-KR" dirty="0"/>
+              <a:t>mutex</a:t>
+            </a:r>
+            <a:r>
+              <a:rPr lang="ko-KR" altLang="en-US" dirty="0"/>
+              <a:t> 획득</a:t>
+            </a:r>
+          </a:p>
+        </p:txBody>
+      </p:sp>
+      <p:sp>
+        <p:nvSpPr>
+          <p:cNvPr id="31" name="화살표: 오른쪽 30">
+            <a:extLst>
+              <a:ext uri="{FF2B5EF4-FFF2-40B4-BE49-F238E27FC236}">
+                <a16:creationId xmlns:a16="http://schemas.microsoft.com/office/drawing/2014/main" id="{80B20800-EDD0-BCC0-6C76-B5ABA0E5324D}"/>
+              </a:ext>
+            </a:extLst>
+          </p:cNvPr>
+          <p:cNvSpPr/>
+          <p:nvPr/>
+        </p:nvSpPr>
+        <p:spPr>
+          <a:xfrm rot="1732135">
+            <a:off x="6380541" y="2154745"/>
+            <a:ext cx="1171044" cy="331934"/>
+          </a:xfrm>
+          <a:prstGeom prst="rightArrow">
+            <a:avLst/>
+          </a:prstGeom>
+          <a:noFill/>
+        </p:spPr>
+        <p:style>
+          <a:lnRef idx="2">
+            <a:schemeClr val="accent1">
+              <a:shade val="15000"/>
+            </a:schemeClr>
+          </a:lnRef>
+          <a:fillRef idx="1">
+            <a:schemeClr val="accent1"/>
+          </a:fillRef>
+          <a:effectRef idx="0">
+            <a:schemeClr val="accent1"/>
+          </a:effectRef>
+          <a:fontRef idx="minor">
+            <a:schemeClr val="lt1"/>
+          </a:fontRef>
+        </p:style>
+        <p:txBody>
+          <a:bodyPr rtlCol="0" anchor="ctr"/>
+          <a:lstStyle/>
+          <a:p>
+            <a:pPr algn="ctr"/>
+            <a:endParaRPr lang="ko-KR" altLang="en-US"/>
+          </a:p>
+        </p:txBody>
+      </p:sp>
+      <p:sp>
+        <p:nvSpPr>
+          <p:cNvPr id="33" name="사각형: 둥근 모서리 32">
+            <a:extLst>
+              <a:ext uri="{FF2B5EF4-FFF2-40B4-BE49-F238E27FC236}">
+                <a16:creationId xmlns:a16="http://schemas.microsoft.com/office/drawing/2014/main" id="{41406883-C8A3-DCD4-3752-CA49F6AC74D0}"/>
+              </a:ext>
+            </a:extLst>
+          </p:cNvPr>
+          <p:cNvSpPr/>
+          <p:nvPr/>
+        </p:nvSpPr>
+        <p:spPr>
+          <a:xfrm>
+            <a:off x="1740308" y="3412955"/>
+            <a:ext cx="3384067" cy="557981"/>
+          </a:xfrm>
+          <a:prstGeom prst="roundRect">
+            <a:avLst/>
+          </a:prstGeom>
+          <a:noFill/>
+        </p:spPr>
+        <p:style>
+          <a:lnRef idx="2">
+            <a:schemeClr val="accent1">
+              <a:shade val="15000"/>
+            </a:schemeClr>
+          </a:lnRef>
+          <a:fillRef idx="1">
+            <a:schemeClr val="accent1"/>
+          </a:fillRef>
+          <a:effectRef idx="0">
+            <a:schemeClr val="accent1"/>
+          </a:effectRef>
+          <a:fontRef idx="minor">
+            <a:schemeClr val="lt1"/>
+          </a:fontRef>
+        </p:style>
+        <p:txBody>
+          <a:bodyPr rtlCol="0" anchor="ctr"/>
+          <a:lstStyle/>
+          <a:p>
+            <a:pPr algn="ctr"/>
+            <a:endParaRPr lang="ko-KR" altLang="en-US"/>
+          </a:p>
+        </p:txBody>
+      </p:sp>
+      <p:sp>
+        <p:nvSpPr>
+          <p:cNvPr id="35" name="TextBox 34">
+            <a:extLst>
+              <a:ext uri="{FF2B5EF4-FFF2-40B4-BE49-F238E27FC236}">
+                <a16:creationId xmlns:a16="http://schemas.microsoft.com/office/drawing/2014/main" id="{DFD8F56D-7D6C-36E2-E09D-A291BEDD6C68}"/>
+              </a:ext>
+            </a:extLst>
+          </p:cNvPr>
+          <p:cNvSpPr txBox="1"/>
+          <p:nvPr/>
+        </p:nvSpPr>
+        <p:spPr>
+          <a:xfrm>
+            <a:off x="1887305" y="3502771"/>
+            <a:ext cx="3061992" cy="369332"/>
+          </a:xfrm>
+          <a:prstGeom prst="rect">
+            <a:avLst/>
+          </a:prstGeom>
+          <a:noFill/>
+        </p:spPr>
+        <p:txBody>
+          <a:bodyPr wrap="none" rtlCol="0">
+            <a:spAutoFit/>
+          </a:bodyPr>
+          <a:lstStyle/>
+          <a:p>
+            <a:r>
+              <a:rPr lang="en-US" altLang="ko-KR" dirty="0"/>
+              <a:t>PMIC</a:t>
+            </a:r>
+            <a:r>
+              <a:rPr lang="ko-KR" altLang="en-US" dirty="0"/>
+              <a:t>로부터 </a:t>
+            </a:r>
+            <a:r>
+              <a:rPr lang="en-US" altLang="ko-KR" dirty="0"/>
+              <a:t>UV,OV,OC</a:t>
+            </a:r>
+            <a:r>
+              <a:rPr lang="ko-KR" altLang="en-US" dirty="0"/>
+              <a:t> 읽기</a:t>
+            </a:r>
+          </a:p>
+        </p:txBody>
+      </p:sp>
+      <p:sp>
+        <p:nvSpPr>
+          <p:cNvPr id="36" name="다이아몬드 35">
+            <a:extLst>
+              <a:ext uri="{FF2B5EF4-FFF2-40B4-BE49-F238E27FC236}">
+                <a16:creationId xmlns:a16="http://schemas.microsoft.com/office/drawing/2014/main" id="{D7199C88-FA5E-2710-47C1-38F0D721C0E4}"/>
+              </a:ext>
+            </a:extLst>
+          </p:cNvPr>
+          <p:cNvSpPr/>
+          <p:nvPr/>
+        </p:nvSpPr>
+        <p:spPr>
+          <a:xfrm>
+            <a:off x="2182761" y="4070566"/>
+            <a:ext cx="2399071" cy="739308"/>
+          </a:xfrm>
+          <a:prstGeom prst="diamond">
+            <a:avLst/>
+          </a:prstGeom>
+          <a:noFill/>
+        </p:spPr>
+        <p:style>
+          <a:lnRef idx="2">
+            <a:schemeClr val="accent1">
+              <a:shade val="15000"/>
+            </a:schemeClr>
+          </a:lnRef>
+          <a:fillRef idx="1">
+            <a:schemeClr val="accent1"/>
+          </a:fillRef>
+          <a:effectRef idx="0">
+            <a:schemeClr val="accent1"/>
+          </a:effectRef>
+          <a:fontRef idx="minor">
+            <a:schemeClr val="lt1"/>
+          </a:fontRef>
+        </p:style>
+        <p:txBody>
+          <a:bodyPr rtlCol="0" anchor="ctr"/>
+          <a:lstStyle/>
+          <a:p>
+            <a:pPr algn="ctr"/>
+            <a:endParaRPr lang="ko-KR" altLang="en-US"/>
+          </a:p>
+        </p:txBody>
+      </p:sp>
+      <p:sp>
+        <p:nvSpPr>
+          <p:cNvPr id="38" name="TextBox 37">
+            <a:extLst>
+              <a:ext uri="{FF2B5EF4-FFF2-40B4-BE49-F238E27FC236}">
+                <a16:creationId xmlns:a16="http://schemas.microsoft.com/office/drawing/2014/main" id="{E84A45C1-6E83-0B8E-3EC3-9B0079B14C7B}"/>
+              </a:ext>
+            </a:extLst>
+          </p:cNvPr>
+          <p:cNvSpPr txBox="1"/>
+          <p:nvPr/>
+        </p:nvSpPr>
+        <p:spPr>
+          <a:xfrm>
+            <a:off x="2509300" y="4244560"/>
+            <a:ext cx="1745991" cy="369332"/>
+          </a:xfrm>
+          <a:prstGeom prst="rect">
+            <a:avLst/>
+          </a:prstGeom>
+          <a:noFill/>
+        </p:spPr>
+        <p:txBody>
+          <a:bodyPr wrap="none" rtlCol="0">
+            <a:spAutoFit/>
+          </a:bodyPr>
+          <a:lstStyle/>
+          <a:p>
+            <a:r>
+              <a:rPr lang="en-US" altLang="ko-KR" dirty="0"/>
+              <a:t>CAN </a:t>
+            </a:r>
+            <a:r>
+              <a:rPr lang="ko-KR" altLang="en-US" dirty="0"/>
+              <a:t>수신 있음</a:t>
+            </a:r>
+          </a:p>
+        </p:txBody>
+      </p:sp>
+      <p:sp>
+        <p:nvSpPr>
+          <p:cNvPr id="40" name="TextBox 39">
+            <a:extLst>
+              <a:ext uri="{FF2B5EF4-FFF2-40B4-BE49-F238E27FC236}">
+                <a16:creationId xmlns:a16="http://schemas.microsoft.com/office/drawing/2014/main" id="{3C0C81D3-EB60-1E7A-C089-75C020F352ED}"/>
+              </a:ext>
+            </a:extLst>
+          </p:cNvPr>
+          <p:cNvSpPr txBox="1"/>
+          <p:nvPr/>
+        </p:nvSpPr>
+        <p:spPr>
+          <a:xfrm>
+            <a:off x="2602802" y="5728139"/>
+            <a:ext cx="1373774" cy="369332"/>
+          </a:xfrm>
+          <a:prstGeom prst="rect">
+            <a:avLst/>
+          </a:prstGeom>
+          <a:noFill/>
+        </p:spPr>
+        <p:txBody>
+          <a:bodyPr wrap="none" rtlCol="0">
+            <a:spAutoFit/>
+          </a:bodyPr>
+          <a:lstStyle/>
+          <a:p>
+            <a:r>
+              <a:rPr lang="en-US" altLang="ko-KR" dirty="0"/>
+              <a:t>mutex</a:t>
+            </a:r>
+            <a:r>
+              <a:rPr lang="ko-KR" altLang="en-US" dirty="0"/>
+              <a:t> 반납</a:t>
+            </a:r>
+          </a:p>
+        </p:txBody>
+      </p:sp>
+      <p:sp>
+        <p:nvSpPr>
+          <p:cNvPr id="42" name="사각형: 둥근 모서리 41">
+            <a:extLst>
+              <a:ext uri="{FF2B5EF4-FFF2-40B4-BE49-F238E27FC236}">
+                <a16:creationId xmlns:a16="http://schemas.microsoft.com/office/drawing/2014/main" id="{F98B13FF-AD4A-600C-FEE1-DFA1EA76986D}"/>
+              </a:ext>
+            </a:extLst>
+          </p:cNvPr>
+          <p:cNvSpPr/>
+          <p:nvPr/>
+        </p:nvSpPr>
+        <p:spPr>
+          <a:xfrm>
+            <a:off x="2407489" y="5669984"/>
+            <a:ext cx="1764401" cy="557981"/>
+          </a:xfrm>
+          <a:prstGeom prst="roundRect">
+            <a:avLst/>
+          </a:prstGeom>
+          <a:noFill/>
+        </p:spPr>
+        <p:style>
+          <a:lnRef idx="2">
+            <a:schemeClr val="accent1">
+              <a:shade val="15000"/>
+            </a:schemeClr>
+          </a:lnRef>
+          <a:fillRef idx="1">
+            <a:schemeClr val="accent1"/>
+          </a:fillRef>
+          <a:effectRef idx="0">
+            <a:schemeClr val="accent1"/>
+          </a:effectRef>
+          <a:fontRef idx="minor">
+            <a:schemeClr val="lt1"/>
+          </a:fontRef>
+        </p:style>
+        <p:txBody>
+          <a:bodyPr rtlCol="0" anchor="ctr"/>
+          <a:lstStyle/>
+          <a:p>
+            <a:pPr algn="ctr"/>
+            <a:endParaRPr lang="ko-KR" altLang="en-US"/>
+          </a:p>
+        </p:txBody>
+      </p:sp>
+      <p:sp>
+        <p:nvSpPr>
+          <p:cNvPr id="44" name="TextBox 43">
+            <a:extLst>
+              <a:ext uri="{FF2B5EF4-FFF2-40B4-BE49-F238E27FC236}">
+                <a16:creationId xmlns:a16="http://schemas.microsoft.com/office/drawing/2014/main" id="{22A5546E-B4E2-D934-BAD7-58FE93B49D77}"/>
+              </a:ext>
+            </a:extLst>
+          </p:cNvPr>
+          <p:cNvSpPr txBox="1"/>
+          <p:nvPr/>
+        </p:nvSpPr>
+        <p:spPr>
+          <a:xfrm>
+            <a:off x="1636847" y="5053000"/>
+            <a:ext cx="3431902" cy="369332"/>
+          </a:xfrm>
+          <a:prstGeom prst="rect">
+            <a:avLst/>
+          </a:prstGeom>
+          <a:noFill/>
+        </p:spPr>
+        <p:txBody>
+          <a:bodyPr wrap="none" rtlCol="0">
+            <a:spAutoFit/>
+          </a:bodyPr>
+          <a:lstStyle/>
+          <a:p>
+            <a:r>
+              <a:rPr lang="en-US" altLang="ko-KR" dirty="0"/>
+              <a:t>UDS</a:t>
+            </a:r>
+            <a:r>
+              <a:rPr lang="ko-KR" altLang="en-US" dirty="0"/>
+              <a:t> </a:t>
+            </a:r>
+            <a:r>
+              <a:rPr lang="en-US" altLang="ko-KR" dirty="0"/>
+              <a:t>ID</a:t>
+            </a:r>
+            <a:r>
+              <a:rPr lang="ko-KR" altLang="en-US" dirty="0"/>
+              <a:t>에 따라 </a:t>
+            </a:r>
+            <a:r>
+              <a:rPr lang="en-US" altLang="ko-KR" dirty="0"/>
+              <a:t>DTC Read/Clear</a:t>
+            </a:r>
+            <a:endParaRPr lang="ko-KR" altLang="en-US" dirty="0"/>
+          </a:p>
+        </p:txBody>
+      </p:sp>
+      <p:sp>
+        <p:nvSpPr>
+          <p:cNvPr id="46" name="사각형: 둥근 모서리 45">
+            <a:extLst>
+              <a:ext uri="{FF2B5EF4-FFF2-40B4-BE49-F238E27FC236}">
+                <a16:creationId xmlns:a16="http://schemas.microsoft.com/office/drawing/2014/main" id="{F4D0B180-FEA3-E95F-4375-DEB23ABE7EC7}"/>
+              </a:ext>
+            </a:extLst>
+          </p:cNvPr>
+          <p:cNvSpPr/>
+          <p:nvPr/>
+        </p:nvSpPr>
+        <p:spPr>
+          <a:xfrm>
+            <a:off x="1597655" y="4958676"/>
+            <a:ext cx="3526722" cy="557981"/>
+          </a:xfrm>
+          <a:prstGeom prst="roundRect">
+            <a:avLst/>
+          </a:prstGeom>
+          <a:noFill/>
+        </p:spPr>
+        <p:style>
+          <a:lnRef idx="2">
+            <a:schemeClr val="accent1">
+              <a:shade val="15000"/>
+            </a:schemeClr>
+          </a:lnRef>
+          <a:fillRef idx="1">
+            <a:schemeClr val="accent1"/>
+          </a:fillRef>
+          <a:effectRef idx="0">
+            <a:schemeClr val="accent1"/>
+          </a:effectRef>
+          <a:fontRef idx="minor">
+            <a:schemeClr val="lt1"/>
+          </a:fontRef>
+        </p:style>
+        <p:txBody>
+          <a:bodyPr rtlCol="0" anchor="ctr"/>
+          <a:lstStyle/>
+          <a:p>
+            <a:pPr algn="ctr"/>
+            <a:endParaRPr lang="ko-KR" altLang="en-US"/>
+          </a:p>
+        </p:txBody>
+      </p:sp>
+      <p:sp>
+        <p:nvSpPr>
+          <p:cNvPr id="49" name="화살표: 아래쪽 48">
+            <a:extLst>
+              <a:ext uri="{FF2B5EF4-FFF2-40B4-BE49-F238E27FC236}">
+                <a16:creationId xmlns:a16="http://schemas.microsoft.com/office/drawing/2014/main" id="{A0986017-0487-6743-7CEB-F199C47B7952}"/>
+              </a:ext>
+            </a:extLst>
+          </p:cNvPr>
+          <p:cNvSpPr/>
+          <p:nvPr/>
+        </p:nvSpPr>
+        <p:spPr>
+          <a:xfrm>
+            <a:off x="3234811" y="3206802"/>
+            <a:ext cx="294968" cy="256228"/>
+          </a:xfrm>
+          <a:prstGeom prst="downArrow">
+            <a:avLst/>
+          </a:prstGeom>
+          <a:noFill/>
+        </p:spPr>
+        <p:style>
+          <a:lnRef idx="2">
+            <a:schemeClr val="accent1">
+              <a:shade val="15000"/>
+            </a:schemeClr>
+          </a:lnRef>
+          <a:fillRef idx="1">
+            <a:schemeClr val="accent1"/>
+          </a:fillRef>
+          <a:effectRef idx="0">
+            <a:schemeClr val="accent1"/>
+          </a:effectRef>
+          <a:fontRef idx="minor">
+            <a:schemeClr val="lt1"/>
+          </a:fontRef>
+        </p:style>
+        <p:txBody>
+          <a:bodyPr rtlCol="0" anchor="ctr"/>
+          <a:lstStyle/>
+          <a:p>
+            <a:pPr algn="ctr"/>
+            <a:endParaRPr lang="ko-KR" altLang="en-US"/>
+          </a:p>
+        </p:txBody>
+      </p:sp>
+      <p:sp>
+        <p:nvSpPr>
+          <p:cNvPr id="51" name="화살표: 아래쪽 50">
+            <a:extLst>
+              <a:ext uri="{FF2B5EF4-FFF2-40B4-BE49-F238E27FC236}">
+                <a16:creationId xmlns:a16="http://schemas.microsoft.com/office/drawing/2014/main" id="{03146E7A-BE48-BBC1-3C57-CD1C66B95896}"/>
+              </a:ext>
+            </a:extLst>
+          </p:cNvPr>
+          <p:cNvSpPr/>
+          <p:nvPr/>
+        </p:nvSpPr>
+        <p:spPr>
+          <a:xfrm>
+            <a:off x="3234811" y="3868035"/>
+            <a:ext cx="294968" cy="256228"/>
+          </a:xfrm>
+          <a:prstGeom prst="downArrow">
+            <a:avLst/>
+          </a:prstGeom>
+          <a:noFill/>
+        </p:spPr>
+        <p:style>
+          <a:lnRef idx="2">
+            <a:schemeClr val="accent1">
+              <a:shade val="15000"/>
+            </a:schemeClr>
+          </a:lnRef>
+          <a:fillRef idx="1">
+            <a:schemeClr val="accent1"/>
+          </a:fillRef>
+          <a:effectRef idx="0">
+            <a:schemeClr val="accent1"/>
+          </a:effectRef>
+          <a:fontRef idx="minor">
+            <a:schemeClr val="lt1"/>
+          </a:fontRef>
+        </p:style>
+        <p:txBody>
+          <a:bodyPr rtlCol="0" anchor="ctr"/>
+          <a:lstStyle/>
+          <a:p>
+            <a:pPr algn="ctr"/>
+            <a:endParaRPr lang="ko-KR" altLang="en-US"/>
+          </a:p>
+        </p:txBody>
+      </p:sp>
+      <p:sp>
+        <p:nvSpPr>
+          <p:cNvPr id="53" name="화살표: 아래쪽 52">
+            <a:extLst>
+              <a:ext uri="{FF2B5EF4-FFF2-40B4-BE49-F238E27FC236}">
+                <a16:creationId xmlns:a16="http://schemas.microsoft.com/office/drawing/2014/main" id="{D9CBB9BC-00B9-C7DC-00CC-BB940332E9C2}"/>
+              </a:ext>
+            </a:extLst>
+          </p:cNvPr>
+          <p:cNvSpPr/>
+          <p:nvPr/>
+        </p:nvSpPr>
+        <p:spPr>
+          <a:xfrm>
+            <a:off x="3234811" y="4738580"/>
+            <a:ext cx="294968" cy="256228"/>
+          </a:xfrm>
+          <a:prstGeom prst="downArrow">
+            <a:avLst/>
+          </a:prstGeom>
+          <a:noFill/>
+        </p:spPr>
+        <p:style>
+          <a:lnRef idx="2">
+            <a:schemeClr val="accent1">
+              <a:shade val="15000"/>
+            </a:schemeClr>
+          </a:lnRef>
+          <a:fillRef idx="1">
+            <a:schemeClr val="accent1"/>
+          </a:fillRef>
+          <a:effectRef idx="0">
+            <a:schemeClr val="accent1"/>
+          </a:effectRef>
+          <a:fontRef idx="minor">
+            <a:schemeClr val="lt1"/>
+          </a:fontRef>
+        </p:style>
+        <p:txBody>
+          <a:bodyPr rtlCol="0" anchor="ctr"/>
+          <a:lstStyle/>
+          <a:p>
+            <a:pPr algn="ctr"/>
+            <a:endParaRPr lang="ko-KR" altLang="en-US"/>
+          </a:p>
+        </p:txBody>
+      </p:sp>
+      <p:sp>
+        <p:nvSpPr>
+          <p:cNvPr id="55" name="TextBox 54">
+            <a:extLst>
+              <a:ext uri="{FF2B5EF4-FFF2-40B4-BE49-F238E27FC236}">
+                <a16:creationId xmlns:a16="http://schemas.microsoft.com/office/drawing/2014/main" id="{92F38EFC-8710-5548-9E4C-78FD0B0A0780}"/>
+              </a:ext>
+            </a:extLst>
+          </p:cNvPr>
+          <p:cNvSpPr txBox="1"/>
+          <p:nvPr/>
+        </p:nvSpPr>
+        <p:spPr>
+          <a:xfrm>
+            <a:off x="2797924" y="4681676"/>
+            <a:ext cx="408253" cy="276999"/>
+          </a:xfrm>
+          <a:prstGeom prst="rect">
+            <a:avLst/>
+          </a:prstGeom>
+          <a:noFill/>
+        </p:spPr>
+        <p:txBody>
+          <a:bodyPr wrap="none" rtlCol="0">
+            <a:spAutoFit/>
+          </a:bodyPr>
+          <a:lstStyle/>
+          <a:p>
+            <a:r>
+              <a:rPr lang="en-US" altLang="ko-KR" sz="1200" dirty="0"/>
+              <a:t>yes</a:t>
+            </a:r>
+            <a:endParaRPr lang="ko-KR" altLang="en-US" sz="1200" dirty="0"/>
+          </a:p>
+        </p:txBody>
+      </p:sp>
+      <p:sp>
+        <p:nvSpPr>
+          <p:cNvPr id="56" name="화살표: U자형 55">
+            <a:extLst>
+              <a:ext uri="{FF2B5EF4-FFF2-40B4-BE49-F238E27FC236}">
+                <a16:creationId xmlns:a16="http://schemas.microsoft.com/office/drawing/2014/main" id="{424B652D-1ECB-1D9E-10E5-04F7C1266DBD}"/>
+              </a:ext>
+            </a:extLst>
+          </p:cNvPr>
+          <p:cNvSpPr/>
+          <p:nvPr/>
+        </p:nvSpPr>
+        <p:spPr>
+          <a:xfrm rot="5400000">
+            <a:off x="4020833" y="4584119"/>
+            <a:ext cx="1740708" cy="1323186"/>
+          </a:xfrm>
+          <a:prstGeom prst="uturnArrow">
+            <a:avLst>
+              <a:gd name="adj1" fmla="val 9138"/>
+              <a:gd name="adj2" fmla="val 11625"/>
+              <a:gd name="adj3" fmla="val 21087"/>
+              <a:gd name="adj4" fmla="val 34060"/>
+              <a:gd name="adj5" fmla="val 100000"/>
+            </a:avLst>
+          </a:prstGeom>
+          <a:noFill/>
+        </p:spPr>
+        <p:style>
+          <a:lnRef idx="2">
+            <a:schemeClr val="accent1">
+              <a:shade val="15000"/>
+            </a:schemeClr>
+          </a:lnRef>
+          <a:fillRef idx="1">
+            <a:schemeClr val="accent1"/>
+          </a:fillRef>
+          <a:effectRef idx="0">
+            <a:schemeClr val="accent1"/>
+          </a:effectRef>
+          <a:fontRef idx="minor">
+            <a:schemeClr val="lt1"/>
+          </a:fontRef>
+        </p:style>
+        <p:txBody>
+          <a:bodyPr rtlCol="0" anchor="ctr"/>
+          <a:lstStyle/>
+          <a:p>
+            <a:pPr algn="ctr"/>
+            <a:endParaRPr lang="ko-KR" altLang="en-US">
+              <a:solidFill>
+                <a:schemeClr val="tx1"/>
+              </a:solidFill>
+            </a:endParaRPr>
+          </a:p>
+        </p:txBody>
+      </p:sp>
+      <p:sp>
+        <p:nvSpPr>
+          <p:cNvPr id="58" name="TextBox 57">
+            <a:extLst>
+              <a:ext uri="{FF2B5EF4-FFF2-40B4-BE49-F238E27FC236}">
+                <a16:creationId xmlns:a16="http://schemas.microsoft.com/office/drawing/2014/main" id="{627E6F8F-4DCA-6372-F5C3-03D18FF188AA}"/>
+              </a:ext>
+            </a:extLst>
+          </p:cNvPr>
+          <p:cNvSpPr txBox="1"/>
+          <p:nvPr/>
+        </p:nvSpPr>
+        <p:spPr>
+          <a:xfrm>
+            <a:off x="4631532" y="4056609"/>
+            <a:ext cx="367408" cy="276999"/>
+          </a:xfrm>
+          <a:prstGeom prst="rect">
+            <a:avLst/>
+          </a:prstGeom>
+          <a:noFill/>
+        </p:spPr>
+        <p:txBody>
+          <a:bodyPr wrap="none" rtlCol="0">
+            <a:spAutoFit/>
+          </a:bodyPr>
+          <a:lstStyle/>
+          <a:p>
+            <a:r>
+              <a:rPr lang="en-US" altLang="ko-KR" sz="1200" dirty="0"/>
+              <a:t>no</a:t>
+            </a:r>
+            <a:endParaRPr lang="ko-KR" altLang="en-US" sz="1200" dirty="0"/>
+          </a:p>
+        </p:txBody>
+      </p:sp>
+      <p:sp>
+        <p:nvSpPr>
+          <p:cNvPr id="60" name="사각형: 둥근 모서리 59">
+            <a:extLst>
+              <a:ext uri="{FF2B5EF4-FFF2-40B4-BE49-F238E27FC236}">
+                <a16:creationId xmlns:a16="http://schemas.microsoft.com/office/drawing/2014/main" id="{9F91BF75-40EE-CD0A-4938-21A7420E2975}"/>
+              </a:ext>
+            </a:extLst>
+          </p:cNvPr>
+          <p:cNvSpPr/>
+          <p:nvPr/>
+        </p:nvSpPr>
+        <p:spPr>
+          <a:xfrm>
+            <a:off x="7014030" y="3381107"/>
+            <a:ext cx="2873590" cy="557981"/>
+          </a:xfrm>
+          <a:prstGeom prst="roundRect">
+            <a:avLst/>
+          </a:prstGeom>
+          <a:noFill/>
+        </p:spPr>
+        <p:style>
+          <a:lnRef idx="2">
+            <a:schemeClr val="accent1">
+              <a:shade val="15000"/>
+            </a:schemeClr>
+          </a:lnRef>
+          <a:fillRef idx="1">
+            <a:schemeClr val="accent1"/>
+          </a:fillRef>
+          <a:effectRef idx="0">
+            <a:schemeClr val="accent1"/>
+          </a:effectRef>
+          <a:fontRef idx="minor">
+            <a:schemeClr val="lt1"/>
+          </a:fontRef>
+        </p:style>
+        <p:txBody>
+          <a:bodyPr rtlCol="0" anchor="ctr"/>
+          <a:lstStyle/>
+          <a:p>
+            <a:pPr algn="ctr"/>
+            <a:endParaRPr lang="ko-KR" altLang="en-US"/>
+          </a:p>
+        </p:txBody>
+      </p:sp>
+      <p:sp>
+        <p:nvSpPr>
+          <p:cNvPr id="62" name="TextBox 61">
+            <a:extLst>
+              <a:ext uri="{FF2B5EF4-FFF2-40B4-BE49-F238E27FC236}">
+                <a16:creationId xmlns:a16="http://schemas.microsoft.com/office/drawing/2014/main" id="{63F4074E-636C-06E4-58EB-7755BA577330}"/>
+              </a:ext>
+            </a:extLst>
+          </p:cNvPr>
+          <p:cNvSpPr txBox="1"/>
+          <p:nvPr/>
+        </p:nvSpPr>
+        <p:spPr>
+          <a:xfrm>
+            <a:off x="7118064" y="3487413"/>
+            <a:ext cx="2641492" cy="369332"/>
+          </a:xfrm>
+          <a:prstGeom prst="rect">
+            <a:avLst/>
+          </a:prstGeom>
+          <a:noFill/>
+        </p:spPr>
+        <p:txBody>
+          <a:bodyPr wrap="none" rtlCol="0">
+            <a:spAutoFit/>
+          </a:bodyPr>
+          <a:lstStyle/>
+          <a:p>
+            <a:r>
+              <a:rPr lang="en-US" altLang="ko-KR" dirty="0"/>
+              <a:t>PMIC</a:t>
+            </a:r>
+            <a:r>
+              <a:rPr lang="ko-KR" altLang="en-US" dirty="0"/>
+              <a:t>로부터 </a:t>
+            </a:r>
+            <a:r>
+              <a:rPr lang="en-US" altLang="ko-KR" dirty="0"/>
+              <a:t>UVLO </a:t>
+            </a:r>
+            <a:r>
+              <a:rPr lang="ko-KR" altLang="en-US" dirty="0"/>
+              <a:t>읽기</a:t>
+            </a:r>
+          </a:p>
+        </p:txBody>
+      </p:sp>
+      <p:sp>
+        <p:nvSpPr>
+          <p:cNvPr id="64" name="화살표: 아래쪽 63">
+            <a:extLst>
+              <a:ext uri="{FF2B5EF4-FFF2-40B4-BE49-F238E27FC236}">
+                <a16:creationId xmlns:a16="http://schemas.microsoft.com/office/drawing/2014/main" id="{7A9B81E9-07AF-9273-F885-0BB8630BF42F}"/>
+              </a:ext>
+            </a:extLst>
+          </p:cNvPr>
+          <p:cNvSpPr/>
+          <p:nvPr/>
+        </p:nvSpPr>
+        <p:spPr>
+          <a:xfrm>
+            <a:off x="8291326" y="3171203"/>
+            <a:ext cx="294968" cy="256228"/>
+          </a:xfrm>
+          <a:prstGeom prst="downArrow">
+            <a:avLst/>
+          </a:prstGeom>
+          <a:noFill/>
+        </p:spPr>
+        <p:style>
+          <a:lnRef idx="2">
+            <a:schemeClr val="accent1">
+              <a:shade val="15000"/>
+            </a:schemeClr>
+          </a:lnRef>
+          <a:fillRef idx="1">
+            <a:schemeClr val="accent1"/>
+          </a:fillRef>
+          <a:effectRef idx="0">
+            <a:schemeClr val="accent1"/>
+          </a:effectRef>
+          <a:fontRef idx="minor">
+            <a:schemeClr val="lt1"/>
+          </a:fontRef>
+        </p:style>
+        <p:txBody>
+          <a:bodyPr rtlCol="0" anchor="ctr"/>
+          <a:lstStyle/>
+          <a:p>
+            <a:pPr algn="ctr"/>
+            <a:endParaRPr lang="ko-KR" altLang="en-US"/>
+          </a:p>
+        </p:txBody>
+      </p:sp>
+      <p:sp>
+        <p:nvSpPr>
+          <p:cNvPr id="68" name="사각형: 둥근 모서리 67">
+            <a:extLst>
+              <a:ext uri="{FF2B5EF4-FFF2-40B4-BE49-F238E27FC236}">
+                <a16:creationId xmlns:a16="http://schemas.microsoft.com/office/drawing/2014/main" id="{3D32CF95-89D8-2A54-8FE9-FC257D593289}"/>
+              </a:ext>
+            </a:extLst>
+          </p:cNvPr>
+          <p:cNvSpPr/>
+          <p:nvPr/>
+        </p:nvSpPr>
+        <p:spPr>
+          <a:xfrm>
+            <a:off x="6715165" y="4070488"/>
+            <a:ext cx="3447290" cy="557981"/>
+          </a:xfrm>
+          <a:prstGeom prst="roundRect">
+            <a:avLst/>
+          </a:prstGeom>
+          <a:noFill/>
+          <a:ln>
+            <a:prstDash val="dash"/>
+          </a:ln>
+        </p:spPr>
+        <p:style>
+          <a:lnRef idx="2">
+            <a:schemeClr val="accent1">
+              <a:shade val="15000"/>
+            </a:schemeClr>
+          </a:lnRef>
+          <a:fillRef idx="1">
+            <a:schemeClr val="accent1"/>
+          </a:fillRef>
+          <a:effectRef idx="0">
+            <a:schemeClr val="accent1"/>
+          </a:effectRef>
+          <a:fontRef idx="minor">
+            <a:schemeClr val="lt1"/>
+          </a:fontRef>
+        </p:style>
+        <p:txBody>
+          <a:bodyPr rtlCol="0" anchor="ctr"/>
+          <a:lstStyle/>
+          <a:p>
+            <a:pPr algn="ctr"/>
+            <a:endParaRPr lang="ko-KR" altLang="en-US"/>
+          </a:p>
+        </p:txBody>
+      </p:sp>
+      <p:sp>
+        <p:nvSpPr>
+          <p:cNvPr id="70" name="TextBox 69">
+            <a:extLst>
+              <a:ext uri="{FF2B5EF4-FFF2-40B4-BE49-F238E27FC236}">
+                <a16:creationId xmlns:a16="http://schemas.microsoft.com/office/drawing/2014/main" id="{353969B8-E8EF-CF8A-584D-A9CEE6381FE3}"/>
+              </a:ext>
+            </a:extLst>
+          </p:cNvPr>
+          <p:cNvSpPr txBox="1"/>
+          <p:nvPr/>
+        </p:nvSpPr>
+        <p:spPr>
+          <a:xfrm>
+            <a:off x="6715165" y="4195108"/>
+            <a:ext cx="3447290" cy="369332"/>
+          </a:xfrm>
+          <a:prstGeom prst="rect">
+            <a:avLst/>
+          </a:prstGeom>
+          <a:noFill/>
+        </p:spPr>
+        <p:txBody>
+          <a:bodyPr wrap="none" rtlCol="0">
+            <a:spAutoFit/>
+          </a:bodyPr>
+          <a:lstStyle/>
+          <a:p>
+            <a:r>
+              <a:rPr lang="en-US" altLang="ko-KR" dirty="0"/>
+              <a:t>Power-switch</a:t>
+            </a:r>
+            <a:r>
+              <a:rPr lang="ko-KR" altLang="en-US" dirty="0"/>
+              <a:t>로부터 </a:t>
+            </a:r>
+            <a:r>
+              <a:rPr lang="en-US" altLang="ko-KR" dirty="0"/>
+              <a:t>UVLO </a:t>
+            </a:r>
+            <a:r>
+              <a:rPr lang="ko-KR" altLang="en-US" dirty="0"/>
+              <a:t>읽기</a:t>
+            </a:r>
+          </a:p>
+        </p:txBody>
+      </p:sp>
+      <p:sp>
+        <p:nvSpPr>
+          <p:cNvPr id="72" name="화살표: 아래쪽 71">
+            <a:extLst>
+              <a:ext uri="{FF2B5EF4-FFF2-40B4-BE49-F238E27FC236}">
+                <a16:creationId xmlns:a16="http://schemas.microsoft.com/office/drawing/2014/main" id="{A256D8EF-9C21-A8BE-6E93-2187D9DF4197}"/>
+              </a:ext>
+            </a:extLst>
+          </p:cNvPr>
+          <p:cNvSpPr/>
+          <p:nvPr/>
+        </p:nvSpPr>
+        <p:spPr>
+          <a:xfrm>
+            <a:off x="8291326" y="3882393"/>
+            <a:ext cx="294968" cy="256228"/>
+          </a:xfrm>
+          <a:prstGeom prst="downArrow">
+            <a:avLst/>
+          </a:prstGeom>
+          <a:noFill/>
+        </p:spPr>
+        <p:style>
+          <a:lnRef idx="2">
+            <a:schemeClr val="accent1">
+              <a:shade val="15000"/>
+            </a:schemeClr>
+          </a:lnRef>
+          <a:fillRef idx="1">
+            <a:schemeClr val="accent1"/>
+          </a:fillRef>
+          <a:effectRef idx="0">
+            <a:schemeClr val="accent1"/>
+          </a:effectRef>
+          <a:fontRef idx="minor">
+            <a:schemeClr val="lt1"/>
+          </a:fontRef>
+        </p:style>
+        <p:txBody>
+          <a:bodyPr rtlCol="0" anchor="ctr"/>
+          <a:lstStyle/>
+          <a:p>
+            <a:pPr algn="ctr"/>
+            <a:endParaRPr lang="ko-KR" altLang="en-US"/>
+          </a:p>
+        </p:txBody>
+      </p:sp>
+      <p:sp>
+        <p:nvSpPr>
+          <p:cNvPr id="74" name="사각형: 둥근 모서리 73">
+            <a:extLst>
+              <a:ext uri="{FF2B5EF4-FFF2-40B4-BE49-F238E27FC236}">
+                <a16:creationId xmlns:a16="http://schemas.microsoft.com/office/drawing/2014/main" id="{2B5223EF-9DAE-0794-0593-72ED8909A302}"/>
+              </a:ext>
+            </a:extLst>
+          </p:cNvPr>
+          <p:cNvSpPr/>
+          <p:nvPr/>
+        </p:nvSpPr>
+        <p:spPr>
+          <a:xfrm>
+            <a:off x="7011548" y="4847283"/>
+            <a:ext cx="2873590" cy="557981"/>
+          </a:xfrm>
+          <a:prstGeom prst="roundRect">
+            <a:avLst/>
+          </a:prstGeom>
+          <a:noFill/>
+        </p:spPr>
+        <p:style>
+          <a:lnRef idx="2">
+            <a:schemeClr val="accent1">
+              <a:shade val="15000"/>
+            </a:schemeClr>
+          </a:lnRef>
+          <a:fillRef idx="1">
+            <a:schemeClr val="accent1"/>
+          </a:fillRef>
+          <a:effectRef idx="0">
+            <a:schemeClr val="accent1"/>
+          </a:effectRef>
+          <a:fontRef idx="minor">
+            <a:schemeClr val="lt1"/>
+          </a:fontRef>
+        </p:style>
+        <p:txBody>
+          <a:bodyPr rtlCol="0" anchor="ctr"/>
+          <a:lstStyle/>
+          <a:p>
+            <a:pPr algn="ctr"/>
+            <a:endParaRPr lang="ko-KR" altLang="en-US"/>
+          </a:p>
+        </p:txBody>
+      </p:sp>
+      <p:sp>
+        <p:nvSpPr>
+          <p:cNvPr id="76" name="TextBox 75">
+            <a:extLst>
+              <a:ext uri="{FF2B5EF4-FFF2-40B4-BE49-F238E27FC236}">
+                <a16:creationId xmlns:a16="http://schemas.microsoft.com/office/drawing/2014/main" id="{8E49F3C3-5C5D-8C1D-CAF4-73E9D1D5E6E6}"/>
+              </a:ext>
+            </a:extLst>
+          </p:cNvPr>
+          <p:cNvSpPr txBox="1"/>
+          <p:nvPr/>
+        </p:nvSpPr>
+        <p:spPr>
+          <a:xfrm>
+            <a:off x="7115582" y="4953589"/>
+            <a:ext cx="2563522" cy="369332"/>
+          </a:xfrm>
+          <a:prstGeom prst="rect">
+            <a:avLst/>
+          </a:prstGeom>
+          <a:noFill/>
+        </p:spPr>
+        <p:txBody>
+          <a:bodyPr wrap="none" rtlCol="0">
+            <a:spAutoFit/>
+          </a:bodyPr>
+          <a:lstStyle/>
+          <a:p>
+            <a:r>
+              <a:rPr lang="en-US" altLang="ko-KR" dirty="0"/>
+              <a:t>DTC</a:t>
+            </a:r>
+            <a:r>
+              <a:rPr lang="ko-KR" altLang="en-US" dirty="0"/>
+              <a:t> 정보 </a:t>
+            </a:r>
+            <a:r>
+              <a:rPr lang="en-US" altLang="ko-KR" dirty="0"/>
+              <a:t>UART</a:t>
+            </a:r>
+            <a:r>
+              <a:rPr lang="ko-KR" altLang="en-US" dirty="0"/>
+              <a:t>로 출력</a:t>
+            </a:r>
+          </a:p>
+        </p:txBody>
+      </p:sp>
+      <p:sp>
+        <p:nvSpPr>
+          <p:cNvPr id="78" name="화살표: 아래쪽 77">
+            <a:extLst>
+              <a:ext uri="{FF2B5EF4-FFF2-40B4-BE49-F238E27FC236}">
+                <a16:creationId xmlns:a16="http://schemas.microsoft.com/office/drawing/2014/main" id="{1CC3D8FC-0E10-E763-FE45-C1A930E5406C}"/>
+              </a:ext>
+            </a:extLst>
+          </p:cNvPr>
+          <p:cNvSpPr/>
+          <p:nvPr/>
+        </p:nvSpPr>
+        <p:spPr>
+          <a:xfrm>
+            <a:off x="8290603" y="4644208"/>
+            <a:ext cx="294968" cy="256228"/>
+          </a:xfrm>
+          <a:prstGeom prst="downArrow">
+            <a:avLst/>
+          </a:prstGeom>
+          <a:noFill/>
+        </p:spPr>
+        <p:style>
+          <a:lnRef idx="2">
+            <a:schemeClr val="accent1">
+              <a:shade val="15000"/>
+            </a:schemeClr>
+          </a:lnRef>
+          <a:fillRef idx="1">
+            <a:schemeClr val="accent1"/>
+          </a:fillRef>
+          <a:effectRef idx="0">
+            <a:schemeClr val="accent1"/>
+          </a:effectRef>
+          <a:fontRef idx="minor">
+            <a:schemeClr val="lt1"/>
+          </a:fontRef>
+        </p:style>
+        <p:txBody>
+          <a:bodyPr rtlCol="0" anchor="ctr"/>
+          <a:lstStyle/>
+          <a:p>
+            <a:pPr algn="ctr"/>
+            <a:endParaRPr lang="ko-KR" altLang="en-US"/>
+          </a:p>
+        </p:txBody>
+      </p:sp>
+    </p:spTree>
+    <p:extLst>
+      <p:ext uri="{BB962C8B-B14F-4D97-AF65-F5344CB8AC3E}">
+        <p14:creationId xmlns:p14="http://schemas.microsoft.com/office/powerpoint/2010/main" val="1521067495"/>
       </p:ext>
     </p:extLst>
   </p:cSld>

--- a/ECU 고장 진단 시스템.pptx
+++ b/ECU 고장 진단 시스템.pptx
@@ -6101,8 +6101,8 @@
         </p:nvSpPr>
         <p:spPr>
           <a:xfrm>
-            <a:off x="1445342" y="2458065"/>
-            <a:ext cx="3814916" cy="4001728"/>
+            <a:off x="196947" y="2067299"/>
+            <a:ext cx="3814916" cy="4566743"/>
           </a:xfrm>
           <a:prstGeom prst="rect">
             <a:avLst/>
@@ -6148,8 +6148,8 @@
         </p:nvSpPr>
         <p:spPr>
           <a:xfrm>
-            <a:off x="6543368" y="2440662"/>
-            <a:ext cx="3814916" cy="4019132"/>
+            <a:off x="8153755" y="1999057"/>
+            <a:ext cx="3814916" cy="4609646"/>
           </a:xfrm>
           <a:prstGeom prst="rect">
             <a:avLst/>
@@ -6195,7 +6195,7 @@
         </p:nvSpPr>
         <p:spPr>
           <a:xfrm>
-            <a:off x="2787933" y="2071330"/>
+            <a:off x="1598448" y="1629725"/>
             <a:ext cx="1129733" cy="369332"/>
           </a:xfrm>
           <a:prstGeom prst="rect">
@@ -6231,7 +6231,7 @@
         </p:nvSpPr>
         <p:spPr>
           <a:xfrm>
-            <a:off x="7974449" y="2071330"/>
+            <a:off x="9527530" y="1629725"/>
             <a:ext cx="1129733" cy="369332"/>
           </a:xfrm>
           <a:prstGeom prst="rect">
@@ -6281,7 +6281,7 @@
         </p:blipFill>
         <p:spPr>
           <a:xfrm>
-            <a:off x="5124377" y="1212418"/>
+            <a:off x="4986400" y="1434112"/>
             <a:ext cx="1442847" cy="1096844"/>
           </a:xfrm>
           <a:prstGeom prst="rect">
@@ -6303,7 +6303,7 @@
         </p:nvSpPr>
         <p:spPr>
           <a:xfrm>
-            <a:off x="5407220" y="1167854"/>
+            <a:off x="5292645" y="1327211"/>
             <a:ext cx="830356" cy="369332"/>
           </a:xfrm>
           <a:prstGeom prst="rect">
@@ -6338,9 +6338,9 @@
           <p:nvPr/>
         </p:nvSpPr>
         <p:spPr>
-          <a:xfrm rot="8897107">
-            <a:off x="4167892" y="2205719"/>
-            <a:ext cx="1096362" cy="296214"/>
+          <a:xfrm rot="10049208">
+            <a:off x="3022633" y="1888008"/>
+            <a:ext cx="1803131" cy="326073"/>
           </a:xfrm>
           <a:prstGeom prst="rightArrow">
             <a:avLst/>
@@ -6386,7 +6386,7 @@
         </p:nvSpPr>
         <p:spPr>
           <a:xfrm>
-            <a:off x="2470598" y="2693071"/>
+            <a:off x="1188427" y="2136187"/>
             <a:ext cx="1764401" cy="557981"/>
           </a:xfrm>
           <a:prstGeom prst="roundRect">
@@ -6433,7 +6433,7 @@
         </p:nvSpPr>
         <p:spPr>
           <a:xfrm>
-            <a:off x="2665911" y="2787395"/>
+            <a:off x="1383740" y="2222321"/>
             <a:ext cx="1373774" cy="369332"/>
           </a:xfrm>
           <a:prstGeom prst="rect">
@@ -6472,7 +6472,7 @@
         </p:nvSpPr>
         <p:spPr>
           <a:xfrm>
-            <a:off x="7568625" y="2654424"/>
+            <a:off x="9179012" y="2067299"/>
             <a:ext cx="1764401" cy="557981"/>
           </a:xfrm>
           <a:prstGeom prst="roundRect">
@@ -6519,7 +6519,7 @@
         </p:nvSpPr>
         <p:spPr>
           <a:xfrm>
-            <a:off x="7768229" y="2748749"/>
+            <a:off x="9378616" y="2161624"/>
             <a:ext cx="1373774" cy="369332"/>
           </a:xfrm>
           <a:prstGeom prst="rect">
@@ -6557,9 +6557,9 @@
           <p:nvPr/>
         </p:nvSpPr>
         <p:spPr>
-          <a:xfrm rot="1732135">
-            <a:off x="6380541" y="2154745"/>
-            <a:ext cx="1171044" cy="331934"/>
+          <a:xfrm rot="422864">
+            <a:off x="6543750" y="1848210"/>
+            <a:ext cx="2295109" cy="331934"/>
           </a:xfrm>
           <a:prstGeom prst="rightArrow">
             <a:avLst/>
@@ -6605,7 +6605,7 @@
         </p:nvSpPr>
         <p:spPr>
           <a:xfrm>
-            <a:off x="1740308" y="3412955"/>
+            <a:off x="443471" y="2857860"/>
             <a:ext cx="3384067" cy="557981"/>
           </a:xfrm>
           <a:prstGeom prst="roundRect">
@@ -6652,7 +6652,7 @@
         </p:nvSpPr>
         <p:spPr>
           <a:xfrm>
-            <a:off x="1887305" y="3502771"/>
+            <a:off x="590468" y="2947676"/>
             <a:ext cx="3061992" cy="369332"/>
           </a:xfrm>
           <a:prstGeom prst="rect">
@@ -6699,7 +6699,7 @@
         </p:nvSpPr>
         <p:spPr>
           <a:xfrm>
-            <a:off x="2182761" y="4070566"/>
+            <a:off x="877036" y="4244815"/>
             <a:ext cx="2399071" cy="739308"/>
           </a:xfrm>
           <a:prstGeom prst="diamond">
@@ -6746,7 +6746,7 @@
         </p:nvSpPr>
         <p:spPr>
           <a:xfrm>
-            <a:off x="2509300" y="4244560"/>
+            <a:off x="1159094" y="4429803"/>
             <a:ext cx="1745991" cy="369332"/>
           </a:xfrm>
           <a:prstGeom prst="rect">
@@ -6785,7 +6785,7 @@
         </p:nvSpPr>
         <p:spPr>
           <a:xfrm>
-            <a:off x="2602802" y="5728139"/>
+            <a:off x="1354407" y="5902388"/>
             <a:ext cx="1373774" cy="369332"/>
           </a:xfrm>
           <a:prstGeom prst="rect">
@@ -6824,7 +6824,7 @@
         </p:nvSpPr>
         <p:spPr>
           <a:xfrm>
-            <a:off x="2407489" y="5669984"/>
+            <a:off x="1159094" y="5844233"/>
             <a:ext cx="1764401" cy="557981"/>
           </a:xfrm>
           <a:prstGeom prst="roundRect">
@@ -6871,7 +6871,7 @@
         </p:nvSpPr>
         <p:spPr>
           <a:xfrm>
-            <a:off x="1636847" y="5053000"/>
+            <a:off x="388452" y="5227249"/>
             <a:ext cx="3431902" cy="369332"/>
           </a:xfrm>
           <a:prstGeom prst="rect">
@@ -6923,7 +6923,7 @@
         </p:nvSpPr>
         <p:spPr>
           <a:xfrm>
-            <a:off x="1597655" y="4958676"/>
+            <a:off x="349260" y="5132925"/>
             <a:ext cx="3526722" cy="557981"/>
           </a:xfrm>
           <a:prstGeom prst="roundRect">
@@ -6970,7 +6970,7 @@
         </p:nvSpPr>
         <p:spPr>
           <a:xfrm>
-            <a:off x="3234811" y="3206802"/>
+            <a:off x="1933611" y="2679905"/>
             <a:ext cx="294968" cy="256228"/>
           </a:xfrm>
           <a:prstGeom prst="downArrow">
@@ -7017,7 +7017,7 @@
         </p:nvSpPr>
         <p:spPr>
           <a:xfrm>
-            <a:off x="3234811" y="3868035"/>
+            <a:off x="1939099" y="4053821"/>
             <a:ext cx="294968" cy="256228"/>
           </a:xfrm>
           <a:prstGeom prst="downArrow">
@@ -7064,7 +7064,7 @@
         </p:nvSpPr>
         <p:spPr>
           <a:xfrm>
-            <a:off x="3234811" y="4738580"/>
+            <a:off x="1899219" y="4912799"/>
             <a:ext cx="294968" cy="256228"/>
           </a:xfrm>
           <a:prstGeom prst="downArrow">
@@ -7111,7 +7111,7 @@
         </p:nvSpPr>
         <p:spPr>
           <a:xfrm>
-            <a:off x="2797924" y="4681676"/>
+            <a:off x="1490966" y="4874735"/>
             <a:ext cx="408253" cy="276999"/>
           </a:xfrm>
           <a:prstGeom prst="rect">
@@ -7147,14 +7147,14 @@
         </p:nvSpPr>
         <p:spPr>
           <a:xfrm rot="5400000">
-            <a:off x="4020833" y="4584119"/>
-            <a:ext cx="1740708" cy="1323186"/>
+            <a:off x="2797864" y="4661622"/>
+            <a:ext cx="1656739" cy="1369334"/>
           </a:xfrm>
           <a:prstGeom prst="uturnArrow">
             <a:avLst>
-              <a:gd name="adj1" fmla="val 9138"/>
-              <a:gd name="adj2" fmla="val 11625"/>
-              <a:gd name="adj3" fmla="val 21087"/>
+              <a:gd name="adj1" fmla="val 11594"/>
+              <a:gd name="adj2" fmla="val 12976"/>
+              <a:gd name="adj3" fmla="val 23447"/>
               <a:gd name="adj4" fmla="val 34060"/>
               <a:gd name="adj5" fmla="val 100000"/>
             </a:avLst>
@@ -7204,7 +7204,7 @@
         </p:nvSpPr>
         <p:spPr>
           <a:xfrm>
-            <a:off x="4631532" y="4056609"/>
+            <a:off x="3431260" y="4211809"/>
             <a:ext cx="367408" cy="276999"/>
           </a:xfrm>
           <a:prstGeom prst="rect">
@@ -7240,7 +7240,7 @@
         </p:nvSpPr>
         <p:spPr>
           <a:xfrm>
-            <a:off x="7014030" y="3381107"/>
+            <a:off x="8624417" y="2793982"/>
             <a:ext cx="2873590" cy="557981"/>
           </a:xfrm>
           <a:prstGeom prst="roundRect">
@@ -7287,7 +7287,7 @@
         </p:nvSpPr>
         <p:spPr>
           <a:xfrm>
-            <a:off x="7118064" y="3487413"/>
+            <a:off x="8728451" y="2900288"/>
             <a:ext cx="2641492" cy="369332"/>
           </a:xfrm>
           <a:prstGeom prst="rect">
@@ -7334,7 +7334,7 @@
         </p:nvSpPr>
         <p:spPr>
           <a:xfrm>
-            <a:off x="8291326" y="3171203"/>
+            <a:off x="9901713" y="2584078"/>
             <a:ext cx="294968" cy="256228"/>
           </a:xfrm>
           <a:prstGeom prst="downArrow">
@@ -7381,7 +7381,7 @@
         </p:nvSpPr>
         <p:spPr>
           <a:xfrm>
-            <a:off x="6715165" y="4070488"/>
+            <a:off x="8368752" y="4231767"/>
             <a:ext cx="3447290" cy="557981"/>
           </a:xfrm>
           <a:prstGeom prst="roundRect">
@@ -7431,8 +7431,8 @@
         </p:nvSpPr>
         <p:spPr>
           <a:xfrm>
-            <a:off x="6715165" y="4195108"/>
-            <a:ext cx="3447290" cy="369332"/>
+            <a:off x="8368752" y="4333253"/>
+            <a:ext cx="3552063" cy="369332"/>
           </a:xfrm>
           <a:prstGeom prst="rect">
             <a:avLst/>
@@ -7451,15 +7451,7 @@
             </a:r>
             <a:r>
               <a:rPr lang="ko-KR" altLang="en-US" dirty="0"/>
-              <a:t>로부터 </a:t>
-            </a:r>
-            <a:r>
-              <a:rPr lang="en-US" altLang="ko-KR" dirty="0"/>
-              <a:t>UVLO </a:t>
-            </a:r>
-            <a:r>
-              <a:rPr lang="ko-KR" altLang="en-US" dirty="0"/>
-              <a:t>읽기</a:t>
+              <a:t>로부터 과전류 감지</a:t>
             </a:r>
           </a:p>
         </p:txBody>
@@ -7478,7 +7470,7 @@
         </p:nvSpPr>
         <p:spPr>
           <a:xfrm>
-            <a:off x="8291326" y="3882393"/>
+            <a:off x="9906213" y="4038191"/>
             <a:ext cx="294968" cy="256228"/>
           </a:xfrm>
           <a:prstGeom prst="downArrow">
@@ -7525,7 +7517,7 @@
         </p:nvSpPr>
         <p:spPr>
           <a:xfrm>
-            <a:off x="7011548" y="4847283"/>
+            <a:off x="8624417" y="5714111"/>
             <a:ext cx="2873590" cy="557981"/>
           </a:xfrm>
           <a:prstGeom prst="roundRect">
@@ -7572,8 +7564,8 @@
         </p:nvSpPr>
         <p:spPr>
           <a:xfrm>
-            <a:off x="7115582" y="4953589"/>
-            <a:ext cx="2563522" cy="369332"/>
+            <a:off x="8728451" y="5820417"/>
+            <a:ext cx="2613088" cy="369332"/>
           </a:xfrm>
           <a:prstGeom prst="rect">
             <a:avLst/>
@@ -7587,12 +7579,8 @@
           <a:lstStyle/>
           <a:p>
             <a:r>
-              <a:rPr lang="en-US" altLang="ko-KR" dirty="0"/>
-              <a:t>DTC</a:t>
-            </a:r>
-            <a:r>
               <a:rPr lang="ko-KR" altLang="en-US" dirty="0"/>
-              <a:t> 정보 </a:t>
+              <a:t>고장 정보 </a:t>
             </a:r>
             <a:r>
               <a:rPr lang="en-US" altLang="ko-KR" dirty="0"/>
@@ -7619,7 +7607,7 @@
         </p:nvSpPr>
         <p:spPr>
           <a:xfrm>
-            <a:off x="8290603" y="4644208"/>
+            <a:off x="9885404" y="5518046"/>
             <a:ext cx="294968" cy="256228"/>
           </a:xfrm>
           <a:prstGeom prst="downArrow">
@@ -7649,6 +7637,591 @@
           <a:p>
             <a:pPr algn="ctr"/>
             <a:endParaRPr lang="ko-KR" altLang="en-US"/>
+          </a:p>
+        </p:txBody>
+      </p:sp>
+      <p:sp>
+        <p:nvSpPr>
+          <p:cNvPr id="5" name="화살표: 굽음 4">
+            <a:extLst>
+              <a:ext uri="{FF2B5EF4-FFF2-40B4-BE49-F238E27FC236}">
+                <a16:creationId xmlns:a16="http://schemas.microsoft.com/office/drawing/2014/main" id="{4B29A197-9645-2DBA-B362-8432EBA9232C}"/>
+              </a:ext>
+            </a:extLst>
+          </p:cNvPr>
+          <p:cNvSpPr/>
+          <p:nvPr/>
+        </p:nvSpPr>
+        <p:spPr>
+          <a:xfrm rot="16200000" flipV="1">
+            <a:off x="1914006" y="3193191"/>
+            <a:ext cx="4156635" cy="2103246"/>
+          </a:xfrm>
+          <a:prstGeom prst="bentArrow">
+            <a:avLst>
+              <a:gd name="adj1" fmla="val 6653"/>
+              <a:gd name="adj2" fmla="val 8029"/>
+              <a:gd name="adj3" fmla="val 12157"/>
+              <a:gd name="adj4" fmla="val 29072"/>
+            </a:avLst>
+          </a:prstGeom>
+          <a:noFill/>
+        </p:spPr>
+        <p:style>
+          <a:lnRef idx="2">
+            <a:schemeClr val="accent1">
+              <a:shade val="15000"/>
+            </a:schemeClr>
+          </a:lnRef>
+          <a:fillRef idx="1">
+            <a:schemeClr val="accent1"/>
+          </a:fillRef>
+          <a:effectRef idx="0">
+            <a:schemeClr val="accent1"/>
+          </a:effectRef>
+          <a:fontRef idx="minor">
+            <a:schemeClr val="lt1"/>
+          </a:fontRef>
+        </p:style>
+        <p:txBody>
+          <a:bodyPr rtlCol="0" anchor="ctr"/>
+          <a:lstStyle/>
+          <a:p>
+            <a:pPr algn="ctr"/>
+            <a:endParaRPr lang="ko-KR" altLang="en-US">
+              <a:solidFill>
+                <a:schemeClr val="tx1"/>
+              </a:solidFill>
+            </a:endParaRPr>
+          </a:p>
+        </p:txBody>
+      </p:sp>
+      <p:sp>
+        <p:nvSpPr>
+          <p:cNvPr id="17" name="사각형: 둥근 모서리 16">
+            <a:extLst>
+              <a:ext uri="{FF2B5EF4-FFF2-40B4-BE49-F238E27FC236}">
+                <a16:creationId xmlns:a16="http://schemas.microsoft.com/office/drawing/2014/main" id="{0DB92BA6-B9EF-B0BF-7B03-A9E14AB641E1}"/>
+              </a:ext>
+            </a:extLst>
+          </p:cNvPr>
+          <p:cNvSpPr/>
+          <p:nvPr/>
+        </p:nvSpPr>
+        <p:spPr>
+          <a:xfrm>
+            <a:off x="513761" y="3585928"/>
+            <a:ext cx="3225347" cy="557981"/>
+          </a:xfrm>
+          <a:prstGeom prst="roundRect">
+            <a:avLst/>
+          </a:prstGeom>
+          <a:noFill/>
+        </p:spPr>
+        <p:style>
+          <a:lnRef idx="2">
+            <a:schemeClr val="accent1">
+              <a:shade val="15000"/>
+            </a:schemeClr>
+          </a:lnRef>
+          <a:fillRef idx="1">
+            <a:schemeClr val="accent1"/>
+          </a:fillRef>
+          <a:effectRef idx="0">
+            <a:schemeClr val="accent1"/>
+          </a:effectRef>
+          <a:fontRef idx="minor">
+            <a:schemeClr val="lt1"/>
+          </a:fontRef>
+        </p:style>
+        <p:txBody>
+          <a:bodyPr rtlCol="0" anchor="ctr"/>
+          <a:lstStyle/>
+          <a:p>
+            <a:pPr algn="ctr"/>
+            <a:endParaRPr lang="ko-KR" altLang="en-US"/>
+          </a:p>
+        </p:txBody>
+      </p:sp>
+      <p:sp>
+        <p:nvSpPr>
+          <p:cNvPr id="19" name="TextBox 18">
+            <a:extLst>
+              <a:ext uri="{FF2B5EF4-FFF2-40B4-BE49-F238E27FC236}">
+                <a16:creationId xmlns:a16="http://schemas.microsoft.com/office/drawing/2014/main" id="{1C1C0C69-12A4-0B71-AD15-F286A12A7EE6}"/>
+              </a:ext>
+            </a:extLst>
+          </p:cNvPr>
+          <p:cNvSpPr txBox="1"/>
+          <p:nvPr/>
+        </p:nvSpPr>
+        <p:spPr>
+          <a:xfrm>
+            <a:off x="690157" y="3680252"/>
+            <a:ext cx="2811219" cy="369332"/>
+          </a:xfrm>
+          <a:prstGeom prst="rect">
+            <a:avLst/>
+          </a:prstGeom>
+          <a:noFill/>
+        </p:spPr>
+        <p:txBody>
+          <a:bodyPr wrap="none" rtlCol="0">
+            <a:spAutoFit/>
+          </a:bodyPr>
+          <a:lstStyle/>
+          <a:p>
+            <a:r>
+              <a:rPr lang="en-US" altLang="ko-KR" dirty="0"/>
+              <a:t>EEPROM</a:t>
+            </a:r>
+            <a:r>
+              <a:rPr lang="ko-KR" altLang="en-US" dirty="0"/>
+              <a:t>에 </a:t>
+            </a:r>
+            <a:r>
+              <a:rPr lang="en-US" altLang="ko-KR" dirty="0"/>
+              <a:t>DTC </a:t>
+            </a:r>
+            <a:r>
+              <a:rPr lang="ko-KR" altLang="en-US" dirty="0"/>
+              <a:t>저장하기</a:t>
+            </a:r>
+          </a:p>
+        </p:txBody>
+      </p:sp>
+      <p:sp>
+        <p:nvSpPr>
+          <p:cNvPr id="23" name="화살표: 아래쪽 22">
+            <a:extLst>
+              <a:ext uri="{FF2B5EF4-FFF2-40B4-BE49-F238E27FC236}">
+                <a16:creationId xmlns:a16="http://schemas.microsoft.com/office/drawing/2014/main" id="{29D54E63-C7DD-181A-1E17-54CF6A49BC34}"/>
+              </a:ext>
+            </a:extLst>
+          </p:cNvPr>
+          <p:cNvSpPr/>
+          <p:nvPr/>
+        </p:nvSpPr>
+        <p:spPr>
+          <a:xfrm>
+            <a:off x="1933611" y="3411359"/>
+            <a:ext cx="294968" cy="256228"/>
+          </a:xfrm>
+          <a:prstGeom prst="downArrow">
+            <a:avLst/>
+          </a:prstGeom>
+          <a:noFill/>
+        </p:spPr>
+        <p:style>
+          <a:lnRef idx="2">
+            <a:schemeClr val="accent1">
+              <a:shade val="15000"/>
+            </a:schemeClr>
+          </a:lnRef>
+          <a:fillRef idx="1">
+            <a:schemeClr val="accent1"/>
+          </a:fillRef>
+          <a:effectRef idx="0">
+            <a:schemeClr val="accent1"/>
+          </a:effectRef>
+          <a:fontRef idx="minor">
+            <a:schemeClr val="lt1"/>
+          </a:fontRef>
+        </p:style>
+        <p:txBody>
+          <a:bodyPr rtlCol="0" anchor="ctr"/>
+          <a:lstStyle/>
+          <a:p>
+            <a:pPr algn="ctr"/>
+            <a:endParaRPr lang="ko-KR" altLang="en-US"/>
+          </a:p>
+        </p:txBody>
+      </p:sp>
+      <p:sp>
+        <p:nvSpPr>
+          <p:cNvPr id="26" name="화살표: 아래쪽 25">
+            <a:extLst>
+              <a:ext uri="{FF2B5EF4-FFF2-40B4-BE49-F238E27FC236}">
+                <a16:creationId xmlns:a16="http://schemas.microsoft.com/office/drawing/2014/main" id="{36D2E4EC-758A-3B4E-B18E-721FC405C758}"/>
+              </a:ext>
+            </a:extLst>
+          </p:cNvPr>
+          <p:cNvSpPr/>
+          <p:nvPr/>
+        </p:nvSpPr>
+        <p:spPr>
+          <a:xfrm>
+            <a:off x="1868346" y="5646160"/>
+            <a:ext cx="294968" cy="256228"/>
+          </a:xfrm>
+          <a:prstGeom prst="downArrow">
+            <a:avLst/>
+          </a:prstGeom>
+          <a:noFill/>
+        </p:spPr>
+        <p:style>
+          <a:lnRef idx="2">
+            <a:schemeClr val="accent1">
+              <a:shade val="15000"/>
+            </a:schemeClr>
+          </a:lnRef>
+          <a:fillRef idx="1">
+            <a:schemeClr val="accent1"/>
+          </a:fillRef>
+          <a:effectRef idx="0">
+            <a:schemeClr val="accent1"/>
+          </a:effectRef>
+          <a:fontRef idx="minor">
+            <a:schemeClr val="lt1"/>
+          </a:fontRef>
+        </p:style>
+        <p:txBody>
+          <a:bodyPr rtlCol="0" anchor="ctr"/>
+          <a:lstStyle/>
+          <a:p>
+            <a:pPr algn="ctr"/>
+            <a:endParaRPr lang="ko-KR" altLang="en-US"/>
+          </a:p>
+        </p:txBody>
+      </p:sp>
+      <p:sp>
+        <p:nvSpPr>
+          <p:cNvPr id="30" name="사각형: 둥근 모서리 29">
+            <a:extLst>
+              <a:ext uri="{FF2B5EF4-FFF2-40B4-BE49-F238E27FC236}">
+                <a16:creationId xmlns:a16="http://schemas.microsoft.com/office/drawing/2014/main" id="{512A9F86-D757-497D-8D53-95C29D7E5DA6}"/>
+              </a:ext>
+            </a:extLst>
+          </p:cNvPr>
+          <p:cNvSpPr/>
+          <p:nvPr/>
+        </p:nvSpPr>
+        <p:spPr>
+          <a:xfrm>
+            <a:off x="8508685" y="3520148"/>
+            <a:ext cx="3225347" cy="557981"/>
+          </a:xfrm>
+          <a:prstGeom prst="roundRect">
+            <a:avLst/>
+          </a:prstGeom>
+          <a:noFill/>
+        </p:spPr>
+        <p:style>
+          <a:lnRef idx="2">
+            <a:schemeClr val="accent1">
+              <a:shade val="15000"/>
+            </a:schemeClr>
+          </a:lnRef>
+          <a:fillRef idx="1">
+            <a:schemeClr val="accent1"/>
+          </a:fillRef>
+          <a:effectRef idx="0">
+            <a:schemeClr val="accent1"/>
+          </a:effectRef>
+          <a:fontRef idx="minor">
+            <a:schemeClr val="lt1"/>
+          </a:fontRef>
+        </p:style>
+        <p:txBody>
+          <a:bodyPr rtlCol="0" anchor="ctr"/>
+          <a:lstStyle/>
+          <a:p>
+            <a:pPr algn="ctr"/>
+            <a:endParaRPr lang="ko-KR" altLang="en-US"/>
+          </a:p>
+        </p:txBody>
+      </p:sp>
+      <p:sp>
+        <p:nvSpPr>
+          <p:cNvPr id="34" name="TextBox 33">
+            <a:extLst>
+              <a:ext uri="{FF2B5EF4-FFF2-40B4-BE49-F238E27FC236}">
+                <a16:creationId xmlns:a16="http://schemas.microsoft.com/office/drawing/2014/main" id="{3FBA00CC-409B-A80B-9D95-5CE3B51FA2B5}"/>
+              </a:ext>
+            </a:extLst>
+          </p:cNvPr>
+          <p:cNvSpPr txBox="1"/>
+          <p:nvPr/>
+        </p:nvSpPr>
+        <p:spPr>
+          <a:xfrm>
+            <a:off x="8686788" y="3582758"/>
+            <a:ext cx="2811219" cy="369332"/>
+          </a:xfrm>
+          <a:prstGeom prst="rect">
+            <a:avLst/>
+          </a:prstGeom>
+          <a:noFill/>
+        </p:spPr>
+        <p:txBody>
+          <a:bodyPr wrap="none" rtlCol="0">
+            <a:spAutoFit/>
+          </a:bodyPr>
+          <a:lstStyle/>
+          <a:p>
+            <a:r>
+              <a:rPr lang="en-US" altLang="ko-KR" dirty="0"/>
+              <a:t>EEPROM</a:t>
+            </a:r>
+            <a:r>
+              <a:rPr lang="ko-KR" altLang="en-US" dirty="0"/>
+              <a:t>에 </a:t>
+            </a:r>
+            <a:r>
+              <a:rPr lang="en-US" altLang="ko-KR" dirty="0"/>
+              <a:t>DTC </a:t>
+            </a:r>
+            <a:r>
+              <a:rPr lang="ko-KR" altLang="en-US" dirty="0"/>
+              <a:t>저장하기</a:t>
+            </a:r>
+          </a:p>
+        </p:txBody>
+      </p:sp>
+      <p:sp>
+        <p:nvSpPr>
+          <p:cNvPr id="39" name="화살표: 아래쪽 38">
+            <a:extLst>
+              <a:ext uri="{FF2B5EF4-FFF2-40B4-BE49-F238E27FC236}">
+                <a16:creationId xmlns:a16="http://schemas.microsoft.com/office/drawing/2014/main" id="{BF5791F9-38AD-9EF0-68E8-76C7BEF1AA14}"/>
+              </a:ext>
+            </a:extLst>
+          </p:cNvPr>
+          <p:cNvSpPr/>
+          <p:nvPr/>
+        </p:nvSpPr>
+        <p:spPr>
+          <a:xfrm>
+            <a:off x="9901713" y="3326530"/>
+            <a:ext cx="294968" cy="256228"/>
+          </a:xfrm>
+          <a:prstGeom prst="downArrow">
+            <a:avLst/>
+          </a:prstGeom>
+          <a:noFill/>
+        </p:spPr>
+        <p:style>
+          <a:lnRef idx="2">
+            <a:schemeClr val="accent1">
+              <a:shade val="15000"/>
+            </a:schemeClr>
+          </a:lnRef>
+          <a:fillRef idx="1">
+            <a:schemeClr val="accent1"/>
+          </a:fillRef>
+          <a:effectRef idx="0">
+            <a:schemeClr val="accent1"/>
+          </a:effectRef>
+          <a:fontRef idx="minor">
+            <a:schemeClr val="lt1"/>
+          </a:fontRef>
+        </p:style>
+        <p:txBody>
+          <a:bodyPr rtlCol="0" anchor="ctr"/>
+          <a:lstStyle/>
+          <a:p>
+            <a:pPr algn="ctr"/>
+            <a:endParaRPr lang="ko-KR" altLang="en-US"/>
+          </a:p>
+        </p:txBody>
+      </p:sp>
+      <p:sp>
+        <p:nvSpPr>
+          <p:cNvPr id="43" name="사각형: 둥근 모서리 42">
+            <a:extLst>
+              <a:ext uri="{FF2B5EF4-FFF2-40B4-BE49-F238E27FC236}">
+                <a16:creationId xmlns:a16="http://schemas.microsoft.com/office/drawing/2014/main" id="{2FD7DEFB-FEE2-67E3-ACC9-DC19BAEC0875}"/>
+              </a:ext>
+            </a:extLst>
+          </p:cNvPr>
+          <p:cNvSpPr/>
+          <p:nvPr/>
+        </p:nvSpPr>
+        <p:spPr>
+          <a:xfrm>
+            <a:off x="8508685" y="4943386"/>
+            <a:ext cx="3225347" cy="557981"/>
+          </a:xfrm>
+          <a:prstGeom prst="roundRect">
+            <a:avLst/>
+          </a:prstGeom>
+          <a:noFill/>
+          <a:ln>
+            <a:prstDash val="dash"/>
+          </a:ln>
+        </p:spPr>
+        <p:style>
+          <a:lnRef idx="2">
+            <a:schemeClr val="accent1">
+              <a:shade val="15000"/>
+            </a:schemeClr>
+          </a:lnRef>
+          <a:fillRef idx="1">
+            <a:schemeClr val="accent1"/>
+          </a:fillRef>
+          <a:effectRef idx="0">
+            <a:schemeClr val="accent1"/>
+          </a:effectRef>
+          <a:fontRef idx="minor">
+            <a:schemeClr val="lt1"/>
+          </a:fontRef>
+        </p:style>
+        <p:txBody>
+          <a:bodyPr rtlCol="0" anchor="ctr"/>
+          <a:lstStyle/>
+          <a:p>
+            <a:pPr algn="ctr"/>
+            <a:endParaRPr lang="ko-KR" altLang="en-US"/>
+          </a:p>
+        </p:txBody>
+      </p:sp>
+      <p:sp>
+        <p:nvSpPr>
+          <p:cNvPr id="47" name="TextBox 46">
+            <a:extLst>
+              <a:ext uri="{FF2B5EF4-FFF2-40B4-BE49-F238E27FC236}">
+                <a16:creationId xmlns:a16="http://schemas.microsoft.com/office/drawing/2014/main" id="{BB2113EA-4118-83F0-620E-7154ED7C4D3A}"/>
+              </a:ext>
+            </a:extLst>
+          </p:cNvPr>
+          <p:cNvSpPr txBox="1"/>
+          <p:nvPr/>
+        </p:nvSpPr>
+        <p:spPr>
+          <a:xfrm>
+            <a:off x="8686788" y="5005996"/>
+            <a:ext cx="2811219" cy="369332"/>
+          </a:xfrm>
+          <a:prstGeom prst="rect">
+            <a:avLst/>
+          </a:prstGeom>
+          <a:noFill/>
+        </p:spPr>
+        <p:txBody>
+          <a:bodyPr wrap="none" rtlCol="0">
+            <a:spAutoFit/>
+          </a:bodyPr>
+          <a:lstStyle/>
+          <a:p>
+            <a:r>
+              <a:rPr lang="en-US" altLang="ko-KR" dirty="0"/>
+              <a:t>EEPROM</a:t>
+            </a:r>
+            <a:r>
+              <a:rPr lang="ko-KR" altLang="en-US" dirty="0"/>
+              <a:t>에 </a:t>
+            </a:r>
+            <a:r>
+              <a:rPr lang="en-US" altLang="ko-KR" dirty="0"/>
+              <a:t>DTC </a:t>
+            </a:r>
+            <a:r>
+              <a:rPr lang="ko-KR" altLang="en-US" dirty="0"/>
+              <a:t>저장하기</a:t>
+            </a:r>
+          </a:p>
+        </p:txBody>
+      </p:sp>
+      <p:sp>
+        <p:nvSpPr>
+          <p:cNvPr id="50" name="화살표: 아래쪽 49">
+            <a:extLst>
+              <a:ext uri="{FF2B5EF4-FFF2-40B4-BE49-F238E27FC236}">
+                <a16:creationId xmlns:a16="http://schemas.microsoft.com/office/drawing/2014/main" id="{135A2761-55F2-2868-EB3D-20C4E912E791}"/>
+              </a:ext>
+            </a:extLst>
+          </p:cNvPr>
+          <p:cNvSpPr/>
+          <p:nvPr/>
+        </p:nvSpPr>
+        <p:spPr>
+          <a:xfrm>
+            <a:off x="9887511" y="4802644"/>
+            <a:ext cx="294968" cy="256228"/>
+          </a:xfrm>
+          <a:prstGeom prst="downArrow">
+            <a:avLst/>
+          </a:prstGeom>
+          <a:noFill/>
+        </p:spPr>
+        <p:style>
+          <a:lnRef idx="2">
+            <a:schemeClr val="accent1">
+              <a:shade val="15000"/>
+            </a:schemeClr>
+          </a:lnRef>
+          <a:fillRef idx="1">
+            <a:schemeClr val="accent1"/>
+          </a:fillRef>
+          <a:effectRef idx="0">
+            <a:schemeClr val="accent1"/>
+          </a:effectRef>
+          <a:fontRef idx="minor">
+            <a:schemeClr val="lt1"/>
+          </a:fontRef>
+        </p:style>
+        <p:txBody>
+          <a:bodyPr rtlCol="0" anchor="ctr"/>
+          <a:lstStyle/>
+          <a:p>
+            <a:pPr algn="ctr"/>
+            <a:endParaRPr lang="ko-KR" altLang="en-US"/>
+          </a:p>
+        </p:txBody>
+      </p:sp>
+      <p:sp>
+        <p:nvSpPr>
+          <p:cNvPr id="54" name="화살표: 굽음 53">
+            <a:extLst>
+              <a:ext uri="{FF2B5EF4-FFF2-40B4-BE49-F238E27FC236}">
+                <a16:creationId xmlns:a16="http://schemas.microsoft.com/office/drawing/2014/main" id="{150602CD-2B0E-8A26-EE8B-A81A29C9B595}"/>
+              </a:ext>
+            </a:extLst>
+          </p:cNvPr>
+          <p:cNvSpPr/>
+          <p:nvPr/>
+        </p:nvSpPr>
+        <p:spPr>
+          <a:xfrm rot="16200000">
+            <a:off x="5341604" y="2920682"/>
+            <a:ext cx="3942552" cy="2424437"/>
+          </a:xfrm>
+          <a:prstGeom prst="bentArrow">
+            <a:avLst>
+              <a:gd name="adj1" fmla="val 6653"/>
+              <a:gd name="adj2" fmla="val 8029"/>
+              <a:gd name="adj3" fmla="val 12157"/>
+              <a:gd name="adj4" fmla="val 29072"/>
+            </a:avLst>
+          </a:prstGeom>
+          <a:noFill/>
+        </p:spPr>
+        <p:style>
+          <a:lnRef idx="2">
+            <a:schemeClr val="accent1">
+              <a:shade val="15000"/>
+            </a:schemeClr>
+          </a:lnRef>
+          <a:fillRef idx="1">
+            <a:schemeClr val="accent1"/>
+          </a:fillRef>
+          <a:effectRef idx="0">
+            <a:schemeClr val="accent1"/>
+          </a:effectRef>
+          <a:fontRef idx="minor">
+            <a:schemeClr val="lt1"/>
+          </a:fontRef>
+        </p:style>
+        <p:txBody>
+          <a:bodyPr rtlCol="0" anchor="ctr"/>
+          <a:lstStyle/>
+          <a:p>
+            <a:pPr algn="ctr"/>
+            <a:endParaRPr lang="ko-KR" altLang="en-US">
+              <a:solidFill>
+                <a:schemeClr val="tx1"/>
+              </a:solidFill>
+            </a:endParaRPr>
           </a:p>
         </p:txBody>
       </p:sp>

--- a/ECU 고장 진단 시스템.pptx
+++ b/ECU 고장 진단 시스템.pptx
@@ -9,7 +9,9 @@
     <p:sldId id="257" r:id="rId3"/>
     <p:sldId id="258" r:id="rId4"/>
     <p:sldId id="261" r:id="rId5"/>
-    <p:sldId id="259" r:id="rId6"/>
+    <p:sldId id="262" r:id="rId6"/>
+    <p:sldId id="263" r:id="rId7"/>
+    <p:sldId id="259" r:id="rId8"/>
   </p:sldIdLst>
   <p:sldSz cx="12192000" cy="6858000"/>
   <p:notesSz cx="6858000" cy="9144000"/>
@@ -6055,6 +6057,672 @@
           <p:cNvPr id="2" name="제목 1">
             <a:extLst>
               <a:ext uri="{FF2B5EF4-FFF2-40B4-BE49-F238E27FC236}">
+                <a16:creationId xmlns:a16="http://schemas.microsoft.com/office/drawing/2014/main" id="{4ED9DAD7-050C-15E2-B61E-6F520C307B43}"/>
+              </a:ext>
+            </a:extLst>
+          </p:cNvPr>
+          <p:cNvSpPr>
+            <a:spLocks noGrp="1"/>
+          </p:cNvSpPr>
+          <p:nvPr>
+            <p:ph type="title"/>
+          </p:nvPr>
+        </p:nvSpPr>
+        <p:spPr/>
+        <p:txBody>
+          <a:bodyPr/>
+          <a:lstStyle/>
+          <a:p>
+            <a:r>
+              <a:rPr lang="ko-KR" altLang="ko-KR" dirty="0"/>
+              <a:t>소프트웨어 상세 설계 및 구현</a:t>
+            </a:r>
+            <a:r>
+              <a:rPr lang="en-US" altLang="ko-KR" dirty="0"/>
+              <a:t>(PMIC)</a:t>
+            </a:r>
+            <a:endParaRPr lang="ko-KR" altLang="en-US" dirty="0"/>
+          </a:p>
+        </p:txBody>
+      </p:sp>
+      <p:sp>
+        <p:nvSpPr>
+          <p:cNvPr id="4" name="사각형: 둥근 모서리 3">
+            <a:extLst>
+              <a:ext uri="{FF2B5EF4-FFF2-40B4-BE49-F238E27FC236}">
+                <a16:creationId xmlns:a16="http://schemas.microsoft.com/office/drawing/2014/main" id="{53C5695E-2835-742C-721B-9C6A549A1275}"/>
+              </a:ext>
+            </a:extLst>
+          </p:cNvPr>
+          <p:cNvSpPr/>
+          <p:nvPr/>
+        </p:nvSpPr>
+        <p:spPr>
+          <a:xfrm>
+            <a:off x="1032386" y="2822705"/>
+            <a:ext cx="3352801" cy="894735"/>
+          </a:xfrm>
+          <a:prstGeom prst="roundRect">
+            <a:avLst/>
+          </a:prstGeom>
+          <a:noFill/>
+        </p:spPr>
+        <p:style>
+          <a:lnRef idx="2">
+            <a:schemeClr val="accent1">
+              <a:shade val="15000"/>
+            </a:schemeClr>
+          </a:lnRef>
+          <a:fillRef idx="1">
+            <a:schemeClr val="accent1"/>
+          </a:fillRef>
+          <a:effectRef idx="0">
+            <a:schemeClr val="accent1"/>
+          </a:effectRef>
+          <a:fontRef idx="minor">
+            <a:schemeClr val="lt1"/>
+          </a:fontRef>
+        </p:style>
+        <p:txBody>
+          <a:bodyPr rtlCol="0" anchor="ctr"/>
+          <a:lstStyle/>
+          <a:p>
+            <a:pPr algn="ctr"/>
+            <a:endParaRPr lang="ko-KR" altLang="en-US"/>
+          </a:p>
+        </p:txBody>
+      </p:sp>
+      <p:sp>
+        <p:nvSpPr>
+          <p:cNvPr id="5" name="TextBox 4">
+            <a:extLst>
+              <a:ext uri="{FF2B5EF4-FFF2-40B4-BE49-F238E27FC236}">
+                <a16:creationId xmlns:a16="http://schemas.microsoft.com/office/drawing/2014/main" id="{E34057B9-A626-725E-2956-159BC702E690}"/>
+              </a:ext>
+            </a:extLst>
+          </p:cNvPr>
+          <p:cNvSpPr txBox="1"/>
+          <p:nvPr/>
+        </p:nvSpPr>
+        <p:spPr>
+          <a:xfrm>
+            <a:off x="1103405" y="2946908"/>
+            <a:ext cx="3191130" cy="646331"/>
+          </a:xfrm>
+          <a:prstGeom prst="rect">
+            <a:avLst/>
+          </a:prstGeom>
+          <a:noFill/>
+        </p:spPr>
+        <p:txBody>
+          <a:bodyPr wrap="none" rtlCol="0">
+            <a:spAutoFit/>
+          </a:bodyPr>
+          <a:lstStyle/>
+          <a:p>
+            <a:r>
+              <a:rPr lang="ko-KR" altLang="ko-KR" dirty="0"/>
+              <a:t>PMIC_V_REFA_LOW 레지스터</a:t>
+            </a:r>
+            <a:endParaRPr lang="en-US" altLang="ko-KR" dirty="0"/>
+          </a:p>
+          <a:p>
+            <a:r>
+              <a:rPr lang="ko-KR" altLang="en-US" dirty="0"/>
+              <a:t>하위 </a:t>
+            </a:r>
+            <a:r>
+              <a:rPr lang="en-US" altLang="ko-KR" dirty="0"/>
+              <a:t>2</a:t>
+            </a:r>
+            <a:r>
+              <a:rPr lang="ko-KR" altLang="en-US" dirty="0"/>
+              <a:t>비트 </a:t>
+            </a:r>
+            <a:r>
+              <a:rPr lang="ko-KR" altLang="ko-KR" dirty="0"/>
+              <a:t>변경</a:t>
+            </a:r>
+          </a:p>
+        </p:txBody>
+      </p:sp>
+      <p:sp>
+        <p:nvSpPr>
+          <p:cNvPr id="19" name="사각형: 둥근 모서리 18">
+            <a:extLst>
+              <a:ext uri="{FF2B5EF4-FFF2-40B4-BE49-F238E27FC236}">
+                <a16:creationId xmlns:a16="http://schemas.microsoft.com/office/drawing/2014/main" id="{C2D8F22C-7B27-7A26-7339-6DCDA71C7708}"/>
+              </a:ext>
+            </a:extLst>
+          </p:cNvPr>
+          <p:cNvSpPr/>
+          <p:nvPr/>
+        </p:nvSpPr>
+        <p:spPr>
+          <a:xfrm>
+            <a:off x="1032386" y="4097594"/>
+            <a:ext cx="3887320" cy="894735"/>
+          </a:xfrm>
+          <a:prstGeom prst="roundRect">
+            <a:avLst/>
+          </a:prstGeom>
+          <a:noFill/>
+        </p:spPr>
+        <p:style>
+          <a:lnRef idx="2">
+            <a:schemeClr val="accent1">
+              <a:shade val="15000"/>
+            </a:schemeClr>
+          </a:lnRef>
+          <a:fillRef idx="1">
+            <a:schemeClr val="accent1"/>
+          </a:fillRef>
+          <a:effectRef idx="0">
+            <a:schemeClr val="accent1"/>
+          </a:effectRef>
+          <a:fontRef idx="minor">
+            <a:schemeClr val="lt1"/>
+          </a:fontRef>
+        </p:style>
+        <p:txBody>
+          <a:bodyPr rtlCol="0" anchor="ctr"/>
+          <a:lstStyle/>
+          <a:p>
+            <a:pPr algn="ctr"/>
+            <a:endParaRPr lang="ko-KR" altLang="en-US"/>
+          </a:p>
+        </p:txBody>
+      </p:sp>
+      <p:sp>
+        <p:nvSpPr>
+          <p:cNvPr id="21" name="TextBox 20">
+            <a:extLst>
+              <a:ext uri="{FF2B5EF4-FFF2-40B4-BE49-F238E27FC236}">
+                <a16:creationId xmlns:a16="http://schemas.microsoft.com/office/drawing/2014/main" id="{AA63F40F-D41A-45C9-42C9-C7A18AA353DC}"/>
+              </a:ext>
+            </a:extLst>
+          </p:cNvPr>
+          <p:cNvSpPr txBox="1"/>
+          <p:nvPr/>
+        </p:nvSpPr>
+        <p:spPr>
+          <a:xfrm>
+            <a:off x="1103405" y="4360295"/>
+            <a:ext cx="3816301" cy="369332"/>
+          </a:xfrm>
+          <a:prstGeom prst="rect">
+            <a:avLst/>
+          </a:prstGeom>
+          <a:noFill/>
+        </p:spPr>
+        <p:txBody>
+          <a:bodyPr wrap="none" rtlCol="0">
+            <a:spAutoFit/>
+          </a:bodyPr>
+          <a:lstStyle/>
+          <a:p>
+            <a:r>
+              <a:rPr lang="ko-KR" altLang="ko-KR" dirty="0"/>
+              <a:t>PMIC_V_REFA_LOW 레지스터 변경</a:t>
+            </a:r>
+          </a:p>
+        </p:txBody>
+      </p:sp>
+      <p:sp>
+        <p:nvSpPr>
+          <p:cNvPr id="24" name="사각형: 둥근 모서리 23">
+            <a:extLst>
+              <a:ext uri="{FF2B5EF4-FFF2-40B4-BE49-F238E27FC236}">
+                <a16:creationId xmlns:a16="http://schemas.microsoft.com/office/drawing/2014/main" id="{BD9563E1-0E74-6C7A-4ACB-ABB341E27331}"/>
+              </a:ext>
+            </a:extLst>
+          </p:cNvPr>
+          <p:cNvSpPr/>
+          <p:nvPr/>
+        </p:nvSpPr>
+        <p:spPr>
+          <a:xfrm>
+            <a:off x="7074309" y="2802729"/>
+            <a:ext cx="3352801" cy="894735"/>
+          </a:xfrm>
+          <a:prstGeom prst="roundRect">
+            <a:avLst/>
+          </a:prstGeom>
+          <a:noFill/>
+        </p:spPr>
+        <p:style>
+          <a:lnRef idx="2">
+            <a:schemeClr val="accent1">
+              <a:shade val="15000"/>
+            </a:schemeClr>
+          </a:lnRef>
+          <a:fillRef idx="1">
+            <a:schemeClr val="accent1"/>
+          </a:fillRef>
+          <a:effectRef idx="0">
+            <a:schemeClr val="accent1"/>
+          </a:effectRef>
+          <a:fontRef idx="minor">
+            <a:schemeClr val="lt1"/>
+          </a:fontRef>
+        </p:style>
+        <p:txBody>
+          <a:bodyPr rtlCol="0" anchor="ctr"/>
+          <a:lstStyle/>
+          <a:p>
+            <a:pPr algn="ctr"/>
+            <a:endParaRPr lang="ko-KR" altLang="en-US"/>
+          </a:p>
+        </p:txBody>
+      </p:sp>
+      <p:sp>
+        <p:nvSpPr>
+          <p:cNvPr id="26" name="TextBox 25">
+            <a:extLst>
+              <a:ext uri="{FF2B5EF4-FFF2-40B4-BE49-F238E27FC236}">
+                <a16:creationId xmlns:a16="http://schemas.microsoft.com/office/drawing/2014/main" id="{131630A9-1F76-73E8-6B78-101AC4848C1F}"/>
+              </a:ext>
+            </a:extLst>
+          </p:cNvPr>
+          <p:cNvSpPr txBox="1"/>
+          <p:nvPr/>
+        </p:nvSpPr>
+        <p:spPr>
+          <a:xfrm>
+            <a:off x="7357956" y="3065430"/>
+            <a:ext cx="2785506" cy="369332"/>
+          </a:xfrm>
+          <a:prstGeom prst="rect">
+            <a:avLst/>
+          </a:prstGeom>
+          <a:noFill/>
+        </p:spPr>
+        <p:txBody>
+          <a:bodyPr wrap="none" rtlCol="0">
+            <a:spAutoFit/>
+          </a:bodyPr>
+          <a:lstStyle/>
+          <a:p>
+            <a:r>
+              <a:rPr lang="en-US" altLang="ko-KR" dirty="0"/>
+              <a:t>UV, OV </a:t>
+            </a:r>
+            <a:r>
+              <a:rPr lang="ko-KR" altLang="en-US" dirty="0"/>
+              <a:t>레지스터 값 읽기</a:t>
+            </a:r>
+            <a:endParaRPr lang="ko-KR" altLang="ko-KR" dirty="0"/>
+          </a:p>
+        </p:txBody>
+      </p:sp>
+      <p:sp>
+        <p:nvSpPr>
+          <p:cNvPr id="29" name="사각형: 둥근 모서리 28">
+            <a:extLst>
+              <a:ext uri="{FF2B5EF4-FFF2-40B4-BE49-F238E27FC236}">
+                <a16:creationId xmlns:a16="http://schemas.microsoft.com/office/drawing/2014/main" id="{5D036CF2-F1A1-5297-4574-DEC67F7F0E04}"/>
+              </a:ext>
+            </a:extLst>
+          </p:cNvPr>
+          <p:cNvSpPr/>
+          <p:nvPr/>
+        </p:nvSpPr>
+        <p:spPr>
+          <a:xfrm>
+            <a:off x="7192296" y="4282259"/>
+            <a:ext cx="3069153" cy="894735"/>
+          </a:xfrm>
+          <a:prstGeom prst="roundRect">
+            <a:avLst/>
+          </a:prstGeom>
+          <a:noFill/>
+        </p:spPr>
+        <p:style>
+          <a:lnRef idx="2">
+            <a:schemeClr val="accent1">
+              <a:shade val="15000"/>
+            </a:schemeClr>
+          </a:lnRef>
+          <a:fillRef idx="1">
+            <a:schemeClr val="accent1"/>
+          </a:fillRef>
+          <a:effectRef idx="0">
+            <a:schemeClr val="accent1"/>
+          </a:effectRef>
+          <a:fontRef idx="minor">
+            <a:schemeClr val="lt1"/>
+          </a:fontRef>
+        </p:style>
+        <p:txBody>
+          <a:bodyPr rtlCol="0" anchor="ctr"/>
+          <a:lstStyle/>
+          <a:p>
+            <a:pPr algn="ctr"/>
+            <a:endParaRPr lang="ko-KR" altLang="en-US"/>
+          </a:p>
+        </p:txBody>
+      </p:sp>
+      <p:sp>
+        <p:nvSpPr>
+          <p:cNvPr id="31" name="TextBox 30">
+            <a:extLst>
+              <a:ext uri="{FF2B5EF4-FFF2-40B4-BE49-F238E27FC236}">
+                <a16:creationId xmlns:a16="http://schemas.microsoft.com/office/drawing/2014/main" id="{4273CF9F-246B-A675-61F5-15DBCA52863A}"/>
+              </a:ext>
+            </a:extLst>
+          </p:cNvPr>
+          <p:cNvSpPr txBox="1"/>
+          <p:nvPr/>
+        </p:nvSpPr>
+        <p:spPr>
+          <a:xfrm>
+            <a:off x="7475943" y="4544960"/>
+            <a:ext cx="2369559" cy="369332"/>
+          </a:xfrm>
+          <a:prstGeom prst="rect">
+            <a:avLst/>
+          </a:prstGeom>
+          <a:noFill/>
+        </p:spPr>
+        <p:txBody>
+          <a:bodyPr wrap="none" rtlCol="0">
+            <a:spAutoFit/>
+          </a:bodyPr>
+          <a:lstStyle/>
+          <a:p>
+            <a:r>
+              <a:rPr lang="en-US" altLang="ko-KR" dirty="0"/>
+              <a:t>OC </a:t>
+            </a:r>
+            <a:r>
+              <a:rPr lang="ko-KR" altLang="en-US" dirty="0"/>
+              <a:t>레지스터 값 읽기</a:t>
+            </a:r>
+            <a:endParaRPr lang="ko-KR" altLang="ko-KR" dirty="0"/>
+          </a:p>
+        </p:txBody>
+      </p:sp>
+      <p:sp>
+        <p:nvSpPr>
+          <p:cNvPr id="32" name="사각형: 둥근 모서리 31">
+            <a:extLst>
+              <a:ext uri="{FF2B5EF4-FFF2-40B4-BE49-F238E27FC236}">
+                <a16:creationId xmlns:a16="http://schemas.microsoft.com/office/drawing/2014/main" id="{F3A794DC-5B03-7AC6-749F-BC1013ADA147}"/>
+              </a:ext>
+            </a:extLst>
+          </p:cNvPr>
+          <p:cNvSpPr/>
+          <p:nvPr/>
+        </p:nvSpPr>
+        <p:spPr>
+          <a:xfrm>
+            <a:off x="717755" y="2320413"/>
+            <a:ext cx="4699819" cy="3165987"/>
+          </a:xfrm>
+          <a:prstGeom prst="roundRect">
+            <a:avLst/>
+          </a:prstGeom>
+          <a:noFill/>
+        </p:spPr>
+        <p:style>
+          <a:lnRef idx="2">
+            <a:schemeClr val="accent1">
+              <a:shade val="15000"/>
+            </a:schemeClr>
+          </a:lnRef>
+          <a:fillRef idx="1">
+            <a:schemeClr val="accent1"/>
+          </a:fillRef>
+          <a:effectRef idx="0">
+            <a:schemeClr val="accent1"/>
+          </a:effectRef>
+          <a:fontRef idx="minor">
+            <a:schemeClr val="lt1"/>
+          </a:fontRef>
+        </p:style>
+        <p:txBody>
+          <a:bodyPr rtlCol="0" anchor="ctr"/>
+          <a:lstStyle/>
+          <a:p>
+            <a:pPr algn="ctr"/>
+            <a:endParaRPr lang="ko-KR" altLang="en-US"/>
+          </a:p>
+        </p:txBody>
+      </p:sp>
+      <p:sp>
+        <p:nvSpPr>
+          <p:cNvPr id="34" name="사각형: 둥근 모서리 33">
+            <a:extLst>
+              <a:ext uri="{FF2B5EF4-FFF2-40B4-BE49-F238E27FC236}">
+                <a16:creationId xmlns:a16="http://schemas.microsoft.com/office/drawing/2014/main" id="{34069FDC-AEA0-1775-219D-E4BEBC9B580A}"/>
+              </a:ext>
+            </a:extLst>
+          </p:cNvPr>
+          <p:cNvSpPr/>
+          <p:nvPr/>
+        </p:nvSpPr>
+        <p:spPr>
+          <a:xfrm>
+            <a:off x="6310812" y="2320413"/>
+            <a:ext cx="4699819" cy="3165987"/>
+          </a:xfrm>
+          <a:prstGeom prst="roundRect">
+            <a:avLst/>
+          </a:prstGeom>
+          <a:noFill/>
+        </p:spPr>
+        <p:style>
+          <a:lnRef idx="2">
+            <a:schemeClr val="accent1">
+              <a:shade val="15000"/>
+            </a:schemeClr>
+          </a:lnRef>
+          <a:fillRef idx="1">
+            <a:schemeClr val="accent1"/>
+          </a:fillRef>
+          <a:effectRef idx="0">
+            <a:schemeClr val="accent1"/>
+          </a:effectRef>
+          <a:fontRef idx="minor">
+            <a:schemeClr val="lt1"/>
+          </a:fontRef>
+        </p:style>
+        <p:txBody>
+          <a:bodyPr rtlCol="0" anchor="ctr"/>
+          <a:lstStyle/>
+          <a:p>
+            <a:pPr algn="ctr"/>
+            <a:endParaRPr lang="ko-KR" altLang="en-US"/>
+          </a:p>
+        </p:txBody>
+      </p:sp>
+    </p:spTree>
+    <p:extLst>
+      <p:ext uri="{BB962C8B-B14F-4D97-AF65-F5344CB8AC3E}">
+        <p14:creationId xmlns:p14="http://schemas.microsoft.com/office/powerpoint/2010/main" val="126309422"/>
+      </p:ext>
+    </p:extLst>
+  </p:cSld>
+  <p:clrMapOvr>
+    <a:masterClrMapping/>
+  </p:clrMapOvr>
+</p:sld>
+</file>
+
+<file path=ppt/slides/slide6.xml><?xml version="1.0" encoding="utf-8"?>
+<p:sld xmlns:a="http://schemas.openxmlformats.org/drawingml/2006/main" xmlns:r="http://schemas.openxmlformats.org/officeDocument/2006/relationships" xmlns:p="http://schemas.openxmlformats.org/presentationml/2006/main">
+  <p:cSld>
+    <p:spTree>
+      <p:nvGrpSpPr>
+        <p:cNvPr id="1" name="">
+          <a:extLst>
+            <a:ext uri="{FF2B5EF4-FFF2-40B4-BE49-F238E27FC236}">
+              <a16:creationId xmlns:a16="http://schemas.microsoft.com/office/drawing/2014/main" id="{8C6BB044-4B4E-8A7A-397D-FCC2B9078F93}"/>
+            </a:ext>
+          </a:extLst>
+        </p:cNvPr>
+        <p:cNvGrpSpPr/>
+        <p:nvPr/>
+      </p:nvGrpSpPr>
+      <p:grpSpPr>
+        <a:xfrm>
+          <a:off x="0" y="0"/>
+          <a:ext cx="0" cy="0"/>
+          <a:chOff x="0" y="0"/>
+          <a:chExt cx="0" cy="0"/>
+        </a:xfrm>
+      </p:grpSpPr>
+      <p:sp>
+        <p:nvSpPr>
+          <p:cNvPr id="2" name="제목 1">
+            <a:extLst>
+              <a:ext uri="{FF2B5EF4-FFF2-40B4-BE49-F238E27FC236}">
+                <a16:creationId xmlns:a16="http://schemas.microsoft.com/office/drawing/2014/main" id="{245D428D-064D-EA10-B2D1-193494DA97AD}"/>
+              </a:ext>
+            </a:extLst>
+          </p:cNvPr>
+          <p:cNvSpPr>
+            <a:spLocks noGrp="1"/>
+          </p:cNvSpPr>
+          <p:nvPr>
+            <p:ph type="title"/>
+          </p:nvPr>
+        </p:nvSpPr>
+        <p:spPr/>
+        <p:txBody>
+          <a:bodyPr/>
+          <a:lstStyle/>
+          <a:p>
+            <a:r>
+              <a:rPr lang="ko-KR" altLang="ko-KR" dirty="0"/>
+              <a:t>소프트웨어 상세 설계 및 구현</a:t>
+            </a:r>
+            <a:r>
+              <a:rPr lang="en-US" altLang="ko-KR" dirty="0"/>
+              <a:t>(EEPROM)</a:t>
+            </a:r>
+            <a:endParaRPr lang="ko-KR" altLang="en-US" dirty="0"/>
+          </a:p>
+        </p:txBody>
+      </p:sp>
+      <p:sp>
+        <p:nvSpPr>
+          <p:cNvPr id="4" name="사각형: 둥근 모서리 3">
+            <a:extLst>
+              <a:ext uri="{FF2B5EF4-FFF2-40B4-BE49-F238E27FC236}">
+                <a16:creationId xmlns:a16="http://schemas.microsoft.com/office/drawing/2014/main" id="{86218E6E-8299-984D-BABB-043298BADB62}"/>
+              </a:ext>
+            </a:extLst>
+          </p:cNvPr>
+          <p:cNvSpPr/>
+          <p:nvPr/>
+        </p:nvSpPr>
+        <p:spPr>
+          <a:xfrm>
+            <a:off x="1474838" y="2231117"/>
+            <a:ext cx="2064775" cy="606295"/>
+          </a:xfrm>
+          <a:prstGeom prst="roundRect">
+            <a:avLst/>
+          </a:prstGeom>
+          <a:noFill/>
+        </p:spPr>
+        <p:style>
+          <a:lnRef idx="2">
+            <a:schemeClr val="accent1">
+              <a:shade val="15000"/>
+            </a:schemeClr>
+          </a:lnRef>
+          <a:fillRef idx="1">
+            <a:schemeClr val="accent1"/>
+          </a:fillRef>
+          <a:effectRef idx="0">
+            <a:schemeClr val="accent1"/>
+          </a:effectRef>
+          <a:fontRef idx="minor">
+            <a:schemeClr val="lt1"/>
+          </a:fontRef>
+        </p:style>
+        <p:txBody>
+          <a:bodyPr rtlCol="0" anchor="ctr"/>
+          <a:lstStyle/>
+          <a:p>
+            <a:pPr algn="ctr"/>
+            <a:endParaRPr lang="ko-KR" altLang="en-US"/>
+          </a:p>
+        </p:txBody>
+      </p:sp>
+      <p:sp>
+        <p:nvSpPr>
+          <p:cNvPr id="5" name="TextBox 4">
+            <a:extLst>
+              <a:ext uri="{FF2B5EF4-FFF2-40B4-BE49-F238E27FC236}">
+                <a16:creationId xmlns:a16="http://schemas.microsoft.com/office/drawing/2014/main" id="{DCC4F324-DCE9-C341-C83F-2EC8A614B8C0}"/>
+              </a:ext>
+            </a:extLst>
+          </p:cNvPr>
+          <p:cNvSpPr txBox="1"/>
+          <p:nvPr/>
+        </p:nvSpPr>
+        <p:spPr>
+          <a:xfrm>
+            <a:off x="1545857" y="2355320"/>
+            <a:ext cx="1818831" cy="369332"/>
+          </a:xfrm>
+          <a:prstGeom prst="rect">
+            <a:avLst/>
+          </a:prstGeom>
+          <a:noFill/>
+        </p:spPr>
+        <p:txBody>
+          <a:bodyPr wrap="none" rtlCol="0">
+            <a:spAutoFit/>
+          </a:bodyPr>
+          <a:lstStyle/>
+          <a:p>
+            <a:r>
+              <a:rPr lang="en-US" altLang="ko-KR" dirty="0"/>
+              <a:t>EEPROM WREN</a:t>
+            </a:r>
+            <a:endParaRPr lang="ko-KR" altLang="ko-KR" dirty="0"/>
+          </a:p>
+        </p:txBody>
+      </p:sp>
+    </p:spTree>
+    <p:extLst>
+      <p:ext uri="{BB962C8B-B14F-4D97-AF65-F5344CB8AC3E}">
+        <p14:creationId xmlns:p14="http://schemas.microsoft.com/office/powerpoint/2010/main" val="3815658646"/>
+      </p:ext>
+    </p:extLst>
+  </p:cSld>
+  <p:clrMapOvr>
+    <a:masterClrMapping/>
+  </p:clrMapOvr>
+</p:sld>
+</file>
+
+<file path=ppt/slides/slide7.xml><?xml version="1.0" encoding="utf-8"?>
+<p:sld xmlns:a="http://schemas.openxmlformats.org/drawingml/2006/main" xmlns:r="http://schemas.openxmlformats.org/officeDocument/2006/relationships" xmlns:p="http://schemas.openxmlformats.org/presentationml/2006/main">
+  <p:cSld>
+    <p:spTree>
+      <p:nvGrpSpPr>
+        <p:cNvPr id="1" name=""/>
+        <p:cNvGrpSpPr/>
+        <p:nvPr/>
+      </p:nvGrpSpPr>
+      <p:grpSpPr>
+        <a:xfrm>
+          <a:off x="0" y="0"/>
+          <a:ext cx="0" cy="0"/>
+          <a:chOff x="0" y="0"/>
+          <a:chExt cx="0" cy="0"/>
+        </a:xfrm>
+      </p:grpSpPr>
+      <p:sp>
+        <p:nvSpPr>
+          <p:cNvPr id="2" name="제목 1">
+            <a:extLst>
+              <a:ext uri="{FF2B5EF4-FFF2-40B4-BE49-F238E27FC236}">
                 <a16:creationId xmlns:a16="http://schemas.microsoft.com/office/drawing/2014/main" id="{CCF29319-983C-63D7-FBC5-33A4E2189F2C}"/>
               </a:ext>
             </a:extLst>

--- a/ECU 고장 진단 시스템.pptx
+++ b/ECU 고장 진단 시스템.pptx
@@ -4,14 +4,16 @@
   <p:sldMasterIdLst>
     <p:sldMasterId id="2147483648" r:id="rId1"/>
   </p:sldMasterIdLst>
+  <p:notesMasterIdLst>
+    <p:notesMasterId r:id="rId8"/>
+  </p:notesMasterIdLst>
   <p:sldIdLst>
     <p:sldId id="256" r:id="rId2"/>
     <p:sldId id="257" r:id="rId3"/>
     <p:sldId id="258" r:id="rId4"/>
     <p:sldId id="261" r:id="rId5"/>
-    <p:sldId id="262" r:id="rId6"/>
-    <p:sldId id="263" r:id="rId7"/>
-    <p:sldId id="259" r:id="rId8"/>
+    <p:sldId id="259" r:id="rId6"/>
+    <p:sldId id="262" r:id="rId7"/>
   </p:sldIdLst>
   <p:sldSz cx="12192000" cy="6858000"/>
   <p:notesSz cx="6858000" cy="9144000"/>
@@ -118,6 +120,439 @@
 </p:presentation>
 </file>
 
+<file path=ppt/notesMasters/notesMaster1.xml><?xml version="1.0" encoding="utf-8"?>
+<p:notesMaster xmlns:a="http://schemas.openxmlformats.org/drawingml/2006/main" xmlns:r="http://schemas.openxmlformats.org/officeDocument/2006/relationships" xmlns:p="http://schemas.openxmlformats.org/presentationml/2006/main">
+  <p:cSld>
+    <p:bg>
+      <p:bgRef idx="1001">
+        <a:schemeClr val="bg1"/>
+      </p:bgRef>
+    </p:bg>
+    <p:spTree>
+      <p:nvGrpSpPr>
+        <p:cNvPr id="1" name=""/>
+        <p:cNvGrpSpPr/>
+        <p:nvPr/>
+      </p:nvGrpSpPr>
+      <p:grpSpPr>
+        <a:xfrm>
+          <a:off x="0" y="0"/>
+          <a:ext cx="0" cy="0"/>
+          <a:chOff x="0" y="0"/>
+          <a:chExt cx="0" cy="0"/>
+        </a:xfrm>
+      </p:grpSpPr>
+      <p:sp>
+        <p:nvSpPr>
+          <p:cNvPr id="2" name="머리글 개체 틀 1"/>
+          <p:cNvSpPr>
+            <a:spLocks noGrp="1"/>
+          </p:cNvSpPr>
+          <p:nvPr>
+            <p:ph type="hdr" sz="quarter"/>
+          </p:nvPr>
+        </p:nvSpPr>
+        <p:spPr>
+          <a:xfrm>
+            <a:off x="0" y="0"/>
+            <a:ext cx="2971800" cy="458788"/>
+          </a:xfrm>
+          <a:prstGeom prst="rect">
+            <a:avLst/>
+          </a:prstGeom>
+        </p:spPr>
+        <p:txBody>
+          <a:bodyPr vert="horz" lIns="91440" tIns="45720" rIns="91440" bIns="45720" rtlCol="0"/>
+          <a:lstStyle>
+            <a:lvl1pPr algn="l">
+              <a:defRPr sz="1200"/>
+            </a:lvl1pPr>
+          </a:lstStyle>
+          <a:p>
+            <a:endParaRPr lang="ko-KR" altLang="en-US"/>
+          </a:p>
+        </p:txBody>
+      </p:sp>
+      <p:sp>
+        <p:nvSpPr>
+          <p:cNvPr id="3" name="날짜 개체 틀 2"/>
+          <p:cNvSpPr>
+            <a:spLocks noGrp="1"/>
+          </p:cNvSpPr>
+          <p:nvPr>
+            <p:ph type="dt" idx="1"/>
+          </p:nvPr>
+        </p:nvSpPr>
+        <p:spPr>
+          <a:xfrm>
+            <a:off x="3884613" y="0"/>
+            <a:ext cx="2971800" cy="458788"/>
+          </a:xfrm>
+          <a:prstGeom prst="rect">
+            <a:avLst/>
+          </a:prstGeom>
+        </p:spPr>
+        <p:txBody>
+          <a:bodyPr vert="horz" lIns="91440" tIns="45720" rIns="91440" bIns="45720" rtlCol="0"/>
+          <a:lstStyle>
+            <a:lvl1pPr algn="r">
+              <a:defRPr sz="1200"/>
+            </a:lvl1pPr>
+          </a:lstStyle>
+          <a:p>
+            <a:fld id="{FE10F9C2-239F-4BCA-907A-EA6CAD586962}" type="datetimeFigureOut">
+              <a:rPr lang="ko-KR" altLang="en-US" smtClean="0"/>
+              <a:t>2026-10-20</a:t>
+            </a:fld>
+            <a:endParaRPr lang="ko-KR" altLang="en-US"/>
+          </a:p>
+        </p:txBody>
+      </p:sp>
+      <p:sp>
+        <p:nvSpPr>
+          <p:cNvPr id="4" name="슬라이드 이미지 개체 틀 3"/>
+          <p:cNvSpPr>
+            <a:spLocks noGrp="1" noRot="1" noChangeAspect="1"/>
+          </p:cNvSpPr>
+          <p:nvPr>
+            <p:ph type="sldImg" idx="2"/>
+          </p:nvPr>
+        </p:nvSpPr>
+        <p:spPr>
+          <a:xfrm>
+            <a:off x="685800" y="1143000"/>
+            <a:ext cx="5486400" cy="3086100"/>
+          </a:xfrm>
+          <a:prstGeom prst="rect">
+            <a:avLst/>
+          </a:prstGeom>
+          <a:noFill/>
+          <a:ln w="12700">
+            <a:solidFill>
+              <a:prstClr val="black"/>
+            </a:solidFill>
+          </a:ln>
+        </p:spPr>
+        <p:txBody>
+          <a:bodyPr vert="horz" lIns="91440" tIns="45720" rIns="91440" bIns="45720" rtlCol="0" anchor="ctr"/>
+          <a:lstStyle/>
+          <a:p>
+            <a:endParaRPr lang="ko-KR" altLang="en-US"/>
+          </a:p>
+        </p:txBody>
+      </p:sp>
+      <p:sp>
+        <p:nvSpPr>
+          <p:cNvPr id="5" name="슬라이드 노트 개체 틀 4"/>
+          <p:cNvSpPr>
+            <a:spLocks noGrp="1"/>
+          </p:cNvSpPr>
+          <p:nvPr>
+            <p:ph type="body" sz="quarter" idx="3"/>
+          </p:nvPr>
+        </p:nvSpPr>
+        <p:spPr>
+          <a:xfrm>
+            <a:off x="685800" y="4400550"/>
+            <a:ext cx="5486400" cy="3600450"/>
+          </a:xfrm>
+          <a:prstGeom prst="rect">
+            <a:avLst/>
+          </a:prstGeom>
+        </p:spPr>
+        <p:txBody>
+          <a:bodyPr vert="horz" lIns="91440" tIns="45720" rIns="91440" bIns="45720" rtlCol="0"/>
+          <a:lstStyle/>
+          <a:p>
+            <a:pPr lvl="0"/>
+            <a:r>
+              <a:rPr lang="ko-KR" altLang="en-US"/>
+              <a:t>마스터 텍스트 스타일을 편집하려면 클릭</a:t>
+            </a:r>
+          </a:p>
+          <a:p>
+            <a:pPr lvl="1"/>
+            <a:r>
+              <a:rPr lang="ko-KR" altLang="en-US"/>
+              <a:t>두 번째 수준</a:t>
+            </a:r>
+          </a:p>
+          <a:p>
+            <a:pPr lvl="2"/>
+            <a:r>
+              <a:rPr lang="ko-KR" altLang="en-US"/>
+              <a:t>세 번째 수준</a:t>
+            </a:r>
+          </a:p>
+          <a:p>
+            <a:pPr lvl="3"/>
+            <a:r>
+              <a:rPr lang="ko-KR" altLang="en-US"/>
+              <a:t>네 번째 수준</a:t>
+            </a:r>
+          </a:p>
+          <a:p>
+            <a:pPr lvl="4"/>
+            <a:r>
+              <a:rPr lang="ko-KR" altLang="en-US"/>
+              <a:t>다섯 번째 수준</a:t>
+            </a:r>
+          </a:p>
+        </p:txBody>
+      </p:sp>
+      <p:sp>
+        <p:nvSpPr>
+          <p:cNvPr id="6" name="바닥글 개체 틀 5"/>
+          <p:cNvSpPr>
+            <a:spLocks noGrp="1"/>
+          </p:cNvSpPr>
+          <p:nvPr>
+            <p:ph type="ftr" sz="quarter" idx="4"/>
+          </p:nvPr>
+        </p:nvSpPr>
+        <p:spPr>
+          <a:xfrm>
+            <a:off x="0" y="8685213"/>
+            <a:ext cx="2971800" cy="458787"/>
+          </a:xfrm>
+          <a:prstGeom prst="rect">
+            <a:avLst/>
+          </a:prstGeom>
+        </p:spPr>
+        <p:txBody>
+          <a:bodyPr vert="horz" lIns="91440" tIns="45720" rIns="91440" bIns="45720" rtlCol="0" anchor="b"/>
+          <a:lstStyle>
+            <a:lvl1pPr algn="l">
+              <a:defRPr sz="1200"/>
+            </a:lvl1pPr>
+          </a:lstStyle>
+          <a:p>
+            <a:endParaRPr lang="ko-KR" altLang="en-US"/>
+          </a:p>
+        </p:txBody>
+      </p:sp>
+      <p:sp>
+        <p:nvSpPr>
+          <p:cNvPr id="7" name="슬라이드 번호 개체 틀 6"/>
+          <p:cNvSpPr>
+            <a:spLocks noGrp="1"/>
+          </p:cNvSpPr>
+          <p:nvPr>
+            <p:ph type="sldNum" sz="quarter" idx="5"/>
+          </p:nvPr>
+        </p:nvSpPr>
+        <p:spPr>
+          <a:xfrm>
+            <a:off x="3884613" y="8685213"/>
+            <a:ext cx="2971800" cy="458787"/>
+          </a:xfrm>
+          <a:prstGeom prst="rect">
+            <a:avLst/>
+          </a:prstGeom>
+        </p:spPr>
+        <p:txBody>
+          <a:bodyPr vert="horz" lIns="91440" tIns="45720" rIns="91440" bIns="45720" rtlCol="0" anchor="b"/>
+          <a:lstStyle>
+            <a:lvl1pPr algn="r">
+              <a:defRPr sz="1200"/>
+            </a:lvl1pPr>
+          </a:lstStyle>
+          <a:p>
+            <a:fld id="{F5A9DCE2-1A76-46F3-9C22-567E4E81BEC8}" type="slidenum">
+              <a:rPr lang="ko-KR" altLang="en-US" smtClean="0"/>
+              <a:t>‹#›</a:t>
+            </a:fld>
+            <a:endParaRPr lang="ko-KR" altLang="en-US"/>
+          </a:p>
+        </p:txBody>
+      </p:sp>
+    </p:spTree>
+    <p:extLst>
+      <p:ext uri="{BB962C8B-B14F-4D97-AF65-F5344CB8AC3E}">
+        <p14:creationId xmlns:p14="http://schemas.microsoft.com/office/powerpoint/2010/main" val="4132153867"/>
+      </p:ext>
+    </p:extLst>
+  </p:cSld>
+  <p:clrMap bg1="lt1" tx1="dk1" bg2="lt2" tx2="dk2" accent1="accent1" accent2="accent2" accent3="accent3" accent4="accent4" accent5="accent5" accent6="accent6" hlink="hlink" folHlink="folHlink"/>
+  <p:notesStyle>
+    <a:lvl1pPr marL="0" algn="l" defTabSz="914400" rtl="0" eaLnBrk="1" latinLnBrk="1" hangingPunct="1">
+      <a:defRPr sz="1200" kern="1200">
+        <a:solidFill>
+          <a:schemeClr val="tx1"/>
+        </a:solidFill>
+        <a:latin typeface="+mn-lt"/>
+        <a:ea typeface="+mn-ea"/>
+        <a:cs typeface="+mn-cs"/>
+      </a:defRPr>
+    </a:lvl1pPr>
+    <a:lvl2pPr marL="457200" algn="l" defTabSz="914400" rtl="0" eaLnBrk="1" latinLnBrk="1" hangingPunct="1">
+      <a:defRPr sz="1200" kern="1200">
+        <a:solidFill>
+          <a:schemeClr val="tx1"/>
+        </a:solidFill>
+        <a:latin typeface="+mn-lt"/>
+        <a:ea typeface="+mn-ea"/>
+        <a:cs typeface="+mn-cs"/>
+      </a:defRPr>
+    </a:lvl2pPr>
+    <a:lvl3pPr marL="914400" algn="l" defTabSz="914400" rtl="0" eaLnBrk="1" latinLnBrk="1" hangingPunct="1">
+      <a:defRPr sz="1200" kern="1200">
+        <a:solidFill>
+          <a:schemeClr val="tx1"/>
+        </a:solidFill>
+        <a:latin typeface="+mn-lt"/>
+        <a:ea typeface="+mn-ea"/>
+        <a:cs typeface="+mn-cs"/>
+      </a:defRPr>
+    </a:lvl3pPr>
+    <a:lvl4pPr marL="1371600" algn="l" defTabSz="914400" rtl="0" eaLnBrk="1" latinLnBrk="1" hangingPunct="1">
+      <a:defRPr sz="1200" kern="1200">
+        <a:solidFill>
+          <a:schemeClr val="tx1"/>
+        </a:solidFill>
+        <a:latin typeface="+mn-lt"/>
+        <a:ea typeface="+mn-ea"/>
+        <a:cs typeface="+mn-cs"/>
+      </a:defRPr>
+    </a:lvl4pPr>
+    <a:lvl5pPr marL="1828800" algn="l" defTabSz="914400" rtl="0" eaLnBrk="1" latinLnBrk="1" hangingPunct="1">
+      <a:defRPr sz="1200" kern="1200">
+        <a:solidFill>
+          <a:schemeClr val="tx1"/>
+        </a:solidFill>
+        <a:latin typeface="+mn-lt"/>
+        <a:ea typeface="+mn-ea"/>
+        <a:cs typeface="+mn-cs"/>
+      </a:defRPr>
+    </a:lvl5pPr>
+    <a:lvl6pPr marL="2286000" algn="l" defTabSz="914400" rtl="0" eaLnBrk="1" latinLnBrk="1" hangingPunct="1">
+      <a:defRPr sz="1200" kern="1200">
+        <a:solidFill>
+          <a:schemeClr val="tx1"/>
+        </a:solidFill>
+        <a:latin typeface="+mn-lt"/>
+        <a:ea typeface="+mn-ea"/>
+        <a:cs typeface="+mn-cs"/>
+      </a:defRPr>
+    </a:lvl6pPr>
+    <a:lvl7pPr marL="2743200" algn="l" defTabSz="914400" rtl="0" eaLnBrk="1" latinLnBrk="1" hangingPunct="1">
+      <a:defRPr sz="1200" kern="1200">
+        <a:solidFill>
+          <a:schemeClr val="tx1"/>
+        </a:solidFill>
+        <a:latin typeface="+mn-lt"/>
+        <a:ea typeface="+mn-ea"/>
+        <a:cs typeface="+mn-cs"/>
+      </a:defRPr>
+    </a:lvl7pPr>
+    <a:lvl8pPr marL="3200400" algn="l" defTabSz="914400" rtl="0" eaLnBrk="1" latinLnBrk="1" hangingPunct="1">
+      <a:defRPr sz="1200" kern="1200">
+        <a:solidFill>
+          <a:schemeClr val="tx1"/>
+        </a:solidFill>
+        <a:latin typeface="+mn-lt"/>
+        <a:ea typeface="+mn-ea"/>
+        <a:cs typeface="+mn-cs"/>
+      </a:defRPr>
+    </a:lvl8pPr>
+    <a:lvl9pPr marL="3657600" algn="l" defTabSz="914400" rtl="0" eaLnBrk="1" latinLnBrk="1" hangingPunct="1">
+      <a:defRPr sz="1200" kern="1200">
+        <a:solidFill>
+          <a:schemeClr val="tx1"/>
+        </a:solidFill>
+        <a:latin typeface="+mn-lt"/>
+        <a:ea typeface="+mn-ea"/>
+        <a:cs typeface="+mn-cs"/>
+      </a:defRPr>
+    </a:lvl9pPr>
+  </p:notesStyle>
+</p:notesMaster>
+</file>
+
+<file path=ppt/notesSlides/notesSlide1.xml><?xml version="1.0" encoding="utf-8"?>
+<p:notes xmlns:a="http://schemas.openxmlformats.org/drawingml/2006/main" xmlns:r="http://schemas.openxmlformats.org/officeDocument/2006/relationships" xmlns:p="http://schemas.openxmlformats.org/presentationml/2006/main">
+  <p:cSld>
+    <p:spTree>
+      <p:nvGrpSpPr>
+        <p:cNvPr id="1" name=""/>
+        <p:cNvGrpSpPr/>
+        <p:nvPr/>
+      </p:nvGrpSpPr>
+      <p:grpSpPr>
+        <a:xfrm>
+          <a:off x="0" y="0"/>
+          <a:ext cx="0" cy="0"/>
+          <a:chOff x="0" y="0"/>
+          <a:chExt cx="0" cy="0"/>
+        </a:xfrm>
+      </p:grpSpPr>
+      <p:sp>
+        <p:nvSpPr>
+          <p:cNvPr id="2" name="슬라이드 이미지 개체 틀 1"/>
+          <p:cNvSpPr>
+            <a:spLocks noGrp="1" noRot="1" noChangeAspect="1"/>
+          </p:cNvSpPr>
+          <p:nvPr>
+            <p:ph type="sldImg"/>
+          </p:nvPr>
+        </p:nvSpPr>
+        <p:spPr/>
+      </p:sp>
+      <p:sp>
+        <p:nvSpPr>
+          <p:cNvPr id="3" name="슬라이드 노트 개체 틀 2"/>
+          <p:cNvSpPr>
+            <a:spLocks noGrp="1"/>
+          </p:cNvSpPr>
+          <p:nvPr>
+            <p:ph type="body" idx="1"/>
+          </p:nvPr>
+        </p:nvSpPr>
+        <p:spPr/>
+        <p:txBody>
+          <a:bodyPr/>
+          <a:lstStyle/>
+          <a:p>
+            <a:endParaRPr lang="ko-KR" altLang="en-US" dirty="0"/>
+          </a:p>
+        </p:txBody>
+      </p:sp>
+      <p:sp>
+        <p:nvSpPr>
+          <p:cNvPr id="4" name="슬라이드 번호 개체 틀 3"/>
+          <p:cNvSpPr>
+            <a:spLocks noGrp="1"/>
+          </p:cNvSpPr>
+          <p:nvPr>
+            <p:ph type="sldNum" sz="quarter" idx="5"/>
+          </p:nvPr>
+        </p:nvSpPr>
+        <p:spPr/>
+        <p:txBody>
+          <a:bodyPr/>
+          <a:lstStyle/>
+          <a:p>
+            <a:fld id="{F5A9DCE2-1A76-46F3-9C22-567E4E81BEC8}" type="slidenum">
+              <a:rPr lang="ko-KR" altLang="en-US" smtClean="0"/>
+              <a:t>6</a:t>
+            </a:fld>
+            <a:endParaRPr lang="ko-KR" altLang="en-US"/>
+          </a:p>
+        </p:txBody>
+      </p:sp>
+    </p:spTree>
+    <p:extLst>
+      <p:ext uri="{BB962C8B-B14F-4D97-AF65-F5344CB8AC3E}">
+        <p14:creationId xmlns:p14="http://schemas.microsoft.com/office/powerpoint/2010/main" val="1019838719"/>
+      </p:ext>
+    </p:extLst>
+  </p:cSld>
+  <p:clrMapOvr>
+    <a:masterClrMapping/>
+  </p:clrMapOvr>
+</p:notes>
+</file>
+
 <file path=ppt/slideLayouts/slideLayout1.xml><?xml version="1.0" encoding="utf-8"?>
 <p:sldLayout xmlns:a="http://schemas.openxmlformats.org/drawingml/2006/main" xmlns:r="http://schemas.openxmlformats.org/officeDocument/2006/relationships" xmlns:p="http://schemas.openxmlformats.org/presentationml/2006/main" type="title" preserve="1">
   <p:cSld name="제목 슬라이드">
@@ -265,7 +700,7 @@
           <a:p>
             <a:fld id="{D81CB108-455C-4D01-80D6-E92D3E7D956D}" type="datetimeFigureOut">
               <a:rPr lang="ko-KR" altLang="en-US" smtClean="0"/>
-              <a:t>2026-10-19</a:t>
+              <a:t>2026-10-20</a:t>
             </a:fld>
             <a:endParaRPr lang="ko-KR" altLang="en-US"/>
           </a:p>
@@ -463,7 +898,7 @@
           <a:p>
             <a:fld id="{D81CB108-455C-4D01-80D6-E92D3E7D956D}" type="datetimeFigureOut">
               <a:rPr lang="ko-KR" altLang="en-US" smtClean="0"/>
-              <a:t>2026-10-19</a:t>
+              <a:t>2026-10-20</a:t>
             </a:fld>
             <a:endParaRPr lang="ko-KR" altLang="en-US"/>
           </a:p>
@@ -671,7 +1106,7 @@
           <a:p>
             <a:fld id="{D81CB108-455C-4D01-80D6-E92D3E7D956D}" type="datetimeFigureOut">
               <a:rPr lang="ko-KR" altLang="en-US" smtClean="0"/>
-              <a:t>2026-10-19</a:t>
+              <a:t>2026-10-20</a:t>
             </a:fld>
             <a:endParaRPr lang="ko-KR" altLang="en-US"/>
           </a:p>
@@ -869,7 +1304,7 @@
           <a:p>
             <a:fld id="{D81CB108-455C-4D01-80D6-E92D3E7D956D}" type="datetimeFigureOut">
               <a:rPr lang="ko-KR" altLang="en-US" smtClean="0"/>
-              <a:t>2026-10-19</a:t>
+              <a:t>2026-10-20</a:t>
             </a:fld>
             <a:endParaRPr lang="ko-KR" altLang="en-US"/>
           </a:p>
@@ -1144,7 +1579,7 @@
           <a:p>
             <a:fld id="{D81CB108-455C-4D01-80D6-E92D3E7D956D}" type="datetimeFigureOut">
               <a:rPr lang="ko-KR" altLang="en-US" smtClean="0"/>
-              <a:t>2026-10-19</a:t>
+              <a:t>2026-10-20</a:t>
             </a:fld>
             <a:endParaRPr lang="ko-KR" altLang="en-US"/>
           </a:p>
@@ -1409,7 +1844,7 @@
           <a:p>
             <a:fld id="{D81CB108-455C-4D01-80D6-E92D3E7D956D}" type="datetimeFigureOut">
               <a:rPr lang="ko-KR" altLang="en-US" smtClean="0"/>
-              <a:t>2026-10-19</a:t>
+              <a:t>2026-10-20</a:t>
             </a:fld>
             <a:endParaRPr lang="ko-KR" altLang="en-US"/>
           </a:p>
@@ -1821,7 +2256,7 @@
           <a:p>
             <a:fld id="{D81CB108-455C-4D01-80D6-E92D3E7D956D}" type="datetimeFigureOut">
               <a:rPr lang="ko-KR" altLang="en-US" smtClean="0"/>
-              <a:t>2026-10-19</a:t>
+              <a:t>2026-10-20</a:t>
             </a:fld>
             <a:endParaRPr lang="ko-KR" altLang="en-US"/>
           </a:p>
@@ -1962,7 +2397,7 @@
           <a:p>
             <a:fld id="{D81CB108-455C-4D01-80D6-E92D3E7D956D}" type="datetimeFigureOut">
               <a:rPr lang="ko-KR" altLang="en-US" smtClean="0"/>
-              <a:t>2026-10-19</a:t>
+              <a:t>2026-10-20</a:t>
             </a:fld>
             <a:endParaRPr lang="ko-KR" altLang="en-US"/>
           </a:p>
@@ -2075,7 +2510,7 @@
           <a:p>
             <a:fld id="{D81CB108-455C-4D01-80D6-E92D3E7D956D}" type="datetimeFigureOut">
               <a:rPr lang="ko-KR" altLang="en-US" smtClean="0"/>
-              <a:t>2026-10-19</a:t>
+              <a:t>2026-10-20</a:t>
             </a:fld>
             <a:endParaRPr lang="ko-KR" altLang="en-US"/>
           </a:p>
@@ -2386,7 +2821,7 @@
           <a:p>
             <a:fld id="{D81CB108-455C-4D01-80D6-E92D3E7D956D}" type="datetimeFigureOut">
               <a:rPr lang="ko-KR" altLang="en-US" smtClean="0"/>
-              <a:t>2026-10-19</a:t>
+              <a:t>2026-10-20</a:t>
             </a:fld>
             <a:endParaRPr lang="ko-KR" altLang="en-US"/>
           </a:p>
@@ -2674,7 +3109,7 @@
           <a:p>
             <a:fld id="{D81CB108-455C-4D01-80D6-E92D3E7D956D}" type="datetimeFigureOut">
               <a:rPr lang="ko-KR" altLang="en-US" smtClean="0"/>
-              <a:t>2026-10-19</a:t>
+              <a:t>2026-10-20</a:t>
             </a:fld>
             <a:endParaRPr lang="ko-KR" altLang="en-US"/>
           </a:p>
@@ -2915,7 +3350,7 @@
           <a:p>
             <a:fld id="{D81CB108-455C-4D01-80D6-E92D3E7D956D}" type="datetimeFigureOut">
               <a:rPr lang="ko-KR" altLang="en-US" smtClean="0"/>
-              <a:t>2026-10-19</a:t>
+              <a:t>2026-10-20</a:t>
             </a:fld>
             <a:endParaRPr lang="ko-KR" altLang="en-US"/>
           </a:p>
@@ -6057,7 +6492,7 @@
           <p:cNvPr id="2" name="제목 1">
             <a:extLst>
               <a:ext uri="{FF2B5EF4-FFF2-40B4-BE49-F238E27FC236}">
-                <a16:creationId xmlns:a16="http://schemas.microsoft.com/office/drawing/2014/main" id="{4ED9DAD7-050C-15E2-B61E-6F520C307B43}"/>
+                <a16:creationId xmlns:a16="http://schemas.microsoft.com/office/drawing/2014/main" id="{CCF29319-983C-63D7-FBC5-33A4E2189F2C}"/>
               </a:ext>
             </a:extLst>
           </p:cNvPr>
@@ -6068,29 +6503,33 @@
             <p:ph type="title"/>
           </p:nvPr>
         </p:nvSpPr>
-        <p:spPr/>
+        <p:spPr>
+          <a:xfrm>
+            <a:off x="838200" y="18255"/>
+            <a:ext cx="10515600" cy="1325563"/>
+          </a:xfrm>
+        </p:spPr>
         <p:txBody>
           <a:bodyPr/>
           <a:lstStyle/>
           <a:p>
             <a:r>
-              <a:rPr lang="ko-KR" altLang="ko-KR" dirty="0"/>
-              <a:t>소프트웨어 상세 설계 및 구현</a:t>
-            </a:r>
-            <a:r>
               <a:rPr lang="en-US" altLang="ko-KR" dirty="0"/>
-              <a:t>(PMIC)</a:t>
-            </a:r>
-            <a:endParaRPr lang="ko-KR" altLang="en-US" dirty="0"/>
-          </a:p>
-        </p:txBody>
-      </p:sp>
-      <p:sp>
-        <p:nvSpPr>
-          <p:cNvPr id="4" name="사각형: 둥근 모서리 3">
-            <a:extLst>
-              <a:ext uri="{FF2B5EF4-FFF2-40B4-BE49-F238E27FC236}">
-                <a16:creationId xmlns:a16="http://schemas.microsoft.com/office/drawing/2014/main" id="{53C5695E-2835-742C-721B-9C6A549A1275}"/>
+              <a:t>RTOS </a:t>
+            </a:r>
+            <a:r>
+              <a:rPr lang="ko-KR" altLang="en-US" dirty="0"/>
+              <a:t>기반 시스템 설계</a:t>
+            </a:r>
+          </a:p>
+        </p:txBody>
+      </p:sp>
+      <p:sp>
+        <p:nvSpPr>
+          <p:cNvPr id="4" name="직사각형 3">
+            <a:extLst>
+              <a:ext uri="{FF2B5EF4-FFF2-40B4-BE49-F238E27FC236}">
+                <a16:creationId xmlns:a16="http://schemas.microsoft.com/office/drawing/2014/main" id="{91FF48B4-D263-4CB4-DB4E-8661DEF6EACE}"/>
               </a:ext>
             </a:extLst>
           </p:cNvPr>
@@ -6099,10 +6538,10 @@
         </p:nvSpPr>
         <p:spPr>
           <a:xfrm>
-            <a:off x="1032386" y="2822705"/>
-            <a:ext cx="3352801" cy="894735"/>
-          </a:xfrm>
-          <a:prstGeom prst="roundRect">
+            <a:off x="196947" y="2067299"/>
+            <a:ext cx="3814916" cy="4566743"/>
+          </a:xfrm>
+          <a:prstGeom prst="rect">
             <a:avLst/>
           </a:prstGeom>
           <a:noFill/>
@@ -6134,64 +6573,10 @@
       </p:sp>
       <p:sp>
         <p:nvSpPr>
-          <p:cNvPr id="5" name="TextBox 4">
-            <a:extLst>
-              <a:ext uri="{FF2B5EF4-FFF2-40B4-BE49-F238E27FC236}">
-                <a16:creationId xmlns:a16="http://schemas.microsoft.com/office/drawing/2014/main" id="{E34057B9-A626-725E-2956-159BC702E690}"/>
-              </a:ext>
-            </a:extLst>
-          </p:cNvPr>
-          <p:cNvSpPr txBox="1"/>
-          <p:nvPr/>
-        </p:nvSpPr>
-        <p:spPr>
-          <a:xfrm>
-            <a:off x="1103405" y="2946908"/>
-            <a:ext cx="3191130" cy="646331"/>
-          </a:xfrm>
-          <a:prstGeom prst="rect">
-            <a:avLst/>
-          </a:prstGeom>
-          <a:noFill/>
-        </p:spPr>
-        <p:txBody>
-          <a:bodyPr wrap="none" rtlCol="0">
-            <a:spAutoFit/>
-          </a:bodyPr>
-          <a:lstStyle/>
-          <a:p>
-            <a:r>
-              <a:rPr lang="ko-KR" altLang="ko-KR" dirty="0"/>
-              <a:t>PMIC_V_REFA_LOW 레지스터</a:t>
-            </a:r>
-            <a:endParaRPr lang="en-US" altLang="ko-KR" dirty="0"/>
-          </a:p>
-          <a:p>
-            <a:r>
-              <a:rPr lang="ko-KR" altLang="en-US" dirty="0"/>
-              <a:t>하위 </a:t>
-            </a:r>
-            <a:r>
-              <a:rPr lang="en-US" altLang="ko-KR" dirty="0"/>
-              <a:t>2</a:t>
-            </a:r>
-            <a:r>
-              <a:rPr lang="ko-KR" altLang="en-US" dirty="0"/>
-              <a:t>비트 </a:t>
-            </a:r>
-            <a:r>
-              <a:rPr lang="ko-KR" altLang="ko-KR" dirty="0"/>
-              <a:t>변경</a:t>
-            </a:r>
-          </a:p>
-        </p:txBody>
-      </p:sp>
-      <p:sp>
-        <p:nvSpPr>
-          <p:cNvPr id="19" name="사각형: 둥근 모서리 18">
-            <a:extLst>
-              <a:ext uri="{FF2B5EF4-FFF2-40B4-BE49-F238E27FC236}">
-                <a16:creationId xmlns:a16="http://schemas.microsoft.com/office/drawing/2014/main" id="{C2D8F22C-7B27-7A26-7339-6DCDA71C7708}"/>
+          <p:cNvPr id="6" name="직사각형 5">
+            <a:extLst>
+              <a:ext uri="{FF2B5EF4-FFF2-40B4-BE49-F238E27FC236}">
+                <a16:creationId xmlns:a16="http://schemas.microsoft.com/office/drawing/2014/main" id="{DC265D45-F9B0-E307-29B2-A1F9609320A9}"/>
               </a:ext>
             </a:extLst>
           </p:cNvPr>
@@ -6200,10 +6585,10 @@
         </p:nvSpPr>
         <p:spPr>
           <a:xfrm>
-            <a:off x="1032386" y="4097594"/>
-            <a:ext cx="3887320" cy="894735"/>
-          </a:xfrm>
-          <a:prstGeom prst="roundRect">
+            <a:off x="8153755" y="1999057"/>
+            <a:ext cx="3814916" cy="4609646"/>
+          </a:xfrm>
+          <a:prstGeom prst="rect">
             <a:avLst/>
           </a:prstGeom>
           <a:noFill/>
@@ -6235,10 +6620,10 @@
       </p:sp>
       <p:sp>
         <p:nvSpPr>
-          <p:cNvPr id="21" name="TextBox 20">
-            <a:extLst>
-              <a:ext uri="{FF2B5EF4-FFF2-40B4-BE49-F238E27FC236}">
-                <a16:creationId xmlns:a16="http://schemas.microsoft.com/office/drawing/2014/main" id="{AA63F40F-D41A-45C9-42C9-C7A18AA353DC}"/>
+          <p:cNvPr id="7" name="TextBox 6">
+            <a:extLst>
+              <a:ext uri="{FF2B5EF4-FFF2-40B4-BE49-F238E27FC236}">
+                <a16:creationId xmlns:a16="http://schemas.microsoft.com/office/drawing/2014/main" id="{F31BF079-C236-D175-79A8-103DCD32498E}"/>
               </a:ext>
             </a:extLst>
           </p:cNvPr>
@@ -6247,8 +6632,8 @@
         </p:nvSpPr>
         <p:spPr>
           <a:xfrm>
-            <a:off x="1103405" y="4360295"/>
-            <a:ext cx="3816301" cy="369332"/>
+            <a:off x="1598448" y="1629725"/>
+            <a:ext cx="1129733" cy="369332"/>
           </a:xfrm>
           <a:prstGeom prst="rect">
             <a:avLst/>
@@ -6262,18 +6647,127 @@
           <a:lstStyle/>
           <a:p>
             <a:r>
-              <a:rPr lang="ko-KR" altLang="ko-KR" dirty="0"/>
-              <a:t>PMIC_V_REFA_LOW 레지스터 변경</a:t>
-            </a:r>
-          </a:p>
-        </p:txBody>
-      </p:sp>
-      <p:sp>
-        <p:nvSpPr>
-          <p:cNvPr id="24" name="사각형: 둥근 모서리 23">
-            <a:extLst>
-              <a:ext uri="{FF2B5EF4-FFF2-40B4-BE49-F238E27FC236}">
-                <a16:creationId xmlns:a16="http://schemas.microsoft.com/office/drawing/2014/main" id="{BD9563E1-0E74-6C7A-4ACB-ABB341E27331}"/>
+              <a:rPr lang="en-US" altLang="ko-KR" dirty="0"/>
+              <a:t>1ms Task</a:t>
+            </a:r>
+            <a:endParaRPr lang="ko-KR" altLang="en-US" dirty="0"/>
+          </a:p>
+        </p:txBody>
+      </p:sp>
+      <p:sp>
+        <p:nvSpPr>
+          <p:cNvPr id="9" name="TextBox 8">
+            <a:extLst>
+              <a:ext uri="{FF2B5EF4-FFF2-40B4-BE49-F238E27FC236}">
+                <a16:creationId xmlns:a16="http://schemas.microsoft.com/office/drawing/2014/main" id="{156306CA-EF0B-D6F5-7074-8664F3C2F784}"/>
+              </a:ext>
+            </a:extLst>
+          </p:cNvPr>
+          <p:cNvSpPr txBox="1"/>
+          <p:nvPr/>
+        </p:nvSpPr>
+        <p:spPr>
+          <a:xfrm>
+            <a:off x="9527530" y="1629725"/>
+            <a:ext cx="1129733" cy="369332"/>
+          </a:xfrm>
+          <a:prstGeom prst="rect">
+            <a:avLst/>
+          </a:prstGeom>
+          <a:noFill/>
+        </p:spPr>
+        <p:txBody>
+          <a:bodyPr wrap="none" rtlCol="0">
+            <a:spAutoFit/>
+          </a:bodyPr>
+          <a:lstStyle/>
+          <a:p>
+            <a:r>
+              <a:rPr lang="en-US" altLang="ko-KR" dirty="0"/>
+              <a:t>5ms Task</a:t>
+            </a:r>
+            <a:endParaRPr lang="ko-KR" altLang="en-US" dirty="0"/>
+          </a:p>
+        </p:txBody>
+      </p:sp>
+      <p:pic>
+        <p:nvPicPr>
+          <p:cNvPr id="11" name="그래픽 10" descr="키 윤곽선">
+            <a:extLst>
+              <a:ext uri="{FF2B5EF4-FFF2-40B4-BE49-F238E27FC236}">
+                <a16:creationId xmlns:a16="http://schemas.microsoft.com/office/drawing/2014/main" id="{CD2AD3E9-5C61-FD82-52AD-24E15D8E46CB}"/>
+              </a:ext>
+            </a:extLst>
+          </p:cNvPr>
+          <p:cNvPicPr>
+            <a:picLocks noChangeAspect="1"/>
+          </p:cNvPicPr>
+          <p:nvPr/>
+        </p:nvPicPr>
+        <p:blipFill>
+          <a:blip>
+            <a:extLst>
+              <a:ext uri="{96DAC541-7B7A-43D3-8B79-37D633B846F1}">
+                <asvg:svgBlip xmlns:asvg="http://schemas.microsoft.com/office/drawing/2016/SVG/main" r:embed="rId2"/>
+              </a:ext>
+            </a:extLst>
+          </a:blip>
+          <a:stretch>
+            <a:fillRect/>
+          </a:stretch>
+        </p:blipFill>
+        <p:spPr>
+          <a:xfrm>
+            <a:off x="4986400" y="1434112"/>
+            <a:ext cx="1442847" cy="1096844"/>
+          </a:xfrm>
+          <a:prstGeom prst="rect">
+            <a:avLst/>
+          </a:prstGeom>
+        </p:spPr>
+      </p:pic>
+      <p:sp>
+        <p:nvSpPr>
+          <p:cNvPr id="13" name="TextBox 12">
+            <a:extLst>
+              <a:ext uri="{FF2B5EF4-FFF2-40B4-BE49-F238E27FC236}">
+                <a16:creationId xmlns:a16="http://schemas.microsoft.com/office/drawing/2014/main" id="{D9C44A05-8D4E-CDBD-5107-2D94CC86342C}"/>
+              </a:ext>
+            </a:extLst>
+          </p:cNvPr>
+          <p:cNvSpPr txBox="1"/>
+          <p:nvPr/>
+        </p:nvSpPr>
+        <p:spPr>
+          <a:xfrm>
+            <a:off x="5292645" y="1327211"/>
+            <a:ext cx="830356" cy="369332"/>
+          </a:xfrm>
+          <a:prstGeom prst="rect">
+            <a:avLst/>
+          </a:prstGeom>
+          <a:noFill/>
+        </p:spPr>
+        <p:txBody>
+          <a:bodyPr wrap="none" rtlCol="0">
+            <a:spAutoFit/>
+          </a:bodyPr>
+          <a:lstStyle/>
+          <a:p>
+            <a:r>
+              <a:rPr lang="en-US" altLang="ko-KR" dirty="0"/>
+              <a:t>mutex</a:t>
+            </a:r>
+            <a:endParaRPr lang="ko-KR" altLang="en-US" dirty="0"/>
+          </a:p>
+        </p:txBody>
+      </p:sp>
+      <p:sp>
+        <p:nvSpPr>
+          <p:cNvPr id="16" name="화살표: 오른쪽 15">
+            <a:extLst>
+              <a:ext uri="{FF2B5EF4-FFF2-40B4-BE49-F238E27FC236}">
+                <a16:creationId xmlns:a16="http://schemas.microsoft.com/office/drawing/2014/main" id="{7F2B2C9D-605E-7415-E620-D705549FC793}"/>
               </a:ext>
             </a:extLst>
           </p:cNvPr>
@@ -6281,11 +6775,11 @@
           <p:nvPr/>
         </p:nvSpPr>
         <p:spPr>
-          <a:xfrm>
-            <a:off x="7074309" y="2802729"/>
-            <a:ext cx="3352801" cy="894735"/>
-          </a:xfrm>
-          <a:prstGeom prst="roundRect">
+          <a:xfrm rot="10049208">
+            <a:off x="3022633" y="1888008"/>
+            <a:ext cx="1803131" cy="326073"/>
+          </a:xfrm>
+          <a:prstGeom prst="rightArrow">
             <a:avLst/>
           </a:prstGeom>
           <a:noFill/>
@@ -6317,50 +6811,10 @@
       </p:sp>
       <p:sp>
         <p:nvSpPr>
-          <p:cNvPr id="26" name="TextBox 25">
-            <a:extLst>
-              <a:ext uri="{FF2B5EF4-FFF2-40B4-BE49-F238E27FC236}">
-                <a16:creationId xmlns:a16="http://schemas.microsoft.com/office/drawing/2014/main" id="{131630A9-1F76-73E8-6B78-101AC4848C1F}"/>
-              </a:ext>
-            </a:extLst>
-          </p:cNvPr>
-          <p:cNvSpPr txBox="1"/>
-          <p:nvPr/>
-        </p:nvSpPr>
-        <p:spPr>
-          <a:xfrm>
-            <a:off x="7357956" y="3065430"/>
-            <a:ext cx="2785506" cy="369332"/>
-          </a:xfrm>
-          <a:prstGeom prst="rect">
-            <a:avLst/>
-          </a:prstGeom>
-          <a:noFill/>
-        </p:spPr>
-        <p:txBody>
-          <a:bodyPr wrap="none" rtlCol="0">
-            <a:spAutoFit/>
-          </a:bodyPr>
-          <a:lstStyle/>
-          <a:p>
-            <a:r>
-              <a:rPr lang="en-US" altLang="ko-KR" dirty="0"/>
-              <a:t>UV, OV </a:t>
-            </a:r>
-            <a:r>
-              <a:rPr lang="ko-KR" altLang="en-US" dirty="0"/>
-              <a:t>레지스터 값 읽기</a:t>
-            </a:r>
-            <a:endParaRPr lang="ko-KR" altLang="ko-KR" dirty="0"/>
-          </a:p>
-        </p:txBody>
-      </p:sp>
-      <p:sp>
-        <p:nvSpPr>
-          <p:cNvPr id="29" name="사각형: 둥근 모서리 28">
-            <a:extLst>
-              <a:ext uri="{FF2B5EF4-FFF2-40B4-BE49-F238E27FC236}">
-                <a16:creationId xmlns:a16="http://schemas.microsoft.com/office/drawing/2014/main" id="{5D036CF2-F1A1-5297-4574-DEC67F7F0E04}"/>
+          <p:cNvPr id="21" name="사각형: 둥근 모서리 20">
+            <a:extLst>
+              <a:ext uri="{FF2B5EF4-FFF2-40B4-BE49-F238E27FC236}">
+                <a16:creationId xmlns:a16="http://schemas.microsoft.com/office/drawing/2014/main" id="{694675F8-E533-9A09-DE51-C3553880E74D}"/>
               </a:ext>
             </a:extLst>
           </p:cNvPr>
@@ -6369,8 +6823,8 @@
         </p:nvSpPr>
         <p:spPr>
           <a:xfrm>
-            <a:off x="7192296" y="4282259"/>
-            <a:ext cx="3069153" cy="894735"/>
+            <a:off x="1188427" y="2136187"/>
+            <a:ext cx="1764401" cy="557981"/>
           </a:xfrm>
           <a:prstGeom prst="roundRect">
             <a:avLst/>
@@ -6404,10 +6858,10 @@
       </p:sp>
       <p:sp>
         <p:nvSpPr>
-          <p:cNvPr id="31" name="TextBox 30">
-            <a:extLst>
-              <a:ext uri="{FF2B5EF4-FFF2-40B4-BE49-F238E27FC236}">
-                <a16:creationId xmlns:a16="http://schemas.microsoft.com/office/drawing/2014/main" id="{4273CF9F-246B-A675-61F5-15DBCA52863A}"/>
+          <p:cNvPr id="25" name="TextBox 24">
+            <a:extLst>
+              <a:ext uri="{FF2B5EF4-FFF2-40B4-BE49-F238E27FC236}">
+                <a16:creationId xmlns:a16="http://schemas.microsoft.com/office/drawing/2014/main" id="{9E09595B-1445-4F77-75BD-DCC3233D1086}"/>
               </a:ext>
             </a:extLst>
           </p:cNvPr>
@@ -6416,8 +6870,8 @@
         </p:nvSpPr>
         <p:spPr>
           <a:xfrm>
-            <a:off x="7475943" y="4544960"/>
-            <a:ext cx="2369559" cy="369332"/>
+            <a:off x="1383740" y="2222321"/>
+            <a:ext cx="1373774" cy="369332"/>
           </a:xfrm>
           <a:prstGeom prst="rect">
             <a:avLst/>
@@ -6432,22 +6886,21 @@
           <a:p>
             <a:r>
               <a:rPr lang="en-US" altLang="ko-KR" dirty="0"/>
-              <a:t>OC </a:t>
+              <a:t>mutex</a:t>
             </a:r>
             <a:r>
               <a:rPr lang="ko-KR" altLang="en-US" dirty="0"/>
-              <a:t>레지스터 값 읽기</a:t>
-            </a:r>
-            <a:endParaRPr lang="ko-KR" altLang="ko-KR" dirty="0"/>
-          </a:p>
-        </p:txBody>
-      </p:sp>
-      <p:sp>
-        <p:nvSpPr>
-          <p:cNvPr id="32" name="사각형: 둥근 모서리 31">
-            <a:extLst>
-              <a:ext uri="{FF2B5EF4-FFF2-40B4-BE49-F238E27FC236}">
-                <a16:creationId xmlns:a16="http://schemas.microsoft.com/office/drawing/2014/main" id="{F3A794DC-5B03-7AC6-749F-BC1013ADA147}"/>
+              <a:t> 획득</a:t>
+            </a:r>
+          </a:p>
+        </p:txBody>
+      </p:sp>
+      <p:sp>
+        <p:nvSpPr>
+          <p:cNvPr id="27" name="사각형: 둥근 모서리 26">
+            <a:extLst>
+              <a:ext uri="{FF2B5EF4-FFF2-40B4-BE49-F238E27FC236}">
+                <a16:creationId xmlns:a16="http://schemas.microsoft.com/office/drawing/2014/main" id="{EA507486-804D-8D32-3898-501B8DA8E764}"/>
               </a:ext>
             </a:extLst>
           </p:cNvPr>
@@ -6456,8 +6909,8 @@
         </p:nvSpPr>
         <p:spPr>
           <a:xfrm>
-            <a:off x="717755" y="2320413"/>
-            <a:ext cx="4699819" cy="3165987"/>
+            <a:off x="9179012" y="2067299"/>
+            <a:ext cx="1764401" cy="557981"/>
           </a:xfrm>
           <a:prstGeom prst="roundRect">
             <a:avLst/>
@@ -6491,10 +6944,49 @@
       </p:sp>
       <p:sp>
         <p:nvSpPr>
-          <p:cNvPr id="34" name="사각형: 둥근 모서리 33">
-            <a:extLst>
-              <a:ext uri="{FF2B5EF4-FFF2-40B4-BE49-F238E27FC236}">
-                <a16:creationId xmlns:a16="http://schemas.microsoft.com/office/drawing/2014/main" id="{34069FDC-AEA0-1775-219D-E4BEBC9B580A}"/>
+          <p:cNvPr id="29" name="TextBox 28">
+            <a:extLst>
+              <a:ext uri="{FF2B5EF4-FFF2-40B4-BE49-F238E27FC236}">
+                <a16:creationId xmlns:a16="http://schemas.microsoft.com/office/drawing/2014/main" id="{1BEA8982-7997-5410-260A-7312300AED9C}"/>
+              </a:ext>
+            </a:extLst>
+          </p:cNvPr>
+          <p:cNvSpPr txBox="1"/>
+          <p:nvPr/>
+        </p:nvSpPr>
+        <p:spPr>
+          <a:xfrm>
+            <a:off x="9378616" y="2161624"/>
+            <a:ext cx="1373774" cy="369332"/>
+          </a:xfrm>
+          <a:prstGeom prst="rect">
+            <a:avLst/>
+          </a:prstGeom>
+          <a:noFill/>
+        </p:spPr>
+        <p:txBody>
+          <a:bodyPr wrap="none" rtlCol="0">
+            <a:spAutoFit/>
+          </a:bodyPr>
+          <a:lstStyle/>
+          <a:p>
+            <a:r>
+              <a:rPr lang="en-US" altLang="ko-KR" dirty="0"/>
+              <a:t>mutex</a:t>
+            </a:r>
+            <a:r>
+              <a:rPr lang="ko-KR" altLang="en-US" dirty="0"/>
+              <a:t> 획득</a:t>
+            </a:r>
+          </a:p>
+        </p:txBody>
+      </p:sp>
+      <p:sp>
+        <p:nvSpPr>
+          <p:cNvPr id="31" name="화살표: 오른쪽 30">
+            <a:extLst>
+              <a:ext uri="{FF2B5EF4-FFF2-40B4-BE49-F238E27FC236}">
+                <a16:creationId xmlns:a16="http://schemas.microsoft.com/office/drawing/2014/main" id="{80B20800-EDD0-BCC0-6C76-B5ABA0E5324D}"/>
               </a:ext>
             </a:extLst>
           </p:cNvPr>
@@ -6502,11 +6994,11 @@
           <p:nvPr/>
         </p:nvSpPr>
         <p:spPr>
-          <a:xfrm>
-            <a:off x="6310812" y="2320413"/>
-            <a:ext cx="4699819" cy="3165987"/>
-          </a:xfrm>
-          <a:prstGeom prst="roundRect">
+          <a:xfrm rot="422864">
+            <a:off x="6543750" y="1848210"/>
+            <a:ext cx="2295109" cy="331934"/>
+          </a:xfrm>
+          <a:prstGeom prst="rightArrow">
             <a:avLst/>
           </a:prstGeom>
           <a:noFill/>
@@ -6536,81 +7028,12 @@
           </a:p>
         </p:txBody>
       </p:sp>
-    </p:spTree>
-    <p:extLst>
-      <p:ext uri="{BB962C8B-B14F-4D97-AF65-F5344CB8AC3E}">
-        <p14:creationId xmlns:p14="http://schemas.microsoft.com/office/powerpoint/2010/main" val="126309422"/>
-      </p:ext>
-    </p:extLst>
-  </p:cSld>
-  <p:clrMapOvr>
-    <a:masterClrMapping/>
-  </p:clrMapOvr>
-</p:sld>
-</file>
-
-<file path=ppt/slides/slide6.xml><?xml version="1.0" encoding="utf-8"?>
-<p:sld xmlns:a="http://schemas.openxmlformats.org/drawingml/2006/main" xmlns:r="http://schemas.openxmlformats.org/officeDocument/2006/relationships" xmlns:p="http://schemas.openxmlformats.org/presentationml/2006/main">
-  <p:cSld>
-    <p:spTree>
-      <p:nvGrpSpPr>
-        <p:cNvPr id="1" name="">
-          <a:extLst>
-            <a:ext uri="{FF2B5EF4-FFF2-40B4-BE49-F238E27FC236}">
-              <a16:creationId xmlns:a16="http://schemas.microsoft.com/office/drawing/2014/main" id="{8C6BB044-4B4E-8A7A-397D-FCC2B9078F93}"/>
-            </a:ext>
-          </a:extLst>
-        </p:cNvPr>
-        <p:cNvGrpSpPr/>
-        <p:nvPr/>
-      </p:nvGrpSpPr>
-      <p:grpSpPr>
-        <a:xfrm>
-          <a:off x="0" y="0"/>
-          <a:ext cx="0" cy="0"/>
-          <a:chOff x="0" y="0"/>
-          <a:chExt cx="0" cy="0"/>
-        </a:xfrm>
-      </p:grpSpPr>
-      <p:sp>
-        <p:nvSpPr>
-          <p:cNvPr id="2" name="제목 1">
-            <a:extLst>
-              <a:ext uri="{FF2B5EF4-FFF2-40B4-BE49-F238E27FC236}">
-                <a16:creationId xmlns:a16="http://schemas.microsoft.com/office/drawing/2014/main" id="{245D428D-064D-EA10-B2D1-193494DA97AD}"/>
-              </a:ext>
-            </a:extLst>
-          </p:cNvPr>
-          <p:cNvSpPr>
-            <a:spLocks noGrp="1"/>
-          </p:cNvSpPr>
-          <p:nvPr>
-            <p:ph type="title"/>
-          </p:nvPr>
-        </p:nvSpPr>
-        <p:spPr/>
-        <p:txBody>
-          <a:bodyPr/>
-          <a:lstStyle/>
-          <a:p>
-            <a:r>
-              <a:rPr lang="ko-KR" altLang="ko-KR" dirty="0"/>
-              <a:t>소프트웨어 상세 설계 및 구현</a:t>
-            </a:r>
-            <a:r>
-              <a:rPr lang="en-US" altLang="ko-KR" dirty="0"/>
-              <a:t>(EEPROM)</a:t>
-            </a:r>
-            <a:endParaRPr lang="ko-KR" altLang="en-US" dirty="0"/>
-          </a:p>
-        </p:txBody>
-      </p:sp>
-      <p:sp>
-        <p:nvSpPr>
-          <p:cNvPr id="4" name="사각형: 둥근 모서리 3">
-            <a:extLst>
-              <a:ext uri="{FF2B5EF4-FFF2-40B4-BE49-F238E27FC236}">
-                <a16:creationId xmlns:a16="http://schemas.microsoft.com/office/drawing/2014/main" id="{86218E6E-8299-984D-BABB-043298BADB62}"/>
+      <p:sp>
+        <p:nvSpPr>
+          <p:cNvPr id="33" name="사각형: 둥근 모서리 32">
+            <a:extLst>
+              <a:ext uri="{FF2B5EF4-FFF2-40B4-BE49-F238E27FC236}">
+                <a16:creationId xmlns:a16="http://schemas.microsoft.com/office/drawing/2014/main" id="{41406883-C8A3-DCD4-3752-CA49F6AC74D0}"/>
               </a:ext>
             </a:extLst>
           </p:cNvPr>
@@ -6619,8 +7042,8 @@
         </p:nvSpPr>
         <p:spPr>
           <a:xfrm>
-            <a:off x="1474838" y="2231117"/>
-            <a:ext cx="2064775" cy="606295"/>
+            <a:off x="443471" y="2857860"/>
+            <a:ext cx="3384067" cy="557981"/>
           </a:xfrm>
           <a:prstGeom prst="roundRect">
             <a:avLst/>
@@ -6654,10 +7077,10 @@
       </p:sp>
       <p:sp>
         <p:nvSpPr>
-          <p:cNvPr id="5" name="TextBox 4">
-            <a:extLst>
-              <a:ext uri="{FF2B5EF4-FFF2-40B4-BE49-F238E27FC236}">
-                <a16:creationId xmlns:a16="http://schemas.microsoft.com/office/drawing/2014/main" id="{DCC4F324-DCE9-C341-C83F-2EC8A614B8C0}"/>
+          <p:cNvPr id="35" name="TextBox 34">
+            <a:extLst>
+              <a:ext uri="{FF2B5EF4-FFF2-40B4-BE49-F238E27FC236}">
+                <a16:creationId xmlns:a16="http://schemas.microsoft.com/office/drawing/2014/main" id="{DFD8F56D-7D6C-36E2-E09D-A291BEDD6C68}"/>
               </a:ext>
             </a:extLst>
           </p:cNvPr>
@@ -6666,8 +7089,8 @@
         </p:nvSpPr>
         <p:spPr>
           <a:xfrm>
-            <a:off x="1545857" y="2355320"/>
-            <a:ext cx="1818831" cy="369332"/>
+            <a:off x="590468" y="2947676"/>
+            <a:ext cx="3061992" cy="369332"/>
           </a:xfrm>
           <a:prstGeom prst="rect">
             <a:avLst/>
@@ -6682,16 +7105,1650 @@
           <a:p>
             <a:r>
               <a:rPr lang="en-US" altLang="ko-KR" dirty="0"/>
-              <a:t>EEPROM WREN</a:t>
-            </a:r>
-            <a:endParaRPr lang="ko-KR" altLang="ko-KR" dirty="0"/>
+              <a:t>PMIC</a:t>
+            </a:r>
+            <a:r>
+              <a:rPr lang="ko-KR" altLang="en-US" dirty="0"/>
+              <a:t>로부터 </a:t>
+            </a:r>
+            <a:r>
+              <a:rPr lang="en-US" altLang="ko-KR" dirty="0"/>
+              <a:t>UV,OV,OC</a:t>
+            </a:r>
+            <a:r>
+              <a:rPr lang="ko-KR" altLang="en-US" dirty="0"/>
+              <a:t> 읽기</a:t>
+            </a:r>
+          </a:p>
+        </p:txBody>
+      </p:sp>
+      <p:sp>
+        <p:nvSpPr>
+          <p:cNvPr id="36" name="다이아몬드 35">
+            <a:extLst>
+              <a:ext uri="{FF2B5EF4-FFF2-40B4-BE49-F238E27FC236}">
+                <a16:creationId xmlns:a16="http://schemas.microsoft.com/office/drawing/2014/main" id="{D7199C88-FA5E-2710-47C1-38F0D721C0E4}"/>
+              </a:ext>
+            </a:extLst>
+          </p:cNvPr>
+          <p:cNvSpPr/>
+          <p:nvPr/>
+        </p:nvSpPr>
+        <p:spPr>
+          <a:xfrm>
+            <a:off x="877036" y="4244815"/>
+            <a:ext cx="2399071" cy="739308"/>
+          </a:xfrm>
+          <a:prstGeom prst="diamond">
+            <a:avLst/>
+          </a:prstGeom>
+          <a:noFill/>
+        </p:spPr>
+        <p:style>
+          <a:lnRef idx="2">
+            <a:schemeClr val="accent1">
+              <a:shade val="15000"/>
+            </a:schemeClr>
+          </a:lnRef>
+          <a:fillRef idx="1">
+            <a:schemeClr val="accent1"/>
+          </a:fillRef>
+          <a:effectRef idx="0">
+            <a:schemeClr val="accent1"/>
+          </a:effectRef>
+          <a:fontRef idx="minor">
+            <a:schemeClr val="lt1"/>
+          </a:fontRef>
+        </p:style>
+        <p:txBody>
+          <a:bodyPr rtlCol="0" anchor="ctr"/>
+          <a:lstStyle/>
+          <a:p>
+            <a:pPr algn="ctr"/>
+            <a:endParaRPr lang="ko-KR" altLang="en-US"/>
+          </a:p>
+        </p:txBody>
+      </p:sp>
+      <p:sp>
+        <p:nvSpPr>
+          <p:cNvPr id="38" name="TextBox 37">
+            <a:extLst>
+              <a:ext uri="{FF2B5EF4-FFF2-40B4-BE49-F238E27FC236}">
+                <a16:creationId xmlns:a16="http://schemas.microsoft.com/office/drawing/2014/main" id="{E84A45C1-6E83-0B8E-3EC3-9B0079B14C7B}"/>
+              </a:ext>
+            </a:extLst>
+          </p:cNvPr>
+          <p:cNvSpPr txBox="1"/>
+          <p:nvPr/>
+        </p:nvSpPr>
+        <p:spPr>
+          <a:xfrm>
+            <a:off x="1159094" y="4429803"/>
+            <a:ext cx="1745991" cy="369332"/>
+          </a:xfrm>
+          <a:prstGeom prst="rect">
+            <a:avLst/>
+          </a:prstGeom>
+          <a:noFill/>
+        </p:spPr>
+        <p:txBody>
+          <a:bodyPr wrap="none" rtlCol="0">
+            <a:spAutoFit/>
+          </a:bodyPr>
+          <a:lstStyle/>
+          <a:p>
+            <a:r>
+              <a:rPr lang="en-US" altLang="ko-KR" dirty="0"/>
+              <a:t>CAN </a:t>
+            </a:r>
+            <a:r>
+              <a:rPr lang="ko-KR" altLang="en-US" dirty="0"/>
+              <a:t>수신 있음</a:t>
+            </a:r>
+          </a:p>
+        </p:txBody>
+      </p:sp>
+      <p:sp>
+        <p:nvSpPr>
+          <p:cNvPr id="40" name="TextBox 39">
+            <a:extLst>
+              <a:ext uri="{FF2B5EF4-FFF2-40B4-BE49-F238E27FC236}">
+                <a16:creationId xmlns:a16="http://schemas.microsoft.com/office/drawing/2014/main" id="{3C0C81D3-EB60-1E7A-C089-75C020F352ED}"/>
+              </a:ext>
+            </a:extLst>
+          </p:cNvPr>
+          <p:cNvSpPr txBox="1"/>
+          <p:nvPr/>
+        </p:nvSpPr>
+        <p:spPr>
+          <a:xfrm>
+            <a:off x="1354407" y="5902388"/>
+            <a:ext cx="1373774" cy="369332"/>
+          </a:xfrm>
+          <a:prstGeom prst="rect">
+            <a:avLst/>
+          </a:prstGeom>
+          <a:noFill/>
+        </p:spPr>
+        <p:txBody>
+          <a:bodyPr wrap="none" rtlCol="0">
+            <a:spAutoFit/>
+          </a:bodyPr>
+          <a:lstStyle/>
+          <a:p>
+            <a:r>
+              <a:rPr lang="en-US" altLang="ko-KR" dirty="0"/>
+              <a:t>mutex</a:t>
+            </a:r>
+            <a:r>
+              <a:rPr lang="ko-KR" altLang="en-US" dirty="0"/>
+              <a:t> 반납</a:t>
+            </a:r>
+          </a:p>
+        </p:txBody>
+      </p:sp>
+      <p:sp>
+        <p:nvSpPr>
+          <p:cNvPr id="42" name="사각형: 둥근 모서리 41">
+            <a:extLst>
+              <a:ext uri="{FF2B5EF4-FFF2-40B4-BE49-F238E27FC236}">
+                <a16:creationId xmlns:a16="http://schemas.microsoft.com/office/drawing/2014/main" id="{F98B13FF-AD4A-600C-FEE1-DFA1EA76986D}"/>
+              </a:ext>
+            </a:extLst>
+          </p:cNvPr>
+          <p:cNvSpPr/>
+          <p:nvPr/>
+        </p:nvSpPr>
+        <p:spPr>
+          <a:xfrm>
+            <a:off x="1159094" y="5844233"/>
+            <a:ext cx="1764401" cy="557981"/>
+          </a:xfrm>
+          <a:prstGeom prst="roundRect">
+            <a:avLst/>
+          </a:prstGeom>
+          <a:noFill/>
+        </p:spPr>
+        <p:style>
+          <a:lnRef idx="2">
+            <a:schemeClr val="accent1">
+              <a:shade val="15000"/>
+            </a:schemeClr>
+          </a:lnRef>
+          <a:fillRef idx="1">
+            <a:schemeClr val="accent1"/>
+          </a:fillRef>
+          <a:effectRef idx="0">
+            <a:schemeClr val="accent1"/>
+          </a:effectRef>
+          <a:fontRef idx="minor">
+            <a:schemeClr val="lt1"/>
+          </a:fontRef>
+        </p:style>
+        <p:txBody>
+          <a:bodyPr rtlCol="0" anchor="ctr"/>
+          <a:lstStyle/>
+          <a:p>
+            <a:pPr algn="ctr"/>
+            <a:endParaRPr lang="ko-KR" altLang="en-US"/>
+          </a:p>
+        </p:txBody>
+      </p:sp>
+      <p:sp>
+        <p:nvSpPr>
+          <p:cNvPr id="44" name="TextBox 43">
+            <a:extLst>
+              <a:ext uri="{FF2B5EF4-FFF2-40B4-BE49-F238E27FC236}">
+                <a16:creationId xmlns:a16="http://schemas.microsoft.com/office/drawing/2014/main" id="{22A5546E-B4E2-D934-BAD7-58FE93B49D77}"/>
+              </a:ext>
+            </a:extLst>
+          </p:cNvPr>
+          <p:cNvSpPr txBox="1"/>
+          <p:nvPr/>
+        </p:nvSpPr>
+        <p:spPr>
+          <a:xfrm>
+            <a:off x="388452" y="5227249"/>
+            <a:ext cx="3431902" cy="369332"/>
+          </a:xfrm>
+          <a:prstGeom prst="rect">
+            <a:avLst/>
+          </a:prstGeom>
+          <a:noFill/>
+        </p:spPr>
+        <p:txBody>
+          <a:bodyPr wrap="none" rtlCol="0">
+            <a:spAutoFit/>
+          </a:bodyPr>
+          <a:lstStyle/>
+          <a:p>
+            <a:r>
+              <a:rPr lang="en-US" altLang="ko-KR" dirty="0"/>
+              <a:t>UDS</a:t>
+            </a:r>
+            <a:r>
+              <a:rPr lang="ko-KR" altLang="en-US" dirty="0"/>
+              <a:t> </a:t>
+            </a:r>
+            <a:r>
+              <a:rPr lang="en-US" altLang="ko-KR" dirty="0"/>
+              <a:t>ID</a:t>
+            </a:r>
+            <a:r>
+              <a:rPr lang="ko-KR" altLang="en-US" dirty="0"/>
+              <a:t>에 따라 </a:t>
+            </a:r>
+            <a:r>
+              <a:rPr lang="en-US" altLang="ko-KR" dirty="0"/>
+              <a:t>DTC Read/Clear</a:t>
+            </a:r>
+            <a:endParaRPr lang="ko-KR" altLang="en-US" dirty="0"/>
+          </a:p>
+        </p:txBody>
+      </p:sp>
+      <p:sp>
+        <p:nvSpPr>
+          <p:cNvPr id="46" name="사각형: 둥근 모서리 45">
+            <a:extLst>
+              <a:ext uri="{FF2B5EF4-FFF2-40B4-BE49-F238E27FC236}">
+                <a16:creationId xmlns:a16="http://schemas.microsoft.com/office/drawing/2014/main" id="{F4D0B180-FEA3-E95F-4375-DEB23ABE7EC7}"/>
+              </a:ext>
+            </a:extLst>
+          </p:cNvPr>
+          <p:cNvSpPr/>
+          <p:nvPr/>
+        </p:nvSpPr>
+        <p:spPr>
+          <a:xfrm>
+            <a:off x="349260" y="5132925"/>
+            <a:ext cx="3526722" cy="557981"/>
+          </a:xfrm>
+          <a:prstGeom prst="roundRect">
+            <a:avLst/>
+          </a:prstGeom>
+          <a:noFill/>
+        </p:spPr>
+        <p:style>
+          <a:lnRef idx="2">
+            <a:schemeClr val="accent1">
+              <a:shade val="15000"/>
+            </a:schemeClr>
+          </a:lnRef>
+          <a:fillRef idx="1">
+            <a:schemeClr val="accent1"/>
+          </a:fillRef>
+          <a:effectRef idx="0">
+            <a:schemeClr val="accent1"/>
+          </a:effectRef>
+          <a:fontRef idx="minor">
+            <a:schemeClr val="lt1"/>
+          </a:fontRef>
+        </p:style>
+        <p:txBody>
+          <a:bodyPr rtlCol="0" anchor="ctr"/>
+          <a:lstStyle/>
+          <a:p>
+            <a:pPr algn="ctr"/>
+            <a:endParaRPr lang="ko-KR" altLang="en-US"/>
+          </a:p>
+        </p:txBody>
+      </p:sp>
+      <p:sp>
+        <p:nvSpPr>
+          <p:cNvPr id="49" name="화살표: 아래쪽 48">
+            <a:extLst>
+              <a:ext uri="{FF2B5EF4-FFF2-40B4-BE49-F238E27FC236}">
+                <a16:creationId xmlns:a16="http://schemas.microsoft.com/office/drawing/2014/main" id="{A0986017-0487-6743-7CEB-F199C47B7952}"/>
+              </a:ext>
+            </a:extLst>
+          </p:cNvPr>
+          <p:cNvSpPr/>
+          <p:nvPr/>
+        </p:nvSpPr>
+        <p:spPr>
+          <a:xfrm>
+            <a:off x="1933611" y="2679905"/>
+            <a:ext cx="294968" cy="256228"/>
+          </a:xfrm>
+          <a:prstGeom prst="downArrow">
+            <a:avLst/>
+          </a:prstGeom>
+          <a:noFill/>
+        </p:spPr>
+        <p:style>
+          <a:lnRef idx="2">
+            <a:schemeClr val="accent1">
+              <a:shade val="15000"/>
+            </a:schemeClr>
+          </a:lnRef>
+          <a:fillRef idx="1">
+            <a:schemeClr val="accent1"/>
+          </a:fillRef>
+          <a:effectRef idx="0">
+            <a:schemeClr val="accent1"/>
+          </a:effectRef>
+          <a:fontRef idx="minor">
+            <a:schemeClr val="lt1"/>
+          </a:fontRef>
+        </p:style>
+        <p:txBody>
+          <a:bodyPr rtlCol="0" anchor="ctr"/>
+          <a:lstStyle/>
+          <a:p>
+            <a:pPr algn="ctr"/>
+            <a:endParaRPr lang="ko-KR" altLang="en-US"/>
+          </a:p>
+        </p:txBody>
+      </p:sp>
+      <p:sp>
+        <p:nvSpPr>
+          <p:cNvPr id="51" name="화살표: 아래쪽 50">
+            <a:extLst>
+              <a:ext uri="{FF2B5EF4-FFF2-40B4-BE49-F238E27FC236}">
+                <a16:creationId xmlns:a16="http://schemas.microsoft.com/office/drawing/2014/main" id="{03146E7A-BE48-BBC1-3C57-CD1C66B95896}"/>
+              </a:ext>
+            </a:extLst>
+          </p:cNvPr>
+          <p:cNvSpPr/>
+          <p:nvPr/>
+        </p:nvSpPr>
+        <p:spPr>
+          <a:xfrm>
+            <a:off x="1939099" y="4053821"/>
+            <a:ext cx="294968" cy="256228"/>
+          </a:xfrm>
+          <a:prstGeom prst="downArrow">
+            <a:avLst/>
+          </a:prstGeom>
+          <a:noFill/>
+        </p:spPr>
+        <p:style>
+          <a:lnRef idx="2">
+            <a:schemeClr val="accent1">
+              <a:shade val="15000"/>
+            </a:schemeClr>
+          </a:lnRef>
+          <a:fillRef idx="1">
+            <a:schemeClr val="accent1"/>
+          </a:fillRef>
+          <a:effectRef idx="0">
+            <a:schemeClr val="accent1"/>
+          </a:effectRef>
+          <a:fontRef idx="minor">
+            <a:schemeClr val="lt1"/>
+          </a:fontRef>
+        </p:style>
+        <p:txBody>
+          <a:bodyPr rtlCol="0" anchor="ctr"/>
+          <a:lstStyle/>
+          <a:p>
+            <a:pPr algn="ctr"/>
+            <a:endParaRPr lang="ko-KR" altLang="en-US"/>
+          </a:p>
+        </p:txBody>
+      </p:sp>
+      <p:sp>
+        <p:nvSpPr>
+          <p:cNvPr id="53" name="화살표: 아래쪽 52">
+            <a:extLst>
+              <a:ext uri="{FF2B5EF4-FFF2-40B4-BE49-F238E27FC236}">
+                <a16:creationId xmlns:a16="http://schemas.microsoft.com/office/drawing/2014/main" id="{D9CBB9BC-00B9-C7DC-00CC-BB940332E9C2}"/>
+              </a:ext>
+            </a:extLst>
+          </p:cNvPr>
+          <p:cNvSpPr/>
+          <p:nvPr/>
+        </p:nvSpPr>
+        <p:spPr>
+          <a:xfrm>
+            <a:off x="1899219" y="4912799"/>
+            <a:ext cx="294968" cy="256228"/>
+          </a:xfrm>
+          <a:prstGeom prst="downArrow">
+            <a:avLst/>
+          </a:prstGeom>
+          <a:noFill/>
+        </p:spPr>
+        <p:style>
+          <a:lnRef idx="2">
+            <a:schemeClr val="accent1">
+              <a:shade val="15000"/>
+            </a:schemeClr>
+          </a:lnRef>
+          <a:fillRef idx="1">
+            <a:schemeClr val="accent1"/>
+          </a:fillRef>
+          <a:effectRef idx="0">
+            <a:schemeClr val="accent1"/>
+          </a:effectRef>
+          <a:fontRef idx="minor">
+            <a:schemeClr val="lt1"/>
+          </a:fontRef>
+        </p:style>
+        <p:txBody>
+          <a:bodyPr rtlCol="0" anchor="ctr"/>
+          <a:lstStyle/>
+          <a:p>
+            <a:pPr algn="ctr"/>
+            <a:endParaRPr lang="ko-KR" altLang="en-US"/>
+          </a:p>
+        </p:txBody>
+      </p:sp>
+      <p:sp>
+        <p:nvSpPr>
+          <p:cNvPr id="55" name="TextBox 54">
+            <a:extLst>
+              <a:ext uri="{FF2B5EF4-FFF2-40B4-BE49-F238E27FC236}">
+                <a16:creationId xmlns:a16="http://schemas.microsoft.com/office/drawing/2014/main" id="{92F38EFC-8710-5548-9E4C-78FD0B0A0780}"/>
+              </a:ext>
+            </a:extLst>
+          </p:cNvPr>
+          <p:cNvSpPr txBox="1"/>
+          <p:nvPr/>
+        </p:nvSpPr>
+        <p:spPr>
+          <a:xfrm>
+            <a:off x="1490966" y="4874735"/>
+            <a:ext cx="408253" cy="276999"/>
+          </a:xfrm>
+          <a:prstGeom prst="rect">
+            <a:avLst/>
+          </a:prstGeom>
+          <a:noFill/>
+        </p:spPr>
+        <p:txBody>
+          <a:bodyPr wrap="none" rtlCol="0">
+            <a:spAutoFit/>
+          </a:bodyPr>
+          <a:lstStyle/>
+          <a:p>
+            <a:r>
+              <a:rPr lang="en-US" altLang="ko-KR" sz="1200" dirty="0"/>
+              <a:t>yes</a:t>
+            </a:r>
+            <a:endParaRPr lang="ko-KR" altLang="en-US" sz="1200" dirty="0"/>
+          </a:p>
+        </p:txBody>
+      </p:sp>
+      <p:sp>
+        <p:nvSpPr>
+          <p:cNvPr id="56" name="화살표: U자형 55">
+            <a:extLst>
+              <a:ext uri="{FF2B5EF4-FFF2-40B4-BE49-F238E27FC236}">
+                <a16:creationId xmlns:a16="http://schemas.microsoft.com/office/drawing/2014/main" id="{424B652D-1ECB-1D9E-10E5-04F7C1266DBD}"/>
+              </a:ext>
+            </a:extLst>
+          </p:cNvPr>
+          <p:cNvSpPr/>
+          <p:nvPr/>
+        </p:nvSpPr>
+        <p:spPr>
+          <a:xfrm rot="5400000">
+            <a:off x="2797864" y="4661622"/>
+            <a:ext cx="1656739" cy="1369334"/>
+          </a:xfrm>
+          <a:prstGeom prst="uturnArrow">
+            <a:avLst>
+              <a:gd name="adj1" fmla="val 11594"/>
+              <a:gd name="adj2" fmla="val 12976"/>
+              <a:gd name="adj3" fmla="val 23447"/>
+              <a:gd name="adj4" fmla="val 34060"/>
+              <a:gd name="adj5" fmla="val 100000"/>
+            </a:avLst>
+          </a:prstGeom>
+          <a:noFill/>
+        </p:spPr>
+        <p:style>
+          <a:lnRef idx="2">
+            <a:schemeClr val="accent1">
+              <a:shade val="15000"/>
+            </a:schemeClr>
+          </a:lnRef>
+          <a:fillRef idx="1">
+            <a:schemeClr val="accent1"/>
+          </a:fillRef>
+          <a:effectRef idx="0">
+            <a:schemeClr val="accent1"/>
+          </a:effectRef>
+          <a:fontRef idx="minor">
+            <a:schemeClr val="lt1"/>
+          </a:fontRef>
+        </p:style>
+        <p:txBody>
+          <a:bodyPr rtlCol="0" anchor="ctr"/>
+          <a:lstStyle/>
+          <a:p>
+            <a:pPr algn="ctr"/>
+            <a:endParaRPr lang="ko-KR" altLang="en-US">
+              <a:solidFill>
+                <a:schemeClr val="tx1"/>
+              </a:solidFill>
+            </a:endParaRPr>
+          </a:p>
+        </p:txBody>
+      </p:sp>
+      <p:sp>
+        <p:nvSpPr>
+          <p:cNvPr id="58" name="TextBox 57">
+            <a:extLst>
+              <a:ext uri="{FF2B5EF4-FFF2-40B4-BE49-F238E27FC236}">
+                <a16:creationId xmlns:a16="http://schemas.microsoft.com/office/drawing/2014/main" id="{627E6F8F-4DCA-6372-F5C3-03D18FF188AA}"/>
+              </a:ext>
+            </a:extLst>
+          </p:cNvPr>
+          <p:cNvSpPr txBox="1"/>
+          <p:nvPr/>
+        </p:nvSpPr>
+        <p:spPr>
+          <a:xfrm>
+            <a:off x="3431260" y="4211809"/>
+            <a:ext cx="367408" cy="276999"/>
+          </a:xfrm>
+          <a:prstGeom prst="rect">
+            <a:avLst/>
+          </a:prstGeom>
+          <a:noFill/>
+        </p:spPr>
+        <p:txBody>
+          <a:bodyPr wrap="none" rtlCol="0">
+            <a:spAutoFit/>
+          </a:bodyPr>
+          <a:lstStyle/>
+          <a:p>
+            <a:r>
+              <a:rPr lang="en-US" altLang="ko-KR" sz="1200" dirty="0"/>
+              <a:t>no</a:t>
+            </a:r>
+            <a:endParaRPr lang="ko-KR" altLang="en-US" sz="1200" dirty="0"/>
+          </a:p>
+        </p:txBody>
+      </p:sp>
+      <p:sp>
+        <p:nvSpPr>
+          <p:cNvPr id="60" name="사각형: 둥근 모서리 59">
+            <a:extLst>
+              <a:ext uri="{FF2B5EF4-FFF2-40B4-BE49-F238E27FC236}">
+                <a16:creationId xmlns:a16="http://schemas.microsoft.com/office/drawing/2014/main" id="{9F91BF75-40EE-CD0A-4938-21A7420E2975}"/>
+              </a:ext>
+            </a:extLst>
+          </p:cNvPr>
+          <p:cNvSpPr/>
+          <p:nvPr/>
+        </p:nvSpPr>
+        <p:spPr>
+          <a:xfrm>
+            <a:off x="8624417" y="2793982"/>
+            <a:ext cx="2873590" cy="557981"/>
+          </a:xfrm>
+          <a:prstGeom prst="roundRect">
+            <a:avLst/>
+          </a:prstGeom>
+          <a:noFill/>
+        </p:spPr>
+        <p:style>
+          <a:lnRef idx="2">
+            <a:schemeClr val="accent1">
+              <a:shade val="15000"/>
+            </a:schemeClr>
+          </a:lnRef>
+          <a:fillRef idx="1">
+            <a:schemeClr val="accent1"/>
+          </a:fillRef>
+          <a:effectRef idx="0">
+            <a:schemeClr val="accent1"/>
+          </a:effectRef>
+          <a:fontRef idx="minor">
+            <a:schemeClr val="lt1"/>
+          </a:fontRef>
+        </p:style>
+        <p:txBody>
+          <a:bodyPr rtlCol="0" anchor="ctr"/>
+          <a:lstStyle/>
+          <a:p>
+            <a:pPr algn="ctr"/>
+            <a:endParaRPr lang="ko-KR" altLang="en-US"/>
+          </a:p>
+        </p:txBody>
+      </p:sp>
+      <p:sp>
+        <p:nvSpPr>
+          <p:cNvPr id="62" name="TextBox 61">
+            <a:extLst>
+              <a:ext uri="{FF2B5EF4-FFF2-40B4-BE49-F238E27FC236}">
+                <a16:creationId xmlns:a16="http://schemas.microsoft.com/office/drawing/2014/main" id="{63F4074E-636C-06E4-58EB-7755BA577330}"/>
+              </a:ext>
+            </a:extLst>
+          </p:cNvPr>
+          <p:cNvSpPr txBox="1"/>
+          <p:nvPr/>
+        </p:nvSpPr>
+        <p:spPr>
+          <a:xfrm>
+            <a:off x="8728451" y="2900288"/>
+            <a:ext cx="2641492" cy="369332"/>
+          </a:xfrm>
+          <a:prstGeom prst="rect">
+            <a:avLst/>
+          </a:prstGeom>
+          <a:noFill/>
+        </p:spPr>
+        <p:txBody>
+          <a:bodyPr wrap="none" rtlCol="0">
+            <a:spAutoFit/>
+          </a:bodyPr>
+          <a:lstStyle/>
+          <a:p>
+            <a:r>
+              <a:rPr lang="en-US" altLang="ko-KR" dirty="0"/>
+              <a:t>PMIC</a:t>
+            </a:r>
+            <a:r>
+              <a:rPr lang="ko-KR" altLang="en-US" dirty="0"/>
+              <a:t>로부터 </a:t>
+            </a:r>
+            <a:r>
+              <a:rPr lang="en-US" altLang="ko-KR" dirty="0"/>
+              <a:t>UVLO </a:t>
+            </a:r>
+            <a:r>
+              <a:rPr lang="ko-KR" altLang="en-US" dirty="0"/>
+              <a:t>읽기</a:t>
+            </a:r>
+          </a:p>
+        </p:txBody>
+      </p:sp>
+      <p:sp>
+        <p:nvSpPr>
+          <p:cNvPr id="64" name="화살표: 아래쪽 63">
+            <a:extLst>
+              <a:ext uri="{FF2B5EF4-FFF2-40B4-BE49-F238E27FC236}">
+                <a16:creationId xmlns:a16="http://schemas.microsoft.com/office/drawing/2014/main" id="{7A9B81E9-07AF-9273-F885-0BB8630BF42F}"/>
+              </a:ext>
+            </a:extLst>
+          </p:cNvPr>
+          <p:cNvSpPr/>
+          <p:nvPr/>
+        </p:nvSpPr>
+        <p:spPr>
+          <a:xfrm>
+            <a:off x="9901713" y="2584078"/>
+            <a:ext cx="294968" cy="256228"/>
+          </a:xfrm>
+          <a:prstGeom prst="downArrow">
+            <a:avLst/>
+          </a:prstGeom>
+          <a:noFill/>
+        </p:spPr>
+        <p:style>
+          <a:lnRef idx="2">
+            <a:schemeClr val="accent1">
+              <a:shade val="15000"/>
+            </a:schemeClr>
+          </a:lnRef>
+          <a:fillRef idx="1">
+            <a:schemeClr val="accent1"/>
+          </a:fillRef>
+          <a:effectRef idx="0">
+            <a:schemeClr val="accent1"/>
+          </a:effectRef>
+          <a:fontRef idx="minor">
+            <a:schemeClr val="lt1"/>
+          </a:fontRef>
+        </p:style>
+        <p:txBody>
+          <a:bodyPr rtlCol="0" anchor="ctr"/>
+          <a:lstStyle/>
+          <a:p>
+            <a:pPr algn="ctr"/>
+            <a:endParaRPr lang="ko-KR" altLang="en-US"/>
+          </a:p>
+        </p:txBody>
+      </p:sp>
+      <p:sp>
+        <p:nvSpPr>
+          <p:cNvPr id="68" name="사각형: 둥근 모서리 67">
+            <a:extLst>
+              <a:ext uri="{FF2B5EF4-FFF2-40B4-BE49-F238E27FC236}">
+                <a16:creationId xmlns:a16="http://schemas.microsoft.com/office/drawing/2014/main" id="{3D32CF95-89D8-2A54-8FE9-FC257D593289}"/>
+              </a:ext>
+            </a:extLst>
+          </p:cNvPr>
+          <p:cNvSpPr/>
+          <p:nvPr/>
+        </p:nvSpPr>
+        <p:spPr>
+          <a:xfrm>
+            <a:off x="8368752" y="4231767"/>
+            <a:ext cx="3447290" cy="557981"/>
+          </a:xfrm>
+          <a:prstGeom prst="roundRect">
+            <a:avLst/>
+          </a:prstGeom>
+          <a:noFill/>
+          <a:ln>
+            <a:prstDash val="dash"/>
+          </a:ln>
+        </p:spPr>
+        <p:style>
+          <a:lnRef idx="2">
+            <a:schemeClr val="accent1">
+              <a:shade val="15000"/>
+            </a:schemeClr>
+          </a:lnRef>
+          <a:fillRef idx="1">
+            <a:schemeClr val="accent1"/>
+          </a:fillRef>
+          <a:effectRef idx="0">
+            <a:schemeClr val="accent1"/>
+          </a:effectRef>
+          <a:fontRef idx="minor">
+            <a:schemeClr val="lt1"/>
+          </a:fontRef>
+        </p:style>
+        <p:txBody>
+          <a:bodyPr rtlCol="0" anchor="ctr"/>
+          <a:lstStyle/>
+          <a:p>
+            <a:pPr algn="ctr"/>
+            <a:endParaRPr lang="ko-KR" altLang="en-US"/>
+          </a:p>
+        </p:txBody>
+      </p:sp>
+      <p:sp>
+        <p:nvSpPr>
+          <p:cNvPr id="70" name="TextBox 69">
+            <a:extLst>
+              <a:ext uri="{FF2B5EF4-FFF2-40B4-BE49-F238E27FC236}">
+                <a16:creationId xmlns:a16="http://schemas.microsoft.com/office/drawing/2014/main" id="{353969B8-E8EF-CF8A-584D-A9CEE6381FE3}"/>
+              </a:ext>
+            </a:extLst>
+          </p:cNvPr>
+          <p:cNvSpPr txBox="1"/>
+          <p:nvPr/>
+        </p:nvSpPr>
+        <p:spPr>
+          <a:xfrm>
+            <a:off x="8368752" y="4333253"/>
+            <a:ext cx="3552063" cy="369332"/>
+          </a:xfrm>
+          <a:prstGeom prst="rect">
+            <a:avLst/>
+          </a:prstGeom>
+          <a:noFill/>
+        </p:spPr>
+        <p:txBody>
+          <a:bodyPr wrap="none" rtlCol="0">
+            <a:spAutoFit/>
+          </a:bodyPr>
+          <a:lstStyle/>
+          <a:p>
+            <a:r>
+              <a:rPr lang="en-US" altLang="ko-KR" dirty="0"/>
+              <a:t>Power-switch</a:t>
+            </a:r>
+            <a:r>
+              <a:rPr lang="ko-KR" altLang="en-US" dirty="0"/>
+              <a:t>로부터 과전류 감지</a:t>
+            </a:r>
+          </a:p>
+        </p:txBody>
+      </p:sp>
+      <p:sp>
+        <p:nvSpPr>
+          <p:cNvPr id="72" name="화살표: 아래쪽 71">
+            <a:extLst>
+              <a:ext uri="{FF2B5EF4-FFF2-40B4-BE49-F238E27FC236}">
+                <a16:creationId xmlns:a16="http://schemas.microsoft.com/office/drawing/2014/main" id="{A256D8EF-9C21-A8BE-6E93-2187D9DF4197}"/>
+              </a:ext>
+            </a:extLst>
+          </p:cNvPr>
+          <p:cNvSpPr/>
+          <p:nvPr/>
+        </p:nvSpPr>
+        <p:spPr>
+          <a:xfrm>
+            <a:off x="9906213" y="4038191"/>
+            <a:ext cx="294968" cy="256228"/>
+          </a:xfrm>
+          <a:prstGeom prst="downArrow">
+            <a:avLst/>
+          </a:prstGeom>
+          <a:noFill/>
+        </p:spPr>
+        <p:style>
+          <a:lnRef idx="2">
+            <a:schemeClr val="accent1">
+              <a:shade val="15000"/>
+            </a:schemeClr>
+          </a:lnRef>
+          <a:fillRef idx="1">
+            <a:schemeClr val="accent1"/>
+          </a:fillRef>
+          <a:effectRef idx="0">
+            <a:schemeClr val="accent1"/>
+          </a:effectRef>
+          <a:fontRef idx="minor">
+            <a:schemeClr val="lt1"/>
+          </a:fontRef>
+        </p:style>
+        <p:txBody>
+          <a:bodyPr rtlCol="0" anchor="ctr"/>
+          <a:lstStyle/>
+          <a:p>
+            <a:pPr algn="ctr"/>
+            <a:endParaRPr lang="ko-KR" altLang="en-US"/>
+          </a:p>
+        </p:txBody>
+      </p:sp>
+      <p:sp>
+        <p:nvSpPr>
+          <p:cNvPr id="74" name="사각형: 둥근 모서리 73">
+            <a:extLst>
+              <a:ext uri="{FF2B5EF4-FFF2-40B4-BE49-F238E27FC236}">
+                <a16:creationId xmlns:a16="http://schemas.microsoft.com/office/drawing/2014/main" id="{2B5223EF-9DAE-0794-0593-72ED8909A302}"/>
+              </a:ext>
+            </a:extLst>
+          </p:cNvPr>
+          <p:cNvSpPr/>
+          <p:nvPr/>
+        </p:nvSpPr>
+        <p:spPr>
+          <a:xfrm>
+            <a:off x="8624417" y="5714111"/>
+            <a:ext cx="2873590" cy="557981"/>
+          </a:xfrm>
+          <a:prstGeom prst="roundRect">
+            <a:avLst/>
+          </a:prstGeom>
+          <a:noFill/>
+        </p:spPr>
+        <p:style>
+          <a:lnRef idx="2">
+            <a:schemeClr val="accent1">
+              <a:shade val="15000"/>
+            </a:schemeClr>
+          </a:lnRef>
+          <a:fillRef idx="1">
+            <a:schemeClr val="accent1"/>
+          </a:fillRef>
+          <a:effectRef idx="0">
+            <a:schemeClr val="accent1"/>
+          </a:effectRef>
+          <a:fontRef idx="minor">
+            <a:schemeClr val="lt1"/>
+          </a:fontRef>
+        </p:style>
+        <p:txBody>
+          <a:bodyPr rtlCol="0" anchor="ctr"/>
+          <a:lstStyle/>
+          <a:p>
+            <a:pPr algn="ctr"/>
+            <a:endParaRPr lang="ko-KR" altLang="en-US"/>
+          </a:p>
+        </p:txBody>
+      </p:sp>
+      <p:sp>
+        <p:nvSpPr>
+          <p:cNvPr id="76" name="TextBox 75">
+            <a:extLst>
+              <a:ext uri="{FF2B5EF4-FFF2-40B4-BE49-F238E27FC236}">
+                <a16:creationId xmlns:a16="http://schemas.microsoft.com/office/drawing/2014/main" id="{8E49F3C3-5C5D-8C1D-CAF4-73E9D1D5E6E6}"/>
+              </a:ext>
+            </a:extLst>
+          </p:cNvPr>
+          <p:cNvSpPr txBox="1"/>
+          <p:nvPr/>
+        </p:nvSpPr>
+        <p:spPr>
+          <a:xfrm>
+            <a:off x="8728451" y="5820417"/>
+            <a:ext cx="2613088" cy="369332"/>
+          </a:xfrm>
+          <a:prstGeom prst="rect">
+            <a:avLst/>
+          </a:prstGeom>
+          <a:noFill/>
+        </p:spPr>
+        <p:txBody>
+          <a:bodyPr wrap="none" rtlCol="0">
+            <a:spAutoFit/>
+          </a:bodyPr>
+          <a:lstStyle/>
+          <a:p>
+            <a:r>
+              <a:rPr lang="ko-KR" altLang="en-US" dirty="0"/>
+              <a:t>고장 정보 </a:t>
+            </a:r>
+            <a:r>
+              <a:rPr lang="en-US" altLang="ko-KR" dirty="0"/>
+              <a:t>UART</a:t>
+            </a:r>
+            <a:r>
+              <a:rPr lang="ko-KR" altLang="en-US" dirty="0"/>
+              <a:t>로 출력</a:t>
+            </a:r>
+          </a:p>
+        </p:txBody>
+      </p:sp>
+      <p:sp>
+        <p:nvSpPr>
+          <p:cNvPr id="78" name="화살표: 아래쪽 77">
+            <a:extLst>
+              <a:ext uri="{FF2B5EF4-FFF2-40B4-BE49-F238E27FC236}">
+                <a16:creationId xmlns:a16="http://schemas.microsoft.com/office/drawing/2014/main" id="{1CC3D8FC-0E10-E763-FE45-C1A930E5406C}"/>
+              </a:ext>
+            </a:extLst>
+          </p:cNvPr>
+          <p:cNvSpPr/>
+          <p:nvPr/>
+        </p:nvSpPr>
+        <p:spPr>
+          <a:xfrm>
+            <a:off x="9885404" y="5518046"/>
+            <a:ext cx="294968" cy="256228"/>
+          </a:xfrm>
+          <a:prstGeom prst="downArrow">
+            <a:avLst/>
+          </a:prstGeom>
+          <a:noFill/>
+        </p:spPr>
+        <p:style>
+          <a:lnRef idx="2">
+            <a:schemeClr val="accent1">
+              <a:shade val="15000"/>
+            </a:schemeClr>
+          </a:lnRef>
+          <a:fillRef idx="1">
+            <a:schemeClr val="accent1"/>
+          </a:fillRef>
+          <a:effectRef idx="0">
+            <a:schemeClr val="accent1"/>
+          </a:effectRef>
+          <a:fontRef idx="minor">
+            <a:schemeClr val="lt1"/>
+          </a:fontRef>
+        </p:style>
+        <p:txBody>
+          <a:bodyPr rtlCol="0" anchor="ctr"/>
+          <a:lstStyle/>
+          <a:p>
+            <a:pPr algn="ctr"/>
+            <a:endParaRPr lang="ko-KR" altLang="en-US"/>
+          </a:p>
+        </p:txBody>
+      </p:sp>
+      <p:sp>
+        <p:nvSpPr>
+          <p:cNvPr id="5" name="화살표: 굽음 4">
+            <a:extLst>
+              <a:ext uri="{FF2B5EF4-FFF2-40B4-BE49-F238E27FC236}">
+                <a16:creationId xmlns:a16="http://schemas.microsoft.com/office/drawing/2014/main" id="{4B29A197-9645-2DBA-B362-8432EBA9232C}"/>
+              </a:ext>
+            </a:extLst>
+          </p:cNvPr>
+          <p:cNvSpPr/>
+          <p:nvPr/>
+        </p:nvSpPr>
+        <p:spPr>
+          <a:xfrm rot="16200000" flipV="1">
+            <a:off x="1914006" y="3193191"/>
+            <a:ext cx="4156635" cy="2103246"/>
+          </a:xfrm>
+          <a:prstGeom prst="bentArrow">
+            <a:avLst>
+              <a:gd name="adj1" fmla="val 6653"/>
+              <a:gd name="adj2" fmla="val 8029"/>
+              <a:gd name="adj3" fmla="val 12157"/>
+              <a:gd name="adj4" fmla="val 29072"/>
+            </a:avLst>
+          </a:prstGeom>
+          <a:noFill/>
+        </p:spPr>
+        <p:style>
+          <a:lnRef idx="2">
+            <a:schemeClr val="accent1">
+              <a:shade val="15000"/>
+            </a:schemeClr>
+          </a:lnRef>
+          <a:fillRef idx="1">
+            <a:schemeClr val="accent1"/>
+          </a:fillRef>
+          <a:effectRef idx="0">
+            <a:schemeClr val="accent1"/>
+          </a:effectRef>
+          <a:fontRef idx="minor">
+            <a:schemeClr val="lt1"/>
+          </a:fontRef>
+        </p:style>
+        <p:txBody>
+          <a:bodyPr rtlCol="0" anchor="ctr"/>
+          <a:lstStyle/>
+          <a:p>
+            <a:pPr algn="ctr"/>
+            <a:endParaRPr lang="ko-KR" altLang="en-US">
+              <a:solidFill>
+                <a:schemeClr val="tx1"/>
+              </a:solidFill>
+            </a:endParaRPr>
+          </a:p>
+        </p:txBody>
+      </p:sp>
+      <p:sp>
+        <p:nvSpPr>
+          <p:cNvPr id="17" name="사각형: 둥근 모서리 16">
+            <a:extLst>
+              <a:ext uri="{FF2B5EF4-FFF2-40B4-BE49-F238E27FC236}">
+                <a16:creationId xmlns:a16="http://schemas.microsoft.com/office/drawing/2014/main" id="{0DB92BA6-B9EF-B0BF-7B03-A9E14AB641E1}"/>
+              </a:ext>
+            </a:extLst>
+          </p:cNvPr>
+          <p:cNvSpPr/>
+          <p:nvPr/>
+        </p:nvSpPr>
+        <p:spPr>
+          <a:xfrm>
+            <a:off x="513761" y="3585928"/>
+            <a:ext cx="3225347" cy="557981"/>
+          </a:xfrm>
+          <a:prstGeom prst="roundRect">
+            <a:avLst/>
+          </a:prstGeom>
+          <a:noFill/>
+        </p:spPr>
+        <p:style>
+          <a:lnRef idx="2">
+            <a:schemeClr val="accent1">
+              <a:shade val="15000"/>
+            </a:schemeClr>
+          </a:lnRef>
+          <a:fillRef idx="1">
+            <a:schemeClr val="accent1"/>
+          </a:fillRef>
+          <a:effectRef idx="0">
+            <a:schemeClr val="accent1"/>
+          </a:effectRef>
+          <a:fontRef idx="minor">
+            <a:schemeClr val="lt1"/>
+          </a:fontRef>
+        </p:style>
+        <p:txBody>
+          <a:bodyPr rtlCol="0" anchor="ctr"/>
+          <a:lstStyle/>
+          <a:p>
+            <a:pPr algn="ctr"/>
+            <a:endParaRPr lang="ko-KR" altLang="en-US"/>
+          </a:p>
+        </p:txBody>
+      </p:sp>
+      <p:sp>
+        <p:nvSpPr>
+          <p:cNvPr id="19" name="TextBox 18">
+            <a:extLst>
+              <a:ext uri="{FF2B5EF4-FFF2-40B4-BE49-F238E27FC236}">
+                <a16:creationId xmlns:a16="http://schemas.microsoft.com/office/drawing/2014/main" id="{1C1C0C69-12A4-0B71-AD15-F286A12A7EE6}"/>
+              </a:ext>
+            </a:extLst>
+          </p:cNvPr>
+          <p:cNvSpPr txBox="1"/>
+          <p:nvPr/>
+        </p:nvSpPr>
+        <p:spPr>
+          <a:xfrm>
+            <a:off x="690157" y="3680252"/>
+            <a:ext cx="2811219" cy="369332"/>
+          </a:xfrm>
+          <a:prstGeom prst="rect">
+            <a:avLst/>
+          </a:prstGeom>
+          <a:noFill/>
+        </p:spPr>
+        <p:txBody>
+          <a:bodyPr wrap="none" rtlCol="0">
+            <a:spAutoFit/>
+          </a:bodyPr>
+          <a:lstStyle/>
+          <a:p>
+            <a:r>
+              <a:rPr lang="en-US" altLang="ko-KR" dirty="0"/>
+              <a:t>EEPROM</a:t>
+            </a:r>
+            <a:r>
+              <a:rPr lang="ko-KR" altLang="en-US" dirty="0"/>
+              <a:t>에 </a:t>
+            </a:r>
+            <a:r>
+              <a:rPr lang="en-US" altLang="ko-KR" dirty="0"/>
+              <a:t>DTC </a:t>
+            </a:r>
+            <a:r>
+              <a:rPr lang="ko-KR" altLang="en-US" dirty="0"/>
+              <a:t>저장하기</a:t>
+            </a:r>
+          </a:p>
+        </p:txBody>
+      </p:sp>
+      <p:sp>
+        <p:nvSpPr>
+          <p:cNvPr id="23" name="화살표: 아래쪽 22">
+            <a:extLst>
+              <a:ext uri="{FF2B5EF4-FFF2-40B4-BE49-F238E27FC236}">
+                <a16:creationId xmlns:a16="http://schemas.microsoft.com/office/drawing/2014/main" id="{29D54E63-C7DD-181A-1E17-54CF6A49BC34}"/>
+              </a:ext>
+            </a:extLst>
+          </p:cNvPr>
+          <p:cNvSpPr/>
+          <p:nvPr/>
+        </p:nvSpPr>
+        <p:spPr>
+          <a:xfrm>
+            <a:off x="1933611" y="3411359"/>
+            <a:ext cx="294968" cy="256228"/>
+          </a:xfrm>
+          <a:prstGeom prst="downArrow">
+            <a:avLst/>
+          </a:prstGeom>
+          <a:noFill/>
+        </p:spPr>
+        <p:style>
+          <a:lnRef idx="2">
+            <a:schemeClr val="accent1">
+              <a:shade val="15000"/>
+            </a:schemeClr>
+          </a:lnRef>
+          <a:fillRef idx="1">
+            <a:schemeClr val="accent1"/>
+          </a:fillRef>
+          <a:effectRef idx="0">
+            <a:schemeClr val="accent1"/>
+          </a:effectRef>
+          <a:fontRef idx="minor">
+            <a:schemeClr val="lt1"/>
+          </a:fontRef>
+        </p:style>
+        <p:txBody>
+          <a:bodyPr rtlCol="0" anchor="ctr"/>
+          <a:lstStyle/>
+          <a:p>
+            <a:pPr algn="ctr"/>
+            <a:endParaRPr lang="ko-KR" altLang="en-US"/>
+          </a:p>
+        </p:txBody>
+      </p:sp>
+      <p:sp>
+        <p:nvSpPr>
+          <p:cNvPr id="26" name="화살표: 아래쪽 25">
+            <a:extLst>
+              <a:ext uri="{FF2B5EF4-FFF2-40B4-BE49-F238E27FC236}">
+                <a16:creationId xmlns:a16="http://schemas.microsoft.com/office/drawing/2014/main" id="{36D2E4EC-758A-3B4E-B18E-721FC405C758}"/>
+              </a:ext>
+            </a:extLst>
+          </p:cNvPr>
+          <p:cNvSpPr/>
+          <p:nvPr/>
+        </p:nvSpPr>
+        <p:spPr>
+          <a:xfrm>
+            <a:off x="1868346" y="5646160"/>
+            <a:ext cx="294968" cy="256228"/>
+          </a:xfrm>
+          <a:prstGeom prst="downArrow">
+            <a:avLst/>
+          </a:prstGeom>
+          <a:noFill/>
+        </p:spPr>
+        <p:style>
+          <a:lnRef idx="2">
+            <a:schemeClr val="accent1">
+              <a:shade val="15000"/>
+            </a:schemeClr>
+          </a:lnRef>
+          <a:fillRef idx="1">
+            <a:schemeClr val="accent1"/>
+          </a:fillRef>
+          <a:effectRef idx="0">
+            <a:schemeClr val="accent1"/>
+          </a:effectRef>
+          <a:fontRef idx="minor">
+            <a:schemeClr val="lt1"/>
+          </a:fontRef>
+        </p:style>
+        <p:txBody>
+          <a:bodyPr rtlCol="0" anchor="ctr"/>
+          <a:lstStyle/>
+          <a:p>
+            <a:pPr algn="ctr"/>
+            <a:endParaRPr lang="ko-KR" altLang="en-US"/>
+          </a:p>
+        </p:txBody>
+      </p:sp>
+      <p:sp>
+        <p:nvSpPr>
+          <p:cNvPr id="30" name="사각형: 둥근 모서리 29">
+            <a:extLst>
+              <a:ext uri="{FF2B5EF4-FFF2-40B4-BE49-F238E27FC236}">
+                <a16:creationId xmlns:a16="http://schemas.microsoft.com/office/drawing/2014/main" id="{512A9F86-D757-497D-8D53-95C29D7E5DA6}"/>
+              </a:ext>
+            </a:extLst>
+          </p:cNvPr>
+          <p:cNvSpPr/>
+          <p:nvPr/>
+        </p:nvSpPr>
+        <p:spPr>
+          <a:xfrm>
+            <a:off x="8508685" y="3520148"/>
+            <a:ext cx="3225347" cy="557981"/>
+          </a:xfrm>
+          <a:prstGeom prst="roundRect">
+            <a:avLst/>
+          </a:prstGeom>
+          <a:noFill/>
+        </p:spPr>
+        <p:style>
+          <a:lnRef idx="2">
+            <a:schemeClr val="accent1">
+              <a:shade val="15000"/>
+            </a:schemeClr>
+          </a:lnRef>
+          <a:fillRef idx="1">
+            <a:schemeClr val="accent1"/>
+          </a:fillRef>
+          <a:effectRef idx="0">
+            <a:schemeClr val="accent1"/>
+          </a:effectRef>
+          <a:fontRef idx="minor">
+            <a:schemeClr val="lt1"/>
+          </a:fontRef>
+        </p:style>
+        <p:txBody>
+          <a:bodyPr rtlCol="0" anchor="ctr"/>
+          <a:lstStyle/>
+          <a:p>
+            <a:pPr algn="ctr"/>
+            <a:endParaRPr lang="ko-KR" altLang="en-US"/>
+          </a:p>
+        </p:txBody>
+      </p:sp>
+      <p:sp>
+        <p:nvSpPr>
+          <p:cNvPr id="34" name="TextBox 33">
+            <a:extLst>
+              <a:ext uri="{FF2B5EF4-FFF2-40B4-BE49-F238E27FC236}">
+                <a16:creationId xmlns:a16="http://schemas.microsoft.com/office/drawing/2014/main" id="{3FBA00CC-409B-A80B-9D95-5CE3B51FA2B5}"/>
+              </a:ext>
+            </a:extLst>
+          </p:cNvPr>
+          <p:cNvSpPr txBox="1"/>
+          <p:nvPr/>
+        </p:nvSpPr>
+        <p:spPr>
+          <a:xfrm>
+            <a:off x="8686788" y="3582758"/>
+            <a:ext cx="2811219" cy="369332"/>
+          </a:xfrm>
+          <a:prstGeom prst="rect">
+            <a:avLst/>
+          </a:prstGeom>
+          <a:noFill/>
+        </p:spPr>
+        <p:txBody>
+          <a:bodyPr wrap="none" rtlCol="0">
+            <a:spAutoFit/>
+          </a:bodyPr>
+          <a:lstStyle/>
+          <a:p>
+            <a:r>
+              <a:rPr lang="en-US" altLang="ko-KR" dirty="0"/>
+              <a:t>EEPROM</a:t>
+            </a:r>
+            <a:r>
+              <a:rPr lang="ko-KR" altLang="en-US" dirty="0"/>
+              <a:t>에 </a:t>
+            </a:r>
+            <a:r>
+              <a:rPr lang="en-US" altLang="ko-KR" dirty="0"/>
+              <a:t>DTC </a:t>
+            </a:r>
+            <a:r>
+              <a:rPr lang="ko-KR" altLang="en-US" dirty="0"/>
+              <a:t>저장하기</a:t>
+            </a:r>
+          </a:p>
+        </p:txBody>
+      </p:sp>
+      <p:sp>
+        <p:nvSpPr>
+          <p:cNvPr id="39" name="화살표: 아래쪽 38">
+            <a:extLst>
+              <a:ext uri="{FF2B5EF4-FFF2-40B4-BE49-F238E27FC236}">
+                <a16:creationId xmlns:a16="http://schemas.microsoft.com/office/drawing/2014/main" id="{BF5791F9-38AD-9EF0-68E8-76C7BEF1AA14}"/>
+              </a:ext>
+            </a:extLst>
+          </p:cNvPr>
+          <p:cNvSpPr/>
+          <p:nvPr/>
+        </p:nvSpPr>
+        <p:spPr>
+          <a:xfrm>
+            <a:off x="9901713" y="3326530"/>
+            <a:ext cx="294968" cy="256228"/>
+          </a:xfrm>
+          <a:prstGeom prst="downArrow">
+            <a:avLst/>
+          </a:prstGeom>
+          <a:noFill/>
+        </p:spPr>
+        <p:style>
+          <a:lnRef idx="2">
+            <a:schemeClr val="accent1">
+              <a:shade val="15000"/>
+            </a:schemeClr>
+          </a:lnRef>
+          <a:fillRef idx="1">
+            <a:schemeClr val="accent1"/>
+          </a:fillRef>
+          <a:effectRef idx="0">
+            <a:schemeClr val="accent1"/>
+          </a:effectRef>
+          <a:fontRef idx="minor">
+            <a:schemeClr val="lt1"/>
+          </a:fontRef>
+        </p:style>
+        <p:txBody>
+          <a:bodyPr rtlCol="0" anchor="ctr"/>
+          <a:lstStyle/>
+          <a:p>
+            <a:pPr algn="ctr"/>
+            <a:endParaRPr lang="ko-KR" altLang="en-US"/>
+          </a:p>
+        </p:txBody>
+      </p:sp>
+      <p:sp>
+        <p:nvSpPr>
+          <p:cNvPr id="43" name="사각형: 둥근 모서리 42">
+            <a:extLst>
+              <a:ext uri="{FF2B5EF4-FFF2-40B4-BE49-F238E27FC236}">
+                <a16:creationId xmlns:a16="http://schemas.microsoft.com/office/drawing/2014/main" id="{2FD7DEFB-FEE2-67E3-ACC9-DC19BAEC0875}"/>
+              </a:ext>
+            </a:extLst>
+          </p:cNvPr>
+          <p:cNvSpPr/>
+          <p:nvPr/>
+        </p:nvSpPr>
+        <p:spPr>
+          <a:xfrm>
+            <a:off x="8508685" y="4943386"/>
+            <a:ext cx="3225347" cy="557981"/>
+          </a:xfrm>
+          <a:prstGeom prst="roundRect">
+            <a:avLst/>
+          </a:prstGeom>
+          <a:noFill/>
+          <a:ln>
+            <a:prstDash val="dash"/>
+          </a:ln>
+        </p:spPr>
+        <p:style>
+          <a:lnRef idx="2">
+            <a:schemeClr val="accent1">
+              <a:shade val="15000"/>
+            </a:schemeClr>
+          </a:lnRef>
+          <a:fillRef idx="1">
+            <a:schemeClr val="accent1"/>
+          </a:fillRef>
+          <a:effectRef idx="0">
+            <a:schemeClr val="accent1"/>
+          </a:effectRef>
+          <a:fontRef idx="minor">
+            <a:schemeClr val="lt1"/>
+          </a:fontRef>
+        </p:style>
+        <p:txBody>
+          <a:bodyPr rtlCol="0" anchor="ctr"/>
+          <a:lstStyle/>
+          <a:p>
+            <a:pPr algn="ctr"/>
+            <a:endParaRPr lang="ko-KR" altLang="en-US"/>
+          </a:p>
+        </p:txBody>
+      </p:sp>
+      <p:sp>
+        <p:nvSpPr>
+          <p:cNvPr id="47" name="TextBox 46">
+            <a:extLst>
+              <a:ext uri="{FF2B5EF4-FFF2-40B4-BE49-F238E27FC236}">
+                <a16:creationId xmlns:a16="http://schemas.microsoft.com/office/drawing/2014/main" id="{BB2113EA-4118-83F0-620E-7154ED7C4D3A}"/>
+              </a:ext>
+            </a:extLst>
+          </p:cNvPr>
+          <p:cNvSpPr txBox="1"/>
+          <p:nvPr/>
+        </p:nvSpPr>
+        <p:spPr>
+          <a:xfrm>
+            <a:off x="8686788" y="5005996"/>
+            <a:ext cx="2811219" cy="369332"/>
+          </a:xfrm>
+          <a:prstGeom prst="rect">
+            <a:avLst/>
+          </a:prstGeom>
+          <a:noFill/>
+        </p:spPr>
+        <p:txBody>
+          <a:bodyPr wrap="none" rtlCol="0">
+            <a:spAutoFit/>
+          </a:bodyPr>
+          <a:lstStyle/>
+          <a:p>
+            <a:r>
+              <a:rPr lang="en-US" altLang="ko-KR" dirty="0"/>
+              <a:t>EEPROM</a:t>
+            </a:r>
+            <a:r>
+              <a:rPr lang="ko-KR" altLang="en-US" dirty="0"/>
+              <a:t>에 </a:t>
+            </a:r>
+            <a:r>
+              <a:rPr lang="en-US" altLang="ko-KR" dirty="0"/>
+              <a:t>DTC </a:t>
+            </a:r>
+            <a:r>
+              <a:rPr lang="ko-KR" altLang="en-US" dirty="0"/>
+              <a:t>저장하기</a:t>
+            </a:r>
+          </a:p>
+        </p:txBody>
+      </p:sp>
+      <p:sp>
+        <p:nvSpPr>
+          <p:cNvPr id="50" name="화살표: 아래쪽 49">
+            <a:extLst>
+              <a:ext uri="{FF2B5EF4-FFF2-40B4-BE49-F238E27FC236}">
+                <a16:creationId xmlns:a16="http://schemas.microsoft.com/office/drawing/2014/main" id="{135A2761-55F2-2868-EB3D-20C4E912E791}"/>
+              </a:ext>
+            </a:extLst>
+          </p:cNvPr>
+          <p:cNvSpPr/>
+          <p:nvPr/>
+        </p:nvSpPr>
+        <p:spPr>
+          <a:xfrm>
+            <a:off x="9887511" y="4802644"/>
+            <a:ext cx="294968" cy="256228"/>
+          </a:xfrm>
+          <a:prstGeom prst="downArrow">
+            <a:avLst/>
+          </a:prstGeom>
+          <a:noFill/>
+        </p:spPr>
+        <p:style>
+          <a:lnRef idx="2">
+            <a:schemeClr val="accent1">
+              <a:shade val="15000"/>
+            </a:schemeClr>
+          </a:lnRef>
+          <a:fillRef idx="1">
+            <a:schemeClr val="accent1"/>
+          </a:fillRef>
+          <a:effectRef idx="0">
+            <a:schemeClr val="accent1"/>
+          </a:effectRef>
+          <a:fontRef idx="minor">
+            <a:schemeClr val="lt1"/>
+          </a:fontRef>
+        </p:style>
+        <p:txBody>
+          <a:bodyPr rtlCol="0" anchor="ctr"/>
+          <a:lstStyle/>
+          <a:p>
+            <a:pPr algn="ctr"/>
+            <a:endParaRPr lang="ko-KR" altLang="en-US"/>
+          </a:p>
+        </p:txBody>
+      </p:sp>
+      <p:sp>
+        <p:nvSpPr>
+          <p:cNvPr id="54" name="화살표: 굽음 53">
+            <a:extLst>
+              <a:ext uri="{FF2B5EF4-FFF2-40B4-BE49-F238E27FC236}">
+                <a16:creationId xmlns:a16="http://schemas.microsoft.com/office/drawing/2014/main" id="{150602CD-2B0E-8A26-EE8B-A81A29C9B595}"/>
+              </a:ext>
+            </a:extLst>
+          </p:cNvPr>
+          <p:cNvSpPr/>
+          <p:nvPr/>
+        </p:nvSpPr>
+        <p:spPr>
+          <a:xfrm rot="16200000">
+            <a:off x="5341604" y="2920682"/>
+            <a:ext cx="3942552" cy="2424437"/>
+          </a:xfrm>
+          <a:prstGeom prst="bentArrow">
+            <a:avLst>
+              <a:gd name="adj1" fmla="val 6653"/>
+              <a:gd name="adj2" fmla="val 8029"/>
+              <a:gd name="adj3" fmla="val 12157"/>
+              <a:gd name="adj4" fmla="val 29072"/>
+            </a:avLst>
+          </a:prstGeom>
+          <a:noFill/>
+        </p:spPr>
+        <p:style>
+          <a:lnRef idx="2">
+            <a:schemeClr val="accent1">
+              <a:shade val="15000"/>
+            </a:schemeClr>
+          </a:lnRef>
+          <a:fillRef idx="1">
+            <a:schemeClr val="accent1"/>
+          </a:fillRef>
+          <a:effectRef idx="0">
+            <a:schemeClr val="accent1"/>
+          </a:effectRef>
+          <a:fontRef idx="minor">
+            <a:schemeClr val="lt1"/>
+          </a:fontRef>
+        </p:style>
+        <p:txBody>
+          <a:bodyPr rtlCol="0" anchor="ctr"/>
+          <a:lstStyle/>
+          <a:p>
+            <a:pPr algn="ctr"/>
+            <a:endParaRPr lang="ko-KR" altLang="en-US">
+              <a:solidFill>
+                <a:schemeClr val="tx1"/>
+              </a:solidFill>
+            </a:endParaRPr>
+          </a:p>
+        </p:txBody>
+      </p:sp>
+      <p:sp>
+        <p:nvSpPr>
+          <p:cNvPr id="8" name="TextBox 7">
+            <a:extLst>
+              <a:ext uri="{FF2B5EF4-FFF2-40B4-BE49-F238E27FC236}">
+                <a16:creationId xmlns:a16="http://schemas.microsoft.com/office/drawing/2014/main" id="{B3007112-804F-8609-6E3E-C9F98ACBCFF2}"/>
+              </a:ext>
+            </a:extLst>
+          </p:cNvPr>
+          <p:cNvSpPr txBox="1"/>
+          <p:nvPr/>
+        </p:nvSpPr>
+        <p:spPr>
+          <a:xfrm>
+            <a:off x="8508685" y="92939"/>
+            <a:ext cx="2218877" cy="1200329"/>
+          </a:xfrm>
+          <a:prstGeom prst="rect">
+            <a:avLst/>
+          </a:prstGeom>
+          <a:noFill/>
+        </p:spPr>
+        <p:txBody>
+          <a:bodyPr wrap="none" rtlCol="0">
+            <a:spAutoFit/>
+          </a:bodyPr>
+          <a:lstStyle/>
+          <a:p>
+            <a:r>
+              <a:rPr lang="en-US" altLang="ko-KR" dirty="0"/>
+              <a:t>PMIC,</a:t>
+            </a:r>
+            <a:r>
+              <a:rPr lang="ko-KR" altLang="en-US" dirty="0"/>
+              <a:t> </a:t>
+            </a:r>
+            <a:r>
+              <a:rPr lang="en-US" altLang="ko-KR" dirty="0"/>
+              <a:t>EEPROM</a:t>
+            </a:r>
+            <a:r>
+              <a:rPr lang="ko-KR" altLang="en-US" dirty="0"/>
+              <a:t>은</a:t>
+            </a:r>
+            <a:endParaRPr lang="en-US" altLang="ko-KR" dirty="0"/>
+          </a:p>
+          <a:p>
+            <a:r>
+              <a:rPr lang="ko-KR" altLang="en-US" dirty="0" err="1"/>
+              <a:t>세마포어</a:t>
+            </a:r>
+            <a:r>
+              <a:rPr lang="ko-KR" altLang="en-US" dirty="0"/>
+              <a:t> 획득 </a:t>
+            </a:r>
+            <a:r>
+              <a:rPr lang="en-US" altLang="ko-KR" dirty="0"/>
+              <a:t>-&gt; </a:t>
+            </a:r>
+          </a:p>
+          <a:p>
+            <a:r>
+              <a:rPr lang="ko-KR" altLang="en-US" dirty="0"/>
+              <a:t>인터럽트</a:t>
+            </a:r>
+            <a:r>
+              <a:rPr lang="en-US" altLang="ko-KR" dirty="0"/>
+              <a:t>+DMA -&gt; </a:t>
+            </a:r>
+          </a:p>
+          <a:p>
+            <a:r>
+              <a:rPr lang="ko-KR" altLang="en-US" dirty="0" err="1"/>
+              <a:t>세마포어</a:t>
+            </a:r>
+            <a:r>
+              <a:rPr lang="ko-KR" altLang="en-US" dirty="0"/>
+              <a:t> 반납</a:t>
+            </a:r>
+            <a:endParaRPr lang="en-US" altLang="ko-KR" dirty="0"/>
           </a:p>
         </p:txBody>
       </p:sp>
     </p:spTree>
     <p:extLst>
       <p:ext uri="{BB962C8B-B14F-4D97-AF65-F5344CB8AC3E}">
-        <p14:creationId xmlns:p14="http://schemas.microsoft.com/office/powerpoint/2010/main" val="3815658646"/>
+        <p14:creationId xmlns:p14="http://schemas.microsoft.com/office/powerpoint/2010/main" val="1521067495"/>
       </p:ext>
     </p:extLst>
   </p:cSld>
@@ -6701,7 +8758,7 @@
 </p:sld>
 </file>
 
-<file path=ppt/slides/slide7.xml><?xml version="1.0" encoding="utf-8"?>
+<file path=ppt/slides/slide6.xml><?xml version="1.0" encoding="utf-8"?>
 <p:sld xmlns:a="http://schemas.openxmlformats.org/drawingml/2006/main" xmlns:r="http://schemas.openxmlformats.org/officeDocument/2006/relationships" xmlns:p="http://schemas.openxmlformats.org/presentationml/2006/main">
   <p:cSld>
     <p:spTree>
@@ -6723,7 +8780,7 @@
           <p:cNvPr id="2" name="제목 1">
             <a:extLst>
               <a:ext uri="{FF2B5EF4-FFF2-40B4-BE49-F238E27FC236}">
-                <a16:creationId xmlns:a16="http://schemas.microsoft.com/office/drawing/2014/main" id="{CCF29319-983C-63D7-FBC5-33A4E2189F2C}"/>
+                <a16:creationId xmlns:a16="http://schemas.microsoft.com/office/drawing/2014/main" id="{ECFA8517-378F-47DB-4530-97A13D8C1A34}"/>
               </a:ext>
             </a:extLst>
           </p:cNvPr>
@@ -6745,2158 +8802,440 @@
           <a:lstStyle/>
           <a:p>
             <a:r>
-              <a:rPr lang="en-US" altLang="ko-KR" dirty="0"/>
-              <a:t>RTOS </a:t>
-            </a:r>
-            <a:r>
               <a:rPr lang="ko-KR" altLang="en-US" dirty="0"/>
-              <a:t>기반 시스템 설계</a:t>
-            </a:r>
-          </a:p>
-        </p:txBody>
-      </p:sp>
-      <p:sp>
-        <p:nvSpPr>
-          <p:cNvPr id="4" name="직사각형 3">
-            <a:extLst>
-              <a:ext uri="{FF2B5EF4-FFF2-40B4-BE49-F238E27FC236}">
-                <a16:creationId xmlns:a16="http://schemas.microsoft.com/office/drawing/2014/main" id="{91FF48B4-D263-4CB4-DB4E-8661DEF6EACE}"/>
-              </a:ext>
-            </a:extLst>
-          </p:cNvPr>
-          <p:cNvSpPr/>
-          <p:nvPr/>
-        </p:nvSpPr>
-        <p:spPr>
-          <a:xfrm>
-            <a:off x="196947" y="2067299"/>
-            <a:ext cx="3814916" cy="4566743"/>
-          </a:xfrm>
-          <a:prstGeom prst="rect">
-            <a:avLst/>
-          </a:prstGeom>
-          <a:noFill/>
-        </p:spPr>
-        <p:style>
-          <a:lnRef idx="2">
-            <a:schemeClr val="accent1">
-              <a:shade val="15000"/>
-            </a:schemeClr>
-          </a:lnRef>
-          <a:fillRef idx="1">
-            <a:schemeClr val="accent1"/>
-          </a:fillRef>
-          <a:effectRef idx="0">
-            <a:schemeClr val="accent1"/>
-          </a:effectRef>
-          <a:fontRef idx="minor">
-            <a:schemeClr val="lt1"/>
-          </a:fontRef>
-        </p:style>
-        <p:txBody>
-          <a:bodyPr rtlCol="0" anchor="ctr"/>
-          <a:lstStyle/>
-          <a:p>
-            <a:pPr algn="ctr"/>
-            <a:endParaRPr lang="ko-KR" altLang="en-US"/>
-          </a:p>
-        </p:txBody>
-      </p:sp>
-      <p:sp>
-        <p:nvSpPr>
-          <p:cNvPr id="6" name="직사각형 5">
-            <a:extLst>
-              <a:ext uri="{FF2B5EF4-FFF2-40B4-BE49-F238E27FC236}">
-                <a16:creationId xmlns:a16="http://schemas.microsoft.com/office/drawing/2014/main" id="{DC265D45-F9B0-E307-29B2-A1F9609320A9}"/>
-              </a:ext>
-            </a:extLst>
-          </p:cNvPr>
-          <p:cNvSpPr/>
-          <p:nvPr/>
-        </p:nvSpPr>
-        <p:spPr>
-          <a:xfrm>
-            <a:off x="8153755" y="1999057"/>
-            <a:ext cx="3814916" cy="4609646"/>
-          </a:xfrm>
-          <a:prstGeom prst="rect">
-            <a:avLst/>
-          </a:prstGeom>
-          <a:noFill/>
-        </p:spPr>
-        <p:style>
-          <a:lnRef idx="2">
-            <a:schemeClr val="accent1">
-              <a:shade val="15000"/>
-            </a:schemeClr>
-          </a:lnRef>
-          <a:fillRef idx="1">
-            <a:schemeClr val="accent1"/>
-          </a:fillRef>
-          <a:effectRef idx="0">
-            <a:schemeClr val="accent1"/>
-          </a:effectRef>
-          <a:fontRef idx="minor">
-            <a:schemeClr val="lt1"/>
-          </a:fontRef>
-        </p:style>
-        <p:txBody>
-          <a:bodyPr rtlCol="0" anchor="ctr"/>
-          <a:lstStyle/>
-          <a:p>
-            <a:pPr algn="ctr"/>
-            <a:endParaRPr lang="ko-KR" altLang="en-US"/>
-          </a:p>
-        </p:txBody>
-      </p:sp>
-      <p:sp>
-        <p:nvSpPr>
-          <p:cNvPr id="7" name="TextBox 6">
-            <a:extLst>
-              <a:ext uri="{FF2B5EF4-FFF2-40B4-BE49-F238E27FC236}">
-                <a16:creationId xmlns:a16="http://schemas.microsoft.com/office/drawing/2014/main" id="{F31BF079-C236-D175-79A8-103DCD32498E}"/>
-              </a:ext>
-            </a:extLst>
-          </p:cNvPr>
-          <p:cNvSpPr txBox="1"/>
-          <p:nvPr/>
-        </p:nvSpPr>
-        <p:spPr>
-          <a:xfrm>
-            <a:off x="1598448" y="1629725"/>
-            <a:ext cx="1129733" cy="369332"/>
-          </a:xfrm>
-          <a:prstGeom prst="rect">
-            <a:avLst/>
-          </a:prstGeom>
-          <a:noFill/>
-        </p:spPr>
-        <p:txBody>
-          <a:bodyPr wrap="none" rtlCol="0">
-            <a:spAutoFit/>
-          </a:bodyPr>
-          <a:lstStyle/>
-          <a:p>
-            <a:r>
-              <a:rPr lang="en-US" altLang="ko-KR" dirty="0"/>
-              <a:t>1ms Task</a:t>
-            </a:r>
-            <a:endParaRPr lang="ko-KR" altLang="en-US" dirty="0"/>
-          </a:p>
-        </p:txBody>
-      </p:sp>
-      <p:sp>
-        <p:nvSpPr>
-          <p:cNvPr id="9" name="TextBox 8">
-            <a:extLst>
-              <a:ext uri="{FF2B5EF4-FFF2-40B4-BE49-F238E27FC236}">
-                <a16:creationId xmlns:a16="http://schemas.microsoft.com/office/drawing/2014/main" id="{156306CA-EF0B-D6F5-7074-8664F3C2F784}"/>
-              </a:ext>
-            </a:extLst>
-          </p:cNvPr>
-          <p:cNvSpPr txBox="1"/>
-          <p:nvPr/>
-        </p:nvSpPr>
-        <p:spPr>
-          <a:xfrm>
-            <a:off x="9527530" y="1629725"/>
-            <a:ext cx="1129733" cy="369332"/>
-          </a:xfrm>
-          <a:prstGeom prst="rect">
-            <a:avLst/>
-          </a:prstGeom>
-          <a:noFill/>
-        </p:spPr>
-        <p:txBody>
-          <a:bodyPr wrap="none" rtlCol="0">
-            <a:spAutoFit/>
-          </a:bodyPr>
-          <a:lstStyle/>
-          <a:p>
-            <a:r>
-              <a:rPr lang="en-US" altLang="ko-KR" dirty="0"/>
-              <a:t>5ms Task</a:t>
-            </a:r>
-            <a:endParaRPr lang="ko-KR" altLang="en-US" dirty="0"/>
-          </a:p>
-        </p:txBody>
-      </p:sp>
-      <p:pic>
-        <p:nvPicPr>
-          <p:cNvPr id="11" name="그래픽 10" descr="키 윤곽선">
-            <a:extLst>
-              <a:ext uri="{FF2B5EF4-FFF2-40B4-BE49-F238E27FC236}">
-                <a16:creationId xmlns:a16="http://schemas.microsoft.com/office/drawing/2014/main" id="{CD2AD3E9-5C61-FD82-52AD-24E15D8E46CB}"/>
-              </a:ext>
-            </a:extLst>
-          </p:cNvPr>
-          <p:cNvPicPr>
-            <a:picLocks noChangeAspect="1"/>
-          </p:cNvPicPr>
-          <p:nvPr/>
-        </p:nvPicPr>
-        <p:blipFill>
-          <a:blip>
-            <a:extLst>
-              <a:ext uri="{96DAC541-7B7A-43D3-8B79-37D633B846F1}">
-                <asvg:svgBlip xmlns:asvg="http://schemas.microsoft.com/office/drawing/2016/SVG/main" r:embed="rId2"/>
-              </a:ext>
-            </a:extLst>
-          </a:blip>
-          <a:stretch>
-            <a:fillRect/>
-          </a:stretch>
-        </p:blipFill>
-        <p:spPr>
-          <a:xfrm>
-            <a:off x="4986400" y="1434112"/>
-            <a:ext cx="1442847" cy="1096844"/>
-          </a:xfrm>
-          <a:prstGeom prst="rect">
-            <a:avLst/>
-          </a:prstGeom>
-        </p:spPr>
-      </p:pic>
-      <p:sp>
-        <p:nvSpPr>
-          <p:cNvPr id="13" name="TextBox 12">
-            <a:extLst>
-              <a:ext uri="{FF2B5EF4-FFF2-40B4-BE49-F238E27FC236}">
-                <a16:creationId xmlns:a16="http://schemas.microsoft.com/office/drawing/2014/main" id="{D9C44A05-8D4E-CDBD-5107-2D94CC86342C}"/>
-              </a:ext>
-            </a:extLst>
-          </p:cNvPr>
-          <p:cNvSpPr txBox="1"/>
-          <p:nvPr/>
-        </p:nvSpPr>
-        <p:spPr>
-          <a:xfrm>
-            <a:off x="5292645" y="1327211"/>
-            <a:ext cx="830356" cy="369332"/>
-          </a:xfrm>
-          <a:prstGeom prst="rect">
-            <a:avLst/>
-          </a:prstGeom>
-          <a:noFill/>
-        </p:spPr>
-        <p:txBody>
-          <a:bodyPr wrap="none" rtlCol="0">
-            <a:spAutoFit/>
-          </a:bodyPr>
-          <a:lstStyle/>
-          <a:p>
-            <a:r>
-              <a:rPr lang="en-US" altLang="ko-KR" dirty="0"/>
-              <a:t>mutex</a:t>
-            </a:r>
-            <a:endParaRPr lang="ko-KR" altLang="en-US" dirty="0"/>
-          </a:p>
-        </p:txBody>
-      </p:sp>
-      <p:sp>
-        <p:nvSpPr>
-          <p:cNvPr id="16" name="화살표: 오른쪽 15">
-            <a:extLst>
-              <a:ext uri="{FF2B5EF4-FFF2-40B4-BE49-F238E27FC236}">
-                <a16:creationId xmlns:a16="http://schemas.microsoft.com/office/drawing/2014/main" id="{7F2B2C9D-605E-7415-E620-D705549FC793}"/>
-              </a:ext>
-            </a:extLst>
-          </p:cNvPr>
-          <p:cNvSpPr/>
-          <p:nvPr/>
-        </p:nvSpPr>
-        <p:spPr>
-          <a:xfrm rot="10049208">
-            <a:off x="3022633" y="1888008"/>
-            <a:ext cx="1803131" cy="326073"/>
-          </a:xfrm>
-          <a:prstGeom prst="rightArrow">
-            <a:avLst/>
-          </a:prstGeom>
-          <a:noFill/>
-        </p:spPr>
-        <p:style>
-          <a:lnRef idx="2">
-            <a:schemeClr val="accent1">
-              <a:shade val="15000"/>
-            </a:schemeClr>
-          </a:lnRef>
-          <a:fillRef idx="1">
-            <a:schemeClr val="accent1"/>
-          </a:fillRef>
-          <a:effectRef idx="0">
-            <a:schemeClr val="accent1"/>
-          </a:effectRef>
-          <a:fontRef idx="minor">
-            <a:schemeClr val="lt1"/>
-          </a:fontRef>
-        </p:style>
-        <p:txBody>
-          <a:bodyPr rtlCol="0" anchor="ctr"/>
-          <a:lstStyle/>
-          <a:p>
-            <a:pPr algn="ctr"/>
-            <a:endParaRPr lang="ko-KR" altLang="en-US"/>
-          </a:p>
-        </p:txBody>
-      </p:sp>
-      <p:sp>
-        <p:nvSpPr>
-          <p:cNvPr id="21" name="사각형: 둥근 모서리 20">
-            <a:extLst>
-              <a:ext uri="{FF2B5EF4-FFF2-40B4-BE49-F238E27FC236}">
-                <a16:creationId xmlns:a16="http://schemas.microsoft.com/office/drawing/2014/main" id="{694675F8-E533-9A09-DE51-C3553880E74D}"/>
-              </a:ext>
-            </a:extLst>
-          </p:cNvPr>
-          <p:cNvSpPr/>
-          <p:nvPr/>
-        </p:nvSpPr>
-        <p:spPr>
-          <a:xfrm>
-            <a:off x="1188427" y="2136187"/>
-            <a:ext cx="1764401" cy="557981"/>
-          </a:xfrm>
-          <a:prstGeom prst="roundRect">
-            <a:avLst/>
-          </a:prstGeom>
-          <a:noFill/>
-        </p:spPr>
-        <p:style>
-          <a:lnRef idx="2">
-            <a:schemeClr val="accent1">
-              <a:shade val="15000"/>
-            </a:schemeClr>
-          </a:lnRef>
-          <a:fillRef idx="1">
-            <a:schemeClr val="accent1"/>
-          </a:fillRef>
-          <a:effectRef idx="0">
-            <a:schemeClr val="accent1"/>
-          </a:effectRef>
-          <a:fontRef idx="minor">
-            <a:schemeClr val="lt1"/>
-          </a:fontRef>
-        </p:style>
-        <p:txBody>
-          <a:bodyPr rtlCol="0" anchor="ctr"/>
-          <a:lstStyle/>
-          <a:p>
-            <a:pPr algn="ctr"/>
-            <a:endParaRPr lang="ko-KR" altLang="en-US"/>
-          </a:p>
-        </p:txBody>
-      </p:sp>
-      <p:sp>
-        <p:nvSpPr>
-          <p:cNvPr id="25" name="TextBox 24">
-            <a:extLst>
-              <a:ext uri="{FF2B5EF4-FFF2-40B4-BE49-F238E27FC236}">
-                <a16:creationId xmlns:a16="http://schemas.microsoft.com/office/drawing/2014/main" id="{9E09595B-1445-4F77-75BD-DCC3233D1086}"/>
-              </a:ext>
-            </a:extLst>
-          </p:cNvPr>
-          <p:cNvSpPr txBox="1"/>
-          <p:nvPr/>
-        </p:nvSpPr>
-        <p:spPr>
-          <a:xfrm>
-            <a:off x="1383740" y="2222321"/>
-            <a:ext cx="1373774" cy="369332"/>
-          </a:xfrm>
-          <a:prstGeom prst="rect">
-            <a:avLst/>
-          </a:prstGeom>
-          <a:noFill/>
-        </p:spPr>
-        <p:txBody>
-          <a:bodyPr wrap="none" rtlCol="0">
-            <a:spAutoFit/>
-          </a:bodyPr>
-          <a:lstStyle/>
-          <a:p>
-            <a:r>
-              <a:rPr lang="en-US" altLang="ko-KR" dirty="0"/>
-              <a:t>mutex</a:t>
-            </a:r>
-            <a:r>
-              <a:rPr lang="ko-KR" altLang="en-US" dirty="0"/>
-              <a:t> 획득</a:t>
-            </a:r>
-          </a:p>
-        </p:txBody>
-      </p:sp>
-      <p:sp>
-        <p:nvSpPr>
-          <p:cNvPr id="27" name="사각형: 둥근 모서리 26">
-            <a:extLst>
-              <a:ext uri="{FF2B5EF4-FFF2-40B4-BE49-F238E27FC236}">
-                <a16:creationId xmlns:a16="http://schemas.microsoft.com/office/drawing/2014/main" id="{EA507486-804D-8D32-3898-501B8DA8E764}"/>
-              </a:ext>
-            </a:extLst>
-          </p:cNvPr>
-          <p:cNvSpPr/>
-          <p:nvPr/>
-        </p:nvSpPr>
-        <p:spPr>
-          <a:xfrm>
-            <a:off x="9179012" y="2067299"/>
-            <a:ext cx="1764401" cy="557981"/>
-          </a:xfrm>
-          <a:prstGeom prst="roundRect">
-            <a:avLst/>
-          </a:prstGeom>
-          <a:noFill/>
-        </p:spPr>
-        <p:style>
-          <a:lnRef idx="2">
-            <a:schemeClr val="accent1">
-              <a:shade val="15000"/>
-            </a:schemeClr>
-          </a:lnRef>
-          <a:fillRef idx="1">
-            <a:schemeClr val="accent1"/>
-          </a:fillRef>
-          <a:effectRef idx="0">
-            <a:schemeClr val="accent1"/>
-          </a:effectRef>
-          <a:fontRef idx="minor">
-            <a:schemeClr val="lt1"/>
-          </a:fontRef>
-        </p:style>
-        <p:txBody>
-          <a:bodyPr rtlCol="0" anchor="ctr"/>
-          <a:lstStyle/>
-          <a:p>
-            <a:pPr algn="ctr"/>
-            <a:endParaRPr lang="ko-KR" altLang="en-US"/>
-          </a:p>
-        </p:txBody>
-      </p:sp>
-      <p:sp>
-        <p:nvSpPr>
-          <p:cNvPr id="29" name="TextBox 28">
-            <a:extLst>
-              <a:ext uri="{FF2B5EF4-FFF2-40B4-BE49-F238E27FC236}">
-                <a16:creationId xmlns:a16="http://schemas.microsoft.com/office/drawing/2014/main" id="{1BEA8982-7997-5410-260A-7312300AED9C}"/>
-              </a:ext>
-            </a:extLst>
-          </p:cNvPr>
-          <p:cNvSpPr txBox="1"/>
-          <p:nvPr/>
-        </p:nvSpPr>
-        <p:spPr>
-          <a:xfrm>
-            <a:off x="9378616" y="2161624"/>
-            <a:ext cx="1373774" cy="369332"/>
-          </a:xfrm>
-          <a:prstGeom prst="rect">
-            <a:avLst/>
-          </a:prstGeom>
-          <a:noFill/>
-        </p:spPr>
-        <p:txBody>
-          <a:bodyPr wrap="none" rtlCol="0">
-            <a:spAutoFit/>
-          </a:bodyPr>
-          <a:lstStyle/>
-          <a:p>
-            <a:r>
-              <a:rPr lang="en-US" altLang="ko-KR" dirty="0"/>
-              <a:t>mutex</a:t>
-            </a:r>
-            <a:r>
-              <a:rPr lang="ko-KR" altLang="en-US" dirty="0"/>
-              <a:t> 획득</a:t>
-            </a:r>
-          </a:p>
-        </p:txBody>
-      </p:sp>
-      <p:sp>
-        <p:nvSpPr>
-          <p:cNvPr id="31" name="화살표: 오른쪽 30">
-            <a:extLst>
-              <a:ext uri="{FF2B5EF4-FFF2-40B4-BE49-F238E27FC236}">
-                <a16:creationId xmlns:a16="http://schemas.microsoft.com/office/drawing/2014/main" id="{80B20800-EDD0-BCC0-6C76-B5ABA0E5324D}"/>
-              </a:ext>
-            </a:extLst>
-          </p:cNvPr>
-          <p:cNvSpPr/>
-          <p:nvPr/>
-        </p:nvSpPr>
-        <p:spPr>
-          <a:xfrm rot="422864">
-            <a:off x="6543750" y="1848210"/>
-            <a:ext cx="2295109" cy="331934"/>
-          </a:xfrm>
-          <a:prstGeom prst="rightArrow">
-            <a:avLst/>
-          </a:prstGeom>
-          <a:noFill/>
-        </p:spPr>
-        <p:style>
-          <a:lnRef idx="2">
-            <a:schemeClr val="accent1">
-              <a:shade val="15000"/>
-            </a:schemeClr>
-          </a:lnRef>
-          <a:fillRef idx="1">
-            <a:schemeClr val="accent1"/>
-          </a:fillRef>
-          <a:effectRef idx="0">
-            <a:schemeClr val="accent1"/>
-          </a:effectRef>
-          <a:fontRef idx="minor">
-            <a:schemeClr val="lt1"/>
-          </a:fontRef>
-        </p:style>
-        <p:txBody>
-          <a:bodyPr rtlCol="0" anchor="ctr"/>
-          <a:lstStyle/>
-          <a:p>
-            <a:pPr algn="ctr"/>
-            <a:endParaRPr lang="ko-KR" altLang="en-US"/>
-          </a:p>
-        </p:txBody>
-      </p:sp>
-      <p:sp>
-        <p:nvSpPr>
-          <p:cNvPr id="33" name="사각형: 둥근 모서리 32">
-            <a:extLst>
-              <a:ext uri="{FF2B5EF4-FFF2-40B4-BE49-F238E27FC236}">
-                <a16:creationId xmlns:a16="http://schemas.microsoft.com/office/drawing/2014/main" id="{41406883-C8A3-DCD4-3752-CA49F6AC74D0}"/>
-              </a:ext>
-            </a:extLst>
-          </p:cNvPr>
-          <p:cNvSpPr/>
-          <p:nvPr/>
-        </p:nvSpPr>
-        <p:spPr>
-          <a:xfrm>
-            <a:off x="443471" y="2857860"/>
-            <a:ext cx="3384067" cy="557981"/>
-          </a:xfrm>
-          <a:prstGeom prst="roundRect">
-            <a:avLst/>
-          </a:prstGeom>
-          <a:noFill/>
-        </p:spPr>
-        <p:style>
-          <a:lnRef idx="2">
-            <a:schemeClr val="accent1">
-              <a:shade val="15000"/>
-            </a:schemeClr>
-          </a:lnRef>
-          <a:fillRef idx="1">
-            <a:schemeClr val="accent1"/>
-          </a:fillRef>
-          <a:effectRef idx="0">
-            <a:schemeClr val="accent1"/>
-          </a:effectRef>
-          <a:fontRef idx="minor">
-            <a:schemeClr val="lt1"/>
-          </a:fontRef>
-        </p:style>
-        <p:txBody>
-          <a:bodyPr rtlCol="0" anchor="ctr"/>
-          <a:lstStyle/>
-          <a:p>
-            <a:pPr algn="ctr"/>
-            <a:endParaRPr lang="ko-KR" altLang="en-US"/>
-          </a:p>
-        </p:txBody>
-      </p:sp>
-      <p:sp>
-        <p:nvSpPr>
-          <p:cNvPr id="35" name="TextBox 34">
-            <a:extLst>
-              <a:ext uri="{FF2B5EF4-FFF2-40B4-BE49-F238E27FC236}">
-                <a16:creationId xmlns:a16="http://schemas.microsoft.com/office/drawing/2014/main" id="{DFD8F56D-7D6C-36E2-E09D-A291BEDD6C68}"/>
-              </a:ext>
-            </a:extLst>
-          </p:cNvPr>
-          <p:cNvSpPr txBox="1"/>
-          <p:nvPr/>
-        </p:nvSpPr>
-        <p:spPr>
-          <a:xfrm>
-            <a:off x="590468" y="2947676"/>
-            <a:ext cx="3061992" cy="369332"/>
-          </a:xfrm>
-          <a:prstGeom prst="rect">
-            <a:avLst/>
-          </a:prstGeom>
-          <a:noFill/>
-        </p:spPr>
-        <p:txBody>
-          <a:bodyPr wrap="none" rtlCol="0">
-            <a:spAutoFit/>
-          </a:bodyPr>
-          <a:lstStyle/>
-          <a:p>
-            <a:r>
-              <a:rPr lang="en-US" altLang="ko-KR" dirty="0"/>
-              <a:t>PMIC</a:t>
-            </a:r>
-            <a:r>
-              <a:rPr lang="ko-KR" altLang="en-US" dirty="0"/>
-              <a:t>로부터 </a:t>
-            </a:r>
-            <a:r>
-              <a:rPr lang="en-US" altLang="ko-KR" dirty="0"/>
-              <a:t>UV,OV,OC</a:t>
-            </a:r>
-            <a:r>
-              <a:rPr lang="ko-KR" altLang="en-US" dirty="0"/>
-              <a:t> 읽기</a:t>
-            </a:r>
-          </a:p>
-        </p:txBody>
-      </p:sp>
-      <p:sp>
-        <p:nvSpPr>
-          <p:cNvPr id="36" name="다이아몬드 35">
-            <a:extLst>
-              <a:ext uri="{FF2B5EF4-FFF2-40B4-BE49-F238E27FC236}">
-                <a16:creationId xmlns:a16="http://schemas.microsoft.com/office/drawing/2014/main" id="{D7199C88-FA5E-2710-47C1-38F0D721C0E4}"/>
-              </a:ext>
-            </a:extLst>
-          </p:cNvPr>
-          <p:cNvSpPr/>
-          <p:nvPr/>
-        </p:nvSpPr>
-        <p:spPr>
-          <a:xfrm>
-            <a:off x="877036" y="4244815"/>
-            <a:ext cx="2399071" cy="739308"/>
-          </a:xfrm>
-          <a:prstGeom prst="diamond">
-            <a:avLst/>
-          </a:prstGeom>
-          <a:noFill/>
-        </p:spPr>
-        <p:style>
-          <a:lnRef idx="2">
-            <a:schemeClr val="accent1">
-              <a:shade val="15000"/>
-            </a:schemeClr>
-          </a:lnRef>
-          <a:fillRef idx="1">
-            <a:schemeClr val="accent1"/>
-          </a:fillRef>
-          <a:effectRef idx="0">
-            <a:schemeClr val="accent1"/>
-          </a:effectRef>
-          <a:fontRef idx="minor">
-            <a:schemeClr val="lt1"/>
-          </a:fontRef>
-        </p:style>
-        <p:txBody>
-          <a:bodyPr rtlCol="0" anchor="ctr"/>
-          <a:lstStyle/>
-          <a:p>
-            <a:pPr algn="ctr"/>
-            <a:endParaRPr lang="ko-KR" altLang="en-US"/>
-          </a:p>
-        </p:txBody>
-      </p:sp>
-      <p:sp>
-        <p:nvSpPr>
-          <p:cNvPr id="38" name="TextBox 37">
-            <a:extLst>
-              <a:ext uri="{FF2B5EF4-FFF2-40B4-BE49-F238E27FC236}">
-                <a16:creationId xmlns:a16="http://schemas.microsoft.com/office/drawing/2014/main" id="{E84A45C1-6E83-0B8E-3EC3-9B0079B14C7B}"/>
-              </a:ext>
-            </a:extLst>
-          </p:cNvPr>
-          <p:cNvSpPr txBox="1"/>
-          <p:nvPr/>
-        </p:nvSpPr>
-        <p:spPr>
-          <a:xfrm>
-            <a:off x="1159094" y="4429803"/>
-            <a:ext cx="1745991" cy="369332"/>
-          </a:xfrm>
-          <a:prstGeom prst="rect">
-            <a:avLst/>
-          </a:prstGeom>
-          <a:noFill/>
-        </p:spPr>
-        <p:txBody>
-          <a:bodyPr wrap="none" rtlCol="0">
-            <a:spAutoFit/>
-          </a:bodyPr>
-          <a:lstStyle/>
-          <a:p>
-            <a:r>
-              <a:rPr lang="en-US" altLang="ko-KR" dirty="0"/>
-              <a:t>CAN </a:t>
-            </a:r>
-            <a:r>
-              <a:rPr lang="ko-KR" altLang="en-US" dirty="0"/>
-              <a:t>수신 있음</a:t>
-            </a:r>
-          </a:p>
-        </p:txBody>
-      </p:sp>
-      <p:sp>
-        <p:nvSpPr>
-          <p:cNvPr id="40" name="TextBox 39">
-            <a:extLst>
-              <a:ext uri="{FF2B5EF4-FFF2-40B4-BE49-F238E27FC236}">
-                <a16:creationId xmlns:a16="http://schemas.microsoft.com/office/drawing/2014/main" id="{3C0C81D3-EB60-1E7A-C089-75C020F352ED}"/>
-              </a:ext>
-            </a:extLst>
-          </p:cNvPr>
-          <p:cNvSpPr txBox="1"/>
-          <p:nvPr/>
-        </p:nvSpPr>
-        <p:spPr>
-          <a:xfrm>
-            <a:off x="1354407" y="5902388"/>
-            <a:ext cx="1373774" cy="369332"/>
-          </a:xfrm>
-          <a:prstGeom prst="rect">
-            <a:avLst/>
-          </a:prstGeom>
-          <a:noFill/>
-        </p:spPr>
-        <p:txBody>
-          <a:bodyPr wrap="none" rtlCol="0">
-            <a:spAutoFit/>
-          </a:bodyPr>
-          <a:lstStyle/>
-          <a:p>
-            <a:r>
-              <a:rPr lang="en-US" altLang="ko-KR" dirty="0"/>
-              <a:t>mutex</a:t>
-            </a:r>
-            <a:r>
-              <a:rPr lang="ko-KR" altLang="en-US" dirty="0"/>
-              <a:t> 반납</a:t>
-            </a:r>
-          </a:p>
-        </p:txBody>
-      </p:sp>
-      <p:sp>
-        <p:nvSpPr>
-          <p:cNvPr id="42" name="사각형: 둥근 모서리 41">
-            <a:extLst>
-              <a:ext uri="{FF2B5EF4-FFF2-40B4-BE49-F238E27FC236}">
-                <a16:creationId xmlns:a16="http://schemas.microsoft.com/office/drawing/2014/main" id="{F98B13FF-AD4A-600C-FEE1-DFA1EA76986D}"/>
-              </a:ext>
-            </a:extLst>
-          </p:cNvPr>
-          <p:cNvSpPr/>
-          <p:nvPr/>
-        </p:nvSpPr>
-        <p:spPr>
-          <a:xfrm>
-            <a:off x="1159094" y="5844233"/>
-            <a:ext cx="1764401" cy="557981"/>
-          </a:xfrm>
-          <a:prstGeom prst="roundRect">
-            <a:avLst/>
-          </a:prstGeom>
-          <a:noFill/>
-        </p:spPr>
-        <p:style>
-          <a:lnRef idx="2">
-            <a:schemeClr val="accent1">
-              <a:shade val="15000"/>
-            </a:schemeClr>
-          </a:lnRef>
-          <a:fillRef idx="1">
-            <a:schemeClr val="accent1"/>
-          </a:fillRef>
-          <a:effectRef idx="0">
-            <a:schemeClr val="accent1"/>
-          </a:effectRef>
-          <a:fontRef idx="minor">
-            <a:schemeClr val="lt1"/>
-          </a:fontRef>
-        </p:style>
-        <p:txBody>
-          <a:bodyPr rtlCol="0" anchor="ctr"/>
-          <a:lstStyle/>
-          <a:p>
-            <a:pPr algn="ctr"/>
-            <a:endParaRPr lang="ko-KR" altLang="en-US"/>
-          </a:p>
-        </p:txBody>
-      </p:sp>
-      <p:sp>
-        <p:nvSpPr>
-          <p:cNvPr id="44" name="TextBox 43">
-            <a:extLst>
-              <a:ext uri="{FF2B5EF4-FFF2-40B4-BE49-F238E27FC236}">
-                <a16:creationId xmlns:a16="http://schemas.microsoft.com/office/drawing/2014/main" id="{22A5546E-B4E2-D934-BAD7-58FE93B49D77}"/>
-              </a:ext>
-            </a:extLst>
-          </p:cNvPr>
-          <p:cNvSpPr txBox="1"/>
-          <p:nvPr/>
-        </p:nvSpPr>
-        <p:spPr>
-          <a:xfrm>
-            <a:off x="388452" y="5227249"/>
-            <a:ext cx="3431902" cy="369332"/>
-          </a:xfrm>
-          <a:prstGeom prst="rect">
-            <a:avLst/>
-          </a:prstGeom>
-          <a:noFill/>
-        </p:spPr>
-        <p:txBody>
-          <a:bodyPr wrap="none" rtlCol="0">
-            <a:spAutoFit/>
-          </a:bodyPr>
-          <a:lstStyle/>
-          <a:p>
-            <a:r>
-              <a:rPr lang="en-US" altLang="ko-KR" dirty="0"/>
-              <a:t>UDS</a:t>
-            </a:r>
-            <a:r>
-              <a:rPr lang="ko-KR" altLang="en-US" dirty="0"/>
-              <a:t> </a:t>
-            </a:r>
-            <a:r>
-              <a:rPr lang="en-US" altLang="ko-KR" dirty="0"/>
-              <a:t>ID</a:t>
-            </a:r>
-            <a:r>
-              <a:rPr lang="ko-KR" altLang="en-US" dirty="0"/>
-              <a:t>에 따라 </a:t>
-            </a:r>
-            <a:r>
-              <a:rPr lang="en-US" altLang="ko-KR" dirty="0"/>
-              <a:t>DTC Read/Clear</a:t>
-            </a:r>
-            <a:endParaRPr lang="ko-KR" altLang="en-US" dirty="0"/>
-          </a:p>
-        </p:txBody>
-      </p:sp>
-      <p:sp>
-        <p:nvSpPr>
-          <p:cNvPr id="46" name="사각형: 둥근 모서리 45">
-            <a:extLst>
-              <a:ext uri="{FF2B5EF4-FFF2-40B4-BE49-F238E27FC236}">
-                <a16:creationId xmlns:a16="http://schemas.microsoft.com/office/drawing/2014/main" id="{F4D0B180-FEA3-E95F-4375-DEB23ABE7EC7}"/>
-              </a:ext>
-            </a:extLst>
-          </p:cNvPr>
-          <p:cNvSpPr/>
-          <p:nvPr/>
-        </p:nvSpPr>
-        <p:spPr>
-          <a:xfrm>
-            <a:off x="349260" y="5132925"/>
-            <a:ext cx="3526722" cy="557981"/>
-          </a:xfrm>
-          <a:prstGeom prst="roundRect">
-            <a:avLst/>
-          </a:prstGeom>
-          <a:noFill/>
-        </p:spPr>
-        <p:style>
-          <a:lnRef idx="2">
-            <a:schemeClr val="accent1">
-              <a:shade val="15000"/>
-            </a:schemeClr>
-          </a:lnRef>
-          <a:fillRef idx="1">
-            <a:schemeClr val="accent1"/>
-          </a:fillRef>
-          <a:effectRef idx="0">
-            <a:schemeClr val="accent1"/>
-          </a:effectRef>
-          <a:fontRef idx="minor">
-            <a:schemeClr val="lt1"/>
-          </a:fontRef>
-        </p:style>
-        <p:txBody>
-          <a:bodyPr rtlCol="0" anchor="ctr"/>
-          <a:lstStyle/>
-          <a:p>
-            <a:pPr algn="ctr"/>
-            <a:endParaRPr lang="ko-KR" altLang="en-US"/>
-          </a:p>
-        </p:txBody>
-      </p:sp>
-      <p:sp>
-        <p:nvSpPr>
-          <p:cNvPr id="49" name="화살표: 아래쪽 48">
-            <a:extLst>
-              <a:ext uri="{FF2B5EF4-FFF2-40B4-BE49-F238E27FC236}">
-                <a16:creationId xmlns:a16="http://schemas.microsoft.com/office/drawing/2014/main" id="{A0986017-0487-6743-7CEB-F199C47B7952}"/>
-              </a:ext>
-            </a:extLst>
-          </p:cNvPr>
-          <p:cNvSpPr/>
-          <p:nvPr/>
-        </p:nvSpPr>
-        <p:spPr>
-          <a:xfrm>
-            <a:off x="1933611" y="2679905"/>
-            <a:ext cx="294968" cy="256228"/>
-          </a:xfrm>
-          <a:prstGeom prst="downArrow">
-            <a:avLst/>
-          </a:prstGeom>
-          <a:noFill/>
-        </p:spPr>
-        <p:style>
-          <a:lnRef idx="2">
-            <a:schemeClr val="accent1">
-              <a:shade val="15000"/>
-            </a:schemeClr>
-          </a:lnRef>
-          <a:fillRef idx="1">
-            <a:schemeClr val="accent1"/>
-          </a:fillRef>
-          <a:effectRef idx="0">
-            <a:schemeClr val="accent1"/>
-          </a:effectRef>
-          <a:fontRef idx="minor">
-            <a:schemeClr val="lt1"/>
-          </a:fontRef>
-        </p:style>
-        <p:txBody>
-          <a:bodyPr rtlCol="0" anchor="ctr"/>
-          <a:lstStyle/>
-          <a:p>
-            <a:pPr algn="ctr"/>
-            <a:endParaRPr lang="ko-KR" altLang="en-US"/>
-          </a:p>
-        </p:txBody>
-      </p:sp>
-      <p:sp>
-        <p:nvSpPr>
-          <p:cNvPr id="51" name="화살표: 아래쪽 50">
-            <a:extLst>
-              <a:ext uri="{FF2B5EF4-FFF2-40B4-BE49-F238E27FC236}">
-                <a16:creationId xmlns:a16="http://schemas.microsoft.com/office/drawing/2014/main" id="{03146E7A-BE48-BBC1-3C57-CD1C66B95896}"/>
-              </a:ext>
-            </a:extLst>
-          </p:cNvPr>
-          <p:cNvSpPr/>
-          <p:nvPr/>
-        </p:nvSpPr>
-        <p:spPr>
-          <a:xfrm>
-            <a:off x="1939099" y="4053821"/>
-            <a:ext cx="294968" cy="256228"/>
-          </a:xfrm>
-          <a:prstGeom prst="downArrow">
-            <a:avLst/>
-          </a:prstGeom>
-          <a:noFill/>
-        </p:spPr>
-        <p:style>
-          <a:lnRef idx="2">
-            <a:schemeClr val="accent1">
-              <a:shade val="15000"/>
-            </a:schemeClr>
-          </a:lnRef>
-          <a:fillRef idx="1">
-            <a:schemeClr val="accent1"/>
-          </a:fillRef>
-          <a:effectRef idx="0">
-            <a:schemeClr val="accent1"/>
-          </a:effectRef>
-          <a:fontRef idx="minor">
-            <a:schemeClr val="lt1"/>
-          </a:fontRef>
-        </p:style>
-        <p:txBody>
-          <a:bodyPr rtlCol="0" anchor="ctr"/>
-          <a:lstStyle/>
-          <a:p>
-            <a:pPr algn="ctr"/>
-            <a:endParaRPr lang="ko-KR" altLang="en-US"/>
-          </a:p>
-        </p:txBody>
-      </p:sp>
-      <p:sp>
-        <p:nvSpPr>
-          <p:cNvPr id="53" name="화살표: 아래쪽 52">
-            <a:extLst>
-              <a:ext uri="{FF2B5EF4-FFF2-40B4-BE49-F238E27FC236}">
-                <a16:creationId xmlns:a16="http://schemas.microsoft.com/office/drawing/2014/main" id="{D9CBB9BC-00B9-C7DC-00CC-BB940332E9C2}"/>
-              </a:ext>
-            </a:extLst>
-          </p:cNvPr>
-          <p:cNvSpPr/>
-          <p:nvPr/>
-        </p:nvSpPr>
-        <p:spPr>
-          <a:xfrm>
-            <a:off x="1899219" y="4912799"/>
-            <a:ext cx="294968" cy="256228"/>
-          </a:xfrm>
-          <a:prstGeom prst="downArrow">
-            <a:avLst/>
-          </a:prstGeom>
-          <a:noFill/>
-        </p:spPr>
-        <p:style>
-          <a:lnRef idx="2">
-            <a:schemeClr val="accent1">
-              <a:shade val="15000"/>
-            </a:schemeClr>
-          </a:lnRef>
-          <a:fillRef idx="1">
-            <a:schemeClr val="accent1"/>
-          </a:fillRef>
-          <a:effectRef idx="0">
-            <a:schemeClr val="accent1"/>
-          </a:effectRef>
-          <a:fontRef idx="minor">
-            <a:schemeClr val="lt1"/>
-          </a:fontRef>
-        </p:style>
-        <p:txBody>
-          <a:bodyPr rtlCol="0" anchor="ctr"/>
-          <a:lstStyle/>
-          <a:p>
-            <a:pPr algn="ctr"/>
-            <a:endParaRPr lang="ko-KR" altLang="en-US"/>
-          </a:p>
-        </p:txBody>
-      </p:sp>
-      <p:sp>
-        <p:nvSpPr>
-          <p:cNvPr id="55" name="TextBox 54">
-            <a:extLst>
-              <a:ext uri="{FF2B5EF4-FFF2-40B4-BE49-F238E27FC236}">
-                <a16:creationId xmlns:a16="http://schemas.microsoft.com/office/drawing/2014/main" id="{92F38EFC-8710-5548-9E4C-78FD0B0A0780}"/>
-              </a:ext>
-            </a:extLst>
-          </p:cNvPr>
-          <p:cNvSpPr txBox="1"/>
-          <p:nvPr/>
-        </p:nvSpPr>
-        <p:spPr>
-          <a:xfrm>
-            <a:off x="1490966" y="4874735"/>
-            <a:ext cx="408253" cy="276999"/>
-          </a:xfrm>
-          <a:prstGeom prst="rect">
-            <a:avLst/>
-          </a:prstGeom>
-          <a:noFill/>
-        </p:spPr>
-        <p:txBody>
-          <a:bodyPr wrap="none" rtlCol="0">
-            <a:spAutoFit/>
-          </a:bodyPr>
-          <a:lstStyle/>
-          <a:p>
-            <a:r>
-              <a:rPr lang="en-US" altLang="ko-KR" sz="1200" dirty="0"/>
-              <a:t>yes</a:t>
-            </a:r>
-            <a:endParaRPr lang="ko-KR" altLang="en-US" sz="1200" dirty="0"/>
-          </a:p>
-        </p:txBody>
-      </p:sp>
-      <p:sp>
-        <p:nvSpPr>
-          <p:cNvPr id="56" name="화살표: U자형 55">
-            <a:extLst>
-              <a:ext uri="{FF2B5EF4-FFF2-40B4-BE49-F238E27FC236}">
-                <a16:creationId xmlns:a16="http://schemas.microsoft.com/office/drawing/2014/main" id="{424B652D-1ECB-1D9E-10E5-04F7C1266DBD}"/>
-              </a:ext>
-            </a:extLst>
-          </p:cNvPr>
-          <p:cNvSpPr/>
-          <p:nvPr/>
-        </p:nvSpPr>
-        <p:spPr>
-          <a:xfrm rot="5400000">
-            <a:off x="2797864" y="4661622"/>
-            <a:ext cx="1656739" cy="1369334"/>
-          </a:xfrm>
-          <a:prstGeom prst="uturnArrow">
-            <a:avLst>
-              <a:gd name="adj1" fmla="val 11594"/>
-              <a:gd name="adj2" fmla="val 12976"/>
-              <a:gd name="adj3" fmla="val 23447"/>
-              <a:gd name="adj4" fmla="val 34060"/>
-              <a:gd name="adj5" fmla="val 100000"/>
-            </a:avLst>
-          </a:prstGeom>
-          <a:noFill/>
-        </p:spPr>
-        <p:style>
-          <a:lnRef idx="2">
-            <a:schemeClr val="accent1">
-              <a:shade val="15000"/>
-            </a:schemeClr>
-          </a:lnRef>
-          <a:fillRef idx="1">
-            <a:schemeClr val="accent1"/>
-          </a:fillRef>
-          <a:effectRef idx="0">
-            <a:schemeClr val="accent1"/>
-          </a:effectRef>
-          <a:fontRef idx="minor">
-            <a:schemeClr val="lt1"/>
-          </a:fontRef>
-        </p:style>
-        <p:txBody>
-          <a:bodyPr rtlCol="0" anchor="ctr"/>
-          <a:lstStyle/>
-          <a:p>
-            <a:pPr algn="ctr"/>
-            <a:endParaRPr lang="ko-KR" altLang="en-US">
-              <a:solidFill>
-                <a:schemeClr val="tx1"/>
-              </a:solidFill>
-            </a:endParaRPr>
-          </a:p>
-        </p:txBody>
-      </p:sp>
-      <p:sp>
-        <p:nvSpPr>
-          <p:cNvPr id="58" name="TextBox 57">
-            <a:extLst>
-              <a:ext uri="{FF2B5EF4-FFF2-40B4-BE49-F238E27FC236}">
-                <a16:creationId xmlns:a16="http://schemas.microsoft.com/office/drawing/2014/main" id="{627E6F8F-4DCA-6372-F5C3-03D18FF188AA}"/>
-              </a:ext>
-            </a:extLst>
-          </p:cNvPr>
-          <p:cNvSpPr txBox="1"/>
-          <p:nvPr/>
-        </p:nvSpPr>
-        <p:spPr>
-          <a:xfrm>
-            <a:off x="3431260" y="4211809"/>
-            <a:ext cx="367408" cy="276999"/>
-          </a:xfrm>
-          <a:prstGeom prst="rect">
-            <a:avLst/>
-          </a:prstGeom>
-          <a:noFill/>
-        </p:spPr>
-        <p:txBody>
-          <a:bodyPr wrap="none" rtlCol="0">
-            <a:spAutoFit/>
-          </a:bodyPr>
-          <a:lstStyle/>
-          <a:p>
-            <a:r>
-              <a:rPr lang="en-US" altLang="ko-KR" sz="1200" dirty="0"/>
-              <a:t>no</a:t>
-            </a:r>
-            <a:endParaRPr lang="ko-KR" altLang="en-US" sz="1200" dirty="0"/>
-          </a:p>
-        </p:txBody>
-      </p:sp>
-      <p:sp>
-        <p:nvSpPr>
-          <p:cNvPr id="60" name="사각형: 둥근 모서리 59">
-            <a:extLst>
-              <a:ext uri="{FF2B5EF4-FFF2-40B4-BE49-F238E27FC236}">
-                <a16:creationId xmlns:a16="http://schemas.microsoft.com/office/drawing/2014/main" id="{9F91BF75-40EE-CD0A-4938-21A7420E2975}"/>
-              </a:ext>
-            </a:extLst>
-          </p:cNvPr>
-          <p:cNvSpPr/>
-          <p:nvPr/>
-        </p:nvSpPr>
-        <p:spPr>
-          <a:xfrm>
-            <a:off x="8624417" y="2793982"/>
-            <a:ext cx="2873590" cy="557981"/>
-          </a:xfrm>
-          <a:prstGeom prst="roundRect">
-            <a:avLst/>
-          </a:prstGeom>
-          <a:noFill/>
-        </p:spPr>
-        <p:style>
-          <a:lnRef idx="2">
-            <a:schemeClr val="accent1">
-              <a:shade val="15000"/>
-            </a:schemeClr>
-          </a:lnRef>
-          <a:fillRef idx="1">
-            <a:schemeClr val="accent1"/>
-          </a:fillRef>
-          <a:effectRef idx="0">
-            <a:schemeClr val="accent1"/>
-          </a:effectRef>
-          <a:fontRef idx="minor">
-            <a:schemeClr val="lt1"/>
-          </a:fontRef>
-        </p:style>
-        <p:txBody>
-          <a:bodyPr rtlCol="0" anchor="ctr"/>
-          <a:lstStyle/>
-          <a:p>
-            <a:pPr algn="ctr"/>
-            <a:endParaRPr lang="ko-KR" altLang="en-US"/>
-          </a:p>
-        </p:txBody>
-      </p:sp>
-      <p:sp>
-        <p:nvSpPr>
-          <p:cNvPr id="62" name="TextBox 61">
-            <a:extLst>
-              <a:ext uri="{FF2B5EF4-FFF2-40B4-BE49-F238E27FC236}">
-                <a16:creationId xmlns:a16="http://schemas.microsoft.com/office/drawing/2014/main" id="{63F4074E-636C-06E4-58EB-7755BA577330}"/>
-              </a:ext>
-            </a:extLst>
-          </p:cNvPr>
-          <p:cNvSpPr txBox="1"/>
-          <p:nvPr/>
-        </p:nvSpPr>
-        <p:spPr>
-          <a:xfrm>
-            <a:off x="8728451" y="2900288"/>
-            <a:ext cx="2641492" cy="369332"/>
-          </a:xfrm>
-          <a:prstGeom prst="rect">
-            <a:avLst/>
-          </a:prstGeom>
-          <a:noFill/>
-        </p:spPr>
-        <p:txBody>
-          <a:bodyPr wrap="none" rtlCol="0">
-            <a:spAutoFit/>
-          </a:bodyPr>
-          <a:lstStyle/>
-          <a:p>
-            <a:r>
-              <a:rPr lang="en-US" altLang="ko-KR" dirty="0"/>
-              <a:t>PMIC</a:t>
-            </a:r>
-            <a:r>
-              <a:rPr lang="ko-KR" altLang="en-US" dirty="0"/>
-              <a:t>로부터 </a:t>
-            </a:r>
-            <a:r>
-              <a:rPr lang="en-US" altLang="ko-KR" dirty="0"/>
-              <a:t>UVLO </a:t>
-            </a:r>
-            <a:r>
-              <a:rPr lang="ko-KR" altLang="en-US" dirty="0"/>
-              <a:t>읽기</a:t>
-            </a:r>
-          </a:p>
-        </p:txBody>
-      </p:sp>
-      <p:sp>
-        <p:nvSpPr>
-          <p:cNvPr id="64" name="화살표: 아래쪽 63">
-            <a:extLst>
-              <a:ext uri="{FF2B5EF4-FFF2-40B4-BE49-F238E27FC236}">
-                <a16:creationId xmlns:a16="http://schemas.microsoft.com/office/drawing/2014/main" id="{7A9B81E9-07AF-9273-F885-0BB8630BF42F}"/>
-              </a:ext>
-            </a:extLst>
-          </p:cNvPr>
-          <p:cNvSpPr/>
-          <p:nvPr/>
-        </p:nvSpPr>
-        <p:spPr>
-          <a:xfrm>
-            <a:off x="9901713" y="2584078"/>
-            <a:ext cx="294968" cy="256228"/>
-          </a:xfrm>
-          <a:prstGeom prst="downArrow">
-            <a:avLst/>
-          </a:prstGeom>
-          <a:noFill/>
-        </p:spPr>
-        <p:style>
-          <a:lnRef idx="2">
-            <a:schemeClr val="accent1">
-              <a:shade val="15000"/>
-            </a:schemeClr>
-          </a:lnRef>
-          <a:fillRef idx="1">
-            <a:schemeClr val="accent1"/>
-          </a:fillRef>
-          <a:effectRef idx="0">
-            <a:schemeClr val="accent1"/>
-          </a:effectRef>
-          <a:fontRef idx="minor">
-            <a:schemeClr val="lt1"/>
-          </a:fontRef>
-        </p:style>
-        <p:txBody>
-          <a:bodyPr rtlCol="0" anchor="ctr"/>
-          <a:lstStyle/>
-          <a:p>
-            <a:pPr algn="ctr"/>
-            <a:endParaRPr lang="ko-KR" altLang="en-US"/>
-          </a:p>
-        </p:txBody>
-      </p:sp>
-      <p:sp>
-        <p:nvSpPr>
-          <p:cNvPr id="68" name="사각형: 둥근 모서리 67">
-            <a:extLst>
-              <a:ext uri="{FF2B5EF4-FFF2-40B4-BE49-F238E27FC236}">
-                <a16:creationId xmlns:a16="http://schemas.microsoft.com/office/drawing/2014/main" id="{3D32CF95-89D8-2A54-8FE9-FC257D593289}"/>
-              </a:ext>
-            </a:extLst>
-          </p:cNvPr>
-          <p:cNvSpPr/>
-          <p:nvPr/>
-        </p:nvSpPr>
-        <p:spPr>
-          <a:xfrm>
-            <a:off x="8368752" y="4231767"/>
-            <a:ext cx="3447290" cy="557981"/>
-          </a:xfrm>
-          <a:prstGeom prst="roundRect">
-            <a:avLst/>
-          </a:prstGeom>
-          <a:noFill/>
-          <a:ln>
-            <a:prstDash val="dash"/>
-          </a:ln>
-        </p:spPr>
-        <p:style>
-          <a:lnRef idx="2">
-            <a:schemeClr val="accent1">
-              <a:shade val="15000"/>
-            </a:schemeClr>
-          </a:lnRef>
-          <a:fillRef idx="1">
-            <a:schemeClr val="accent1"/>
-          </a:fillRef>
-          <a:effectRef idx="0">
-            <a:schemeClr val="accent1"/>
-          </a:effectRef>
-          <a:fontRef idx="minor">
-            <a:schemeClr val="lt1"/>
-          </a:fontRef>
-        </p:style>
-        <p:txBody>
-          <a:bodyPr rtlCol="0" anchor="ctr"/>
-          <a:lstStyle/>
-          <a:p>
-            <a:pPr algn="ctr"/>
-            <a:endParaRPr lang="ko-KR" altLang="en-US"/>
-          </a:p>
-        </p:txBody>
-      </p:sp>
-      <p:sp>
-        <p:nvSpPr>
-          <p:cNvPr id="70" name="TextBox 69">
-            <a:extLst>
-              <a:ext uri="{FF2B5EF4-FFF2-40B4-BE49-F238E27FC236}">
-                <a16:creationId xmlns:a16="http://schemas.microsoft.com/office/drawing/2014/main" id="{353969B8-E8EF-CF8A-584D-A9CEE6381FE3}"/>
-              </a:ext>
-            </a:extLst>
-          </p:cNvPr>
-          <p:cNvSpPr txBox="1"/>
-          <p:nvPr/>
-        </p:nvSpPr>
-        <p:spPr>
-          <a:xfrm>
-            <a:off x="8368752" y="4333253"/>
-            <a:ext cx="3552063" cy="369332"/>
-          </a:xfrm>
-          <a:prstGeom prst="rect">
-            <a:avLst/>
-          </a:prstGeom>
-          <a:noFill/>
-        </p:spPr>
-        <p:txBody>
-          <a:bodyPr wrap="none" rtlCol="0">
-            <a:spAutoFit/>
-          </a:bodyPr>
-          <a:lstStyle/>
-          <a:p>
-            <a:r>
-              <a:rPr lang="en-US" altLang="ko-KR" dirty="0"/>
-              <a:t>Power-switch</a:t>
-            </a:r>
-            <a:r>
-              <a:rPr lang="ko-KR" altLang="en-US" dirty="0"/>
-              <a:t>로부터 과전류 감지</a:t>
-            </a:r>
-          </a:p>
-        </p:txBody>
-      </p:sp>
-      <p:sp>
-        <p:nvSpPr>
-          <p:cNvPr id="72" name="화살표: 아래쪽 71">
-            <a:extLst>
-              <a:ext uri="{FF2B5EF4-FFF2-40B4-BE49-F238E27FC236}">
-                <a16:creationId xmlns:a16="http://schemas.microsoft.com/office/drawing/2014/main" id="{A256D8EF-9C21-A8BE-6E93-2187D9DF4197}"/>
-              </a:ext>
-            </a:extLst>
-          </p:cNvPr>
-          <p:cNvSpPr/>
-          <p:nvPr/>
-        </p:nvSpPr>
-        <p:spPr>
-          <a:xfrm>
-            <a:off x="9906213" y="4038191"/>
-            <a:ext cx="294968" cy="256228"/>
-          </a:xfrm>
-          <a:prstGeom prst="downArrow">
-            <a:avLst/>
-          </a:prstGeom>
-          <a:noFill/>
-        </p:spPr>
-        <p:style>
-          <a:lnRef idx="2">
-            <a:schemeClr val="accent1">
-              <a:shade val="15000"/>
-            </a:schemeClr>
-          </a:lnRef>
-          <a:fillRef idx="1">
-            <a:schemeClr val="accent1"/>
-          </a:fillRef>
-          <a:effectRef idx="0">
-            <a:schemeClr val="accent1"/>
-          </a:effectRef>
-          <a:fontRef idx="minor">
-            <a:schemeClr val="lt1"/>
-          </a:fontRef>
-        </p:style>
-        <p:txBody>
-          <a:bodyPr rtlCol="0" anchor="ctr"/>
-          <a:lstStyle/>
-          <a:p>
-            <a:pPr algn="ctr"/>
-            <a:endParaRPr lang="ko-KR" altLang="en-US"/>
-          </a:p>
-        </p:txBody>
-      </p:sp>
-      <p:sp>
-        <p:nvSpPr>
-          <p:cNvPr id="74" name="사각형: 둥근 모서리 73">
-            <a:extLst>
-              <a:ext uri="{FF2B5EF4-FFF2-40B4-BE49-F238E27FC236}">
-                <a16:creationId xmlns:a16="http://schemas.microsoft.com/office/drawing/2014/main" id="{2B5223EF-9DAE-0794-0593-72ED8909A302}"/>
-              </a:ext>
-            </a:extLst>
-          </p:cNvPr>
-          <p:cNvSpPr/>
-          <p:nvPr/>
-        </p:nvSpPr>
-        <p:spPr>
-          <a:xfrm>
-            <a:off x="8624417" y="5714111"/>
-            <a:ext cx="2873590" cy="557981"/>
-          </a:xfrm>
-          <a:prstGeom prst="roundRect">
-            <a:avLst/>
-          </a:prstGeom>
-          <a:noFill/>
-        </p:spPr>
-        <p:style>
-          <a:lnRef idx="2">
-            <a:schemeClr val="accent1">
-              <a:shade val="15000"/>
-            </a:schemeClr>
-          </a:lnRef>
-          <a:fillRef idx="1">
-            <a:schemeClr val="accent1"/>
-          </a:fillRef>
-          <a:effectRef idx="0">
-            <a:schemeClr val="accent1"/>
-          </a:effectRef>
-          <a:fontRef idx="minor">
-            <a:schemeClr val="lt1"/>
-          </a:fontRef>
-        </p:style>
-        <p:txBody>
-          <a:bodyPr rtlCol="0" anchor="ctr"/>
-          <a:lstStyle/>
-          <a:p>
-            <a:pPr algn="ctr"/>
-            <a:endParaRPr lang="ko-KR" altLang="en-US"/>
-          </a:p>
-        </p:txBody>
-      </p:sp>
-      <p:sp>
-        <p:nvSpPr>
-          <p:cNvPr id="76" name="TextBox 75">
-            <a:extLst>
-              <a:ext uri="{FF2B5EF4-FFF2-40B4-BE49-F238E27FC236}">
-                <a16:creationId xmlns:a16="http://schemas.microsoft.com/office/drawing/2014/main" id="{8E49F3C3-5C5D-8C1D-CAF4-73E9D1D5E6E6}"/>
-              </a:ext>
-            </a:extLst>
-          </p:cNvPr>
-          <p:cNvSpPr txBox="1"/>
-          <p:nvPr/>
-        </p:nvSpPr>
-        <p:spPr>
-          <a:xfrm>
-            <a:off x="8728451" y="5820417"/>
-            <a:ext cx="2613088" cy="369332"/>
-          </a:xfrm>
-          <a:prstGeom prst="rect">
-            <a:avLst/>
-          </a:prstGeom>
-          <a:noFill/>
-        </p:spPr>
-        <p:txBody>
-          <a:bodyPr wrap="none" rtlCol="0">
-            <a:spAutoFit/>
-          </a:bodyPr>
-          <a:lstStyle/>
-          <a:p>
-            <a:r>
-              <a:rPr lang="ko-KR" altLang="en-US" dirty="0"/>
-              <a:t>고장 정보 </a:t>
-            </a:r>
-            <a:r>
-              <a:rPr lang="en-US" altLang="ko-KR" dirty="0"/>
-              <a:t>UART</a:t>
-            </a:r>
-            <a:r>
-              <a:rPr lang="ko-KR" altLang="en-US" dirty="0"/>
-              <a:t>로 출력</a:t>
-            </a:r>
-          </a:p>
-        </p:txBody>
-      </p:sp>
-      <p:sp>
-        <p:nvSpPr>
-          <p:cNvPr id="78" name="화살표: 아래쪽 77">
-            <a:extLst>
-              <a:ext uri="{FF2B5EF4-FFF2-40B4-BE49-F238E27FC236}">
-                <a16:creationId xmlns:a16="http://schemas.microsoft.com/office/drawing/2014/main" id="{1CC3D8FC-0E10-E763-FE45-C1A930E5406C}"/>
-              </a:ext>
-            </a:extLst>
-          </p:cNvPr>
-          <p:cNvSpPr/>
-          <p:nvPr/>
-        </p:nvSpPr>
-        <p:spPr>
-          <a:xfrm>
-            <a:off x="9885404" y="5518046"/>
-            <a:ext cx="294968" cy="256228"/>
-          </a:xfrm>
-          <a:prstGeom prst="downArrow">
-            <a:avLst/>
-          </a:prstGeom>
-          <a:noFill/>
-        </p:spPr>
-        <p:style>
-          <a:lnRef idx="2">
-            <a:schemeClr val="accent1">
-              <a:shade val="15000"/>
-            </a:schemeClr>
-          </a:lnRef>
-          <a:fillRef idx="1">
-            <a:schemeClr val="accent1"/>
-          </a:fillRef>
-          <a:effectRef idx="0">
-            <a:schemeClr val="accent1"/>
-          </a:effectRef>
-          <a:fontRef idx="minor">
-            <a:schemeClr val="lt1"/>
-          </a:fontRef>
-        </p:style>
-        <p:txBody>
-          <a:bodyPr rtlCol="0" anchor="ctr"/>
-          <a:lstStyle/>
-          <a:p>
-            <a:pPr algn="ctr"/>
-            <a:endParaRPr lang="ko-KR" altLang="en-US"/>
-          </a:p>
-        </p:txBody>
-      </p:sp>
-      <p:sp>
-        <p:nvSpPr>
-          <p:cNvPr id="5" name="화살표: 굽음 4">
-            <a:extLst>
-              <a:ext uri="{FF2B5EF4-FFF2-40B4-BE49-F238E27FC236}">
-                <a16:creationId xmlns:a16="http://schemas.microsoft.com/office/drawing/2014/main" id="{4B29A197-9645-2DBA-B362-8432EBA9232C}"/>
-              </a:ext>
-            </a:extLst>
-          </p:cNvPr>
-          <p:cNvSpPr/>
-          <p:nvPr/>
-        </p:nvSpPr>
-        <p:spPr>
-          <a:xfrm rot="16200000" flipV="1">
-            <a:off x="1914006" y="3193191"/>
-            <a:ext cx="4156635" cy="2103246"/>
-          </a:xfrm>
-          <a:prstGeom prst="bentArrow">
-            <a:avLst>
-              <a:gd name="adj1" fmla="val 6653"/>
-              <a:gd name="adj2" fmla="val 8029"/>
-              <a:gd name="adj3" fmla="val 12157"/>
-              <a:gd name="adj4" fmla="val 29072"/>
-            </a:avLst>
-          </a:prstGeom>
-          <a:noFill/>
-        </p:spPr>
-        <p:style>
-          <a:lnRef idx="2">
-            <a:schemeClr val="accent1">
-              <a:shade val="15000"/>
-            </a:schemeClr>
-          </a:lnRef>
-          <a:fillRef idx="1">
-            <a:schemeClr val="accent1"/>
-          </a:fillRef>
-          <a:effectRef idx="0">
-            <a:schemeClr val="accent1"/>
-          </a:effectRef>
-          <a:fontRef idx="minor">
-            <a:schemeClr val="lt1"/>
-          </a:fontRef>
-        </p:style>
-        <p:txBody>
-          <a:bodyPr rtlCol="0" anchor="ctr"/>
-          <a:lstStyle/>
-          <a:p>
-            <a:pPr algn="ctr"/>
-            <a:endParaRPr lang="ko-KR" altLang="en-US">
-              <a:solidFill>
-                <a:schemeClr val="tx1"/>
-              </a:solidFill>
-            </a:endParaRPr>
-          </a:p>
-        </p:txBody>
-      </p:sp>
-      <p:sp>
-        <p:nvSpPr>
-          <p:cNvPr id="17" name="사각형: 둥근 모서리 16">
-            <a:extLst>
-              <a:ext uri="{FF2B5EF4-FFF2-40B4-BE49-F238E27FC236}">
-                <a16:creationId xmlns:a16="http://schemas.microsoft.com/office/drawing/2014/main" id="{0DB92BA6-B9EF-B0BF-7B03-A9E14AB641E1}"/>
-              </a:ext>
-            </a:extLst>
-          </p:cNvPr>
-          <p:cNvSpPr/>
-          <p:nvPr/>
-        </p:nvSpPr>
-        <p:spPr>
-          <a:xfrm>
-            <a:off x="513761" y="3585928"/>
-            <a:ext cx="3225347" cy="557981"/>
-          </a:xfrm>
-          <a:prstGeom prst="roundRect">
-            <a:avLst/>
-          </a:prstGeom>
-          <a:noFill/>
-        </p:spPr>
-        <p:style>
-          <a:lnRef idx="2">
-            <a:schemeClr val="accent1">
-              <a:shade val="15000"/>
-            </a:schemeClr>
-          </a:lnRef>
-          <a:fillRef idx="1">
-            <a:schemeClr val="accent1"/>
-          </a:fillRef>
-          <a:effectRef idx="0">
-            <a:schemeClr val="accent1"/>
-          </a:effectRef>
-          <a:fontRef idx="minor">
-            <a:schemeClr val="lt1"/>
-          </a:fontRef>
-        </p:style>
-        <p:txBody>
-          <a:bodyPr rtlCol="0" anchor="ctr"/>
-          <a:lstStyle/>
-          <a:p>
-            <a:pPr algn="ctr"/>
-            <a:endParaRPr lang="ko-KR" altLang="en-US"/>
-          </a:p>
-        </p:txBody>
-      </p:sp>
-      <p:sp>
-        <p:nvSpPr>
-          <p:cNvPr id="19" name="TextBox 18">
-            <a:extLst>
-              <a:ext uri="{FF2B5EF4-FFF2-40B4-BE49-F238E27FC236}">
-                <a16:creationId xmlns:a16="http://schemas.microsoft.com/office/drawing/2014/main" id="{1C1C0C69-12A4-0B71-AD15-F286A12A7EE6}"/>
-              </a:ext>
-            </a:extLst>
-          </p:cNvPr>
-          <p:cNvSpPr txBox="1"/>
-          <p:nvPr/>
-        </p:nvSpPr>
-        <p:spPr>
-          <a:xfrm>
-            <a:off x="690157" y="3680252"/>
-            <a:ext cx="2811219" cy="369332"/>
-          </a:xfrm>
-          <a:prstGeom prst="rect">
-            <a:avLst/>
-          </a:prstGeom>
-          <a:noFill/>
-        </p:spPr>
-        <p:txBody>
-          <a:bodyPr wrap="none" rtlCol="0">
-            <a:spAutoFit/>
-          </a:bodyPr>
-          <a:lstStyle/>
-          <a:p>
-            <a:r>
-              <a:rPr lang="en-US" altLang="ko-KR" dirty="0"/>
-              <a:t>EEPROM</a:t>
-            </a:r>
-            <a:r>
-              <a:rPr lang="ko-KR" altLang="en-US" dirty="0"/>
-              <a:t>에 </a:t>
-            </a:r>
-            <a:r>
-              <a:rPr lang="en-US" altLang="ko-KR" dirty="0"/>
-              <a:t>DTC </a:t>
-            </a:r>
-            <a:r>
-              <a:rPr lang="ko-KR" altLang="en-US" dirty="0"/>
-              <a:t>저장하기</a:t>
-            </a:r>
-          </a:p>
-        </p:txBody>
-      </p:sp>
-      <p:sp>
-        <p:nvSpPr>
-          <p:cNvPr id="23" name="화살표: 아래쪽 22">
-            <a:extLst>
-              <a:ext uri="{FF2B5EF4-FFF2-40B4-BE49-F238E27FC236}">
-                <a16:creationId xmlns:a16="http://schemas.microsoft.com/office/drawing/2014/main" id="{29D54E63-C7DD-181A-1E17-54CF6A49BC34}"/>
-              </a:ext>
-            </a:extLst>
-          </p:cNvPr>
-          <p:cNvSpPr/>
-          <p:nvPr/>
-        </p:nvSpPr>
-        <p:spPr>
-          <a:xfrm>
-            <a:off x="1933611" y="3411359"/>
-            <a:ext cx="294968" cy="256228"/>
-          </a:xfrm>
-          <a:prstGeom prst="downArrow">
-            <a:avLst/>
-          </a:prstGeom>
-          <a:noFill/>
-        </p:spPr>
-        <p:style>
-          <a:lnRef idx="2">
-            <a:schemeClr val="accent1">
-              <a:shade val="15000"/>
-            </a:schemeClr>
-          </a:lnRef>
-          <a:fillRef idx="1">
-            <a:schemeClr val="accent1"/>
-          </a:fillRef>
-          <a:effectRef idx="0">
-            <a:schemeClr val="accent1"/>
-          </a:effectRef>
-          <a:fontRef idx="minor">
-            <a:schemeClr val="lt1"/>
-          </a:fontRef>
-        </p:style>
-        <p:txBody>
-          <a:bodyPr rtlCol="0" anchor="ctr"/>
-          <a:lstStyle/>
-          <a:p>
-            <a:pPr algn="ctr"/>
-            <a:endParaRPr lang="ko-KR" altLang="en-US"/>
-          </a:p>
-        </p:txBody>
-      </p:sp>
-      <p:sp>
-        <p:nvSpPr>
-          <p:cNvPr id="26" name="화살표: 아래쪽 25">
-            <a:extLst>
-              <a:ext uri="{FF2B5EF4-FFF2-40B4-BE49-F238E27FC236}">
-                <a16:creationId xmlns:a16="http://schemas.microsoft.com/office/drawing/2014/main" id="{36D2E4EC-758A-3B4E-B18E-721FC405C758}"/>
-              </a:ext>
-            </a:extLst>
-          </p:cNvPr>
-          <p:cNvSpPr/>
-          <p:nvPr/>
-        </p:nvSpPr>
-        <p:spPr>
-          <a:xfrm>
-            <a:off x="1868346" y="5646160"/>
-            <a:ext cx="294968" cy="256228"/>
-          </a:xfrm>
-          <a:prstGeom prst="downArrow">
-            <a:avLst/>
-          </a:prstGeom>
-          <a:noFill/>
-        </p:spPr>
-        <p:style>
-          <a:lnRef idx="2">
-            <a:schemeClr val="accent1">
-              <a:shade val="15000"/>
-            </a:schemeClr>
-          </a:lnRef>
-          <a:fillRef idx="1">
-            <a:schemeClr val="accent1"/>
-          </a:fillRef>
-          <a:effectRef idx="0">
-            <a:schemeClr val="accent1"/>
-          </a:effectRef>
-          <a:fontRef idx="minor">
-            <a:schemeClr val="lt1"/>
-          </a:fontRef>
-        </p:style>
-        <p:txBody>
-          <a:bodyPr rtlCol="0" anchor="ctr"/>
-          <a:lstStyle/>
-          <a:p>
-            <a:pPr algn="ctr"/>
-            <a:endParaRPr lang="ko-KR" altLang="en-US"/>
-          </a:p>
-        </p:txBody>
-      </p:sp>
-      <p:sp>
-        <p:nvSpPr>
-          <p:cNvPr id="30" name="사각형: 둥근 모서리 29">
-            <a:extLst>
-              <a:ext uri="{FF2B5EF4-FFF2-40B4-BE49-F238E27FC236}">
-                <a16:creationId xmlns:a16="http://schemas.microsoft.com/office/drawing/2014/main" id="{512A9F86-D757-497D-8D53-95C29D7E5DA6}"/>
-              </a:ext>
-            </a:extLst>
-          </p:cNvPr>
-          <p:cNvSpPr/>
-          <p:nvPr/>
-        </p:nvSpPr>
-        <p:spPr>
-          <a:xfrm>
-            <a:off x="8508685" y="3520148"/>
-            <a:ext cx="3225347" cy="557981"/>
-          </a:xfrm>
-          <a:prstGeom prst="roundRect">
-            <a:avLst/>
-          </a:prstGeom>
-          <a:noFill/>
-        </p:spPr>
-        <p:style>
-          <a:lnRef idx="2">
-            <a:schemeClr val="accent1">
-              <a:shade val="15000"/>
-            </a:schemeClr>
-          </a:lnRef>
-          <a:fillRef idx="1">
-            <a:schemeClr val="accent1"/>
-          </a:fillRef>
-          <a:effectRef idx="0">
-            <a:schemeClr val="accent1"/>
-          </a:effectRef>
-          <a:fontRef idx="minor">
-            <a:schemeClr val="lt1"/>
-          </a:fontRef>
-        </p:style>
-        <p:txBody>
-          <a:bodyPr rtlCol="0" anchor="ctr"/>
-          <a:lstStyle/>
-          <a:p>
-            <a:pPr algn="ctr"/>
-            <a:endParaRPr lang="ko-KR" altLang="en-US"/>
-          </a:p>
-        </p:txBody>
-      </p:sp>
-      <p:sp>
-        <p:nvSpPr>
-          <p:cNvPr id="34" name="TextBox 33">
-            <a:extLst>
-              <a:ext uri="{FF2B5EF4-FFF2-40B4-BE49-F238E27FC236}">
-                <a16:creationId xmlns:a16="http://schemas.microsoft.com/office/drawing/2014/main" id="{3FBA00CC-409B-A80B-9D95-5CE3B51FA2B5}"/>
-              </a:ext>
-            </a:extLst>
-          </p:cNvPr>
-          <p:cNvSpPr txBox="1"/>
-          <p:nvPr/>
-        </p:nvSpPr>
-        <p:spPr>
-          <a:xfrm>
-            <a:off x="8686788" y="3582758"/>
-            <a:ext cx="2811219" cy="369332"/>
-          </a:xfrm>
-          <a:prstGeom prst="rect">
-            <a:avLst/>
-          </a:prstGeom>
-          <a:noFill/>
-        </p:spPr>
-        <p:txBody>
-          <a:bodyPr wrap="none" rtlCol="0">
-            <a:spAutoFit/>
-          </a:bodyPr>
-          <a:lstStyle/>
-          <a:p>
-            <a:r>
-              <a:rPr lang="en-US" altLang="ko-KR" dirty="0"/>
-              <a:t>EEPROM</a:t>
-            </a:r>
-            <a:r>
-              <a:rPr lang="ko-KR" altLang="en-US" dirty="0"/>
-              <a:t>에 </a:t>
-            </a:r>
-            <a:r>
-              <a:rPr lang="en-US" altLang="ko-KR" dirty="0"/>
-              <a:t>DTC </a:t>
-            </a:r>
-            <a:r>
-              <a:rPr lang="ko-KR" altLang="en-US" dirty="0"/>
-              <a:t>저장하기</a:t>
-            </a:r>
-          </a:p>
-        </p:txBody>
-      </p:sp>
-      <p:sp>
-        <p:nvSpPr>
-          <p:cNvPr id="39" name="화살표: 아래쪽 38">
-            <a:extLst>
-              <a:ext uri="{FF2B5EF4-FFF2-40B4-BE49-F238E27FC236}">
-                <a16:creationId xmlns:a16="http://schemas.microsoft.com/office/drawing/2014/main" id="{BF5791F9-38AD-9EF0-68E8-76C7BEF1AA14}"/>
-              </a:ext>
-            </a:extLst>
-          </p:cNvPr>
-          <p:cNvSpPr/>
-          <p:nvPr/>
-        </p:nvSpPr>
-        <p:spPr>
-          <a:xfrm>
-            <a:off x="9901713" y="3326530"/>
-            <a:ext cx="294968" cy="256228"/>
-          </a:xfrm>
-          <a:prstGeom prst="downArrow">
-            <a:avLst/>
-          </a:prstGeom>
-          <a:noFill/>
-        </p:spPr>
-        <p:style>
-          <a:lnRef idx="2">
-            <a:schemeClr val="accent1">
-              <a:shade val="15000"/>
-            </a:schemeClr>
-          </a:lnRef>
-          <a:fillRef idx="1">
-            <a:schemeClr val="accent1"/>
-          </a:fillRef>
-          <a:effectRef idx="0">
-            <a:schemeClr val="accent1"/>
-          </a:effectRef>
-          <a:fontRef idx="minor">
-            <a:schemeClr val="lt1"/>
-          </a:fontRef>
-        </p:style>
-        <p:txBody>
-          <a:bodyPr rtlCol="0" anchor="ctr"/>
-          <a:lstStyle/>
-          <a:p>
-            <a:pPr algn="ctr"/>
-            <a:endParaRPr lang="ko-KR" altLang="en-US"/>
-          </a:p>
-        </p:txBody>
-      </p:sp>
-      <p:sp>
-        <p:nvSpPr>
-          <p:cNvPr id="43" name="사각형: 둥근 모서리 42">
-            <a:extLst>
-              <a:ext uri="{FF2B5EF4-FFF2-40B4-BE49-F238E27FC236}">
-                <a16:creationId xmlns:a16="http://schemas.microsoft.com/office/drawing/2014/main" id="{2FD7DEFB-FEE2-67E3-ACC9-DC19BAEC0875}"/>
-              </a:ext>
-            </a:extLst>
-          </p:cNvPr>
-          <p:cNvSpPr/>
-          <p:nvPr/>
-        </p:nvSpPr>
-        <p:spPr>
-          <a:xfrm>
-            <a:off x="8508685" y="4943386"/>
-            <a:ext cx="3225347" cy="557981"/>
-          </a:xfrm>
-          <a:prstGeom prst="roundRect">
-            <a:avLst/>
-          </a:prstGeom>
-          <a:noFill/>
-          <a:ln>
-            <a:prstDash val="dash"/>
-          </a:ln>
-        </p:spPr>
-        <p:style>
-          <a:lnRef idx="2">
-            <a:schemeClr val="accent1">
-              <a:shade val="15000"/>
-            </a:schemeClr>
-          </a:lnRef>
-          <a:fillRef idx="1">
-            <a:schemeClr val="accent1"/>
-          </a:fillRef>
-          <a:effectRef idx="0">
-            <a:schemeClr val="accent1"/>
-          </a:effectRef>
-          <a:fontRef idx="minor">
-            <a:schemeClr val="lt1"/>
-          </a:fontRef>
-        </p:style>
-        <p:txBody>
-          <a:bodyPr rtlCol="0" anchor="ctr"/>
-          <a:lstStyle/>
-          <a:p>
-            <a:pPr algn="ctr"/>
-            <a:endParaRPr lang="ko-KR" altLang="en-US"/>
-          </a:p>
-        </p:txBody>
-      </p:sp>
-      <p:sp>
-        <p:nvSpPr>
-          <p:cNvPr id="47" name="TextBox 46">
-            <a:extLst>
-              <a:ext uri="{FF2B5EF4-FFF2-40B4-BE49-F238E27FC236}">
-                <a16:creationId xmlns:a16="http://schemas.microsoft.com/office/drawing/2014/main" id="{BB2113EA-4118-83F0-620E-7154ED7C4D3A}"/>
-              </a:ext>
-            </a:extLst>
-          </p:cNvPr>
-          <p:cNvSpPr txBox="1"/>
-          <p:nvPr/>
-        </p:nvSpPr>
-        <p:spPr>
-          <a:xfrm>
-            <a:off x="8686788" y="5005996"/>
-            <a:ext cx="2811219" cy="369332"/>
-          </a:xfrm>
-          <a:prstGeom prst="rect">
-            <a:avLst/>
-          </a:prstGeom>
-          <a:noFill/>
-        </p:spPr>
-        <p:txBody>
-          <a:bodyPr wrap="none" rtlCol="0">
-            <a:spAutoFit/>
-          </a:bodyPr>
-          <a:lstStyle/>
-          <a:p>
-            <a:r>
-              <a:rPr lang="en-US" altLang="ko-KR" dirty="0"/>
-              <a:t>EEPROM</a:t>
-            </a:r>
-            <a:r>
-              <a:rPr lang="ko-KR" altLang="en-US" dirty="0"/>
-              <a:t>에 </a:t>
-            </a:r>
-            <a:r>
-              <a:rPr lang="en-US" altLang="ko-KR" dirty="0"/>
-              <a:t>DTC </a:t>
-            </a:r>
-            <a:r>
-              <a:rPr lang="ko-KR" altLang="en-US" dirty="0"/>
-              <a:t>저장하기</a:t>
-            </a:r>
-          </a:p>
-        </p:txBody>
-      </p:sp>
-      <p:sp>
-        <p:nvSpPr>
-          <p:cNvPr id="50" name="화살표: 아래쪽 49">
-            <a:extLst>
-              <a:ext uri="{FF2B5EF4-FFF2-40B4-BE49-F238E27FC236}">
-                <a16:creationId xmlns:a16="http://schemas.microsoft.com/office/drawing/2014/main" id="{135A2761-55F2-2868-EB3D-20C4E912E791}"/>
-              </a:ext>
-            </a:extLst>
-          </p:cNvPr>
-          <p:cNvSpPr/>
-          <p:nvPr/>
-        </p:nvSpPr>
-        <p:spPr>
-          <a:xfrm>
-            <a:off x="9887511" y="4802644"/>
-            <a:ext cx="294968" cy="256228"/>
-          </a:xfrm>
-          <a:prstGeom prst="downArrow">
-            <a:avLst/>
-          </a:prstGeom>
-          <a:noFill/>
-        </p:spPr>
-        <p:style>
-          <a:lnRef idx="2">
-            <a:schemeClr val="accent1">
-              <a:shade val="15000"/>
-            </a:schemeClr>
-          </a:lnRef>
-          <a:fillRef idx="1">
-            <a:schemeClr val="accent1"/>
-          </a:fillRef>
-          <a:effectRef idx="0">
-            <a:schemeClr val="accent1"/>
-          </a:effectRef>
-          <a:fontRef idx="minor">
-            <a:schemeClr val="lt1"/>
-          </a:fontRef>
-        </p:style>
-        <p:txBody>
-          <a:bodyPr rtlCol="0" anchor="ctr"/>
-          <a:lstStyle/>
-          <a:p>
-            <a:pPr algn="ctr"/>
-            <a:endParaRPr lang="ko-KR" altLang="en-US"/>
-          </a:p>
-        </p:txBody>
-      </p:sp>
-      <p:sp>
-        <p:nvSpPr>
-          <p:cNvPr id="54" name="화살표: 굽음 53">
-            <a:extLst>
-              <a:ext uri="{FF2B5EF4-FFF2-40B4-BE49-F238E27FC236}">
-                <a16:creationId xmlns:a16="http://schemas.microsoft.com/office/drawing/2014/main" id="{150602CD-2B0E-8A26-EE8B-A81A29C9B595}"/>
-              </a:ext>
-            </a:extLst>
-          </p:cNvPr>
-          <p:cNvSpPr/>
-          <p:nvPr/>
-        </p:nvSpPr>
-        <p:spPr>
-          <a:xfrm rot="16200000">
-            <a:off x="5341604" y="2920682"/>
-            <a:ext cx="3942552" cy="2424437"/>
-          </a:xfrm>
-          <a:prstGeom prst="bentArrow">
-            <a:avLst>
-              <a:gd name="adj1" fmla="val 6653"/>
-              <a:gd name="adj2" fmla="val 8029"/>
-              <a:gd name="adj3" fmla="val 12157"/>
-              <a:gd name="adj4" fmla="val 29072"/>
-            </a:avLst>
-          </a:prstGeom>
-          <a:noFill/>
-        </p:spPr>
-        <p:style>
-          <a:lnRef idx="2">
-            <a:schemeClr val="accent1">
-              <a:shade val="15000"/>
-            </a:schemeClr>
-          </a:lnRef>
-          <a:fillRef idx="1">
-            <a:schemeClr val="accent1"/>
-          </a:fillRef>
-          <a:effectRef idx="0">
-            <a:schemeClr val="accent1"/>
-          </a:effectRef>
-          <a:fontRef idx="minor">
-            <a:schemeClr val="lt1"/>
-          </a:fontRef>
-        </p:style>
-        <p:txBody>
-          <a:bodyPr rtlCol="0" anchor="ctr"/>
-          <a:lstStyle/>
-          <a:p>
-            <a:pPr algn="ctr"/>
-            <a:endParaRPr lang="ko-KR" altLang="en-US">
-              <a:solidFill>
-                <a:schemeClr val="tx1"/>
-              </a:solidFill>
-            </a:endParaRPr>
-          </a:p>
-        </p:txBody>
-      </p:sp>
+              <a:t>테스트 및 검증</a:t>
+            </a:r>
+          </a:p>
+        </p:txBody>
+      </p:sp>
+      <p:graphicFrame>
+        <p:nvGraphicFramePr>
+          <p:cNvPr id="4" name="내용 개체 틀 3">
+            <a:extLst>
+              <a:ext uri="{FF2B5EF4-FFF2-40B4-BE49-F238E27FC236}">
+                <a16:creationId xmlns:a16="http://schemas.microsoft.com/office/drawing/2014/main" id="{AAEB0CC3-20CB-59A2-E0CA-28FC8CA21842}"/>
+              </a:ext>
+            </a:extLst>
+          </p:cNvPr>
+          <p:cNvGraphicFramePr>
+            <a:graphicFrameLocks noGrp="1"/>
+          </p:cNvGraphicFramePr>
+          <p:nvPr>
+            <p:ph idx="1"/>
+            <p:extLst>
+              <p:ext uri="{D42A27DB-BD31-4B8C-83A1-F6EECF244321}">
+                <p14:modId xmlns:p14="http://schemas.microsoft.com/office/powerpoint/2010/main" val="1593291892"/>
+              </p:ext>
+            </p:extLst>
+          </p:nvPr>
+        </p:nvGraphicFramePr>
+        <p:xfrm>
+          <a:off x="875074" y="1825624"/>
+          <a:ext cx="10776152" cy="4191715"/>
+        </p:xfrm>
+        <a:graphic>
+          <a:graphicData uri="http://schemas.openxmlformats.org/drawingml/2006/table">
+            <a:tbl>
+              <a:tblPr firstRow="1" bandRow="1">
+                <a:tableStyleId>{5C22544A-7EE6-4342-B048-85BDC9FD1C3A}</a:tableStyleId>
+              </a:tblPr>
+              <a:tblGrid>
+                <a:gridCol w="2224251">
+                  <a:extLst>
+                    <a:ext uri="{9D8B030D-6E8A-4147-A177-3AD203B41FA5}">
+                      <a16:colId xmlns:a16="http://schemas.microsoft.com/office/drawing/2014/main" val="1683388789"/>
+                    </a:ext>
+                  </a:extLst>
+                </a:gridCol>
+                <a:gridCol w="3409630">
+                  <a:extLst>
+                    <a:ext uri="{9D8B030D-6E8A-4147-A177-3AD203B41FA5}">
+                      <a16:colId xmlns:a16="http://schemas.microsoft.com/office/drawing/2014/main" val="4034575019"/>
+                    </a:ext>
+                  </a:extLst>
+                </a:gridCol>
+                <a:gridCol w="5142271">
+                  <a:extLst>
+                    <a:ext uri="{9D8B030D-6E8A-4147-A177-3AD203B41FA5}">
+                      <a16:colId xmlns:a16="http://schemas.microsoft.com/office/drawing/2014/main" val="3166618071"/>
+                    </a:ext>
+                  </a:extLst>
+                </a:gridCol>
+              </a:tblGrid>
+              <a:tr h="838343">
+                <a:tc>
+                  <a:txBody>
+                    <a:bodyPr/>
+                    <a:lstStyle/>
+                    <a:p>
+                      <a:pPr algn="ctr" latinLnBrk="1"/>
+                      <a:r>
+                        <a:rPr lang="ko-KR" altLang="en-US" dirty="0"/>
+                        <a:t>구분</a:t>
+                      </a:r>
+                    </a:p>
+                  </a:txBody>
+                  <a:tcPr anchor="ctr"/>
+                </a:tc>
+                <a:tc>
+                  <a:txBody>
+                    <a:bodyPr/>
+                    <a:lstStyle/>
+                    <a:p>
+                      <a:pPr algn="ctr" latinLnBrk="1"/>
+                      <a:r>
+                        <a:rPr lang="en-US" altLang="ko-KR" dirty="0"/>
+                        <a:t>TEST CASE</a:t>
+                      </a:r>
+                      <a:endParaRPr lang="ko-KR" altLang="en-US" dirty="0"/>
+                    </a:p>
+                  </a:txBody>
+                  <a:tcPr anchor="ctr"/>
+                </a:tc>
+                <a:tc>
+                  <a:txBody>
+                    <a:bodyPr/>
+                    <a:lstStyle/>
+                    <a:p>
+                      <a:pPr algn="ctr" latinLnBrk="1"/>
+                      <a:r>
+                        <a:rPr lang="en-US" altLang="ko-KR" dirty="0"/>
+                        <a:t>TEST </a:t>
+                      </a:r>
+                      <a:r>
+                        <a:rPr lang="ko-KR" altLang="en-US" dirty="0"/>
+                        <a:t>목적</a:t>
+                      </a:r>
+                    </a:p>
+                  </a:txBody>
+                  <a:tcPr anchor="ctr"/>
+                </a:tc>
+                <a:extLst>
+                  <a:ext uri="{0D108BD9-81ED-4DB2-BD59-A6C34878D82A}">
+                    <a16:rowId xmlns:a16="http://schemas.microsoft.com/office/drawing/2014/main" val="378025623"/>
+                  </a:ext>
+                </a:extLst>
+              </a:tr>
+              <a:tr h="838343">
+                <a:tc>
+                  <a:txBody>
+                    <a:bodyPr/>
+                    <a:lstStyle/>
+                    <a:p>
+                      <a:pPr algn="ctr" latinLnBrk="1"/>
+                      <a:r>
+                        <a:rPr lang="en-US" altLang="ko-KR" dirty="0"/>
+                        <a:t>White Box 1</a:t>
+                      </a:r>
+                      <a:endParaRPr lang="ko-KR" altLang="en-US" dirty="0"/>
+                    </a:p>
+                  </a:txBody>
+                  <a:tcPr anchor="ctr"/>
+                </a:tc>
+                <a:tc>
+                  <a:txBody>
+                    <a:bodyPr/>
+                    <a:lstStyle/>
+                    <a:p>
+                      <a:pPr algn="ctr" latinLnBrk="1"/>
+                      <a:r>
+                        <a:rPr lang="ko-KR" altLang="ko-KR" sz="1800" kern="1200" dirty="0">
+                          <a:solidFill>
+                            <a:schemeClr val="dk1"/>
+                          </a:solidFill>
+                          <a:effectLst/>
+                          <a:latin typeface="+mn-lt"/>
+                          <a:ea typeface="+mn-ea"/>
+                          <a:cs typeface="+mn-cs"/>
+                        </a:rPr>
+                        <a:t>WB_TC01_FaultBitDecode()</a:t>
+                      </a:r>
+                      <a:endParaRPr lang="ko-KR" altLang="en-US" dirty="0"/>
+                    </a:p>
+                  </a:txBody>
+                  <a:tcPr anchor="ctr"/>
+                </a:tc>
+                <a:tc>
+                  <a:txBody>
+                    <a:bodyPr/>
+                    <a:lstStyle/>
+                    <a:p>
+                      <a:pPr algn="ctr" latinLnBrk="1"/>
+                      <a:r>
+                        <a:rPr lang="ko-KR" altLang="ko-KR" dirty="0"/>
+                        <a:t>레지스터 비트필드가 올바르게 해석되는지 검증</a:t>
+                      </a:r>
+                      <a:endParaRPr lang="ko-KR" altLang="en-US" dirty="0"/>
+                    </a:p>
+                  </a:txBody>
+                  <a:tcPr anchor="ctr"/>
+                </a:tc>
+                <a:extLst>
+                  <a:ext uri="{0D108BD9-81ED-4DB2-BD59-A6C34878D82A}">
+                    <a16:rowId xmlns:a16="http://schemas.microsoft.com/office/drawing/2014/main" val="118356440"/>
+                  </a:ext>
+                </a:extLst>
+              </a:tr>
+              <a:tr h="838343">
+                <a:tc>
+                  <a:txBody>
+                    <a:bodyPr/>
+                    <a:lstStyle/>
+                    <a:p>
+                      <a:pPr marL="0" marR="0" lvl="0" indent="0" algn="ctr" defTabSz="914400" rtl="0" eaLnBrk="1" fontAlgn="auto" latinLnBrk="1" hangingPunct="1">
+                        <a:lnSpc>
+                          <a:spcPct val="100000"/>
+                        </a:lnSpc>
+                        <a:spcBef>
+                          <a:spcPts val="0"/>
+                        </a:spcBef>
+                        <a:spcAft>
+                          <a:spcPts val="0"/>
+                        </a:spcAft>
+                        <a:buClrTx/>
+                        <a:buSzTx/>
+                        <a:buFontTx/>
+                        <a:buNone/>
+                        <a:tabLst/>
+                        <a:defRPr/>
+                      </a:pPr>
+                      <a:r>
+                        <a:rPr lang="en-US" altLang="ko-KR" dirty="0"/>
+                        <a:t>White Box 2</a:t>
+                      </a:r>
+                      <a:endParaRPr lang="ko-KR" altLang="en-US" dirty="0"/>
+                    </a:p>
+                  </a:txBody>
+                  <a:tcPr anchor="ctr"/>
+                </a:tc>
+                <a:tc>
+                  <a:txBody>
+                    <a:bodyPr/>
+                    <a:lstStyle/>
+                    <a:p>
+                      <a:pPr algn="ctr" latinLnBrk="1"/>
+                      <a:r>
+                        <a:rPr lang="ko-KR" altLang="ko-KR" sz="1800" kern="1200" dirty="0">
+                          <a:solidFill>
+                            <a:schemeClr val="dk1"/>
+                          </a:solidFill>
+                          <a:effectLst/>
+                          <a:latin typeface="+mn-lt"/>
+                          <a:ea typeface="+mn-ea"/>
+                          <a:cs typeface="+mn-cs"/>
+                        </a:rPr>
+                        <a:t>WB_TC02_FaultToDTC()</a:t>
+                      </a:r>
+                      <a:endParaRPr lang="ko-KR" altLang="en-US" dirty="0"/>
+                    </a:p>
+                  </a:txBody>
+                  <a:tcPr anchor="ctr"/>
+                </a:tc>
+                <a:tc>
+                  <a:txBody>
+                    <a:bodyPr/>
+                    <a:lstStyle/>
+                    <a:p>
+                      <a:pPr algn="ctr" latinLnBrk="1"/>
+                      <a:r>
+                        <a:rPr lang="ko-KR" altLang="ko-KR" dirty="0" err="1"/>
+                        <a:t>Fault</a:t>
+                      </a:r>
+                      <a:r>
+                        <a:rPr lang="ko-KR" altLang="ko-KR" dirty="0"/>
+                        <a:t> 정보가 DTC 활성 상태로 변환되는지 검증</a:t>
+                      </a:r>
+                      <a:endParaRPr lang="ko-KR" altLang="en-US" dirty="0"/>
+                    </a:p>
+                  </a:txBody>
+                  <a:tcPr anchor="ctr"/>
+                </a:tc>
+                <a:extLst>
+                  <a:ext uri="{0D108BD9-81ED-4DB2-BD59-A6C34878D82A}">
+                    <a16:rowId xmlns:a16="http://schemas.microsoft.com/office/drawing/2014/main" val="1530215346"/>
+                  </a:ext>
+                </a:extLst>
+              </a:tr>
+              <a:tr h="838343">
+                <a:tc>
+                  <a:txBody>
+                    <a:bodyPr/>
+                    <a:lstStyle/>
+                    <a:p>
+                      <a:pPr marL="0" marR="0" lvl="0" indent="0" algn="ctr" defTabSz="914400" rtl="0" eaLnBrk="1" fontAlgn="auto" latinLnBrk="1" hangingPunct="1">
+                        <a:lnSpc>
+                          <a:spcPct val="100000"/>
+                        </a:lnSpc>
+                        <a:spcBef>
+                          <a:spcPts val="0"/>
+                        </a:spcBef>
+                        <a:spcAft>
+                          <a:spcPts val="0"/>
+                        </a:spcAft>
+                        <a:buClrTx/>
+                        <a:buSzTx/>
+                        <a:buFontTx/>
+                        <a:buNone/>
+                        <a:tabLst/>
+                        <a:defRPr/>
+                      </a:pPr>
+                      <a:r>
+                        <a:rPr lang="en-US" altLang="ko-KR" dirty="0"/>
+                        <a:t>Black Box 1</a:t>
+                      </a:r>
+                      <a:endParaRPr lang="ko-KR" altLang="en-US" dirty="0"/>
+                    </a:p>
+                  </a:txBody>
+                  <a:tcPr anchor="ctr"/>
+                </a:tc>
+                <a:tc>
+                  <a:txBody>
+                    <a:bodyPr/>
+                    <a:lstStyle/>
+                    <a:p>
+                      <a:pPr algn="ctr" latinLnBrk="1"/>
+                      <a:r>
+                        <a:rPr lang="ko-KR" altLang="ko-KR" sz="1800" u="sng" kern="1200" dirty="0">
+                          <a:solidFill>
+                            <a:schemeClr val="dk1"/>
+                          </a:solidFill>
+                          <a:effectLst/>
+                          <a:latin typeface="+mn-lt"/>
+                          <a:ea typeface="+mn-ea"/>
+                          <a:cs typeface="+mn-cs"/>
+                        </a:rPr>
+                        <a:t>BB_TC01_ReadDtcResponse</a:t>
+                      </a:r>
+                      <a:r>
+                        <a:rPr lang="ko-KR" altLang="ko-KR" sz="1800" kern="1200" dirty="0">
+                          <a:solidFill>
+                            <a:schemeClr val="dk1"/>
+                          </a:solidFill>
+                          <a:effectLst/>
+                          <a:latin typeface="+mn-lt"/>
+                          <a:ea typeface="+mn-ea"/>
+                          <a:cs typeface="+mn-cs"/>
+                        </a:rPr>
+                        <a:t>()</a:t>
+                      </a:r>
+                      <a:endParaRPr lang="ko-KR" altLang="en-US" dirty="0"/>
+                    </a:p>
+                  </a:txBody>
+                  <a:tcPr anchor="ctr"/>
+                </a:tc>
+                <a:tc>
+                  <a:txBody>
+                    <a:bodyPr/>
+                    <a:lstStyle/>
+                    <a:p>
+                      <a:pPr algn="ctr" latinLnBrk="1"/>
+                      <a:r>
+                        <a:rPr lang="ko-KR" altLang="ko-KR" dirty="0"/>
+                        <a:t>활성 </a:t>
+                      </a:r>
+                      <a:r>
+                        <a:rPr lang="ko-KR" altLang="ko-KR" dirty="0" err="1"/>
+                        <a:t>DTC가</a:t>
+                      </a:r>
+                      <a:r>
+                        <a:rPr lang="ko-KR" altLang="ko-KR" dirty="0"/>
+                        <a:t> 진단 응답에 포함되는지 검증</a:t>
+                      </a:r>
+                      <a:endParaRPr lang="ko-KR" altLang="en-US" dirty="0"/>
+                    </a:p>
+                  </a:txBody>
+                  <a:tcPr anchor="ctr"/>
+                </a:tc>
+                <a:extLst>
+                  <a:ext uri="{0D108BD9-81ED-4DB2-BD59-A6C34878D82A}">
+                    <a16:rowId xmlns:a16="http://schemas.microsoft.com/office/drawing/2014/main" val="3285111614"/>
+                  </a:ext>
+                </a:extLst>
+              </a:tr>
+              <a:tr h="838343">
+                <a:tc>
+                  <a:txBody>
+                    <a:bodyPr/>
+                    <a:lstStyle/>
+                    <a:p>
+                      <a:pPr marL="0" marR="0" lvl="0" indent="0" algn="ctr" defTabSz="914400" rtl="0" eaLnBrk="1" fontAlgn="auto" latinLnBrk="1" hangingPunct="1">
+                        <a:lnSpc>
+                          <a:spcPct val="100000"/>
+                        </a:lnSpc>
+                        <a:spcBef>
+                          <a:spcPts val="0"/>
+                        </a:spcBef>
+                        <a:spcAft>
+                          <a:spcPts val="0"/>
+                        </a:spcAft>
+                        <a:buClrTx/>
+                        <a:buSzTx/>
+                        <a:buFontTx/>
+                        <a:buNone/>
+                        <a:tabLst/>
+                        <a:defRPr/>
+                      </a:pPr>
+                      <a:r>
+                        <a:rPr lang="en-US" altLang="ko-KR" dirty="0"/>
+                        <a:t>Black Box 2</a:t>
+                      </a:r>
+                      <a:endParaRPr lang="ko-KR" altLang="en-US" dirty="0"/>
+                    </a:p>
+                  </a:txBody>
+                  <a:tcPr anchor="ctr"/>
+                </a:tc>
+                <a:tc>
+                  <a:txBody>
+                    <a:bodyPr/>
+                    <a:lstStyle/>
+                    <a:p>
+                      <a:pPr algn="ctr" latinLnBrk="1"/>
+                      <a:r>
+                        <a:rPr lang="ko-KR" altLang="ko-KR" sz="1800" kern="1200" dirty="0">
+                          <a:solidFill>
+                            <a:schemeClr val="dk1"/>
+                          </a:solidFill>
+                          <a:effectLst/>
+                          <a:latin typeface="+mn-lt"/>
+                          <a:ea typeface="+mn-ea"/>
+                          <a:cs typeface="+mn-cs"/>
+                        </a:rPr>
+                        <a:t>BB_TC02_UnsupportedSubFunction()</a:t>
+                      </a:r>
+                      <a:endParaRPr lang="ko-KR" altLang="en-US" dirty="0"/>
+                    </a:p>
+                  </a:txBody>
+                  <a:tcPr anchor="ctr"/>
+                </a:tc>
+                <a:tc>
+                  <a:txBody>
+                    <a:bodyPr/>
+                    <a:lstStyle/>
+                    <a:p>
+                      <a:pPr algn="ctr" latinLnBrk="1"/>
+                      <a:r>
+                        <a:rPr lang="ko-KR" altLang="ko-KR" dirty="0"/>
+                        <a:t>미지원 요청에 NRC 0x12를 반환하는지 검증</a:t>
+                      </a:r>
+                      <a:endParaRPr lang="ko-KR" altLang="en-US" dirty="0"/>
+                    </a:p>
+                  </a:txBody>
+                  <a:tcPr anchor="ctr"/>
+                </a:tc>
+                <a:extLst>
+                  <a:ext uri="{0D108BD9-81ED-4DB2-BD59-A6C34878D82A}">
+                    <a16:rowId xmlns:a16="http://schemas.microsoft.com/office/drawing/2014/main" val="3705145274"/>
+                  </a:ext>
+                </a:extLst>
+              </a:tr>
+            </a:tbl>
+          </a:graphicData>
+        </a:graphic>
+      </p:graphicFrame>
     </p:spTree>
     <p:extLst>
       <p:ext uri="{BB962C8B-B14F-4D97-AF65-F5344CB8AC3E}">
-        <p14:creationId xmlns:p14="http://schemas.microsoft.com/office/powerpoint/2010/main" val="1521067495"/>
+        <p14:creationId xmlns:p14="http://schemas.microsoft.com/office/powerpoint/2010/main" val="869796068"/>
       </p:ext>
     </p:extLst>
   </p:cSld>
@@ -9219,4 +9558,319 @@
     </a:ext>
   </a:extLst>
 </a:theme>
+</file>
+
+<file path=ppt/theme/theme2.xml><?xml version="1.0" encoding="utf-8"?>
+<a:theme xmlns:a="http://schemas.openxmlformats.org/drawingml/2006/main" name="Office 테마">
+  <a:themeElements>
+    <a:clrScheme name="Office">
+      <a:dk1>
+        <a:sysClr val="windowText" lastClr="000000"/>
+      </a:dk1>
+      <a:lt1>
+        <a:sysClr val="window" lastClr="FFFFFF"/>
+      </a:lt1>
+      <a:dk2>
+        <a:srgbClr val="0E2841"/>
+      </a:dk2>
+      <a:lt2>
+        <a:srgbClr val="E8E8E8"/>
+      </a:lt2>
+      <a:accent1>
+        <a:srgbClr val="156082"/>
+      </a:accent1>
+      <a:accent2>
+        <a:srgbClr val="E97132"/>
+      </a:accent2>
+      <a:accent3>
+        <a:srgbClr val="196B24"/>
+      </a:accent3>
+      <a:accent4>
+        <a:srgbClr val="0F9ED5"/>
+      </a:accent4>
+      <a:accent5>
+        <a:srgbClr val="A02B93"/>
+      </a:accent5>
+      <a:accent6>
+        <a:srgbClr val="4EA72E"/>
+      </a:accent6>
+      <a:hlink>
+        <a:srgbClr val="467886"/>
+      </a:hlink>
+      <a:folHlink>
+        <a:srgbClr val="96607D"/>
+      </a:folHlink>
+    </a:clrScheme>
+    <a:fontScheme name="Office">
+      <a:majorFont>
+        <a:latin typeface="맑은 고딕" panose="02110004020202020204"/>
+        <a:ea typeface=""/>
+        <a:cs typeface=""/>
+        <a:font script="Jpan" typeface="游ゴシック Light"/>
+        <a:font script="Hang" typeface="맑은 고딕"/>
+        <a:font script="Hans" typeface="等线 Light"/>
+        <a:font script="Hant" typeface="新細明體"/>
+        <a:font script="Arab" typeface="Times New Roman"/>
+        <a:font script="Hebr" typeface="Times New Roman"/>
+        <a:font script="Thai" typeface="Angsana New"/>
+        <a:font script="Ethi" typeface="Nyala"/>
+        <a:font script="Beng" typeface="Vrinda"/>
+        <a:font script="Gujr" typeface="Shruti"/>
+        <a:font script="Khmr" typeface="MoolBoran"/>
+        <a:font script="Knda" typeface="Tunga"/>
+        <a:font script="Guru" typeface="Raavi"/>
+        <a:font script="Cans" typeface="Euphemia"/>
+        <a:font script="Cher" typeface="Plantagenet Cherokee"/>
+        <a:font script="Yiii" typeface="Microsoft Yi Baiti"/>
+        <a:font script="Tibt" typeface="Microsoft Himalaya"/>
+        <a:font script="Thaa" typeface="MV Boli"/>
+        <a:font script="Deva" typeface="Mangal"/>
+        <a:font script="Telu" typeface="Gautami"/>
+        <a:font script="Taml" typeface="Latha"/>
+        <a:font script="Syrc" typeface="Estrangelo Edessa"/>
+        <a:font script="Orya" typeface="Kalinga"/>
+        <a:font script="Mlym" typeface="Kartika"/>
+        <a:font script="Laoo" typeface="DokChampa"/>
+        <a:font script="Sinh" typeface="Iskoola Pota"/>
+        <a:font script="Mong" typeface="Mongolian Baiti"/>
+        <a:font script="Viet" typeface="Times New Roman"/>
+        <a:font script="Uigh" typeface="Microsoft Uighur"/>
+        <a:font script="Geor" typeface="Sylfaen"/>
+        <a:font script="Armn" typeface="Arial"/>
+        <a:font script="Bugi" typeface="Leelawadee UI"/>
+        <a:font script="Bopo" typeface="Microsoft JhengHei"/>
+        <a:font script="Java" typeface="Javanese Text"/>
+        <a:font script="Lisu" typeface="Segoe UI"/>
+        <a:font script="Mymr" typeface="Myanmar Text"/>
+        <a:font script="Nkoo" typeface="Ebrima"/>
+        <a:font script="Olck" typeface="Nirmala UI"/>
+        <a:font script="Osma" typeface="Ebrima"/>
+        <a:font script="Phag" typeface="Phagspa"/>
+        <a:font script="Syrn" typeface="Estrangelo Edessa"/>
+        <a:font script="Syrj" typeface="Estrangelo Edessa"/>
+        <a:font script="Syre" typeface="Estrangelo Edessa"/>
+        <a:font script="Sora" typeface="Nirmala UI"/>
+        <a:font script="Tale" typeface="Microsoft Tai Le"/>
+        <a:font script="Talu" typeface="Microsoft New Tai Lue"/>
+        <a:font script="Tfng" typeface="Ebrima"/>
+      </a:majorFont>
+      <a:minorFont>
+        <a:latin typeface="맑은 고딕" panose="02110004020202020204"/>
+        <a:ea typeface=""/>
+        <a:cs typeface=""/>
+        <a:font script="Jpan" typeface="游ゴシック"/>
+        <a:font script="Hang" typeface="맑은 고딕"/>
+        <a:font script="Hans" typeface="等线"/>
+        <a:font script="Hant" typeface="新細明體"/>
+        <a:font script="Arab" typeface="Arial"/>
+        <a:font script="Hebr" typeface="Arial"/>
+        <a:font script="Thai" typeface="Cordia New"/>
+        <a:font script="Ethi" typeface="Nyala"/>
+        <a:font script="Beng" typeface="Vrinda"/>
+        <a:font script="Gujr" typeface="Shruti"/>
+        <a:font script="Khmr" typeface="DaunPenh"/>
+        <a:font script="Knda" typeface="Tunga"/>
+        <a:font script="Guru" typeface="Raavi"/>
+        <a:font script="Cans" typeface="Euphemia"/>
+        <a:font script="Cher" typeface="Plantagenet Cherokee"/>
+        <a:font script="Yiii" typeface="Microsoft Yi Baiti"/>
+        <a:font script="Tibt" typeface="Microsoft Himalaya"/>
+        <a:font script="Thaa" typeface="MV Boli"/>
+        <a:font script="Deva" typeface="Mangal"/>
+        <a:font script="Telu" typeface="Gautami"/>
+        <a:font script="Taml" typeface="Latha"/>
+        <a:font script="Syrc" typeface="Estrangelo Edessa"/>
+        <a:font script="Orya" typeface="Kalinga"/>
+        <a:font script="Mlym" typeface="Kartika"/>
+        <a:font script="Laoo" typeface="DokChampa"/>
+        <a:font script="Sinh" typeface="Iskoola Pota"/>
+        <a:font script="Mong" typeface="Mongolian Baiti"/>
+        <a:font script="Viet" typeface="Arial"/>
+        <a:font script="Uigh" typeface="Microsoft Uighur"/>
+        <a:font script="Geor" typeface="Sylfaen"/>
+        <a:font script="Armn" typeface="Arial"/>
+        <a:font script="Bugi" typeface="Leelawadee UI"/>
+        <a:font script="Bopo" typeface="Microsoft JhengHei"/>
+        <a:font script="Java" typeface="Javanese Text"/>
+        <a:font script="Lisu" typeface="Segoe UI"/>
+        <a:font script="Mymr" typeface="Myanmar Text"/>
+        <a:font script="Nkoo" typeface="Ebrima"/>
+        <a:font script="Olck" typeface="Nirmala UI"/>
+        <a:font script="Osma" typeface="Ebrima"/>
+        <a:font script="Phag" typeface="Phagspa"/>
+        <a:font script="Syrn" typeface="Estrangelo Edessa"/>
+        <a:font script="Syrj" typeface="Estrangelo Edessa"/>
+        <a:font script="Syre" typeface="Estrangelo Edessa"/>
+        <a:font script="Sora" typeface="Nirmala UI"/>
+        <a:font script="Tale" typeface="Microsoft Tai Le"/>
+        <a:font script="Talu" typeface="Microsoft New Tai Lue"/>
+        <a:font script="Tfng" typeface="Ebrima"/>
+      </a:minorFont>
+    </a:fontScheme>
+    <a:fmtScheme name="Office">
+      <a:fillStyleLst>
+        <a:solidFill>
+          <a:schemeClr val="phClr"/>
+        </a:solidFill>
+        <a:gradFill rotWithShape="1">
+          <a:gsLst>
+            <a:gs pos="0">
+              <a:schemeClr val="phClr">
+                <a:lumMod val="110000"/>
+                <a:satMod val="105000"/>
+                <a:tint val="67000"/>
+              </a:schemeClr>
+            </a:gs>
+            <a:gs pos="50000">
+              <a:schemeClr val="phClr">
+                <a:lumMod val="105000"/>
+                <a:satMod val="103000"/>
+                <a:tint val="73000"/>
+              </a:schemeClr>
+            </a:gs>
+            <a:gs pos="100000">
+              <a:schemeClr val="phClr">
+                <a:lumMod val="105000"/>
+                <a:satMod val="109000"/>
+                <a:tint val="81000"/>
+              </a:schemeClr>
+            </a:gs>
+          </a:gsLst>
+          <a:lin ang="5400000" scaled="0"/>
+        </a:gradFill>
+        <a:gradFill rotWithShape="1">
+          <a:gsLst>
+            <a:gs pos="0">
+              <a:schemeClr val="phClr">
+                <a:satMod val="103000"/>
+                <a:lumMod val="102000"/>
+                <a:tint val="94000"/>
+              </a:schemeClr>
+            </a:gs>
+            <a:gs pos="50000">
+              <a:schemeClr val="phClr">
+                <a:satMod val="110000"/>
+                <a:lumMod val="100000"/>
+                <a:shade val="100000"/>
+              </a:schemeClr>
+            </a:gs>
+            <a:gs pos="100000">
+              <a:schemeClr val="phClr">
+                <a:lumMod val="99000"/>
+                <a:satMod val="120000"/>
+                <a:shade val="78000"/>
+              </a:schemeClr>
+            </a:gs>
+          </a:gsLst>
+          <a:lin ang="5400000" scaled="0"/>
+        </a:gradFill>
+      </a:fillStyleLst>
+      <a:lnStyleLst>
+        <a:ln w="12700" cap="flat" cmpd="sng" algn="ctr">
+          <a:solidFill>
+            <a:schemeClr val="phClr"/>
+          </a:solidFill>
+          <a:prstDash val="solid"/>
+          <a:miter lim="800000"/>
+        </a:ln>
+        <a:ln w="19050" cap="flat" cmpd="sng" algn="ctr">
+          <a:solidFill>
+            <a:schemeClr val="phClr"/>
+          </a:solidFill>
+          <a:prstDash val="solid"/>
+          <a:miter lim="800000"/>
+        </a:ln>
+        <a:ln w="25400" cap="flat" cmpd="sng" algn="ctr">
+          <a:solidFill>
+            <a:schemeClr val="phClr"/>
+          </a:solidFill>
+          <a:prstDash val="solid"/>
+          <a:miter lim="800000"/>
+        </a:ln>
+      </a:lnStyleLst>
+      <a:effectStyleLst>
+        <a:effectStyle>
+          <a:effectLst/>
+        </a:effectStyle>
+        <a:effectStyle>
+          <a:effectLst/>
+        </a:effectStyle>
+        <a:effectStyle>
+          <a:effectLst>
+            <a:outerShdw blurRad="57150" dist="19050" dir="5400000" algn="ctr" rotWithShape="0">
+              <a:srgbClr val="000000">
+                <a:alpha val="63000"/>
+              </a:srgbClr>
+            </a:outerShdw>
+          </a:effectLst>
+        </a:effectStyle>
+      </a:effectStyleLst>
+      <a:bgFillStyleLst>
+        <a:solidFill>
+          <a:schemeClr val="phClr"/>
+        </a:solidFill>
+        <a:solidFill>
+          <a:schemeClr val="phClr">
+            <a:tint val="95000"/>
+            <a:satMod val="170000"/>
+          </a:schemeClr>
+        </a:solidFill>
+        <a:gradFill rotWithShape="1">
+          <a:gsLst>
+            <a:gs pos="0">
+              <a:schemeClr val="phClr">
+                <a:tint val="93000"/>
+                <a:satMod val="150000"/>
+                <a:shade val="98000"/>
+                <a:lumMod val="102000"/>
+              </a:schemeClr>
+            </a:gs>
+            <a:gs pos="50000">
+              <a:schemeClr val="phClr">
+                <a:tint val="98000"/>
+                <a:satMod val="130000"/>
+                <a:shade val="90000"/>
+                <a:lumMod val="103000"/>
+              </a:schemeClr>
+            </a:gs>
+            <a:gs pos="100000">
+              <a:schemeClr val="phClr">
+                <a:shade val="63000"/>
+                <a:satMod val="120000"/>
+              </a:schemeClr>
+            </a:gs>
+          </a:gsLst>
+          <a:lin ang="5400000" scaled="0"/>
+        </a:gradFill>
+      </a:bgFillStyleLst>
+    </a:fmtScheme>
+  </a:themeElements>
+  <a:objectDefaults>
+    <a:lnDef>
+      <a:spPr/>
+      <a:bodyPr/>
+      <a:lstStyle/>
+      <a:style>
+        <a:lnRef idx="2">
+          <a:schemeClr val="accent1"/>
+        </a:lnRef>
+        <a:fillRef idx="0">
+          <a:schemeClr val="accent1"/>
+        </a:fillRef>
+        <a:effectRef idx="1">
+          <a:schemeClr val="accent1"/>
+        </a:effectRef>
+        <a:fontRef idx="minor">
+          <a:schemeClr val="tx1"/>
+        </a:fontRef>
+      </a:style>
+    </a:lnDef>
+  </a:objectDefaults>
+  <a:extraClrSchemeLst/>
+  <a:extLst>
+    <a:ext uri="{05A4C25C-085E-4340-85A3-A5531E510DB2}">
+      <thm15:themeFamily xmlns:thm15="http://schemas.microsoft.com/office/thememl/2012/main" name="Office Theme" id="{2E142A2C-CD16-42D6-873A-C26D2A0506FA}" vid="{1BDDFF52-6CD6-40A5-AB3C-68EB2F1E4D0A}"/>
+    </a:ext>
+  </a:extLst>
+</a:theme>
 </file>
--- a/ECU 고장 진단 시스템.pptx
+++ b/ECU 고장 진단 시스템.pptx
@@ -5,15 +5,17 @@
     <p:sldMasterId id="2147483648" r:id="rId1"/>
   </p:sldMasterIdLst>
   <p:notesMasterIdLst>
-    <p:notesMasterId r:id="rId8"/>
+    <p:notesMasterId r:id="rId10"/>
   </p:notesMasterIdLst>
   <p:sldIdLst>
     <p:sldId id="256" r:id="rId2"/>
     <p:sldId id="257" r:id="rId3"/>
     <p:sldId id="258" r:id="rId4"/>
-    <p:sldId id="261" r:id="rId5"/>
-    <p:sldId id="259" r:id="rId6"/>
-    <p:sldId id="262" r:id="rId7"/>
+    <p:sldId id="264" r:id="rId5"/>
+    <p:sldId id="261" r:id="rId6"/>
+    <p:sldId id="263" r:id="rId7"/>
+    <p:sldId id="259" r:id="rId8"/>
+    <p:sldId id="262" r:id="rId9"/>
   </p:sldIdLst>
   <p:sldSz cx="12192000" cy="6858000"/>
   <p:notesSz cx="6858000" cy="9144000"/>
@@ -202,7 +204,7 @@
           <a:p>
             <a:fld id="{FE10F9C2-239F-4BCA-907A-EA6CAD586962}" type="datetimeFigureOut">
               <a:rPr lang="ko-KR" altLang="en-US" smtClean="0"/>
-              <a:t>2026-10-20</a:t>
+              <a:t>2026-10-22</a:t>
             </a:fld>
             <a:endParaRPr lang="ko-KR" altLang="en-US"/>
           </a:p>
@@ -534,7 +536,7 @@
           <a:p>
             <a:fld id="{F5A9DCE2-1A76-46F3-9C22-567E4E81BEC8}" type="slidenum">
               <a:rPr lang="ko-KR" altLang="en-US" smtClean="0"/>
-              <a:t>6</a:t>
+              <a:t>8</a:t>
             </a:fld>
             <a:endParaRPr lang="ko-KR" altLang="en-US"/>
           </a:p>
@@ -700,7 +702,7 @@
           <a:p>
             <a:fld id="{D81CB108-455C-4D01-80D6-E92D3E7D956D}" type="datetimeFigureOut">
               <a:rPr lang="ko-KR" altLang="en-US" smtClean="0"/>
-              <a:t>2026-10-20</a:t>
+              <a:t>2026-10-22</a:t>
             </a:fld>
             <a:endParaRPr lang="ko-KR" altLang="en-US"/>
           </a:p>
@@ -898,7 +900,7 @@
           <a:p>
             <a:fld id="{D81CB108-455C-4D01-80D6-E92D3E7D956D}" type="datetimeFigureOut">
               <a:rPr lang="ko-KR" altLang="en-US" smtClean="0"/>
-              <a:t>2026-10-20</a:t>
+              <a:t>2026-10-22</a:t>
             </a:fld>
             <a:endParaRPr lang="ko-KR" altLang="en-US"/>
           </a:p>
@@ -1106,7 +1108,7 @@
           <a:p>
             <a:fld id="{D81CB108-455C-4D01-80D6-E92D3E7D956D}" type="datetimeFigureOut">
               <a:rPr lang="ko-KR" altLang="en-US" smtClean="0"/>
-              <a:t>2026-10-20</a:t>
+              <a:t>2026-10-22</a:t>
             </a:fld>
             <a:endParaRPr lang="ko-KR" altLang="en-US"/>
           </a:p>
@@ -1304,7 +1306,7 @@
           <a:p>
             <a:fld id="{D81CB108-455C-4D01-80D6-E92D3E7D956D}" type="datetimeFigureOut">
               <a:rPr lang="ko-KR" altLang="en-US" smtClean="0"/>
-              <a:t>2026-10-20</a:t>
+              <a:t>2026-10-22</a:t>
             </a:fld>
             <a:endParaRPr lang="ko-KR" altLang="en-US"/>
           </a:p>
@@ -1579,7 +1581,7 @@
           <a:p>
             <a:fld id="{D81CB108-455C-4D01-80D6-E92D3E7D956D}" type="datetimeFigureOut">
               <a:rPr lang="ko-KR" altLang="en-US" smtClean="0"/>
-              <a:t>2026-10-20</a:t>
+              <a:t>2026-10-22</a:t>
             </a:fld>
             <a:endParaRPr lang="ko-KR" altLang="en-US"/>
           </a:p>
@@ -1844,7 +1846,7 @@
           <a:p>
             <a:fld id="{D81CB108-455C-4D01-80D6-E92D3E7D956D}" type="datetimeFigureOut">
               <a:rPr lang="ko-KR" altLang="en-US" smtClean="0"/>
-              <a:t>2026-10-20</a:t>
+              <a:t>2026-10-22</a:t>
             </a:fld>
             <a:endParaRPr lang="ko-KR" altLang="en-US"/>
           </a:p>
@@ -2256,7 +2258,7 @@
           <a:p>
             <a:fld id="{D81CB108-455C-4D01-80D6-E92D3E7D956D}" type="datetimeFigureOut">
               <a:rPr lang="ko-KR" altLang="en-US" smtClean="0"/>
-              <a:t>2026-10-20</a:t>
+              <a:t>2026-10-22</a:t>
             </a:fld>
             <a:endParaRPr lang="ko-KR" altLang="en-US"/>
           </a:p>
@@ -2397,7 +2399,7 @@
           <a:p>
             <a:fld id="{D81CB108-455C-4D01-80D6-E92D3E7D956D}" type="datetimeFigureOut">
               <a:rPr lang="ko-KR" altLang="en-US" smtClean="0"/>
-              <a:t>2026-10-20</a:t>
+              <a:t>2026-10-22</a:t>
             </a:fld>
             <a:endParaRPr lang="ko-KR" altLang="en-US"/>
           </a:p>
@@ -2510,7 +2512,7 @@
           <a:p>
             <a:fld id="{D81CB108-455C-4D01-80D6-E92D3E7D956D}" type="datetimeFigureOut">
               <a:rPr lang="ko-KR" altLang="en-US" smtClean="0"/>
-              <a:t>2026-10-20</a:t>
+              <a:t>2026-10-22</a:t>
             </a:fld>
             <a:endParaRPr lang="ko-KR" altLang="en-US"/>
           </a:p>
@@ -2821,7 +2823,7 @@
           <a:p>
             <a:fld id="{D81CB108-455C-4D01-80D6-E92D3E7D956D}" type="datetimeFigureOut">
               <a:rPr lang="ko-KR" altLang="en-US" smtClean="0"/>
-              <a:t>2026-10-20</a:t>
+              <a:t>2026-10-22</a:t>
             </a:fld>
             <a:endParaRPr lang="ko-KR" altLang="en-US"/>
           </a:p>
@@ -3109,7 +3111,7 @@
           <a:p>
             <a:fld id="{D81CB108-455C-4D01-80D6-E92D3E7D956D}" type="datetimeFigureOut">
               <a:rPr lang="ko-KR" altLang="en-US" smtClean="0"/>
-              <a:t>2026-10-20</a:t>
+              <a:t>2026-10-22</a:t>
             </a:fld>
             <a:endParaRPr lang="ko-KR" altLang="en-US"/>
           </a:p>
@@ -3350,7 +3352,7 @@
           <a:p>
             <a:fld id="{D81CB108-455C-4D01-80D6-E92D3E7D956D}" type="datetimeFigureOut">
               <a:rPr lang="ko-KR" altLang="en-US" smtClean="0"/>
-              <a:t>2026-10-20</a:t>
+              <a:t>2026-10-22</a:t>
             </a:fld>
             <a:endParaRPr lang="ko-KR" altLang="en-US"/>
           </a:p>
@@ -5689,6 +5691,1142 @@
         <p:cNvPr id="1" name="">
           <a:extLst>
             <a:ext uri="{FF2B5EF4-FFF2-40B4-BE49-F238E27FC236}">
+              <a16:creationId xmlns:a16="http://schemas.microsoft.com/office/drawing/2014/main" id="{21704B73-F061-3128-EEE7-8FB3CFFC2503}"/>
+            </a:ext>
+          </a:extLst>
+        </p:cNvPr>
+        <p:cNvGrpSpPr/>
+        <p:nvPr/>
+      </p:nvGrpSpPr>
+      <p:grpSpPr>
+        <a:xfrm>
+          <a:off x="0" y="0"/>
+          <a:ext cx="0" cy="0"/>
+          <a:chOff x="0" y="0"/>
+          <a:chExt cx="0" cy="0"/>
+        </a:xfrm>
+      </p:grpSpPr>
+      <p:sp>
+        <p:nvSpPr>
+          <p:cNvPr id="2" name="제목 1">
+            <a:extLst>
+              <a:ext uri="{FF2B5EF4-FFF2-40B4-BE49-F238E27FC236}">
+                <a16:creationId xmlns:a16="http://schemas.microsoft.com/office/drawing/2014/main" id="{9C3D63B5-BDB9-5339-5DB6-11E4D8C5429A}"/>
+              </a:ext>
+            </a:extLst>
+          </p:cNvPr>
+          <p:cNvSpPr>
+            <a:spLocks noGrp="1"/>
+          </p:cNvSpPr>
+          <p:nvPr>
+            <p:ph type="title"/>
+          </p:nvPr>
+        </p:nvSpPr>
+        <p:spPr>
+          <a:xfrm>
+            <a:off x="838200" y="18255"/>
+            <a:ext cx="10515600" cy="1325563"/>
+          </a:xfrm>
+        </p:spPr>
+        <p:txBody>
+          <a:bodyPr/>
+          <a:lstStyle/>
+          <a:p>
+            <a:r>
+              <a:rPr lang="en-US" altLang="ko-KR" dirty="0"/>
+              <a:t>IC </a:t>
+            </a:r>
+            <a:r>
+              <a:rPr lang="ko-KR" altLang="en-US" dirty="0"/>
+              <a:t>분석 </a:t>
+            </a:r>
+            <a:r>
+              <a:rPr lang="en-US" altLang="ko-KR" dirty="0"/>
+              <a:t>(PMIC</a:t>
+            </a:r>
+            <a:r>
+              <a:rPr lang="ko-KR" altLang="en-US" dirty="0"/>
+              <a:t> </a:t>
+            </a:r>
+            <a:r>
+              <a:rPr lang="en-US" altLang="ko-KR" dirty="0"/>
+              <a:t>:</a:t>
+            </a:r>
+            <a:r>
+              <a:rPr lang="ko-KR" altLang="en-US" dirty="0"/>
+              <a:t> </a:t>
+            </a:r>
+            <a:r>
+              <a:rPr lang="en-US" altLang="ko-KR" dirty="0"/>
+              <a:t>MP5475) | </a:t>
+            </a:r>
+            <a:r>
+              <a:rPr lang="ko-KR" altLang="en-US" dirty="0"/>
+              <a:t>동작 원리</a:t>
+            </a:r>
+          </a:p>
+        </p:txBody>
+      </p:sp>
+      <p:pic>
+        <p:nvPicPr>
+          <p:cNvPr id="4" name="그림 3">
+            <a:extLst>
+              <a:ext uri="{FF2B5EF4-FFF2-40B4-BE49-F238E27FC236}">
+                <a16:creationId xmlns:a16="http://schemas.microsoft.com/office/drawing/2014/main" id="{C9579014-2A7F-D1E2-D0B6-E65382D214BD}"/>
+              </a:ext>
+            </a:extLst>
+          </p:cNvPr>
+          <p:cNvPicPr>
+            <a:picLocks noChangeAspect="1"/>
+          </p:cNvPicPr>
+          <p:nvPr/>
+        </p:nvPicPr>
+        <p:blipFill>
+          <a:blip r:embed="rId2"/>
+          <a:srcRect r="1008" b="51067"/>
+          <a:stretch>
+            <a:fillRect/>
+          </a:stretch>
+        </p:blipFill>
+        <p:spPr>
+          <a:xfrm>
+            <a:off x="5158249" y="1251935"/>
+            <a:ext cx="6693309" cy="2825059"/>
+          </a:xfrm>
+          <a:prstGeom prst="rect">
+            <a:avLst/>
+          </a:prstGeom>
+        </p:spPr>
+      </p:pic>
+      <p:pic>
+        <p:nvPicPr>
+          <p:cNvPr id="6" name="그림 5">
+            <a:extLst>
+              <a:ext uri="{FF2B5EF4-FFF2-40B4-BE49-F238E27FC236}">
+                <a16:creationId xmlns:a16="http://schemas.microsoft.com/office/drawing/2014/main" id="{F22E3AB2-F872-7114-13E0-008768D79584}"/>
+              </a:ext>
+            </a:extLst>
+          </p:cNvPr>
+          <p:cNvPicPr>
+            <a:picLocks noChangeAspect="1"/>
+          </p:cNvPicPr>
+          <p:nvPr/>
+        </p:nvPicPr>
+        <p:blipFill>
+          <a:blip r:embed="rId3"/>
+          <a:srcRect l="51560" t="551" r="2705" b="74642"/>
+          <a:stretch>
+            <a:fillRect/>
+          </a:stretch>
+        </p:blipFill>
+        <p:spPr>
+          <a:xfrm>
+            <a:off x="507592" y="1343818"/>
+            <a:ext cx="4650657" cy="1545090"/>
+          </a:xfrm>
+          <a:prstGeom prst="rect">
+            <a:avLst/>
+          </a:prstGeom>
+        </p:spPr>
+      </p:pic>
+      <p:sp>
+        <p:nvSpPr>
+          <p:cNvPr id="7" name="직사각형 6">
+            <a:extLst>
+              <a:ext uri="{FF2B5EF4-FFF2-40B4-BE49-F238E27FC236}">
+                <a16:creationId xmlns:a16="http://schemas.microsoft.com/office/drawing/2014/main" id="{2164823B-391F-A699-B583-EC1805ACB064}"/>
+              </a:ext>
+            </a:extLst>
+          </p:cNvPr>
+          <p:cNvSpPr/>
+          <p:nvPr/>
+        </p:nvSpPr>
+        <p:spPr>
+          <a:xfrm>
+            <a:off x="1327353" y="1810493"/>
+            <a:ext cx="580103" cy="226142"/>
+          </a:xfrm>
+          <a:prstGeom prst="rect">
+            <a:avLst/>
+          </a:prstGeom>
+          <a:noFill/>
+          <a:ln>
+            <a:solidFill>
+              <a:srgbClr val="FF0000"/>
+            </a:solidFill>
+          </a:ln>
+        </p:spPr>
+        <p:style>
+          <a:lnRef idx="2">
+            <a:schemeClr val="accent1">
+              <a:shade val="15000"/>
+            </a:schemeClr>
+          </a:lnRef>
+          <a:fillRef idx="1">
+            <a:schemeClr val="accent1"/>
+          </a:fillRef>
+          <a:effectRef idx="0">
+            <a:schemeClr val="accent1"/>
+          </a:effectRef>
+          <a:fontRef idx="minor">
+            <a:schemeClr val="lt1"/>
+          </a:fontRef>
+        </p:style>
+        <p:txBody>
+          <a:bodyPr rtlCol="0" anchor="ctr"/>
+          <a:lstStyle/>
+          <a:p>
+            <a:pPr algn="ctr"/>
+            <a:endParaRPr lang="ko-KR" altLang="en-US"/>
+          </a:p>
+        </p:txBody>
+      </p:sp>
+      <p:sp>
+        <p:nvSpPr>
+          <p:cNvPr id="9" name="직사각형 8">
+            <a:extLst>
+              <a:ext uri="{FF2B5EF4-FFF2-40B4-BE49-F238E27FC236}">
+                <a16:creationId xmlns:a16="http://schemas.microsoft.com/office/drawing/2014/main" id="{1DA68C03-A3DF-3B0C-5999-3D2C85CB8E14}"/>
+              </a:ext>
+            </a:extLst>
+          </p:cNvPr>
+          <p:cNvSpPr/>
+          <p:nvPr/>
+        </p:nvSpPr>
+        <p:spPr>
+          <a:xfrm>
+            <a:off x="10987548" y="2438323"/>
+            <a:ext cx="580103" cy="226142"/>
+          </a:xfrm>
+          <a:prstGeom prst="rect">
+            <a:avLst/>
+          </a:prstGeom>
+          <a:noFill/>
+          <a:ln>
+            <a:solidFill>
+              <a:srgbClr val="FF0000"/>
+            </a:solidFill>
+          </a:ln>
+        </p:spPr>
+        <p:style>
+          <a:lnRef idx="2">
+            <a:schemeClr val="accent1">
+              <a:shade val="15000"/>
+            </a:schemeClr>
+          </a:lnRef>
+          <a:fillRef idx="1">
+            <a:schemeClr val="accent1"/>
+          </a:fillRef>
+          <a:effectRef idx="0">
+            <a:schemeClr val="accent1"/>
+          </a:effectRef>
+          <a:fontRef idx="minor">
+            <a:schemeClr val="lt1"/>
+          </a:fontRef>
+        </p:style>
+        <p:txBody>
+          <a:bodyPr rtlCol="0" anchor="ctr"/>
+          <a:lstStyle/>
+          <a:p>
+            <a:pPr algn="ctr"/>
+            <a:endParaRPr lang="ko-KR" altLang="en-US"/>
+          </a:p>
+        </p:txBody>
+      </p:sp>
+      <p:sp>
+        <p:nvSpPr>
+          <p:cNvPr id="12" name="직사각형 11">
+            <a:extLst>
+              <a:ext uri="{FF2B5EF4-FFF2-40B4-BE49-F238E27FC236}">
+                <a16:creationId xmlns:a16="http://schemas.microsoft.com/office/drawing/2014/main" id="{0D0A2864-9154-B5D9-0B40-710293A52469}"/>
+              </a:ext>
+            </a:extLst>
+          </p:cNvPr>
+          <p:cNvSpPr/>
+          <p:nvPr/>
+        </p:nvSpPr>
+        <p:spPr>
+          <a:xfrm>
+            <a:off x="1332272" y="2149701"/>
+            <a:ext cx="580103" cy="226142"/>
+          </a:xfrm>
+          <a:prstGeom prst="rect">
+            <a:avLst/>
+          </a:prstGeom>
+          <a:noFill/>
+          <a:ln>
+            <a:solidFill>
+              <a:srgbClr val="FF0000"/>
+            </a:solidFill>
+          </a:ln>
+        </p:spPr>
+        <p:style>
+          <a:lnRef idx="2">
+            <a:schemeClr val="accent1">
+              <a:shade val="15000"/>
+            </a:schemeClr>
+          </a:lnRef>
+          <a:fillRef idx="1">
+            <a:schemeClr val="accent1"/>
+          </a:fillRef>
+          <a:effectRef idx="0">
+            <a:schemeClr val="accent1"/>
+          </a:effectRef>
+          <a:fontRef idx="minor">
+            <a:schemeClr val="lt1"/>
+          </a:fontRef>
+        </p:style>
+        <p:txBody>
+          <a:bodyPr rtlCol="0" anchor="ctr"/>
+          <a:lstStyle/>
+          <a:p>
+            <a:pPr algn="ctr"/>
+            <a:endParaRPr lang="ko-KR" altLang="en-US"/>
+          </a:p>
+        </p:txBody>
+      </p:sp>
+      <p:sp>
+        <p:nvSpPr>
+          <p:cNvPr id="15" name="직사각형 14">
+            <a:extLst>
+              <a:ext uri="{FF2B5EF4-FFF2-40B4-BE49-F238E27FC236}">
+                <a16:creationId xmlns:a16="http://schemas.microsoft.com/office/drawing/2014/main" id="{08F73B0A-768C-B38E-3AAA-933104F0F943}"/>
+              </a:ext>
+            </a:extLst>
+          </p:cNvPr>
+          <p:cNvSpPr/>
+          <p:nvPr/>
+        </p:nvSpPr>
+        <p:spPr>
+          <a:xfrm>
+            <a:off x="11002333" y="2951032"/>
+            <a:ext cx="580103" cy="226142"/>
+          </a:xfrm>
+          <a:prstGeom prst="rect">
+            <a:avLst/>
+          </a:prstGeom>
+          <a:noFill/>
+          <a:ln>
+            <a:solidFill>
+              <a:srgbClr val="FF0000"/>
+            </a:solidFill>
+          </a:ln>
+        </p:spPr>
+        <p:style>
+          <a:lnRef idx="2">
+            <a:schemeClr val="accent1">
+              <a:shade val="15000"/>
+            </a:schemeClr>
+          </a:lnRef>
+          <a:fillRef idx="1">
+            <a:schemeClr val="accent1"/>
+          </a:fillRef>
+          <a:effectRef idx="0">
+            <a:schemeClr val="accent1"/>
+          </a:effectRef>
+          <a:fontRef idx="minor">
+            <a:schemeClr val="lt1"/>
+          </a:fontRef>
+        </p:style>
+        <p:txBody>
+          <a:bodyPr rtlCol="0" anchor="ctr"/>
+          <a:lstStyle/>
+          <a:p>
+            <a:pPr algn="ctr"/>
+            <a:endParaRPr lang="ko-KR" altLang="en-US"/>
+          </a:p>
+        </p:txBody>
+      </p:sp>
+      <p:sp>
+        <p:nvSpPr>
+          <p:cNvPr id="17" name="직사각형 16">
+            <a:extLst>
+              <a:ext uri="{FF2B5EF4-FFF2-40B4-BE49-F238E27FC236}">
+                <a16:creationId xmlns:a16="http://schemas.microsoft.com/office/drawing/2014/main" id="{47E6AD91-4641-9A0F-B1A4-3A0B64438C19}"/>
+              </a:ext>
+            </a:extLst>
+          </p:cNvPr>
+          <p:cNvSpPr/>
+          <p:nvPr/>
+        </p:nvSpPr>
+        <p:spPr>
+          <a:xfrm>
+            <a:off x="5629004" y="3064103"/>
+            <a:ext cx="580103" cy="226142"/>
+          </a:xfrm>
+          <a:prstGeom prst="rect">
+            <a:avLst/>
+          </a:prstGeom>
+          <a:noFill/>
+          <a:ln>
+            <a:solidFill>
+              <a:srgbClr val="FF0000"/>
+            </a:solidFill>
+          </a:ln>
+        </p:spPr>
+        <p:style>
+          <a:lnRef idx="2">
+            <a:schemeClr val="accent1">
+              <a:shade val="15000"/>
+            </a:schemeClr>
+          </a:lnRef>
+          <a:fillRef idx="1">
+            <a:schemeClr val="accent1"/>
+          </a:fillRef>
+          <a:effectRef idx="0">
+            <a:schemeClr val="accent1"/>
+          </a:effectRef>
+          <a:fontRef idx="minor">
+            <a:schemeClr val="lt1"/>
+          </a:fontRef>
+        </p:style>
+        <p:txBody>
+          <a:bodyPr rtlCol="0" anchor="ctr"/>
+          <a:lstStyle/>
+          <a:p>
+            <a:pPr algn="ctr"/>
+            <a:endParaRPr lang="ko-KR" altLang="en-US"/>
+          </a:p>
+        </p:txBody>
+      </p:sp>
+      <p:sp>
+        <p:nvSpPr>
+          <p:cNvPr id="19" name="직사각형 18">
+            <a:extLst>
+              <a:ext uri="{FF2B5EF4-FFF2-40B4-BE49-F238E27FC236}">
+                <a16:creationId xmlns:a16="http://schemas.microsoft.com/office/drawing/2014/main" id="{E773C037-2463-9C38-D527-31961D034DEE}"/>
+              </a:ext>
+            </a:extLst>
+          </p:cNvPr>
+          <p:cNvSpPr/>
+          <p:nvPr/>
+        </p:nvSpPr>
+        <p:spPr>
+          <a:xfrm>
+            <a:off x="5629004" y="3436374"/>
+            <a:ext cx="580103" cy="226142"/>
+          </a:xfrm>
+          <a:prstGeom prst="rect">
+            <a:avLst/>
+          </a:prstGeom>
+          <a:noFill/>
+          <a:ln>
+            <a:solidFill>
+              <a:srgbClr val="FF0000"/>
+            </a:solidFill>
+          </a:ln>
+        </p:spPr>
+        <p:style>
+          <a:lnRef idx="2">
+            <a:schemeClr val="accent1">
+              <a:shade val="15000"/>
+            </a:schemeClr>
+          </a:lnRef>
+          <a:fillRef idx="1">
+            <a:schemeClr val="accent1"/>
+          </a:fillRef>
+          <a:effectRef idx="0">
+            <a:schemeClr val="accent1"/>
+          </a:effectRef>
+          <a:fontRef idx="minor">
+            <a:schemeClr val="lt1"/>
+          </a:fontRef>
+        </p:style>
+        <p:txBody>
+          <a:bodyPr rtlCol="0" anchor="ctr"/>
+          <a:lstStyle/>
+          <a:p>
+            <a:pPr algn="ctr"/>
+            <a:endParaRPr lang="ko-KR" altLang="en-US"/>
+          </a:p>
+        </p:txBody>
+      </p:sp>
+      <p:sp>
+        <p:nvSpPr>
+          <p:cNvPr id="21" name="직사각형 20">
+            <a:extLst>
+              <a:ext uri="{FF2B5EF4-FFF2-40B4-BE49-F238E27FC236}">
+                <a16:creationId xmlns:a16="http://schemas.microsoft.com/office/drawing/2014/main" id="{0895C71E-CD82-6879-73CE-527FCFB40C10}"/>
+              </a:ext>
+            </a:extLst>
+          </p:cNvPr>
+          <p:cNvSpPr/>
+          <p:nvPr/>
+        </p:nvSpPr>
+        <p:spPr>
+          <a:xfrm>
+            <a:off x="838200" y="2438323"/>
+            <a:ext cx="1069256" cy="226142"/>
+          </a:xfrm>
+          <a:prstGeom prst="rect">
+            <a:avLst/>
+          </a:prstGeom>
+          <a:noFill/>
+          <a:ln>
+            <a:solidFill>
+              <a:srgbClr val="FF0000"/>
+            </a:solidFill>
+          </a:ln>
+        </p:spPr>
+        <p:style>
+          <a:lnRef idx="2">
+            <a:schemeClr val="accent1">
+              <a:shade val="15000"/>
+            </a:schemeClr>
+          </a:lnRef>
+          <a:fillRef idx="1">
+            <a:schemeClr val="accent1"/>
+          </a:fillRef>
+          <a:effectRef idx="0">
+            <a:schemeClr val="accent1"/>
+          </a:effectRef>
+          <a:fontRef idx="minor">
+            <a:schemeClr val="lt1"/>
+          </a:fontRef>
+        </p:style>
+        <p:txBody>
+          <a:bodyPr rtlCol="0" anchor="ctr"/>
+          <a:lstStyle/>
+          <a:p>
+            <a:pPr algn="ctr"/>
+            <a:endParaRPr lang="ko-KR" altLang="en-US"/>
+          </a:p>
+        </p:txBody>
+      </p:sp>
+      <p:sp>
+        <p:nvSpPr>
+          <p:cNvPr id="23" name="직사각형 22">
+            <a:extLst>
+              <a:ext uri="{FF2B5EF4-FFF2-40B4-BE49-F238E27FC236}">
+                <a16:creationId xmlns:a16="http://schemas.microsoft.com/office/drawing/2014/main" id="{7D22B3E1-8F50-4705-41AA-2048489ACE36}"/>
+              </a:ext>
+            </a:extLst>
+          </p:cNvPr>
+          <p:cNvSpPr/>
+          <p:nvPr/>
+        </p:nvSpPr>
+        <p:spPr>
+          <a:xfrm>
+            <a:off x="838200" y="2638360"/>
+            <a:ext cx="1069256" cy="226142"/>
+          </a:xfrm>
+          <a:prstGeom prst="rect">
+            <a:avLst/>
+          </a:prstGeom>
+          <a:noFill/>
+          <a:ln>
+            <a:solidFill>
+              <a:srgbClr val="FF0000"/>
+            </a:solidFill>
+          </a:ln>
+        </p:spPr>
+        <p:style>
+          <a:lnRef idx="2">
+            <a:schemeClr val="accent1">
+              <a:shade val="15000"/>
+            </a:schemeClr>
+          </a:lnRef>
+          <a:fillRef idx="1">
+            <a:schemeClr val="accent1"/>
+          </a:fillRef>
+          <a:effectRef idx="0">
+            <a:schemeClr val="accent1"/>
+          </a:effectRef>
+          <a:fontRef idx="minor">
+            <a:schemeClr val="lt1"/>
+          </a:fontRef>
+        </p:style>
+        <p:txBody>
+          <a:bodyPr rtlCol="0" anchor="ctr"/>
+          <a:lstStyle/>
+          <a:p>
+            <a:pPr algn="ctr"/>
+            <a:endParaRPr lang="ko-KR" altLang="en-US"/>
+          </a:p>
+        </p:txBody>
+      </p:sp>
+      <p:sp>
+        <p:nvSpPr>
+          <p:cNvPr id="5" name="사각형: 둥근 모서리 4">
+            <a:extLst>
+              <a:ext uri="{FF2B5EF4-FFF2-40B4-BE49-F238E27FC236}">
+                <a16:creationId xmlns:a16="http://schemas.microsoft.com/office/drawing/2014/main" id="{F99CB063-ADEE-46BE-FD72-F3FC0377809B}"/>
+              </a:ext>
+            </a:extLst>
+          </p:cNvPr>
+          <p:cNvSpPr/>
+          <p:nvPr/>
+        </p:nvSpPr>
+        <p:spPr>
+          <a:xfrm>
+            <a:off x="186812" y="5171499"/>
+            <a:ext cx="2546556" cy="800772"/>
+          </a:xfrm>
+          <a:prstGeom prst="roundRect">
+            <a:avLst/>
+          </a:prstGeom>
+          <a:noFill/>
+        </p:spPr>
+        <p:style>
+          <a:lnRef idx="2">
+            <a:schemeClr val="accent1">
+              <a:shade val="15000"/>
+            </a:schemeClr>
+          </a:lnRef>
+          <a:fillRef idx="1">
+            <a:schemeClr val="accent1"/>
+          </a:fillRef>
+          <a:effectRef idx="0">
+            <a:schemeClr val="accent1"/>
+          </a:effectRef>
+          <a:fontRef idx="minor">
+            <a:schemeClr val="lt1"/>
+          </a:fontRef>
+        </p:style>
+        <p:txBody>
+          <a:bodyPr rtlCol="0" anchor="ctr"/>
+          <a:lstStyle/>
+          <a:p>
+            <a:pPr algn="ctr"/>
+            <a:r>
+              <a:rPr lang="ko-KR" altLang="ko-KR" sz="1400" dirty="0">
+                <a:solidFill>
+                  <a:schemeClr val="tx1"/>
+                </a:solidFill>
+              </a:rPr>
+              <a:t>I2C </a:t>
+            </a:r>
+            <a:r>
+              <a:rPr lang="ko-KR" altLang="ko-KR" sz="1400" dirty="0" err="1">
+                <a:solidFill>
+                  <a:schemeClr val="tx1"/>
+                </a:solidFill>
+              </a:rPr>
+              <a:t>Register</a:t>
+            </a:r>
+            <a:r>
+              <a:rPr lang="ko-KR" altLang="ko-KR" sz="1400" dirty="0">
+                <a:solidFill>
+                  <a:schemeClr val="tx1"/>
+                </a:solidFill>
+              </a:rPr>
+              <a:t> / MT</a:t>
+            </a:r>
+            <a:r>
+              <a:rPr lang="en-US" altLang="ko-KR" sz="1400" dirty="0">
+                <a:solidFill>
+                  <a:schemeClr val="tx1"/>
+                </a:solidFill>
+              </a:rPr>
+              <a:t>P</a:t>
+            </a:r>
+            <a:r>
+              <a:rPr lang="ko-KR" altLang="en-US" sz="1400" dirty="0">
+                <a:solidFill>
+                  <a:schemeClr val="tx1"/>
+                </a:solidFill>
+              </a:rPr>
+              <a:t> 설정 </a:t>
+            </a:r>
+            <a:r>
+              <a:rPr lang="en-US" altLang="ko-KR" sz="1400" dirty="0">
+                <a:solidFill>
+                  <a:schemeClr val="tx1"/>
+                </a:solidFill>
+              </a:rPr>
+              <a:t>-&gt;</a:t>
+            </a:r>
+          </a:p>
+          <a:p>
+            <a:pPr algn="ctr"/>
+            <a:r>
+              <a:rPr lang="ko-KR" altLang="ko-KR" sz="1400" dirty="0">
+                <a:solidFill>
+                  <a:schemeClr val="tx1"/>
+                </a:solidFill>
+              </a:rPr>
+              <a:t>DAC → </a:t>
+            </a:r>
+            <a:r>
+              <a:rPr lang="ko-KR" altLang="en-US" sz="1400" dirty="0">
+                <a:solidFill>
+                  <a:schemeClr val="tx1"/>
+                </a:solidFill>
+              </a:rPr>
+              <a:t>기준 전압 생성</a:t>
+            </a:r>
+            <a:endParaRPr lang="en-US" altLang="ko-KR" sz="1400" dirty="0">
+              <a:solidFill>
+                <a:schemeClr val="tx1"/>
+              </a:solidFill>
+            </a:endParaRPr>
+          </a:p>
+        </p:txBody>
+      </p:sp>
+      <p:sp>
+        <p:nvSpPr>
+          <p:cNvPr id="10" name="사각형: 둥근 모서리 9">
+            <a:extLst>
+              <a:ext uri="{FF2B5EF4-FFF2-40B4-BE49-F238E27FC236}">
+                <a16:creationId xmlns:a16="http://schemas.microsoft.com/office/drawing/2014/main" id="{F957A40E-C117-92F2-7902-367A94697875}"/>
+              </a:ext>
+            </a:extLst>
+          </p:cNvPr>
+          <p:cNvSpPr/>
+          <p:nvPr/>
+        </p:nvSpPr>
+        <p:spPr>
+          <a:xfrm>
+            <a:off x="3284009" y="5171499"/>
+            <a:ext cx="2546556" cy="800772"/>
+          </a:xfrm>
+          <a:prstGeom prst="roundRect">
+            <a:avLst/>
+          </a:prstGeom>
+          <a:noFill/>
+        </p:spPr>
+        <p:style>
+          <a:lnRef idx="2">
+            <a:schemeClr val="accent1">
+              <a:shade val="15000"/>
+            </a:schemeClr>
+          </a:lnRef>
+          <a:fillRef idx="1">
+            <a:schemeClr val="accent1"/>
+          </a:fillRef>
+          <a:effectRef idx="0">
+            <a:schemeClr val="accent1"/>
+          </a:effectRef>
+          <a:fontRef idx="minor">
+            <a:schemeClr val="lt1"/>
+          </a:fontRef>
+        </p:style>
+        <p:txBody>
+          <a:bodyPr rtlCol="0" anchor="ctr"/>
+          <a:lstStyle/>
+          <a:p>
+            <a:pPr algn="ctr"/>
+            <a:r>
+              <a:rPr lang="en-US" altLang="ko-KR" sz="1400" dirty="0">
+                <a:solidFill>
+                  <a:schemeClr val="tx1"/>
+                </a:solidFill>
+              </a:rPr>
+              <a:t>EA</a:t>
+            </a:r>
+            <a:r>
+              <a:rPr lang="ko-KR" altLang="en-US" sz="1400" dirty="0">
+                <a:solidFill>
+                  <a:schemeClr val="tx1"/>
+                </a:solidFill>
+              </a:rPr>
+              <a:t>에서 </a:t>
+            </a:r>
+            <a:r>
+              <a:rPr lang="ko-KR" altLang="ko-KR" sz="1400" dirty="0" err="1">
+                <a:solidFill>
+                  <a:schemeClr val="tx1"/>
+                </a:solidFill>
+              </a:rPr>
+              <a:t>SWA_FB_P</a:t>
+            </a:r>
+            <a:r>
+              <a:rPr lang="ko-KR" altLang="en-US" sz="1400" dirty="0" err="1">
+                <a:solidFill>
+                  <a:schemeClr val="tx1"/>
+                </a:solidFill>
+              </a:rPr>
+              <a:t>와</a:t>
+            </a:r>
+            <a:r>
+              <a:rPr lang="ko-KR" altLang="en-US" sz="1400" dirty="0">
+                <a:solidFill>
+                  <a:schemeClr val="tx1"/>
+                </a:solidFill>
+              </a:rPr>
+              <a:t> </a:t>
+            </a:r>
+            <a:r>
+              <a:rPr lang="en-US" altLang="ko-KR" sz="1400" dirty="0">
+                <a:solidFill>
+                  <a:schemeClr val="tx1"/>
+                </a:solidFill>
+              </a:rPr>
+              <a:t>VREF </a:t>
+            </a:r>
+            <a:r>
+              <a:rPr lang="ko-KR" altLang="en-US" sz="1400" dirty="0">
+                <a:solidFill>
+                  <a:schemeClr val="tx1"/>
+                </a:solidFill>
+              </a:rPr>
+              <a:t>비교하는 신호 생성</a:t>
+            </a:r>
+            <a:endParaRPr lang="en-US" altLang="ko-KR" sz="1400" dirty="0">
+              <a:solidFill>
+                <a:schemeClr val="tx1"/>
+              </a:solidFill>
+            </a:endParaRPr>
+          </a:p>
+        </p:txBody>
+      </p:sp>
+      <p:sp>
+        <p:nvSpPr>
+          <p:cNvPr id="13" name="사각형: 둥근 모서리 12">
+            <a:extLst>
+              <a:ext uri="{FF2B5EF4-FFF2-40B4-BE49-F238E27FC236}">
+                <a16:creationId xmlns:a16="http://schemas.microsoft.com/office/drawing/2014/main" id="{8216DB3B-5451-FAE5-341A-B57DFA3D9E5C}"/>
+              </a:ext>
+            </a:extLst>
+          </p:cNvPr>
+          <p:cNvSpPr/>
+          <p:nvPr/>
+        </p:nvSpPr>
+        <p:spPr>
+          <a:xfrm>
+            <a:off x="6361488" y="5171499"/>
+            <a:ext cx="2546556" cy="800772"/>
+          </a:xfrm>
+          <a:prstGeom prst="roundRect">
+            <a:avLst/>
+          </a:prstGeom>
+          <a:noFill/>
+        </p:spPr>
+        <p:style>
+          <a:lnRef idx="2">
+            <a:schemeClr val="accent1">
+              <a:shade val="15000"/>
+            </a:schemeClr>
+          </a:lnRef>
+          <a:fillRef idx="1">
+            <a:schemeClr val="accent1"/>
+          </a:fillRef>
+          <a:effectRef idx="0">
+            <a:schemeClr val="accent1"/>
+          </a:effectRef>
+          <a:fontRef idx="minor">
+            <a:schemeClr val="lt1"/>
+          </a:fontRef>
+        </p:style>
+        <p:txBody>
+          <a:bodyPr rtlCol="0" anchor="ctr"/>
+          <a:lstStyle/>
+          <a:p>
+            <a:pPr algn="ctr"/>
+            <a:r>
+              <a:rPr lang="ko-KR" altLang="en-US" sz="1400" dirty="0">
+                <a:solidFill>
+                  <a:schemeClr val="tx1"/>
+                </a:solidFill>
+              </a:rPr>
+              <a:t>생성한 신호와 </a:t>
+            </a:r>
+            <a:r>
+              <a:rPr lang="en-US" altLang="ko-KR" sz="1400" dirty="0">
+                <a:solidFill>
+                  <a:schemeClr val="tx1"/>
+                </a:solidFill>
+              </a:rPr>
+              <a:t>Ramp</a:t>
+            </a:r>
+            <a:r>
+              <a:rPr lang="ko-KR" altLang="en-US" sz="1400" dirty="0">
+                <a:solidFill>
+                  <a:schemeClr val="tx1"/>
+                </a:solidFill>
+              </a:rPr>
+              <a:t>를</a:t>
+            </a:r>
+            <a:endParaRPr lang="en-US" altLang="ko-KR" sz="1400" dirty="0">
+              <a:solidFill>
+                <a:schemeClr val="tx1"/>
+              </a:solidFill>
+            </a:endParaRPr>
+          </a:p>
+          <a:p>
+            <a:pPr algn="ctr"/>
+            <a:r>
+              <a:rPr lang="en-US" altLang="ko-KR" sz="1400" dirty="0">
+                <a:solidFill>
+                  <a:schemeClr val="tx1"/>
+                </a:solidFill>
+              </a:rPr>
+              <a:t>COMP</a:t>
+            </a:r>
+            <a:r>
+              <a:rPr lang="ko-KR" altLang="en-US" sz="1400" dirty="0">
+                <a:solidFill>
+                  <a:schemeClr val="tx1"/>
+                </a:solidFill>
+              </a:rPr>
+              <a:t>에서 비교하여</a:t>
+            </a:r>
+            <a:endParaRPr lang="en-US" altLang="ko-KR" sz="1400" dirty="0">
+              <a:solidFill>
+                <a:schemeClr val="tx1"/>
+              </a:solidFill>
+            </a:endParaRPr>
+          </a:p>
+          <a:p>
+            <a:pPr algn="ctr"/>
+            <a:r>
+              <a:rPr lang="en-US" altLang="ko-KR" sz="1400" dirty="0">
+                <a:solidFill>
+                  <a:schemeClr val="tx1"/>
+                </a:solidFill>
+              </a:rPr>
+              <a:t>Logic Control</a:t>
+            </a:r>
+            <a:r>
+              <a:rPr lang="ko-KR" altLang="en-US" sz="1400" dirty="0">
+                <a:solidFill>
+                  <a:schemeClr val="tx1"/>
+                </a:solidFill>
+              </a:rPr>
+              <a:t>에 전달 </a:t>
+            </a:r>
+            <a:endParaRPr lang="en-US" altLang="ko-KR" sz="1400" dirty="0">
+              <a:solidFill>
+                <a:schemeClr val="tx1"/>
+              </a:solidFill>
+            </a:endParaRPr>
+          </a:p>
+        </p:txBody>
+      </p:sp>
+      <p:sp>
+        <p:nvSpPr>
+          <p:cNvPr id="16" name="사각형: 둥근 모서리 15">
+            <a:extLst>
+              <a:ext uri="{FF2B5EF4-FFF2-40B4-BE49-F238E27FC236}">
+                <a16:creationId xmlns:a16="http://schemas.microsoft.com/office/drawing/2014/main" id="{CD6820CF-A5FB-288F-4D0A-1BDC43A74B54}"/>
+              </a:ext>
+            </a:extLst>
+          </p:cNvPr>
+          <p:cNvSpPr/>
+          <p:nvPr/>
+        </p:nvSpPr>
+        <p:spPr>
+          <a:xfrm>
+            <a:off x="9438968" y="5171499"/>
+            <a:ext cx="2546556" cy="800772"/>
+          </a:xfrm>
+          <a:prstGeom prst="roundRect">
+            <a:avLst/>
+          </a:prstGeom>
+          <a:noFill/>
+        </p:spPr>
+        <p:style>
+          <a:lnRef idx="2">
+            <a:schemeClr val="accent1">
+              <a:shade val="15000"/>
+            </a:schemeClr>
+          </a:lnRef>
+          <a:fillRef idx="1">
+            <a:schemeClr val="accent1"/>
+          </a:fillRef>
+          <a:effectRef idx="0">
+            <a:schemeClr val="accent1"/>
+          </a:effectRef>
+          <a:fontRef idx="minor">
+            <a:schemeClr val="lt1"/>
+          </a:fontRef>
+        </p:style>
+        <p:txBody>
+          <a:bodyPr rtlCol="0" anchor="ctr"/>
+          <a:lstStyle/>
+          <a:p>
+            <a:pPr algn="ctr"/>
+            <a:r>
+              <a:rPr lang="ko-KR" altLang="en-US" sz="1400" dirty="0">
+                <a:solidFill>
+                  <a:schemeClr val="tx1"/>
+                </a:solidFill>
+              </a:rPr>
+              <a:t>전달받은 신호에 따라 </a:t>
+            </a:r>
+            <a:r>
+              <a:rPr lang="en-US" altLang="ko-KR" sz="1400" dirty="0">
+                <a:solidFill>
+                  <a:schemeClr val="tx1"/>
+                </a:solidFill>
+              </a:rPr>
+              <a:t>HS/LS Driver </a:t>
+            </a:r>
+            <a:r>
+              <a:rPr lang="ko-KR" altLang="en-US" sz="1400" dirty="0">
+                <a:solidFill>
+                  <a:schemeClr val="tx1"/>
+                </a:solidFill>
+              </a:rPr>
+              <a:t>제어</a:t>
+            </a:r>
+            <a:endParaRPr lang="en-US" altLang="ko-KR" sz="1400" dirty="0">
+              <a:solidFill>
+                <a:schemeClr val="tx1"/>
+              </a:solidFill>
+            </a:endParaRPr>
+          </a:p>
+        </p:txBody>
+      </p:sp>
+      <p:sp>
+        <p:nvSpPr>
+          <p:cNvPr id="18" name="화살표: 오른쪽 17">
+            <a:extLst>
+              <a:ext uri="{FF2B5EF4-FFF2-40B4-BE49-F238E27FC236}">
+                <a16:creationId xmlns:a16="http://schemas.microsoft.com/office/drawing/2014/main" id="{2ABFE781-7BC4-80ED-BD04-5DFE583096AD}"/>
+              </a:ext>
+            </a:extLst>
+          </p:cNvPr>
+          <p:cNvSpPr/>
+          <p:nvPr/>
+        </p:nvSpPr>
+        <p:spPr>
+          <a:xfrm>
+            <a:off x="2767798" y="5329569"/>
+            <a:ext cx="481781" cy="484632"/>
+          </a:xfrm>
+          <a:prstGeom prst="rightArrow">
+            <a:avLst/>
+          </a:prstGeom>
+        </p:spPr>
+        <p:style>
+          <a:lnRef idx="2">
+            <a:schemeClr val="accent1">
+              <a:shade val="15000"/>
+            </a:schemeClr>
+          </a:lnRef>
+          <a:fillRef idx="1">
+            <a:schemeClr val="accent1"/>
+          </a:fillRef>
+          <a:effectRef idx="0">
+            <a:schemeClr val="accent1"/>
+          </a:effectRef>
+          <a:fontRef idx="minor">
+            <a:schemeClr val="lt1"/>
+          </a:fontRef>
+        </p:style>
+        <p:txBody>
+          <a:bodyPr rtlCol="0" anchor="ctr"/>
+          <a:lstStyle/>
+          <a:p>
+            <a:pPr algn="ctr"/>
+            <a:endParaRPr lang="ko-KR" altLang="en-US"/>
+          </a:p>
+        </p:txBody>
+      </p:sp>
+      <p:sp>
+        <p:nvSpPr>
+          <p:cNvPr id="22" name="화살표: 오른쪽 21">
+            <a:extLst>
+              <a:ext uri="{FF2B5EF4-FFF2-40B4-BE49-F238E27FC236}">
+                <a16:creationId xmlns:a16="http://schemas.microsoft.com/office/drawing/2014/main" id="{3D8C69B5-DE9B-289C-63DD-882A7FF44746}"/>
+              </a:ext>
+            </a:extLst>
+          </p:cNvPr>
+          <p:cNvSpPr/>
+          <p:nvPr/>
+        </p:nvSpPr>
+        <p:spPr>
+          <a:xfrm>
+            <a:off x="5855163" y="5329569"/>
+            <a:ext cx="481781" cy="484632"/>
+          </a:xfrm>
+          <a:prstGeom prst="rightArrow">
+            <a:avLst/>
+          </a:prstGeom>
+        </p:spPr>
+        <p:style>
+          <a:lnRef idx="2">
+            <a:schemeClr val="accent1">
+              <a:shade val="15000"/>
+            </a:schemeClr>
+          </a:lnRef>
+          <a:fillRef idx="1">
+            <a:schemeClr val="accent1"/>
+          </a:fillRef>
+          <a:effectRef idx="0">
+            <a:schemeClr val="accent1"/>
+          </a:effectRef>
+          <a:fontRef idx="minor">
+            <a:schemeClr val="lt1"/>
+          </a:fontRef>
+        </p:style>
+        <p:txBody>
+          <a:bodyPr rtlCol="0" anchor="ctr"/>
+          <a:lstStyle/>
+          <a:p>
+            <a:pPr algn="ctr"/>
+            <a:endParaRPr lang="ko-KR" altLang="en-US"/>
+          </a:p>
+        </p:txBody>
+      </p:sp>
+      <p:sp>
+        <p:nvSpPr>
+          <p:cNvPr id="26" name="화살표: 오른쪽 25">
+            <a:extLst>
+              <a:ext uri="{FF2B5EF4-FFF2-40B4-BE49-F238E27FC236}">
+                <a16:creationId xmlns:a16="http://schemas.microsoft.com/office/drawing/2014/main" id="{F7F43230-B03E-7FED-FE4F-EFB53C3E088D}"/>
+              </a:ext>
+            </a:extLst>
+          </p:cNvPr>
+          <p:cNvSpPr/>
+          <p:nvPr/>
+        </p:nvSpPr>
+        <p:spPr>
+          <a:xfrm>
+            <a:off x="8922737" y="5329569"/>
+            <a:ext cx="481781" cy="484632"/>
+          </a:xfrm>
+          <a:prstGeom prst="rightArrow">
+            <a:avLst/>
+          </a:prstGeom>
+        </p:spPr>
+        <p:style>
+          <a:lnRef idx="2">
+            <a:schemeClr val="accent1">
+              <a:shade val="15000"/>
+            </a:schemeClr>
+          </a:lnRef>
+          <a:fillRef idx="1">
+            <a:schemeClr val="accent1"/>
+          </a:fillRef>
+          <a:effectRef idx="0">
+            <a:schemeClr val="accent1"/>
+          </a:effectRef>
+          <a:fontRef idx="minor">
+            <a:schemeClr val="lt1"/>
+          </a:fontRef>
+        </p:style>
+        <p:txBody>
+          <a:bodyPr rtlCol="0" anchor="ctr"/>
+          <a:lstStyle/>
+          <a:p>
+            <a:pPr algn="ctr"/>
+            <a:endParaRPr lang="ko-KR" altLang="en-US"/>
+          </a:p>
+        </p:txBody>
+      </p:sp>
+    </p:spTree>
+    <p:extLst>
+      <p:ext uri="{BB962C8B-B14F-4D97-AF65-F5344CB8AC3E}">
+        <p14:creationId xmlns:p14="http://schemas.microsoft.com/office/powerpoint/2010/main" val="1968289499"/>
+      </p:ext>
+    </p:extLst>
+  </p:cSld>
+  <p:clrMapOvr>
+    <a:masterClrMapping/>
+  </p:clrMapOvr>
+</p:sld>
+</file>
+
+<file path=ppt/slides/slide5.xml><?xml version="1.0" encoding="utf-8"?>
+<p:sld xmlns:a="http://schemas.openxmlformats.org/drawingml/2006/main" xmlns:r="http://schemas.openxmlformats.org/officeDocument/2006/relationships" xmlns:p="http://schemas.openxmlformats.org/presentationml/2006/main">
+  <p:cSld>
+    <p:spTree>
+      <p:nvGrpSpPr>
+        <p:cNvPr id="1" name="">
+          <a:extLst>
+            <a:ext uri="{FF2B5EF4-FFF2-40B4-BE49-F238E27FC236}">
               <a16:creationId xmlns:a16="http://schemas.microsoft.com/office/drawing/2014/main" id="{D8B1EBC2-1B5B-5599-6E22-978F0E1FD67C}"/>
             </a:ext>
           </a:extLst>
@@ -5756,707 +6894,560 @@
             </a:r>
             <a:r>
               <a:rPr lang="en-US" altLang="ko-KR" dirty="0"/>
-              <a:t>MP5475)</a:t>
+              <a:t>MP5475) | </a:t>
+            </a:r>
+            <a:r>
+              <a:rPr lang="ko-KR" altLang="en-US" dirty="0"/>
+              <a:t>동작 흐름</a:t>
+            </a:r>
+            <a:r>
+              <a:rPr lang="en-US" altLang="ko-KR" dirty="0"/>
+              <a:t> </a:t>
             </a:r>
             <a:endParaRPr lang="ko-KR" altLang="en-US" dirty="0"/>
           </a:p>
         </p:txBody>
       </p:sp>
-      <p:graphicFrame>
-        <p:nvGraphicFramePr>
-          <p:cNvPr id="11" name="표 10">
-            <a:extLst>
-              <a:ext uri="{FF2B5EF4-FFF2-40B4-BE49-F238E27FC236}">
-                <a16:creationId xmlns:a16="http://schemas.microsoft.com/office/drawing/2014/main" id="{1986E299-924E-786E-13F1-E3CE1B68A8EE}"/>
-              </a:ext>
-            </a:extLst>
-          </p:cNvPr>
-          <p:cNvGraphicFramePr>
-            <a:graphicFrameLocks noGrp="1"/>
-          </p:cNvGraphicFramePr>
-          <p:nvPr>
-            <p:extLst>
-              <p:ext uri="{D42A27DB-BD31-4B8C-83A1-F6EECF244321}">
-                <p14:modId xmlns:p14="http://schemas.microsoft.com/office/powerpoint/2010/main" val="826716249"/>
-              </p:ext>
-            </p:extLst>
-          </p:nvPr>
-        </p:nvGraphicFramePr>
-        <p:xfrm>
-          <a:off x="985684" y="1501134"/>
-          <a:ext cx="5243873" cy="2865120"/>
-        </p:xfrm>
-        <a:graphic>
-          <a:graphicData uri="http://schemas.openxmlformats.org/drawingml/2006/table">
-            <a:tbl>
-              <a:tblPr firstRow="1" bandRow="1">
-                <a:tableStyleId>{5C22544A-7EE6-4342-B048-85BDC9FD1C3A}</a:tableStyleId>
-              </a:tblPr>
-              <a:tblGrid>
-                <a:gridCol w="2041487">
-                  <a:extLst>
-                    <a:ext uri="{9D8B030D-6E8A-4147-A177-3AD203B41FA5}">
-                      <a16:colId xmlns:a16="http://schemas.microsoft.com/office/drawing/2014/main" val="1317882026"/>
-                    </a:ext>
-                  </a:extLst>
-                </a:gridCol>
-                <a:gridCol w="3202386">
-                  <a:extLst>
-                    <a:ext uri="{9D8B030D-6E8A-4147-A177-3AD203B41FA5}">
-                      <a16:colId xmlns:a16="http://schemas.microsoft.com/office/drawing/2014/main" val="1801095769"/>
-                    </a:ext>
-                  </a:extLst>
-                </a:gridCol>
-              </a:tblGrid>
-              <a:tr h="370840">
-                <a:tc>
-                  <a:txBody>
-                    <a:bodyPr/>
-                    <a:lstStyle/>
-                    <a:p>
-                      <a:pPr latinLnBrk="1"/>
-                      <a:r>
-                        <a:rPr lang="ko-KR" altLang="en-US" dirty="0"/>
-                        <a:t>주요 항목</a:t>
-                      </a:r>
-                    </a:p>
-                  </a:txBody>
-                  <a:tcPr/>
-                </a:tc>
-                <a:tc>
-                  <a:txBody>
-                    <a:bodyPr/>
-                    <a:lstStyle/>
-                    <a:p>
-                      <a:pPr latinLnBrk="1"/>
-                      <a:r>
-                        <a:rPr lang="ko-KR" altLang="en-US" dirty="0"/>
-                        <a:t>사양</a:t>
-                      </a:r>
-                    </a:p>
-                  </a:txBody>
-                  <a:tcPr/>
-                </a:tc>
-                <a:extLst>
-                  <a:ext uri="{0D108BD9-81ED-4DB2-BD59-A6C34878D82A}">
-                    <a16:rowId xmlns:a16="http://schemas.microsoft.com/office/drawing/2014/main" val="1446087308"/>
-                  </a:ext>
-                </a:extLst>
-              </a:tr>
-              <a:tr h="370840">
-                <a:tc>
-                  <a:txBody>
-                    <a:bodyPr/>
-                    <a:lstStyle/>
-                    <a:p>
-                      <a:pPr latinLnBrk="1"/>
-                      <a:r>
-                        <a:rPr lang="ko-KR" altLang="en-US" dirty="0"/>
-                        <a:t>입력 전압</a:t>
-                      </a:r>
-                    </a:p>
-                  </a:txBody>
-                  <a:tcPr/>
-                </a:tc>
-                <a:tc>
-                  <a:txBody>
-                    <a:bodyPr/>
-                    <a:lstStyle/>
-                    <a:p>
-                      <a:pPr latinLnBrk="1"/>
-                      <a:r>
-                        <a:rPr lang="en-US" altLang="ko-KR" dirty="0"/>
-                        <a:t>3 ~ 16V</a:t>
-                      </a:r>
-                      <a:endParaRPr lang="ko-KR" altLang="en-US" dirty="0"/>
-                    </a:p>
-                  </a:txBody>
-                  <a:tcPr/>
-                </a:tc>
-                <a:extLst>
-                  <a:ext uri="{0D108BD9-81ED-4DB2-BD59-A6C34878D82A}">
-                    <a16:rowId xmlns:a16="http://schemas.microsoft.com/office/drawing/2014/main" val="2878854580"/>
-                  </a:ext>
-                </a:extLst>
-              </a:tr>
-              <a:tr h="370840">
-                <a:tc>
-                  <a:txBody>
-                    <a:bodyPr/>
-                    <a:lstStyle/>
-                    <a:p>
-                      <a:pPr latinLnBrk="1"/>
-                      <a:r>
-                        <a:rPr lang="ko-KR" altLang="ko-KR" dirty="0"/>
-                        <a:t>출력 채널</a:t>
-                      </a:r>
-                      <a:endParaRPr lang="ko-KR" altLang="en-US" dirty="0"/>
-                    </a:p>
-                  </a:txBody>
-                  <a:tcPr/>
-                </a:tc>
-                <a:tc>
-                  <a:txBody>
-                    <a:bodyPr/>
-                    <a:lstStyle/>
-                    <a:p>
-                      <a:pPr latinLnBrk="1"/>
-                      <a:r>
-                        <a:rPr lang="ko-KR" altLang="ko-KR" dirty="0" err="1"/>
-                        <a:t>Buck</a:t>
-                      </a:r>
-                      <a:r>
-                        <a:rPr lang="ko-KR" altLang="ko-KR" dirty="0"/>
-                        <a:t> </a:t>
-                      </a:r>
-                      <a:r>
-                        <a:rPr lang="ko-KR" altLang="ko-KR" dirty="0" err="1"/>
-                        <a:t>Converter</a:t>
-                      </a:r>
-                      <a:r>
-                        <a:rPr lang="ko-KR" altLang="ko-KR" dirty="0"/>
-                        <a:t> 4채널</a:t>
-                      </a:r>
-                      <a:endParaRPr lang="ko-KR" altLang="en-US" dirty="0"/>
-                    </a:p>
-                  </a:txBody>
-                  <a:tcPr/>
-                </a:tc>
-                <a:extLst>
-                  <a:ext uri="{0D108BD9-81ED-4DB2-BD59-A6C34878D82A}">
-                    <a16:rowId xmlns:a16="http://schemas.microsoft.com/office/drawing/2014/main" val="3423155806"/>
-                  </a:ext>
-                </a:extLst>
-              </a:tr>
-              <a:tr h="370840">
-                <a:tc>
-                  <a:txBody>
-                    <a:bodyPr/>
-                    <a:lstStyle/>
-                    <a:p>
-                      <a:pPr latinLnBrk="1"/>
-                      <a:r>
-                        <a:rPr lang="ko-KR" altLang="ko-KR" dirty="0"/>
-                        <a:t>채널별 출력 전류</a:t>
-                      </a:r>
-                      <a:endParaRPr lang="ko-KR" altLang="en-US" dirty="0"/>
-                    </a:p>
-                  </a:txBody>
-                  <a:tcPr/>
-                </a:tc>
-                <a:tc>
-                  <a:txBody>
-                    <a:bodyPr/>
-                    <a:lstStyle/>
-                    <a:p>
-                      <a:pPr latinLnBrk="1"/>
-                      <a:r>
-                        <a:rPr lang="ko-KR" altLang="ko-KR" dirty="0"/>
-                        <a:t>최대 6A</a:t>
-                      </a:r>
-                      <a:endParaRPr lang="ko-KR" altLang="en-US" dirty="0"/>
-                    </a:p>
-                  </a:txBody>
-                  <a:tcPr/>
-                </a:tc>
-                <a:extLst>
-                  <a:ext uri="{0D108BD9-81ED-4DB2-BD59-A6C34878D82A}">
-                    <a16:rowId xmlns:a16="http://schemas.microsoft.com/office/drawing/2014/main" val="1633234599"/>
-                  </a:ext>
-                </a:extLst>
-              </a:tr>
-              <a:tr h="370840">
-                <a:tc>
-                  <a:txBody>
-                    <a:bodyPr/>
-                    <a:lstStyle/>
-                    <a:p>
-                      <a:pPr latinLnBrk="1"/>
-                      <a:r>
-                        <a:rPr lang="ko-KR" altLang="ko-KR" dirty="0"/>
-                        <a:t>제어 인터페이스</a:t>
-                      </a:r>
-                      <a:endParaRPr lang="ko-KR" altLang="en-US" dirty="0"/>
-                    </a:p>
-                  </a:txBody>
-                  <a:tcPr/>
-                </a:tc>
-                <a:tc>
-                  <a:txBody>
-                    <a:bodyPr/>
-                    <a:lstStyle/>
-                    <a:p>
-                      <a:pPr latinLnBrk="1"/>
-                      <a:r>
-                        <a:rPr lang="ko-KR" altLang="ko-KR" dirty="0"/>
-                        <a:t>I2C</a:t>
-                      </a:r>
-                      <a:endParaRPr lang="ko-KR" altLang="en-US" dirty="0"/>
-                    </a:p>
-                  </a:txBody>
-                  <a:tcPr/>
-                </a:tc>
-                <a:extLst>
-                  <a:ext uri="{0D108BD9-81ED-4DB2-BD59-A6C34878D82A}">
-                    <a16:rowId xmlns:a16="http://schemas.microsoft.com/office/drawing/2014/main" val="1188293425"/>
-                  </a:ext>
-                </a:extLst>
-              </a:tr>
-              <a:tr h="370840">
-                <a:tc>
-                  <a:txBody>
-                    <a:bodyPr/>
-                    <a:lstStyle/>
-                    <a:p>
-                      <a:pPr latinLnBrk="1"/>
-                      <a:r>
-                        <a:rPr lang="ko-KR" altLang="ko-KR" dirty="0"/>
-                        <a:t>내부 VREF</a:t>
-                      </a:r>
-                      <a:endParaRPr lang="ko-KR" altLang="en-US" dirty="0"/>
-                    </a:p>
-                  </a:txBody>
-                  <a:tcPr/>
-                </a:tc>
-                <a:tc>
-                  <a:txBody>
-                    <a:bodyPr/>
-                    <a:lstStyle/>
-                    <a:p>
-                      <a:pPr latinLnBrk="1"/>
-                      <a:r>
-                        <a:rPr lang="ko-KR" altLang="ko-KR" dirty="0"/>
-                        <a:t>0.3~2.048V, 2mV 단위</a:t>
-                      </a:r>
-                      <a:endParaRPr lang="ko-KR" altLang="en-US" dirty="0"/>
-                    </a:p>
-                  </a:txBody>
-                  <a:tcPr/>
-                </a:tc>
-                <a:extLst>
-                  <a:ext uri="{0D108BD9-81ED-4DB2-BD59-A6C34878D82A}">
-                    <a16:rowId xmlns:a16="http://schemas.microsoft.com/office/drawing/2014/main" val="763771115"/>
-                  </a:ext>
-                </a:extLst>
-              </a:tr>
-              <a:tr h="370840">
-                <a:tc>
-                  <a:txBody>
-                    <a:bodyPr/>
-                    <a:lstStyle/>
-                    <a:p>
-                      <a:pPr latinLnBrk="1"/>
-                      <a:r>
-                        <a:rPr lang="ko-KR" altLang="ko-KR" dirty="0"/>
-                        <a:t>보호 기능</a:t>
-                      </a:r>
-                      <a:endParaRPr lang="ko-KR" altLang="en-US" dirty="0"/>
-                    </a:p>
-                  </a:txBody>
-                  <a:tcPr/>
-                </a:tc>
-                <a:tc>
-                  <a:txBody>
-                    <a:bodyPr/>
-                    <a:lstStyle/>
-                    <a:p>
-                      <a:pPr latinLnBrk="1"/>
-                      <a:r>
-                        <a:rPr lang="ko-KR" altLang="ko-KR" dirty="0"/>
-                        <a:t>UVP, OVP, OCP,</a:t>
-                      </a:r>
-                      <a:r>
-                        <a:rPr lang="en-US" altLang="ko-KR" dirty="0"/>
-                        <a:t> UVLO,</a:t>
-                      </a:r>
-                    </a:p>
-                    <a:p>
-                      <a:pPr latinLnBrk="1"/>
-                      <a:r>
-                        <a:rPr lang="ko-KR" altLang="ko-KR" dirty="0" err="1"/>
-                        <a:t>Thermal</a:t>
-                      </a:r>
-                      <a:r>
-                        <a:rPr lang="ko-KR" altLang="ko-KR" dirty="0"/>
-                        <a:t> </a:t>
-                      </a:r>
-                      <a:r>
-                        <a:rPr lang="ko-KR" altLang="ko-KR" dirty="0" err="1"/>
-                        <a:t>Shutdown</a:t>
-                      </a:r>
-                      <a:endParaRPr lang="ko-KR" altLang="en-US" dirty="0"/>
-                    </a:p>
-                  </a:txBody>
-                  <a:tcPr/>
-                </a:tc>
-                <a:extLst>
-                  <a:ext uri="{0D108BD9-81ED-4DB2-BD59-A6C34878D82A}">
-                    <a16:rowId xmlns:a16="http://schemas.microsoft.com/office/drawing/2014/main" val="603084113"/>
-                  </a:ext>
-                </a:extLst>
-              </a:tr>
-            </a:tbl>
-          </a:graphicData>
-        </a:graphic>
-      </p:graphicFrame>
-      <p:graphicFrame>
-        <p:nvGraphicFramePr>
-          <p:cNvPr id="13" name="표 12">
-            <a:extLst>
-              <a:ext uri="{FF2B5EF4-FFF2-40B4-BE49-F238E27FC236}">
-                <a16:creationId xmlns:a16="http://schemas.microsoft.com/office/drawing/2014/main" id="{D91A0FA2-BB27-3E4D-044F-88E3B472118C}"/>
-              </a:ext>
-            </a:extLst>
-          </p:cNvPr>
-          <p:cNvGraphicFramePr>
-            <a:graphicFrameLocks noGrp="1"/>
-          </p:cNvGraphicFramePr>
-          <p:nvPr>
-            <p:extLst>
-              <p:ext uri="{D42A27DB-BD31-4B8C-83A1-F6EECF244321}">
-                <p14:modId xmlns:p14="http://schemas.microsoft.com/office/powerpoint/2010/main" val="463870054"/>
-              </p:ext>
-            </p:extLst>
-          </p:nvPr>
-        </p:nvGraphicFramePr>
-        <p:xfrm>
-          <a:off x="985684" y="4678383"/>
-          <a:ext cx="7971504" cy="1854200"/>
-        </p:xfrm>
-        <a:graphic>
-          <a:graphicData uri="http://schemas.openxmlformats.org/drawingml/2006/table">
-            <a:tbl>
-              <a:tblPr firstRow="1" bandRow="1">
-                <a:tableStyleId>{5C22544A-7EE6-4342-B048-85BDC9FD1C3A}</a:tableStyleId>
-              </a:tblPr>
-              <a:tblGrid>
-                <a:gridCol w="2058866">
-                  <a:extLst>
-                    <a:ext uri="{9D8B030D-6E8A-4147-A177-3AD203B41FA5}">
-                      <a16:colId xmlns:a16="http://schemas.microsoft.com/office/drawing/2014/main" val="1317882026"/>
-                    </a:ext>
-                  </a:extLst>
-                </a:gridCol>
-                <a:gridCol w="3102448">
-                  <a:extLst>
-                    <a:ext uri="{9D8B030D-6E8A-4147-A177-3AD203B41FA5}">
-                      <a16:colId xmlns:a16="http://schemas.microsoft.com/office/drawing/2014/main" val="1801095769"/>
-                    </a:ext>
-                  </a:extLst>
-                </a:gridCol>
-                <a:gridCol w="2810190">
-                  <a:extLst>
-                    <a:ext uri="{9D8B030D-6E8A-4147-A177-3AD203B41FA5}">
-                      <a16:colId xmlns:a16="http://schemas.microsoft.com/office/drawing/2014/main" val="671593876"/>
-                    </a:ext>
-                  </a:extLst>
-                </a:gridCol>
-              </a:tblGrid>
-              <a:tr h="370840">
-                <a:tc>
-                  <a:txBody>
-                    <a:bodyPr/>
-                    <a:lstStyle/>
-                    <a:p>
-                      <a:pPr latinLnBrk="1"/>
-                      <a:r>
-                        <a:rPr lang="ko-KR" altLang="en-US" dirty="0"/>
-                        <a:t>주요 항목</a:t>
-                      </a:r>
-                    </a:p>
-                  </a:txBody>
-                  <a:tcPr/>
-                </a:tc>
-                <a:tc>
-                  <a:txBody>
-                    <a:bodyPr/>
-                    <a:lstStyle/>
-                    <a:p>
-                      <a:pPr latinLnBrk="1"/>
-                      <a:r>
-                        <a:rPr lang="ko-KR" altLang="en-US" dirty="0"/>
-                        <a:t>사양</a:t>
-                      </a:r>
-                    </a:p>
-                  </a:txBody>
-                  <a:tcPr/>
-                </a:tc>
-                <a:tc>
-                  <a:txBody>
-                    <a:bodyPr/>
-                    <a:lstStyle/>
-                    <a:p>
-                      <a:pPr latinLnBrk="1"/>
-                      <a:r>
-                        <a:rPr lang="ko-KR" altLang="en-US" dirty="0"/>
-                        <a:t>활용</a:t>
-                      </a:r>
-                    </a:p>
-                  </a:txBody>
-                  <a:tcPr/>
-                </a:tc>
-                <a:extLst>
-                  <a:ext uri="{0D108BD9-81ED-4DB2-BD59-A6C34878D82A}">
-                    <a16:rowId xmlns:a16="http://schemas.microsoft.com/office/drawing/2014/main" val="1446087308"/>
-                  </a:ext>
-                </a:extLst>
-              </a:tr>
-              <a:tr h="370840">
-                <a:tc>
-                  <a:txBody>
-                    <a:bodyPr/>
-                    <a:lstStyle/>
-                    <a:p>
-                      <a:pPr latinLnBrk="1"/>
-                      <a:r>
-                        <a:rPr lang="ko-KR" altLang="ko-KR" dirty="0"/>
-                        <a:t>0x07</a:t>
-                      </a:r>
-                      <a:endParaRPr lang="ko-KR" altLang="en-US" dirty="0"/>
-                    </a:p>
-                  </a:txBody>
-                  <a:tcPr/>
-                </a:tc>
-                <a:tc>
-                  <a:txBody>
-                    <a:bodyPr/>
-                    <a:lstStyle/>
-                    <a:p>
-                      <a:pPr latinLnBrk="1"/>
-                      <a:r>
-                        <a:rPr lang="ko-KR" altLang="ko-KR" dirty="0" err="1"/>
-                        <a:t>Buck</a:t>
-                      </a:r>
-                      <a:r>
-                        <a:rPr lang="ko-KR" altLang="ko-KR" dirty="0"/>
-                        <a:t> UV/OV 상태</a:t>
-                      </a:r>
-                      <a:endParaRPr lang="ko-KR" altLang="en-US" dirty="0"/>
-                    </a:p>
-                  </a:txBody>
-                  <a:tcPr/>
-                </a:tc>
-                <a:tc>
-                  <a:txBody>
-                    <a:bodyPr/>
-                    <a:lstStyle/>
-                    <a:p>
-                      <a:pPr latinLnBrk="1"/>
-                      <a:r>
-                        <a:rPr lang="ko-KR" altLang="ko-KR" dirty="0" err="1"/>
-                        <a:t>저전압</a:t>
-                      </a:r>
-                      <a:r>
-                        <a:rPr lang="ko-KR" altLang="ko-KR" dirty="0"/>
-                        <a:t> </a:t>
-                      </a:r>
-                      <a:r>
-                        <a:rPr lang="en-US" altLang="ko-KR" dirty="0"/>
-                        <a:t>,</a:t>
-                      </a:r>
-                      <a:r>
-                        <a:rPr lang="ko-KR" altLang="ko-KR" dirty="0"/>
-                        <a:t>과전압 감지</a:t>
-                      </a:r>
-                      <a:endParaRPr lang="ko-KR" altLang="en-US" dirty="0"/>
-                    </a:p>
-                  </a:txBody>
-                  <a:tcPr/>
-                </a:tc>
-                <a:extLst>
-                  <a:ext uri="{0D108BD9-81ED-4DB2-BD59-A6C34878D82A}">
-                    <a16:rowId xmlns:a16="http://schemas.microsoft.com/office/drawing/2014/main" val="2878854580"/>
-                  </a:ext>
-                </a:extLst>
-              </a:tr>
-              <a:tr h="370840">
-                <a:tc>
-                  <a:txBody>
-                    <a:bodyPr/>
-                    <a:lstStyle/>
-                    <a:p>
-                      <a:pPr latinLnBrk="1"/>
-                      <a:r>
-                        <a:rPr lang="ko-KR" altLang="ko-KR" dirty="0"/>
-                        <a:t>0x08</a:t>
-                      </a:r>
-                      <a:endParaRPr lang="ko-KR" altLang="en-US" dirty="0"/>
-                    </a:p>
-                  </a:txBody>
-                  <a:tcPr/>
-                </a:tc>
-                <a:tc>
-                  <a:txBody>
-                    <a:bodyPr/>
-                    <a:lstStyle/>
-                    <a:p>
-                      <a:pPr latinLnBrk="1"/>
-                      <a:r>
-                        <a:rPr lang="ko-KR" altLang="ko-KR" dirty="0" err="1"/>
-                        <a:t>Buck</a:t>
-                      </a:r>
-                      <a:r>
-                        <a:rPr lang="ko-KR" altLang="ko-KR" dirty="0"/>
-                        <a:t> OC/OC </a:t>
-                      </a:r>
-                      <a:r>
-                        <a:rPr lang="ko-KR" altLang="ko-KR" dirty="0" err="1"/>
-                        <a:t>Warning</a:t>
-                      </a:r>
-                      <a:r>
-                        <a:rPr lang="ko-KR" altLang="ko-KR" dirty="0"/>
-                        <a:t> 상태</a:t>
-                      </a:r>
-                      <a:endParaRPr lang="ko-KR" altLang="en-US" dirty="0"/>
-                    </a:p>
-                  </a:txBody>
-                  <a:tcPr/>
-                </a:tc>
-                <a:tc>
-                  <a:txBody>
-                    <a:bodyPr/>
-                    <a:lstStyle/>
-                    <a:p>
-                      <a:pPr latinLnBrk="1"/>
-                      <a:r>
-                        <a:rPr lang="ko-KR" altLang="ko-KR" dirty="0"/>
-                        <a:t>과전류 및 경고 확인</a:t>
-                      </a:r>
-                      <a:endParaRPr lang="ko-KR" altLang="en-US" dirty="0"/>
-                    </a:p>
-                  </a:txBody>
-                  <a:tcPr/>
-                </a:tc>
-                <a:extLst>
-                  <a:ext uri="{0D108BD9-81ED-4DB2-BD59-A6C34878D82A}">
-                    <a16:rowId xmlns:a16="http://schemas.microsoft.com/office/drawing/2014/main" val="3423155806"/>
-                  </a:ext>
-                </a:extLst>
-              </a:tr>
-              <a:tr h="370840">
-                <a:tc>
-                  <a:txBody>
-                    <a:bodyPr/>
-                    <a:lstStyle/>
-                    <a:p>
-                      <a:pPr latinLnBrk="1"/>
-                      <a:r>
-                        <a:rPr lang="ko-KR" altLang="ko-KR" dirty="0"/>
-                        <a:t>0x13</a:t>
-                      </a:r>
-                      <a:endParaRPr lang="ko-KR" altLang="en-US" dirty="0"/>
-                    </a:p>
-                  </a:txBody>
-                  <a:tcPr/>
-                </a:tc>
-                <a:tc>
-                  <a:txBody>
-                    <a:bodyPr/>
-                    <a:lstStyle/>
-                    <a:p>
-                      <a:pPr latinLnBrk="1"/>
-                      <a:r>
-                        <a:rPr lang="ko-KR" altLang="ko-KR" dirty="0"/>
-                        <a:t>VREF </a:t>
-                      </a:r>
-                      <a:r>
-                        <a:rPr lang="ko-KR" altLang="ko-KR" dirty="0" err="1"/>
-                        <a:t>A</a:t>
-                      </a:r>
-                      <a:r>
-                        <a:rPr lang="ko-KR" altLang="ko-KR" dirty="0"/>
-                        <a:t> HIGH</a:t>
-                      </a:r>
-                      <a:endParaRPr lang="ko-KR" altLang="en-US" dirty="0"/>
-                    </a:p>
-                  </a:txBody>
-                  <a:tcPr/>
-                </a:tc>
-                <a:tc>
-                  <a:txBody>
-                    <a:bodyPr/>
-                    <a:lstStyle/>
-                    <a:p>
-                      <a:pPr latinLnBrk="1"/>
-                      <a:r>
-                        <a:rPr lang="ko-KR" altLang="ko-KR" dirty="0"/>
-                        <a:t>기준 전압 상위 비트 설정</a:t>
-                      </a:r>
-                      <a:endParaRPr lang="ko-KR" altLang="en-US" dirty="0"/>
-                    </a:p>
-                  </a:txBody>
-                  <a:tcPr/>
-                </a:tc>
-                <a:extLst>
-                  <a:ext uri="{0D108BD9-81ED-4DB2-BD59-A6C34878D82A}">
-                    <a16:rowId xmlns:a16="http://schemas.microsoft.com/office/drawing/2014/main" val="1633234599"/>
-                  </a:ext>
-                </a:extLst>
-              </a:tr>
-              <a:tr h="370840">
-                <a:tc>
-                  <a:txBody>
-                    <a:bodyPr/>
-                    <a:lstStyle/>
-                    <a:p>
-                      <a:pPr latinLnBrk="1"/>
-                      <a:r>
-                        <a:rPr lang="ko-KR" altLang="ko-KR" dirty="0"/>
-                        <a:t>0x14</a:t>
-                      </a:r>
-                      <a:endParaRPr lang="ko-KR" altLang="en-US" dirty="0"/>
-                    </a:p>
-                  </a:txBody>
-                  <a:tcPr/>
-                </a:tc>
-                <a:tc>
-                  <a:txBody>
-                    <a:bodyPr/>
-                    <a:lstStyle/>
-                    <a:p>
-                      <a:pPr latinLnBrk="1"/>
-                      <a:r>
-                        <a:rPr lang="ko-KR" altLang="ko-KR" dirty="0"/>
-                        <a:t>VREF </a:t>
-                      </a:r>
-                      <a:r>
-                        <a:rPr lang="ko-KR" altLang="ko-KR" dirty="0" err="1"/>
-                        <a:t>A</a:t>
-                      </a:r>
-                      <a:r>
-                        <a:rPr lang="ko-KR" altLang="ko-KR" dirty="0"/>
-                        <a:t> LOW</a:t>
-                      </a:r>
-                      <a:endParaRPr lang="ko-KR" altLang="en-US" dirty="0"/>
-                    </a:p>
-                  </a:txBody>
-                  <a:tcPr/>
-                </a:tc>
-                <a:tc>
-                  <a:txBody>
-                    <a:bodyPr/>
-                    <a:lstStyle/>
-                    <a:p>
-                      <a:pPr latinLnBrk="1"/>
-                      <a:r>
-                        <a:rPr lang="ko-KR" altLang="ko-KR" dirty="0"/>
-                        <a:t>기준 전압 하위 비트 설정</a:t>
-                      </a:r>
-                      <a:endParaRPr lang="ko-KR" altLang="en-US" dirty="0"/>
-                    </a:p>
-                  </a:txBody>
-                  <a:tcPr/>
-                </a:tc>
-                <a:extLst>
-                  <a:ext uri="{0D108BD9-81ED-4DB2-BD59-A6C34878D82A}">
-                    <a16:rowId xmlns:a16="http://schemas.microsoft.com/office/drawing/2014/main" val="1188293425"/>
-                  </a:ext>
-                </a:extLst>
-              </a:tr>
-            </a:tbl>
-          </a:graphicData>
-        </a:graphic>
-      </p:graphicFrame>
+      <p:pic>
+        <p:nvPicPr>
+          <p:cNvPr id="50" name="그림 49">
+            <a:extLst>
+              <a:ext uri="{FF2B5EF4-FFF2-40B4-BE49-F238E27FC236}">
+                <a16:creationId xmlns:a16="http://schemas.microsoft.com/office/drawing/2014/main" id="{57E650DF-94D4-D6B5-6D69-0F5179070974}"/>
+              </a:ext>
+            </a:extLst>
+          </p:cNvPr>
+          <p:cNvPicPr>
+            <a:picLocks noChangeAspect="1"/>
+          </p:cNvPicPr>
+          <p:nvPr/>
+        </p:nvPicPr>
+        <p:blipFill>
+          <a:blip r:embed="rId2"/>
+          <a:stretch>
+            <a:fillRect/>
+          </a:stretch>
+        </p:blipFill>
+        <p:spPr>
+          <a:xfrm>
+            <a:off x="973394" y="1343818"/>
+            <a:ext cx="7450062" cy="5211096"/>
+          </a:xfrm>
+          <a:prstGeom prst="rect">
+            <a:avLst/>
+          </a:prstGeom>
+        </p:spPr>
+      </p:pic>
+      <p:pic>
+        <p:nvPicPr>
+          <p:cNvPr id="52" name="그래픽 51" descr="배지 1 윤곽선">
+            <a:extLst>
+              <a:ext uri="{FF2B5EF4-FFF2-40B4-BE49-F238E27FC236}">
+                <a16:creationId xmlns:a16="http://schemas.microsoft.com/office/drawing/2014/main" id="{5A73B8D0-FCC2-72A3-0F37-A3A4C2E796A4}"/>
+              </a:ext>
+            </a:extLst>
+          </p:cNvPr>
+          <p:cNvPicPr>
+            <a:picLocks noChangeAspect="1"/>
+          </p:cNvPicPr>
+          <p:nvPr/>
+        </p:nvPicPr>
+        <p:blipFill>
+          <a:blip>
+            <a:extLst>
+              <a:ext uri="{96DAC541-7B7A-43D3-8B79-37D633B846F1}">
+                <asvg:svgBlip xmlns:asvg="http://schemas.microsoft.com/office/drawing/2016/SVG/main" r:embed="rId3"/>
+              </a:ext>
+            </a:extLst>
+          </a:blip>
+          <a:stretch>
+            <a:fillRect/>
+          </a:stretch>
+        </p:blipFill>
+        <p:spPr>
+          <a:xfrm>
+            <a:off x="6312266" y="1066556"/>
+            <a:ext cx="722671" cy="722671"/>
+          </a:xfrm>
+          <a:prstGeom prst="rect">
+            <a:avLst/>
+          </a:prstGeom>
+        </p:spPr>
+      </p:pic>
+      <p:sp>
+        <p:nvSpPr>
+          <p:cNvPr id="55" name="TextBox 54">
+            <a:extLst>
+              <a:ext uri="{FF2B5EF4-FFF2-40B4-BE49-F238E27FC236}">
+                <a16:creationId xmlns:a16="http://schemas.microsoft.com/office/drawing/2014/main" id="{AA28FE49-2220-1A27-AC10-B7E262E67C21}"/>
+              </a:ext>
+            </a:extLst>
+          </p:cNvPr>
+          <p:cNvSpPr txBox="1"/>
+          <p:nvPr/>
+        </p:nvSpPr>
+        <p:spPr>
+          <a:xfrm>
+            <a:off x="7034937" y="1243225"/>
+            <a:ext cx="1326004" cy="369332"/>
+          </a:xfrm>
+          <a:prstGeom prst="rect">
+            <a:avLst/>
+          </a:prstGeom>
+          <a:noFill/>
+        </p:spPr>
+        <p:txBody>
+          <a:bodyPr wrap="none" rtlCol="0">
+            <a:spAutoFit/>
+          </a:bodyPr>
+          <a:lstStyle/>
+          <a:p>
+            <a:r>
+              <a:rPr lang="en-US" altLang="ko-KR"/>
+              <a:t>VDRV </a:t>
+            </a:r>
+            <a:r>
+              <a:rPr lang="ko-KR" altLang="en-US" dirty="0"/>
+              <a:t>인가</a:t>
+            </a:r>
+          </a:p>
+        </p:txBody>
+      </p:sp>
+      <p:pic>
+        <p:nvPicPr>
+          <p:cNvPr id="57" name="그래픽 56" descr="배지 윤곽선">
+            <a:extLst>
+              <a:ext uri="{FF2B5EF4-FFF2-40B4-BE49-F238E27FC236}">
+                <a16:creationId xmlns:a16="http://schemas.microsoft.com/office/drawing/2014/main" id="{147745D5-D204-AEC3-D5B1-51B26744386D}"/>
+              </a:ext>
+            </a:extLst>
+          </p:cNvPr>
+          <p:cNvPicPr>
+            <a:picLocks noChangeAspect="1"/>
+          </p:cNvPicPr>
+          <p:nvPr/>
+        </p:nvPicPr>
+        <p:blipFill>
+          <a:blip>
+            <a:extLst>
+              <a:ext uri="{96DAC541-7B7A-43D3-8B79-37D633B846F1}">
+                <asvg:svgBlip xmlns:asvg="http://schemas.microsoft.com/office/drawing/2016/SVG/main" r:embed="rId4"/>
+              </a:ext>
+            </a:extLst>
+          </a:blip>
+          <a:stretch>
+            <a:fillRect/>
+          </a:stretch>
+        </p:blipFill>
+        <p:spPr>
+          <a:xfrm>
+            <a:off x="7711846" y="2308044"/>
+            <a:ext cx="722671" cy="722671"/>
+          </a:xfrm>
+          <a:prstGeom prst="rect">
+            <a:avLst/>
+          </a:prstGeom>
+        </p:spPr>
+      </p:pic>
+      <p:sp>
+        <p:nvSpPr>
+          <p:cNvPr id="59" name="TextBox 58">
+            <a:extLst>
+              <a:ext uri="{FF2B5EF4-FFF2-40B4-BE49-F238E27FC236}">
+                <a16:creationId xmlns:a16="http://schemas.microsoft.com/office/drawing/2014/main" id="{D31F3482-53EA-8B19-F7E7-408F13202727}"/>
+              </a:ext>
+            </a:extLst>
+          </p:cNvPr>
+          <p:cNvSpPr txBox="1"/>
+          <p:nvPr/>
+        </p:nvSpPr>
+        <p:spPr>
+          <a:xfrm>
+            <a:off x="8423456" y="2346215"/>
+            <a:ext cx="3844258" cy="1200329"/>
+          </a:xfrm>
+          <a:prstGeom prst="rect">
+            <a:avLst/>
+          </a:prstGeom>
+          <a:noFill/>
+        </p:spPr>
+        <p:txBody>
+          <a:bodyPr wrap="none" rtlCol="0">
+            <a:spAutoFit/>
+          </a:bodyPr>
+          <a:lstStyle/>
+          <a:p>
+            <a:r>
+              <a:rPr lang="en-US" altLang="ko-KR" dirty="0" err="1"/>
+              <a:t>VINx</a:t>
+            </a:r>
+            <a:r>
+              <a:rPr lang="en-US" altLang="ko-KR" dirty="0"/>
+              <a:t> </a:t>
+            </a:r>
+            <a:r>
+              <a:rPr lang="ko-KR" altLang="en-US" dirty="0"/>
+              <a:t>인가</a:t>
+            </a:r>
+            <a:r>
+              <a:rPr lang="en-US" altLang="ko-KR" dirty="0"/>
+              <a:t>,</a:t>
+            </a:r>
+          </a:p>
+          <a:p>
+            <a:r>
+              <a:rPr lang="en-US" altLang="ko-KR" dirty="0"/>
+              <a:t>SYSEN bit</a:t>
+            </a:r>
+            <a:r>
+              <a:rPr lang="ko-KR" altLang="en-US" dirty="0"/>
+              <a:t>가 </a:t>
+            </a:r>
+            <a:r>
+              <a:rPr lang="en-US" altLang="ko-KR" dirty="0"/>
+              <a:t>1</a:t>
+            </a:r>
+          </a:p>
+          <a:p>
+            <a:r>
+              <a:rPr lang="en-US" altLang="ko-KR" dirty="0"/>
+              <a:t>(SYSEN</a:t>
+            </a:r>
+            <a:r>
+              <a:rPr lang="ko-KR" altLang="en-US" dirty="0"/>
+              <a:t>은 기본 설정을 통해 키거나</a:t>
+            </a:r>
+            <a:r>
+              <a:rPr lang="en-US" altLang="ko-KR" dirty="0"/>
+              <a:t>,</a:t>
+            </a:r>
+          </a:p>
+          <a:p>
+            <a:r>
+              <a:rPr lang="en-US" altLang="ko-KR" dirty="0"/>
+              <a:t>I2C </a:t>
+            </a:r>
+            <a:r>
+              <a:rPr lang="ko-KR" altLang="en-US" dirty="0"/>
+              <a:t>통신을 통해 </a:t>
+            </a:r>
+            <a:r>
+              <a:rPr lang="ko-KR" altLang="en-US" dirty="0" err="1"/>
+              <a:t>켤수있음</a:t>
+            </a:r>
+            <a:r>
+              <a:rPr lang="en-US" altLang="ko-KR" dirty="0"/>
+              <a:t>)</a:t>
+            </a:r>
+          </a:p>
+        </p:txBody>
+      </p:sp>
+      <p:cxnSp>
+        <p:nvCxnSpPr>
+          <p:cNvPr id="81" name="직선 화살표 연결선 80">
+            <a:extLst>
+              <a:ext uri="{FF2B5EF4-FFF2-40B4-BE49-F238E27FC236}">
+                <a16:creationId xmlns:a16="http://schemas.microsoft.com/office/drawing/2014/main" id="{03C75BB1-32EE-75B3-99FA-17B161DAD6F5}"/>
+              </a:ext>
+            </a:extLst>
+          </p:cNvPr>
+          <p:cNvCxnSpPr>
+            <a:cxnSpLocks/>
+          </p:cNvCxnSpPr>
+          <p:nvPr/>
+        </p:nvCxnSpPr>
+        <p:spPr>
+          <a:xfrm>
+            <a:off x="6213987" y="2392119"/>
+            <a:ext cx="160389" cy="2101778"/>
+          </a:xfrm>
+          <a:prstGeom prst="straightConnector1">
+            <a:avLst/>
+          </a:prstGeom>
+          <a:ln w="28575">
+            <a:tailEnd type="triangle"/>
+          </a:ln>
+        </p:spPr>
+        <p:style>
+          <a:lnRef idx="2">
+            <a:schemeClr val="accent1"/>
+          </a:lnRef>
+          <a:fillRef idx="0">
+            <a:schemeClr val="accent1"/>
+          </a:fillRef>
+          <a:effectRef idx="1">
+            <a:schemeClr val="accent1"/>
+          </a:effectRef>
+          <a:fontRef idx="minor">
+            <a:schemeClr val="tx1"/>
+          </a:fontRef>
+        </p:style>
+      </p:cxnSp>
+      <p:cxnSp>
+        <p:nvCxnSpPr>
+          <p:cNvPr id="85" name="직선 연결선 84">
+            <a:extLst>
+              <a:ext uri="{FF2B5EF4-FFF2-40B4-BE49-F238E27FC236}">
+                <a16:creationId xmlns:a16="http://schemas.microsoft.com/office/drawing/2014/main" id="{9CC6B2F8-AC2A-F498-4B48-00D724F69A73}"/>
+              </a:ext>
+            </a:extLst>
+          </p:cNvPr>
+          <p:cNvCxnSpPr/>
+          <p:nvPr/>
+        </p:nvCxnSpPr>
+        <p:spPr>
+          <a:xfrm>
+            <a:off x="6096000" y="2783083"/>
+            <a:ext cx="1327355" cy="0"/>
+          </a:xfrm>
+          <a:prstGeom prst="line">
+            <a:avLst/>
+          </a:prstGeom>
+          <a:ln>
+            <a:solidFill>
+              <a:srgbClr val="FF0000"/>
+            </a:solidFill>
+          </a:ln>
+        </p:spPr>
+        <p:style>
+          <a:lnRef idx="2">
+            <a:schemeClr val="accent1"/>
+          </a:lnRef>
+          <a:fillRef idx="0">
+            <a:schemeClr val="accent1"/>
+          </a:fillRef>
+          <a:effectRef idx="1">
+            <a:schemeClr val="accent1"/>
+          </a:effectRef>
+          <a:fontRef idx="minor">
+            <a:schemeClr val="tx1"/>
+          </a:fontRef>
+        </p:style>
+      </p:cxnSp>
+      <p:cxnSp>
+        <p:nvCxnSpPr>
+          <p:cNvPr id="86" name="직선 연결선 85">
+            <a:extLst>
+              <a:ext uri="{FF2B5EF4-FFF2-40B4-BE49-F238E27FC236}">
+                <a16:creationId xmlns:a16="http://schemas.microsoft.com/office/drawing/2014/main" id="{E2060F47-AFC8-E188-660C-B25F30AFD305}"/>
+              </a:ext>
+            </a:extLst>
+          </p:cNvPr>
+          <p:cNvCxnSpPr>
+            <a:cxnSpLocks/>
+          </p:cNvCxnSpPr>
+          <p:nvPr/>
+        </p:nvCxnSpPr>
+        <p:spPr>
+          <a:xfrm>
+            <a:off x="5358581" y="2915818"/>
+            <a:ext cx="1789471" cy="0"/>
+          </a:xfrm>
+          <a:prstGeom prst="line">
+            <a:avLst/>
+          </a:prstGeom>
+          <a:ln>
+            <a:solidFill>
+              <a:srgbClr val="FF0000"/>
+            </a:solidFill>
+          </a:ln>
+        </p:spPr>
+        <p:style>
+          <a:lnRef idx="2">
+            <a:schemeClr val="accent1"/>
+          </a:lnRef>
+          <a:fillRef idx="0">
+            <a:schemeClr val="accent1"/>
+          </a:fillRef>
+          <a:effectRef idx="1">
+            <a:schemeClr val="accent1"/>
+          </a:effectRef>
+          <a:fontRef idx="minor">
+            <a:schemeClr val="tx1"/>
+          </a:fontRef>
+        </p:style>
+      </p:cxnSp>
+      <p:cxnSp>
+        <p:nvCxnSpPr>
+          <p:cNvPr id="91" name="직선 화살표 연결선 90">
+            <a:extLst>
+              <a:ext uri="{FF2B5EF4-FFF2-40B4-BE49-F238E27FC236}">
+                <a16:creationId xmlns:a16="http://schemas.microsoft.com/office/drawing/2014/main" id="{A1DA6A37-D87D-BE36-3AE7-0AD1BA6834B9}"/>
+              </a:ext>
+            </a:extLst>
+          </p:cNvPr>
+          <p:cNvCxnSpPr>
+            <a:cxnSpLocks/>
+          </p:cNvCxnSpPr>
+          <p:nvPr/>
+        </p:nvCxnSpPr>
+        <p:spPr>
+          <a:xfrm>
+            <a:off x="4688593" y="1724524"/>
+            <a:ext cx="1102607" cy="321333"/>
+          </a:xfrm>
+          <a:prstGeom prst="straightConnector1">
+            <a:avLst/>
+          </a:prstGeom>
+          <a:ln w="28575">
+            <a:tailEnd type="triangle"/>
+          </a:ln>
+        </p:spPr>
+        <p:style>
+          <a:lnRef idx="2">
+            <a:schemeClr val="accent1"/>
+          </a:lnRef>
+          <a:fillRef idx="0">
+            <a:schemeClr val="accent1"/>
+          </a:fillRef>
+          <a:effectRef idx="1">
+            <a:schemeClr val="accent1"/>
+          </a:effectRef>
+          <a:fontRef idx="minor">
+            <a:schemeClr val="tx1"/>
+          </a:fontRef>
+        </p:style>
+      </p:cxnSp>
+      <p:cxnSp>
+        <p:nvCxnSpPr>
+          <p:cNvPr id="94" name="직선 화살표 연결선 93">
+            <a:extLst>
+              <a:ext uri="{FF2B5EF4-FFF2-40B4-BE49-F238E27FC236}">
+                <a16:creationId xmlns:a16="http://schemas.microsoft.com/office/drawing/2014/main" id="{5AC582E1-759E-F62F-C561-4D07CE43232A}"/>
+              </a:ext>
+            </a:extLst>
+          </p:cNvPr>
+          <p:cNvCxnSpPr>
+            <a:cxnSpLocks/>
+          </p:cNvCxnSpPr>
+          <p:nvPr/>
+        </p:nvCxnSpPr>
+        <p:spPr>
+          <a:xfrm flipH="1">
+            <a:off x="4996490" y="5096789"/>
+            <a:ext cx="1315776" cy="842450"/>
+          </a:xfrm>
+          <a:prstGeom prst="straightConnector1">
+            <a:avLst/>
+          </a:prstGeom>
+          <a:ln w="28575">
+            <a:tailEnd type="triangle"/>
+          </a:ln>
+        </p:spPr>
+        <p:style>
+          <a:lnRef idx="2">
+            <a:schemeClr val="accent1"/>
+          </a:lnRef>
+          <a:fillRef idx="0">
+            <a:schemeClr val="accent1"/>
+          </a:fillRef>
+          <a:effectRef idx="1">
+            <a:schemeClr val="accent1"/>
+          </a:effectRef>
+          <a:fontRef idx="minor">
+            <a:schemeClr val="tx1"/>
+          </a:fontRef>
+        </p:style>
+      </p:cxnSp>
+      <p:pic>
+        <p:nvPicPr>
+          <p:cNvPr id="98" name="그래픽 97" descr="배지 3 윤곽선">
+            <a:extLst>
+              <a:ext uri="{FF2B5EF4-FFF2-40B4-BE49-F238E27FC236}">
+                <a16:creationId xmlns:a16="http://schemas.microsoft.com/office/drawing/2014/main" id="{CB72C50D-0125-820E-BDC2-C9F76545FAA0}"/>
+              </a:ext>
+            </a:extLst>
+          </p:cNvPr>
+          <p:cNvPicPr>
+            <a:picLocks noChangeAspect="1"/>
+          </p:cNvPicPr>
+          <p:nvPr/>
+        </p:nvPicPr>
+        <p:blipFill>
+          <a:blip>
+            <a:extLst>
+              <a:ext uri="{96DAC541-7B7A-43D3-8B79-37D633B846F1}">
+                <asvg:svgBlip xmlns:asvg="http://schemas.microsoft.com/office/drawing/2016/SVG/main" r:embed="rId5"/>
+              </a:ext>
+            </a:extLst>
+          </a:blip>
+          <a:stretch>
+            <a:fillRect/>
+          </a:stretch>
+        </p:blipFill>
+        <p:spPr>
+          <a:xfrm>
+            <a:off x="6577737" y="5249681"/>
+            <a:ext cx="776792" cy="776792"/>
+          </a:xfrm>
+          <a:prstGeom prst="rect">
+            <a:avLst/>
+          </a:prstGeom>
+        </p:spPr>
+      </p:pic>
+      <p:sp>
+        <p:nvSpPr>
+          <p:cNvPr id="108" name="TextBox 107">
+            <a:extLst>
+              <a:ext uri="{FF2B5EF4-FFF2-40B4-BE49-F238E27FC236}">
+                <a16:creationId xmlns:a16="http://schemas.microsoft.com/office/drawing/2014/main" id="{74E4836C-BE5B-C4A7-A5DC-AC560644C078}"/>
+              </a:ext>
+            </a:extLst>
+          </p:cNvPr>
+          <p:cNvSpPr txBox="1"/>
+          <p:nvPr/>
+        </p:nvSpPr>
+        <p:spPr>
+          <a:xfrm>
+            <a:off x="7611140" y="5314911"/>
+            <a:ext cx="3843360" cy="646331"/>
+          </a:xfrm>
+          <a:prstGeom prst="rect">
+            <a:avLst/>
+          </a:prstGeom>
+          <a:noFill/>
+        </p:spPr>
+        <p:txBody>
+          <a:bodyPr wrap="none" rtlCol="0">
+            <a:spAutoFit/>
+          </a:bodyPr>
+          <a:lstStyle/>
+          <a:p>
+            <a:r>
+              <a:rPr lang="ko-KR" altLang="en-US" dirty="0"/>
+              <a:t>각 </a:t>
+            </a:r>
+            <a:r>
+              <a:rPr lang="en-US" altLang="ko-KR" dirty="0"/>
+              <a:t>Buck Converter</a:t>
+            </a:r>
+            <a:r>
+              <a:rPr lang="ko-KR" altLang="en-US" dirty="0"/>
+              <a:t>가 </a:t>
+            </a:r>
+            <a:r>
+              <a:rPr lang="en-US" altLang="ko-KR" dirty="0"/>
+              <a:t>2ms </a:t>
+            </a:r>
+            <a:r>
+              <a:rPr lang="ko-KR" altLang="en-US" dirty="0"/>
+              <a:t>간격으로</a:t>
+            </a:r>
+            <a:endParaRPr lang="en-US" altLang="ko-KR" dirty="0"/>
+          </a:p>
+          <a:p>
+            <a:r>
+              <a:rPr lang="ko-KR" altLang="en-US" dirty="0"/>
+              <a:t>순서대로 </a:t>
+            </a:r>
+            <a:r>
+              <a:rPr lang="ko-KR" altLang="en-US" dirty="0" err="1"/>
+              <a:t>켜짐</a:t>
+            </a:r>
+            <a:endParaRPr lang="en-US" altLang="ko-KR" dirty="0"/>
+          </a:p>
+        </p:txBody>
+      </p:sp>
     </p:spTree>
     <p:extLst>
       <p:ext uri="{BB962C8B-B14F-4D97-AF65-F5344CB8AC3E}">
@@ -6470,7 +7461,485 @@
 </p:sld>
 </file>
 
-<file path=ppt/slides/slide5.xml><?xml version="1.0" encoding="utf-8"?>
+<file path=ppt/slides/slide6.xml><?xml version="1.0" encoding="utf-8"?>
+<p:sld xmlns:a="http://schemas.openxmlformats.org/drawingml/2006/main" xmlns:r="http://schemas.openxmlformats.org/officeDocument/2006/relationships" xmlns:p="http://schemas.openxmlformats.org/presentationml/2006/main">
+  <p:cSld>
+    <p:spTree>
+      <p:nvGrpSpPr>
+        <p:cNvPr id="1" name="">
+          <a:extLst>
+            <a:ext uri="{FF2B5EF4-FFF2-40B4-BE49-F238E27FC236}">
+              <a16:creationId xmlns:a16="http://schemas.microsoft.com/office/drawing/2014/main" id="{8F11488C-6F35-FC75-108C-5390B91F61B9}"/>
+            </a:ext>
+          </a:extLst>
+        </p:cNvPr>
+        <p:cNvGrpSpPr/>
+        <p:nvPr/>
+      </p:nvGrpSpPr>
+      <p:grpSpPr>
+        <a:xfrm>
+          <a:off x="0" y="0"/>
+          <a:ext cx="0" cy="0"/>
+          <a:chOff x="0" y="0"/>
+          <a:chExt cx="0" cy="0"/>
+        </a:xfrm>
+      </p:grpSpPr>
+      <p:sp>
+        <p:nvSpPr>
+          <p:cNvPr id="2" name="제목 1">
+            <a:extLst>
+              <a:ext uri="{FF2B5EF4-FFF2-40B4-BE49-F238E27FC236}">
+                <a16:creationId xmlns:a16="http://schemas.microsoft.com/office/drawing/2014/main" id="{48CA3D54-FF79-77D0-D2AA-1B7C2EB99D13}"/>
+              </a:ext>
+            </a:extLst>
+          </p:cNvPr>
+          <p:cNvSpPr>
+            <a:spLocks noGrp="1"/>
+          </p:cNvSpPr>
+          <p:nvPr>
+            <p:ph type="title"/>
+          </p:nvPr>
+        </p:nvSpPr>
+        <p:spPr>
+          <a:xfrm>
+            <a:off x="838200" y="18255"/>
+            <a:ext cx="10515600" cy="1325563"/>
+          </a:xfrm>
+        </p:spPr>
+        <p:txBody>
+          <a:bodyPr/>
+          <a:lstStyle/>
+          <a:p>
+            <a:r>
+              <a:rPr lang="en-US" altLang="ko-KR" dirty="0"/>
+              <a:t>IC </a:t>
+            </a:r>
+            <a:r>
+              <a:rPr lang="ko-KR" altLang="en-US" dirty="0"/>
+              <a:t>분석 </a:t>
+            </a:r>
+            <a:r>
+              <a:rPr lang="en-US" altLang="ko-KR" dirty="0"/>
+              <a:t>(PMIC</a:t>
+            </a:r>
+            <a:r>
+              <a:rPr lang="ko-KR" altLang="en-US" dirty="0"/>
+              <a:t> </a:t>
+            </a:r>
+            <a:r>
+              <a:rPr lang="en-US" altLang="ko-KR" dirty="0"/>
+              <a:t>:</a:t>
+            </a:r>
+            <a:r>
+              <a:rPr lang="ko-KR" altLang="en-US" dirty="0"/>
+              <a:t> </a:t>
+            </a:r>
+            <a:r>
+              <a:rPr lang="en-US" altLang="ko-KR" dirty="0"/>
+              <a:t>MP5475) | </a:t>
+            </a:r>
+            <a:r>
+              <a:rPr lang="ko-KR" altLang="en-US" dirty="0"/>
+              <a:t>제어 방법</a:t>
+            </a:r>
+          </a:p>
+        </p:txBody>
+      </p:sp>
+      <p:pic>
+        <p:nvPicPr>
+          <p:cNvPr id="4" name="그림 3">
+            <a:extLst>
+              <a:ext uri="{FF2B5EF4-FFF2-40B4-BE49-F238E27FC236}">
+                <a16:creationId xmlns:a16="http://schemas.microsoft.com/office/drawing/2014/main" id="{EE214C23-6CE7-E4F1-9739-1A8B9E739529}"/>
+              </a:ext>
+            </a:extLst>
+          </p:cNvPr>
+          <p:cNvPicPr>
+            <a:picLocks noChangeAspect="1"/>
+          </p:cNvPicPr>
+          <p:nvPr/>
+        </p:nvPicPr>
+        <p:blipFill>
+          <a:blip r:embed="rId2"/>
+          <a:srcRect r="26119" b="49365"/>
+          <a:stretch>
+            <a:fillRect/>
+          </a:stretch>
+        </p:blipFill>
+        <p:spPr>
+          <a:xfrm>
+            <a:off x="110385" y="1232491"/>
+            <a:ext cx="4537811" cy="3155742"/>
+          </a:xfrm>
+          <a:prstGeom prst="rect">
+            <a:avLst/>
+          </a:prstGeom>
+        </p:spPr>
+      </p:pic>
+      <p:sp>
+        <p:nvSpPr>
+          <p:cNvPr id="6" name="직사각형 5">
+            <a:extLst>
+              <a:ext uri="{FF2B5EF4-FFF2-40B4-BE49-F238E27FC236}">
+                <a16:creationId xmlns:a16="http://schemas.microsoft.com/office/drawing/2014/main" id="{60331096-8104-0F47-BCAE-8A9B001BFCFB}"/>
+              </a:ext>
+            </a:extLst>
+          </p:cNvPr>
+          <p:cNvSpPr/>
+          <p:nvPr/>
+        </p:nvSpPr>
+        <p:spPr>
+          <a:xfrm>
+            <a:off x="1789470" y="2484234"/>
+            <a:ext cx="186815" cy="381791"/>
+          </a:xfrm>
+          <a:prstGeom prst="rect">
+            <a:avLst/>
+          </a:prstGeom>
+          <a:noFill/>
+          <a:ln>
+            <a:solidFill>
+              <a:srgbClr val="FF0000"/>
+            </a:solidFill>
+          </a:ln>
+        </p:spPr>
+        <p:style>
+          <a:lnRef idx="2">
+            <a:schemeClr val="accent1">
+              <a:shade val="15000"/>
+            </a:schemeClr>
+          </a:lnRef>
+          <a:fillRef idx="1">
+            <a:schemeClr val="accent1"/>
+          </a:fillRef>
+          <a:effectRef idx="0">
+            <a:schemeClr val="accent1"/>
+          </a:effectRef>
+          <a:fontRef idx="minor">
+            <a:schemeClr val="lt1"/>
+          </a:fontRef>
+        </p:style>
+        <p:txBody>
+          <a:bodyPr rtlCol="0" anchor="ctr"/>
+          <a:lstStyle/>
+          <a:p>
+            <a:pPr algn="ctr"/>
+            <a:endParaRPr lang="ko-KR" altLang="en-US"/>
+          </a:p>
+        </p:txBody>
+      </p:sp>
+      <p:pic>
+        <p:nvPicPr>
+          <p:cNvPr id="8" name="그림 7">
+            <a:extLst>
+              <a:ext uri="{FF2B5EF4-FFF2-40B4-BE49-F238E27FC236}">
+                <a16:creationId xmlns:a16="http://schemas.microsoft.com/office/drawing/2014/main" id="{04DA4BAF-E863-761C-8188-3911B893BFC9}"/>
+              </a:ext>
+            </a:extLst>
+          </p:cNvPr>
+          <p:cNvPicPr>
+            <a:picLocks noChangeAspect="1"/>
+          </p:cNvPicPr>
+          <p:nvPr/>
+        </p:nvPicPr>
+        <p:blipFill>
+          <a:blip r:embed="rId3"/>
+          <a:srcRect t="-5356" b="26952"/>
+          <a:stretch>
+            <a:fillRect/>
+          </a:stretch>
+        </p:blipFill>
+        <p:spPr>
+          <a:xfrm>
+            <a:off x="4788643" y="1232491"/>
+            <a:ext cx="7292972" cy="2061315"/>
+          </a:xfrm>
+          <a:prstGeom prst="rect">
+            <a:avLst/>
+          </a:prstGeom>
+        </p:spPr>
+      </p:pic>
+      <p:pic>
+        <p:nvPicPr>
+          <p:cNvPr id="10" name="그림 9">
+            <a:extLst>
+              <a:ext uri="{FF2B5EF4-FFF2-40B4-BE49-F238E27FC236}">
+                <a16:creationId xmlns:a16="http://schemas.microsoft.com/office/drawing/2014/main" id="{862AA0D3-5B04-6A1C-0C07-B51C12788C0F}"/>
+              </a:ext>
+            </a:extLst>
+          </p:cNvPr>
+          <p:cNvPicPr>
+            <a:picLocks noChangeAspect="1"/>
+          </p:cNvPicPr>
+          <p:nvPr/>
+        </p:nvPicPr>
+        <p:blipFill>
+          <a:blip r:embed="rId4"/>
+          <a:stretch>
+            <a:fillRect/>
+          </a:stretch>
+        </p:blipFill>
+        <p:spPr>
+          <a:xfrm>
+            <a:off x="4784718" y="3859163"/>
+            <a:ext cx="7292972" cy="2339543"/>
+          </a:xfrm>
+          <a:prstGeom prst="rect">
+            <a:avLst/>
+          </a:prstGeom>
+        </p:spPr>
+      </p:pic>
+      <p:sp>
+        <p:nvSpPr>
+          <p:cNvPr id="12" name="직사각형 11">
+            <a:extLst>
+              <a:ext uri="{FF2B5EF4-FFF2-40B4-BE49-F238E27FC236}">
+                <a16:creationId xmlns:a16="http://schemas.microsoft.com/office/drawing/2014/main" id="{E0659C69-4E56-270A-4E15-6C4EF9C629EF}"/>
+              </a:ext>
+            </a:extLst>
+          </p:cNvPr>
+          <p:cNvSpPr/>
+          <p:nvPr/>
+        </p:nvSpPr>
+        <p:spPr>
+          <a:xfrm>
+            <a:off x="5376011" y="2613677"/>
+            <a:ext cx="6705604" cy="601471"/>
+          </a:xfrm>
+          <a:prstGeom prst="rect">
+            <a:avLst/>
+          </a:prstGeom>
+          <a:noFill/>
+          <a:ln>
+            <a:solidFill>
+              <a:srgbClr val="FF0000"/>
+            </a:solidFill>
+          </a:ln>
+        </p:spPr>
+        <p:style>
+          <a:lnRef idx="2">
+            <a:schemeClr val="accent1">
+              <a:shade val="15000"/>
+            </a:schemeClr>
+          </a:lnRef>
+          <a:fillRef idx="1">
+            <a:schemeClr val="accent1"/>
+          </a:fillRef>
+          <a:effectRef idx="0">
+            <a:schemeClr val="accent1"/>
+          </a:effectRef>
+          <a:fontRef idx="minor">
+            <a:schemeClr val="lt1"/>
+          </a:fontRef>
+        </p:style>
+        <p:txBody>
+          <a:bodyPr rtlCol="0" anchor="ctr"/>
+          <a:lstStyle/>
+          <a:p>
+            <a:pPr algn="ctr"/>
+            <a:endParaRPr lang="ko-KR" altLang="en-US"/>
+          </a:p>
+        </p:txBody>
+      </p:sp>
+      <p:sp>
+        <p:nvSpPr>
+          <p:cNvPr id="14" name="직사각형 13">
+            <a:extLst>
+              <a:ext uri="{FF2B5EF4-FFF2-40B4-BE49-F238E27FC236}">
+                <a16:creationId xmlns:a16="http://schemas.microsoft.com/office/drawing/2014/main" id="{4E1B1636-DD98-E721-16FC-02CF1D3A54B5}"/>
+              </a:ext>
+            </a:extLst>
+          </p:cNvPr>
+          <p:cNvSpPr/>
+          <p:nvPr/>
+        </p:nvSpPr>
+        <p:spPr>
+          <a:xfrm>
+            <a:off x="5376011" y="4858633"/>
+            <a:ext cx="6705604" cy="706425"/>
+          </a:xfrm>
+          <a:prstGeom prst="rect">
+            <a:avLst/>
+          </a:prstGeom>
+          <a:noFill/>
+          <a:ln>
+            <a:solidFill>
+              <a:srgbClr val="FF0000"/>
+            </a:solidFill>
+          </a:ln>
+        </p:spPr>
+        <p:style>
+          <a:lnRef idx="2">
+            <a:schemeClr val="accent1">
+              <a:shade val="15000"/>
+            </a:schemeClr>
+          </a:lnRef>
+          <a:fillRef idx="1">
+            <a:schemeClr val="accent1"/>
+          </a:fillRef>
+          <a:effectRef idx="0">
+            <a:schemeClr val="accent1"/>
+          </a:effectRef>
+          <a:fontRef idx="minor">
+            <a:schemeClr val="lt1"/>
+          </a:fontRef>
+        </p:style>
+        <p:txBody>
+          <a:bodyPr rtlCol="0" anchor="ctr"/>
+          <a:lstStyle/>
+          <a:p>
+            <a:pPr algn="ctr"/>
+            <a:endParaRPr lang="ko-KR" altLang="en-US"/>
+          </a:p>
+        </p:txBody>
+      </p:sp>
+      <p:sp>
+        <p:nvSpPr>
+          <p:cNvPr id="15" name="TextBox 14">
+            <a:extLst>
+              <a:ext uri="{FF2B5EF4-FFF2-40B4-BE49-F238E27FC236}">
+                <a16:creationId xmlns:a16="http://schemas.microsoft.com/office/drawing/2014/main" id="{DAA36E92-04EA-1F32-E32A-CB616FA42877}"/>
+              </a:ext>
+            </a:extLst>
+          </p:cNvPr>
+          <p:cNvSpPr txBox="1"/>
+          <p:nvPr/>
+        </p:nvSpPr>
+        <p:spPr>
+          <a:xfrm flipH="1">
+            <a:off x="838200" y="4673967"/>
+            <a:ext cx="3370234" cy="369332"/>
+          </a:xfrm>
+          <a:prstGeom prst="rect">
+            <a:avLst/>
+          </a:prstGeom>
+          <a:noFill/>
+        </p:spPr>
+        <p:txBody>
+          <a:bodyPr wrap="square" rtlCol="0">
+            <a:spAutoFit/>
+          </a:bodyPr>
+          <a:lstStyle/>
+          <a:p>
+            <a:r>
+              <a:rPr lang="en-US" altLang="ko-KR" dirty="0"/>
+              <a:t>PG </a:t>
+            </a:r>
+            <a:r>
+              <a:rPr lang="ko-KR" altLang="en-US" dirty="0"/>
+              <a:t>핀을 통해 </a:t>
+            </a:r>
+            <a:r>
+              <a:rPr lang="en-US" altLang="ko-KR" dirty="0"/>
+              <a:t>UVLO, OTP </a:t>
+            </a:r>
+            <a:r>
+              <a:rPr lang="ko-KR" altLang="en-US" dirty="0"/>
+              <a:t>감지</a:t>
+            </a:r>
+          </a:p>
+        </p:txBody>
+      </p:sp>
+      <p:sp>
+        <p:nvSpPr>
+          <p:cNvPr id="17" name="TextBox 16">
+            <a:extLst>
+              <a:ext uri="{FF2B5EF4-FFF2-40B4-BE49-F238E27FC236}">
+                <a16:creationId xmlns:a16="http://schemas.microsoft.com/office/drawing/2014/main" id="{6F5660B9-7442-6EDF-4F70-95800483A144}"/>
+              </a:ext>
+            </a:extLst>
+          </p:cNvPr>
+          <p:cNvSpPr txBox="1"/>
+          <p:nvPr/>
+        </p:nvSpPr>
+        <p:spPr>
+          <a:xfrm flipH="1">
+            <a:off x="5195214" y="3411173"/>
+            <a:ext cx="6672320" cy="369332"/>
+          </a:xfrm>
+          <a:prstGeom prst="rect">
+            <a:avLst/>
+          </a:prstGeom>
+          <a:noFill/>
+        </p:spPr>
+        <p:txBody>
+          <a:bodyPr wrap="square" rtlCol="0">
+            <a:spAutoFit/>
+          </a:bodyPr>
+          <a:lstStyle/>
+          <a:p>
+            <a:r>
+              <a:rPr lang="en-US" altLang="ko-KR" dirty="0"/>
+              <a:t>0x13, 0x14 </a:t>
+            </a:r>
+            <a:r>
+              <a:rPr lang="ko-KR" altLang="en-US" dirty="0"/>
+              <a:t>레지스터에 비트를 변경하여 기준 전압 설정</a:t>
+            </a:r>
+          </a:p>
+        </p:txBody>
+      </p:sp>
+      <p:sp>
+        <p:nvSpPr>
+          <p:cNvPr id="19" name="TextBox 18">
+            <a:extLst>
+              <a:ext uri="{FF2B5EF4-FFF2-40B4-BE49-F238E27FC236}">
+                <a16:creationId xmlns:a16="http://schemas.microsoft.com/office/drawing/2014/main" id="{9E3604ED-50AE-6883-ADE8-D6916AADEBB5}"/>
+              </a:ext>
+            </a:extLst>
+          </p:cNvPr>
+          <p:cNvSpPr txBox="1"/>
+          <p:nvPr/>
+        </p:nvSpPr>
+        <p:spPr>
+          <a:xfrm flipH="1">
+            <a:off x="5195214" y="6295850"/>
+            <a:ext cx="6672320" cy="369332"/>
+          </a:xfrm>
+          <a:prstGeom prst="rect">
+            <a:avLst/>
+          </a:prstGeom>
+          <a:noFill/>
+        </p:spPr>
+        <p:txBody>
+          <a:bodyPr wrap="square" rtlCol="0">
+            <a:spAutoFit/>
+          </a:bodyPr>
+          <a:lstStyle/>
+          <a:p>
+            <a:r>
+              <a:rPr lang="en-US" altLang="ko-KR" dirty="0"/>
+              <a:t>0x07, 0x08 </a:t>
+            </a:r>
+            <a:r>
+              <a:rPr lang="ko-KR" altLang="en-US" dirty="0"/>
+              <a:t>레지스터의 비트를 읽어 </a:t>
+            </a:r>
+            <a:r>
+              <a:rPr lang="en-US" altLang="ko-KR" dirty="0"/>
+              <a:t>UV, OV, OC</a:t>
+            </a:r>
+            <a:r>
+              <a:rPr lang="ko-KR" altLang="en-US" dirty="0"/>
+              <a:t>를 검사</a:t>
+            </a:r>
+          </a:p>
+        </p:txBody>
+      </p:sp>
+    </p:spTree>
+    <p:extLst>
+      <p:ext uri="{BB962C8B-B14F-4D97-AF65-F5344CB8AC3E}">
+        <p14:creationId xmlns:p14="http://schemas.microsoft.com/office/powerpoint/2010/main" val="4134453306"/>
+      </p:ext>
+    </p:extLst>
+  </p:cSld>
+  <p:clrMapOvr>
+    <a:masterClrMapping/>
+  </p:clrMapOvr>
+</p:sld>
+</file>
+
+<file path=ppt/slides/slide7.xml><?xml version="1.0" encoding="utf-8"?>
 <p:sld xmlns:a="http://schemas.openxmlformats.org/drawingml/2006/main" xmlns:r="http://schemas.openxmlformats.org/officeDocument/2006/relationships" xmlns:p="http://schemas.openxmlformats.org/presentationml/2006/main">
   <p:cSld>
     <p:spTree>
@@ -8758,7 +10227,7 @@
 </p:sld>
 </file>
 
-<file path=ppt/slides/slide6.xml><?xml version="1.0" encoding="utf-8"?>
+<file path=ppt/slides/slide8.xml><?xml version="1.0" encoding="utf-8"?>
 <p:sld xmlns:a="http://schemas.openxmlformats.org/drawingml/2006/main" xmlns:r="http://schemas.openxmlformats.org/officeDocument/2006/relationships" xmlns:p="http://schemas.openxmlformats.org/presentationml/2006/main">
   <p:cSld>
     <p:spTree>
